--- a/scripts/office-metrics/font-grid-diagnostic.pptx
+++ b/scripts/office-metrics/font-grid-diagnostic.pptx
@@ -1210,6 +1210,9 @@
                 <a:solidFill>
                   <a:srgbClr val="000000"/>
                 </a:solidFill>
+                <a:highlight>
+                  <a:srgbClr val="FFFF00"/>
+                </a:highlight>
                 <a:latin typeface="Roboto" pitchFamily="34" charset="0"/>
                 <a:ea typeface="Roboto" pitchFamily="34" charset="-122"/>
                 <a:cs typeface="Roboto" pitchFamily="34" charset="-120"/>
@@ -1276,6 +1279,9 @@
                 <a:solidFill>
                   <a:srgbClr val="000000"/>
                 </a:solidFill>
+                <a:highlight>
+                  <a:srgbClr val="FFFF00"/>
+                </a:highlight>
                 <a:latin typeface="Roboto" pitchFamily="34" charset="0"/>
                 <a:ea typeface="Roboto" pitchFamily="34" charset="-122"/>
                 <a:cs typeface="Roboto" pitchFamily="34" charset="-120"/>
@@ -1342,6 +1348,9 @@
                 <a:solidFill>
                   <a:srgbClr val="000000"/>
                 </a:solidFill>
+                <a:highlight>
+                  <a:srgbClr val="FFFF00"/>
+                </a:highlight>
                 <a:latin typeface="Roboto" pitchFamily="34" charset="0"/>
                 <a:ea typeface="Roboto" pitchFamily="34" charset="-122"/>
                 <a:cs typeface="Roboto" pitchFamily="34" charset="-120"/>
@@ -1408,6 +1417,9 @@
                 <a:solidFill>
                   <a:srgbClr val="000000"/>
                 </a:solidFill>
+                <a:highlight>
+                  <a:srgbClr val="FFFF00"/>
+                </a:highlight>
                 <a:latin typeface="Roboto" pitchFamily="34" charset="0"/>
                 <a:ea typeface="Roboto" pitchFamily="34" charset="-122"/>
                 <a:cs typeface="Roboto" pitchFamily="34" charset="-120"/>
@@ -1474,6 +1486,9 @@
                 <a:solidFill>
                   <a:srgbClr val="000000"/>
                 </a:solidFill>
+                <a:highlight>
+                  <a:srgbClr val="FFFF00"/>
+                </a:highlight>
                 <a:latin typeface="Roboto" pitchFamily="34" charset="0"/>
                 <a:ea typeface="Roboto" pitchFamily="34" charset="-122"/>
                 <a:cs typeface="Roboto" pitchFamily="34" charset="-120"/>
@@ -1540,6 +1555,9 @@
                 <a:solidFill>
                   <a:srgbClr val="000000"/>
                 </a:solidFill>
+                <a:highlight>
+                  <a:srgbClr val="FFFF00"/>
+                </a:highlight>
                 <a:latin typeface="Roboto" pitchFamily="34" charset="0"/>
                 <a:ea typeface="Roboto" pitchFamily="34" charset="-122"/>
                 <a:cs typeface="Roboto" pitchFamily="34" charset="-120"/>
@@ -1606,6 +1624,9 @@
                 <a:solidFill>
                   <a:srgbClr val="000000"/>
                 </a:solidFill>
+                <a:highlight>
+                  <a:srgbClr val="FFFF00"/>
+                </a:highlight>
                 <a:latin typeface="Roboto" pitchFamily="34" charset="0"/>
                 <a:ea typeface="Roboto" pitchFamily="34" charset="-122"/>
                 <a:cs typeface="Roboto" pitchFamily="34" charset="-120"/>
@@ -1672,6 +1693,9 @@
                 <a:solidFill>
                   <a:srgbClr val="000000"/>
                 </a:solidFill>
+                <a:highlight>
+                  <a:srgbClr val="FFFF00"/>
+                </a:highlight>
                 <a:latin typeface="Roboto" pitchFamily="34" charset="0"/>
                 <a:ea typeface="Roboto" pitchFamily="34" charset="-122"/>
                 <a:cs typeface="Roboto" pitchFamily="34" charset="-120"/>
@@ -1738,6 +1762,9 @@
                 <a:solidFill>
                   <a:srgbClr val="000000"/>
                 </a:solidFill>
+                <a:highlight>
+                  <a:srgbClr val="FFFF00"/>
+                </a:highlight>
                 <a:latin typeface="Roboto" pitchFamily="34" charset="0"/>
                 <a:ea typeface="Roboto" pitchFamily="34" charset="-122"/>
                 <a:cs typeface="Roboto" pitchFamily="34" charset="-120"/>
@@ -1804,6 +1831,9 @@
                 <a:solidFill>
                   <a:srgbClr val="000000"/>
                 </a:solidFill>
+                <a:highlight>
+                  <a:srgbClr val="FFFF00"/>
+                </a:highlight>
                 <a:latin typeface="Roboto" pitchFamily="34" charset="0"/>
                 <a:ea typeface="Roboto" pitchFamily="34" charset="-122"/>
                 <a:cs typeface="Roboto" pitchFamily="34" charset="-120"/>
@@ -1870,6 +1900,9 @@
                 <a:solidFill>
                   <a:srgbClr val="000000"/>
                 </a:solidFill>
+                <a:highlight>
+                  <a:srgbClr val="FFFF00"/>
+                </a:highlight>
                 <a:latin typeface="Roboto" pitchFamily="34" charset="0"/>
                 <a:ea typeface="Roboto" pitchFamily="34" charset="-122"/>
                 <a:cs typeface="Roboto" pitchFamily="34" charset="-120"/>
@@ -1936,6 +1969,9 @@
                 <a:solidFill>
                   <a:srgbClr val="000000"/>
                 </a:solidFill>
+                <a:highlight>
+                  <a:srgbClr val="FFFF00"/>
+                </a:highlight>
                 <a:latin typeface="Roboto" pitchFamily="34" charset="0"/>
                 <a:ea typeface="Roboto" pitchFamily="34" charset="-122"/>
                 <a:cs typeface="Roboto" pitchFamily="34" charset="-120"/>
@@ -2002,6 +2038,9 @@
                 <a:solidFill>
                   <a:srgbClr val="000000"/>
                 </a:solidFill>
+                <a:highlight>
+                  <a:srgbClr val="FFFF00"/>
+                </a:highlight>
                 <a:latin typeface="Roboto" pitchFamily="34" charset="0"/>
                 <a:ea typeface="Roboto" pitchFamily="34" charset="-122"/>
                 <a:cs typeface="Roboto" pitchFamily="34" charset="-120"/>
@@ -2068,6 +2107,9 @@
                 <a:solidFill>
                   <a:srgbClr val="000000"/>
                 </a:solidFill>
+                <a:highlight>
+                  <a:srgbClr val="FFFF00"/>
+                </a:highlight>
                 <a:latin typeface="Roboto" pitchFamily="34" charset="0"/>
                 <a:ea typeface="Roboto" pitchFamily="34" charset="-122"/>
                 <a:cs typeface="Roboto" pitchFamily="34" charset="-120"/>
@@ -2134,6 +2176,9 @@
                 <a:solidFill>
                   <a:srgbClr val="000000"/>
                 </a:solidFill>
+                <a:highlight>
+                  <a:srgbClr val="FFFF00"/>
+                </a:highlight>
                 <a:latin typeface="Roboto" pitchFamily="34" charset="0"/>
                 <a:ea typeface="Roboto" pitchFamily="34" charset="-122"/>
                 <a:cs typeface="Roboto" pitchFamily="34" charset="-120"/>
@@ -2200,6 +2245,9 @@
                 <a:solidFill>
                   <a:srgbClr val="000000"/>
                 </a:solidFill>
+                <a:highlight>
+                  <a:srgbClr val="FFFF00"/>
+                </a:highlight>
                 <a:latin typeface="Roboto" pitchFamily="34" charset="0"/>
                 <a:ea typeface="Roboto" pitchFamily="34" charset="-122"/>
                 <a:cs typeface="Roboto" pitchFamily="34" charset="-120"/>
@@ -2266,6 +2314,9 @@
                 <a:solidFill>
                   <a:srgbClr val="000000"/>
                 </a:solidFill>
+                <a:highlight>
+                  <a:srgbClr val="FFFF00"/>
+                </a:highlight>
                 <a:latin typeface="Roboto" pitchFamily="34" charset="0"/>
                 <a:ea typeface="Roboto" pitchFamily="34" charset="-122"/>
                 <a:cs typeface="Roboto" pitchFamily="34" charset="-120"/>
@@ -2332,6 +2383,9 @@
                 <a:solidFill>
                   <a:srgbClr val="000000"/>
                 </a:solidFill>
+                <a:highlight>
+                  <a:srgbClr val="FFFF00"/>
+                </a:highlight>
                 <a:latin typeface="Roboto" pitchFamily="34" charset="0"/>
                 <a:ea typeface="Roboto" pitchFamily="34" charset="-122"/>
                 <a:cs typeface="Roboto" pitchFamily="34" charset="-120"/>
@@ -2398,6 +2452,9 @@
                 <a:solidFill>
                   <a:srgbClr val="000000"/>
                 </a:solidFill>
+                <a:highlight>
+                  <a:srgbClr val="FFFF00"/>
+                </a:highlight>
                 <a:latin typeface="Roboto" pitchFamily="34" charset="0"/>
                 <a:ea typeface="Roboto" pitchFamily="34" charset="-122"/>
                 <a:cs typeface="Roboto" pitchFamily="34" charset="-120"/>
@@ -2464,6 +2521,9 @@
                 <a:solidFill>
                   <a:srgbClr val="000000"/>
                 </a:solidFill>
+                <a:highlight>
+                  <a:srgbClr val="FFFF00"/>
+                </a:highlight>
                 <a:latin typeface="Roboto" pitchFamily="34" charset="0"/>
                 <a:ea typeface="Roboto" pitchFamily="34" charset="-122"/>
                 <a:cs typeface="Roboto" pitchFamily="34" charset="-120"/>
@@ -2530,6 +2590,9 @@
                 <a:solidFill>
                   <a:srgbClr val="000000"/>
                 </a:solidFill>
+                <a:highlight>
+                  <a:srgbClr val="FFFF00"/>
+                </a:highlight>
                 <a:latin typeface="Roboto" pitchFamily="34" charset="0"/>
                 <a:ea typeface="Roboto" pitchFamily="34" charset="-122"/>
                 <a:cs typeface="Roboto" pitchFamily="34" charset="-120"/>
@@ -2596,6 +2659,9 @@
                 <a:solidFill>
                   <a:srgbClr val="000000"/>
                 </a:solidFill>
+                <a:highlight>
+                  <a:srgbClr val="FFFF00"/>
+                </a:highlight>
                 <a:latin typeface="Roboto" pitchFamily="34" charset="0"/>
                 <a:ea typeface="Roboto" pitchFamily="34" charset="-122"/>
                 <a:cs typeface="Roboto" pitchFamily="34" charset="-120"/>
@@ -2662,6 +2728,9 @@
                 <a:solidFill>
                   <a:srgbClr val="000000"/>
                 </a:solidFill>
+                <a:highlight>
+                  <a:srgbClr val="FFFF00"/>
+                </a:highlight>
                 <a:latin typeface="Roboto" pitchFamily="34" charset="0"/>
                 <a:ea typeface="Roboto" pitchFamily="34" charset="-122"/>
                 <a:cs typeface="Roboto" pitchFamily="34" charset="-120"/>
@@ -2728,6 +2797,9 @@
                 <a:solidFill>
                   <a:srgbClr val="000000"/>
                 </a:solidFill>
+                <a:highlight>
+                  <a:srgbClr val="FFFF00"/>
+                </a:highlight>
                 <a:latin typeface="Roboto" pitchFamily="34" charset="0"/>
                 <a:ea typeface="Roboto" pitchFamily="34" charset="-122"/>
                 <a:cs typeface="Roboto" pitchFamily="34" charset="-120"/>
@@ -2794,6 +2866,9 @@
                 <a:solidFill>
                   <a:srgbClr val="000000"/>
                 </a:solidFill>
+                <a:highlight>
+                  <a:srgbClr val="FFFF00"/>
+                </a:highlight>
                 <a:latin typeface="Roboto" pitchFamily="34" charset="0"/>
                 <a:ea typeface="Roboto" pitchFamily="34" charset="-122"/>
                 <a:cs typeface="Roboto" pitchFamily="34" charset="-120"/>
@@ -2860,6 +2935,9 @@
                 <a:solidFill>
                   <a:srgbClr val="000000"/>
                 </a:solidFill>
+                <a:highlight>
+                  <a:srgbClr val="FFFF00"/>
+                </a:highlight>
                 <a:latin typeface="Roboto" pitchFamily="34" charset="0"/>
                 <a:ea typeface="Roboto" pitchFamily="34" charset="-122"/>
                 <a:cs typeface="Roboto" pitchFamily="34" charset="-120"/>
@@ -2926,6 +3004,9 @@
                 <a:solidFill>
                   <a:srgbClr val="000000"/>
                 </a:solidFill>
+                <a:highlight>
+                  <a:srgbClr val="FFFF00"/>
+                </a:highlight>
                 <a:latin typeface="Roboto" pitchFamily="34" charset="0"/>
                 <a:ea typeface="Roboto" pitchFamily="34" charset="-122"/>
                 <a:cs typeface="Roboto" pitchFamily="34" charset="-120"/>
@@ -2992,6 +3073,9 @@
                 <a:solidFill>
                   <a:srgbClr val="000000"/>
                 </a:solidFill>
+                <a:highlight>
+                  <a:srgbClr val="FFFF00"/>
+                </a:highlight>
                 <a:latin typeface="Roboto" pitchFamily="34" charset="0"/>
                 <a:ea typeface="Roboto" pitchFamily="34" charset="-122"/>
                 <a:cs typeface="Roboto" pitchFamily="34" charset="-120"/>
@@ -3058,6 +3142,9 @@
                 <a:solidFill>
                   <a:srgbClr val="000000"/>
                 </a:solidFill>
+                <a:highlight>
+                  <a:srgbClr val="FFFF00"/>
+                </a:highlight>
                 <a:latin typeface="Roboto" pitchFamily="34" charset="0"/>
                 <a:ea typeface="Roboto" pitchFamily="34" charset="-122"/>
                 <a:cs typeface="Roboto" pitchFamily="34" charset="-120"/>
@@ -3124,6 +3211,9 @@
                 <a:solidFill>
                   <a:srgbClr val="000000"/>
                 </a:solidFill>
+                <a:highlight>
+                  <a:srgbClr val="FFFF00"/>
+                </a:highlight>
                 <a:latin typeface="Roboto" pitchFamily="34" charset="0"/>
                 <a:ea typeface="Roboto" pitchFamily="34" charset="-122"/>
                 <a:cs typeface="Roboto" pitchFamily="34" charset="-120"/>
@@ -3190,6 +3280,9 @@
                 <a:solidFill>
                   <a:srgbClr val="000000"/>
                 </a:solidFill>
+                <a:highlight>
+                  <a:srgbClr val="FFFF00"/>
+                </a:highlight>
                 <a:latin typeface="Roboto" pitchFamily="34" charset="0"/>
                 <a:ea typeface="Roboto" pitchFamily="34" charset="-122"/>
                 <a:cs typeface="Roboto" pitchFamily="34" charset="-120"/>
@@ -3256,6 +3349,9 @@
                 <a:solidFill>
                   <a:srgbClr val="000000"/>
                 </a:solidFill>
+                <a:highlight>
+                  <a:srgbClr val="FFFF00"/>
+                </a:highlight>
                 <a:latin typeface="Roboto" pitchFamily="34" charset="0"/>
                 <a:ea typeface="Roboto" pitchFamily="34" charset="-122"/>
                 <a:cs typeface="Roboto" pitchFamily="34" charset="-120"/>
@@ -3322,6 +3418,9 @@
                 <a:solidFill>
                   <a:srgbClr val="000000"/>
                 </a:solidFill>
+                <a:highlight>
+                  <a:srgbClr val="FFFF00"/>
+                </a:highlight>
                 <a:latin typeface="Roboto" pitchFamily="34" charset="0"/>
                 <a:ea typeface="Roboto" pitchFamily="34" charset="-122"/>
                 <a:cs typeface="Roboto" pitchFamily="34" charset="-120"/>
@@ -3388,6 +3487,9 @@
                 <a:solidFill>
                   <a:srgbClr val="000000"/>
                 </a:solidFill>
+                <a:highlight>
+                  <a:srgbClr val="FFFF00"/>
+                </a:highlight>
                 <a:latin typeface="Roboto" pitchFamily="34" charset="0"/>
                 <a:ea typeface="Roboto" pitchFamily="34" charset="-122"/>
                 <a:cs typeface="Roboto" pitchFamily="34" charset="-120"/>
@@ -3454,6 +3556,9 @@
                 <a:solidFill>
                   <a:srgbClr val="000000"/>
                 </a:solidFill>
+                <a:highlight>
+                  <a:srgbClr val="FFFF00"/>
+                </a:highlight>
                 <a:latin typeface="Roboto" pitchFamily="34" charset="0"/>
                 <a:ea typeface="Roboto" pitchFamily="34" charset="-122"/>
                 <a:cs typeface="Roboto" pitchFamily="34" charset="-120"/>
@@ -3520,6 +3625,9 @@
                 <a:solidFill>
                   <a:srgbClr val="000000"/>
                 </a:solidFill>
+                <a:highlight>
+                  <a:srgbClr val="FFFF00"/>
+                </a:highlight>
                 <a:latin typeface="Roboto" pitchFamily="34" charset="0"/>
                 <a:ea typeface="Roboto" pitchFamily="34" charset="-122"/>
                 <a:cs typeface="Roboto" pitchFamily="34" charset="-120"/>
@@ -3586,6 +3694,9 @@
                 <a:solidFill>
                   <a:srgbClr val="000000"/>
                 </a:solidFill>
+                <a:highlight>
+                  <a:srgbClr val="FFFF00"/>
+                </a:highlight>
                 <a:latin typeface="Roboto" pitchFamily="34" charset="0"/>
                 <a:ea typeface="Roboto" pitchFamily="34" charset="-122"/>
                 <a:cs typeface="Roboto" pitchFamily="34" charset="-120"/>
@@ -3652,6 +3763,9 @@
                 <a:solidFill>
                   <a:srgbClr val="000000"/>
                 </a:solidFill>
+                <a:highlight>
+                  <a:srgbClr val="FFFF00"/>
+                </a:highlight>
                 <a:latin typeface="Roboto" pitchFamily="34" charset="0"/>
                 <a:ea typeface="Roboto" pitchFamily="34" charset="-122"/>
                 <a:cs typeface="Roboto" pitchFamily="34" charset="-120"/>
@@ -3718,6 +3832,9 @@
                 <a:solidFill>
                   <a:srgbClr val="000000"/>
                 </a:solidFill>
+                <a:highlight>
+                  <a:srgbClr val="FFFF00"/>
+                </a:highlight>
                 <a:latin typeface="Roboto" pitchFamily="34" charset="0"/>
                 <a:ea typeface="Roboto" pitchFamily="34" charset="-122"/>
                 <a:cs typeface="Roboto" pitchFamily="34" charset="-120"/>
@@ -3784,6 +3901,9 @@
                 <a:solidFill>
                   <a:srgbClr val="000000"/>
                 </a:solidFill>
+                <a:highlight>
+                  <a:srgbClr val="FFFF00"/>
+                </a:highlight>
                 <a:latin typeface="Roboto" pitchFamily="34" charset="0"/>
                 <a:ea typeface="Roboto" pitchFamily="34" charset="-122"/>
                 <a:cs typeface="Roboto" pitchFamily="34" charset="-120"/>
@@ -3850,6 +3970,9 @@
                 <a:solidFill>
                   <a:srgbClr val="000000"/>
                 </a:solidFill>
+                <a:highlight>
+                  <a:srgbClr val="FFFF00"/>
+                </a:highlight>
                 <a:latin typeface="Roboto" pitchFamily="34" charset="0"/>
                 <a:ea typeface="Roboto" pitchFamily="34" charset="-122"/>
                 <a:cs typeface="Roboto" pitchFamily="34" charset="-120"/>
@@ -3916,6 +4039,9 @@
                 <a:solidFill>
                   <a:srgbClr val="000000"/>
                 </a:solidFill>
+                <a:highlight>
+                  <a:srgbClr val="FFFF00"/>
+                </a:highlight>
                 <a:latin typeface="Roboto" pitchFamily="34" charset="0"/>
                 <a:ea typeface="Roboto" pitchFamily="34" charset="-122"/>
                 <a:cs typeface="Roboto" pitchFamily="34" charset="-120"/>
@@ -3982,6 +4108,9 @@
                 <a:solidFill>
                   <a:srgbClr val="000000"/>
                 </a:solidFill>
+                <a:highlight>
+                  <a:srgbClr val="FFFF00"/>
+                </a:highlight>
                 <a:latin typeface="Roboto" pitchFamily="34" charset="0"/>
                 <a:ea typeface="Roboto" pitchFamily="34" charset="-122"/>
                 <a:cs typeface="Roboto" pitchFamily="34" charset="-120"/>
@@ -4048,6 +4177,9 @@
                 <a:solidFill>
                   <a:srgbClr val="000000"/>
                 </a:solidFill>
+                <a:highlight>
+                  <a:srgbClr val="FFFF00"/>
+                </a:highlight>
                 <a:latin typeface="Roboto" pitchFamily="34" charset="0"/>
                 <a:ea typeface="Roboto" pitchFamily="34" charset="-122"/>
                 <a:cs typeface="Roboto" pitchFamily="34" charset="-120"/>
@@ -4114,6 +4246,9 @@
                 <a:solidFill>
                   <a:srgbClr val="000000"/>
                 </a:solidFill>
+                <a:highlight>
+                  <a:srgbClr val="FFFF00"/>
+                </a:highlight>
                 <a:latin typeface="Roboto" pitchFamily="34" charset="0"/>
                 <a:ea typeface="Roboto" pitchFamily="34" charset="-122"/>
                 <a:cs typeface="Roboto" pitchFamily="34" charset="-120"/>
@@ -4180,6 +4315,9 @@
                 <a:solidFill>
                   <a:srgbClr val="000000"/>
                 </a:solidFill>
+                <a:highlight>
+                  <a:srgbClr val="FFFF00"/>
+                </a:highlight>
                 <a:latin typeface="Roboto" pitchFamily="34" charset="0"/>
                 <a:ea typeface="Roboto" pitchFamily="34" charset="-122"/>
                 <a:cs typeface="Roboto" pitchFamily="34" charset="-120"/>
@@ -4246,6 +4384,9 @@
                 <a:solidFill>
                   <a:srgbClr val="000000"/>
                 </a:solidFill>
+                <a:highlight>
+                  <a:srgbClr val="FFFF00"/>
+                </a:highlight>
                 <a:latin typeface="Roboto" pitchFamily="34" charset="0"/>
                 <a:ea typeface="Roboto" pitchFamily="34" charset="-122"/>
                 <a:cs typeface="Roboto" pitchFamily="34" charset="-120"/>
@@ -4312,6 +4453,9 @@
                 <a:solidFill>
                   <a:srgbClr val="000000"/>
                 </a:solidFill>
+                <a:highlight>
+                  <a:srgbClr val="FFFF00"/>
+                </a:highlight>
                 <a:latin typeface="Roboto" pitchFamily="34" charset="0"/>
                 <a:ea typeface="Roboto" pitchFamily="34" charset="-122"/>
                 <a:cs typeface="Roboto" pitchFamily="34" charset="-120"/>
@@ -4378,6 +4522,9 @@
                 <a:solidFill>
                   <a:srgbClr val="000000"/>
                 </a:solidFill>
+                <a:highlight>
+                  <a:srgbClr val="FFFF00"/>
+                </a:highlight>
                 <a:latin typeface="Roboto" pitchFamily="34" charset="0"/>
                 <a:ea typeface="Roboto" pitchFamily="34" charset="-122"/>
                 <a:cs typeface="Roboto" pitchFamily="34" charset="-120"/>
@@ -4444,6 +4591,9 @@
                 <a:solidFill>
                   <a:srgbClr val="000000"/>
                 </a:solidFill>
+                <a:highlight>
+                  <a:srgbClr val="FFFF00"/>
+                </a:highlight>
                 <a:latin typeface="Roboto" pitchFamily="34" charset="0"/>
                 <a:ea typeface="Roboto" pitchFamily="34" charset="-122"/>
                 <a:cs typeface="Roboto" pitchFamily="34" charset="-120"/>
@@ -4510,6 +4660,9 @@
                 <a:solidFill>
                   <a:srgbClr val="000000"/>
                 </a:solidFill>
+                <a:highlight>
+                  <a:srgbClr val="FFFF00"/>
+                </a:highlight>
                 <a:latin typeface="Roboto" pitchFamily="34" charset="0"/>
                 <a:ea typeface="Roboto" pitchFamily="34" charset="-122"/>
                 <a:cs typeface="Roboto" pitchFamily="34" charset="-120"/>
@@ -4576,6 +4729,9 @@
                 <a:solidFill>
                   <a:srgbClr val="000000"/>
                 </a:solidFill>
+                <a:highlight>
+                  <a:srgbClr val="FFFF00"/>
+                </a:highlight>
                 <a:latin typeface="Roboto" pitchFamily="34" charset="0"/>
                 <a:ea typeface="Roboto" pitchFamily="34" charset="-122"/>
                 <a:cs typeface="Roboto" pitchFamily="34" charset="-120"/>
@@ -4642,6 +4798,9 @@
                 <a:solidFill>
                   <a:srgbClr val="000000"/>
                 </a:solidFill>
+                <a:highlight>
+                  <a:srgbClr val="FFFF00"/>
+                </a:highlight>
                 <a:latin typeface="Roboto" pitchFamily="34" charset="0"/>
                 <a:ea typeface="Roboto" pitchFamily="34" charset="-122"/>
                 <a:cs typeface="Roboto" pitchFamily="34" charset="-120"/>
@@ -4708,6 +4867,9 @@
                 <a:solidFill>
                   <a:srgbClr val="000000"/>
                 </a:solidFill>
+                <a:highlight>
+                  <a:srgbClr val="FFFF00"/>
+                </a:highlight>
                 <a:latin typeface="Roboto" pitchFamily="34" charset="0"/>
                 <a:ea typeface="Roboto" pitchFamily="34" charset="-122"/>
                 <a:cs typeface="Roboto" pitchFamily="34" charset="-120"/>
@@ -4774,6 +4936,9 @@
                 <a:solidFill>
                   <a:srgbClr val="000000"/>
                 </a:solidFill>
+                <a:highlight>
+                  <a:srgbClr val="FFFF00"/>
+                </a:highlight>
                 <a:latin typeface="Roboto" pitchFamily="34" charset="0"/>
                 <a:ea typeface="Roboto" pitchFamily="34" charset="-122"/>
                 <a:cs typeface="Roboto" pitchFamily="34" charset="-120"/>
@@ -4904,6 +5069,9 @@
                 <a:solidFill>
                   <a:srgbClr val="000000"/>
                 </a:solidFill>
+                <a:highlight>
+                  <a:srgbClr val="FFFF00"/>
+                </a:highlight>
                 <a:latin typeface="Arial" pitchFamily="34" charset="0"/>
                 <a:ea typeface="Arial" pitchFamily="34" charset="-122"/>
                 <a:cs typeface="Arial" pitchFamily="34" charset="-120"/>
@@ -4970,6 +5138,9 @@
                 <a:solidFill>
                   <a:srgbClr val="000000"/>
                 </a:solidFill>
+                <a:highlight>
+                  <a:srgbClr val="FFFF00"/>
+                </a:highlight>
                 <a:latin typeface="Arial" pitchFamily="34" charset="0"/>
                 <a:ea typeface="Arial" pitchFamily="34" charset="-122"/>
                 <a:cs typeface="Arial" pitchFamily="34" charset="-120"/>
@@ -5036,6 +5207,9 @@
                 <a:solidFill>
                   <a:srgbClr val="000000"/>
                 </a:solidFill>
+                <a:highlight>
+                  <a:srgbClr val="FFFF00"/>
+                </a:highlight>
                 <a:latin typeface="Arial" pitchFamily="34" charset="0"/>
                 <a:ea typeface="Arial" pitchFamily="34" charset="-122"/>
                 <a:cs typeface="Arial" pitchFamily="34" charset="-120"/>
@@ -5102,6 +5276,9 @@
                 <a:solidFill>
                   <a:srgbClr val="000000"/>
                 </a:solidFill>
+                <a:highlight>
+                  <a:srgbClr val="FFFF00"/>
+                </a:highlight>
                 <a:latin typeface="Arial" pitchFamily="34" charset="0"/>
                 <a:ea typeface="Arial" pitchFamily="34" charset="-122"/>
                 <a:cs typeface="Arial" pitchFamily="34" charset="-120"/>
@@ -5168,6 +5345,9 @@
                 <a:solidFill>
                   <a:srgbClr val="000000"/>
                 </a:solidFill>
+                <a:highlight>
+                  <a:srgbClr val="FFFF00"/>
+                </a:highlight>
                 <a:latin typeface="Arial" pitchFamily="34" charset="0"/>
                 <a:ea typeface="Arial" pitchFamily="34" charset="-122"/>
                 <a:cs typeface="Arial" pitchFamily="34" charset="-120"/>
@@ -5234,6 +5414,9 @@
                 <a:solidFill>
                   <a:srgbClr val="000000"/>
                 </a:solidFill>
+                <a:highlight>
+                  <a:srgbClr val="FFFF00"/>
+                </a:highlight>
                 <a:latin typeface="Arial" pitchFamily="34" charset="0"/>
                 <a:ea typeface="Arial" pitchFamily="34" charset="-122"/>
                 <a:cs typeface="Arial" pitchFamily="34" charset="-120"/>
@@ -5300,6 +5483,9 @@
                 <a:solidFill>
                   <a:srgbClr val="000000"/>
                 </a:solidFill>
+                <a:highlight>
+                  <a:srgbClr val="FFFF00"/>
+                </a:highlight>
                 <a:latin typeface="Arial" pitchFamily="34" charset="0"/>
                 <a:ea typeface="Arial" pitchFamily="34" charset="-122"/>
                 <a:cs typeface="Arial" pitchFamily="34" charset="-120"/>
@@ -5366,6 +5552,9 @@
                 <a:solidFill>
                   <a:srgbClr val="000000"/>
                 </a:solidFill>
+                <a:highlight>
+                  <a:srgbClr val="FFFF00"/>
+                </a:highlight>
                 <a:latin typeface="Arial" pitchFamily="34" charset="0"/>
                 <a:ea typeface="Arial" pitchFamily="34" charset="-122"/>
                 <a:cs typeface="Arial" pitchFamily="34" charset="-120"/>
@@ -5432,6 +5621,9 @@
                 <a:solidFill>
                   <a:srgbClr val="000000"/>
                 </a:solidFill>
+                <a:highlight>
+                  <a:srgbClr val="FFFF00"/>
+                </a:highlight>
                 <a:latin typeface="Arial" pitchFamily="34" charset="0"/>
                 <a:ea typeface="Arial" pitchFamily="34" charset="-122"/>
                 <a:cs typeface="Arial" pitchFamily="34" charset="-120"/>
@@ -5498,6 +5690,9 @@
                 <a:solidFill>
                   <a:srgbClr val="000000"/>
                 </a:solidFill>
+                <a:highlight>
+                  <a:srgbClr val="FFFF00"/>
+                </a:highlight>
                 <a:latin typeface="Arial" pitchFamily="34" charset="0"/>
                 <a:ea typeface="Arial" pitchFamily="34" charset="-122"/>
                 <a:cs typeface="Arial" pitchFamily="34" charset="-120"/>
@@ -5564,6 +5759,9 @@
                 <a:solidFill>
                   <a:srgbClr val="000000"/>
                 </a:solidFill>
+                <a:highlight>
+                  <a:srgbClr val="FFFF00"/>
+                </a:highlight>
                 <a:latin typeface="Arial" pitchFamily="34" charset="0"/>
                 <a:ea typeface="Arial" pitchFamily="34" charset="-122"/>
                 <a:cs typeface="Arial" pitchFamily="34" charset="-120"/>
@@ -5630,6 +5828,9 @@
                 <a:solidFill>
                   <a:srgbClr val="000000"/>
                 </a:solidFill>
+                <a:highlight>
+                  <a:srgbClr val="FFFF00"/>
+                </a:highlight>
                 <a:latin typeface="Arial" pitchFamily="34" charset="0"/>
                 <a:ea typeface="Arial" pitchFamily="34" charset="-122"/>
                 <a:cs typeface="Arial" pitchFamily="34" charset="-120"/>
@@ -5696,6 +5897,9 @@
                 <a:solidFill>
                   <a:srgbClr val="000000"/>
                 </a:solidFill>
+                <a:highlight>
+                  <a:srgbClr val="FFFF00"/>
+                </a:highlight>
                 <a:latin typeface="Arial" pitchFamily="34" charset="0"/>
                 <a:ea typeface="Arial" pitchFamily="34" charset="-122"/>
                 <a:cs typeface="Arial" pitchFamily="34" charset="-120"/>
@@ -5762,6 +5966,9 @@
                 <a:solidFill>
                   <a:srgbClr val="000000"/>
                 </a:solidFill>
+                <a:highlight>
+                  <a:srgbClr val="FFFF00"/>
+                </a:highlight>
                 <a:latin typeface="Arial" pitchFamily="34" charset="0"/>
                 <a:ea typeface="Arial" pitchFamily="34" charset="-122"/>
                 <a:cs typeface="Arial" pitchFamily="34" charset="-120"/>
@@ -5828,6 +6035,9 @@
                 <a:solidFill>
                   <a:srgbClr val="000000"/>
                 </a:solidFill>
+                <a:highlight>
+                  <a:srgbClr val="FFFF00"/>
+                </a:highlight>
                 <a:latin typeface="Arial" pitchFamily="34" charset="0"/>
                 <a:ea typeface="Arial" pitchFamily="34" charset="-122"/>
                 <a:cs typeface="Arial" pitchFamily="34" charset="-120"/>
@@ -5894,6 +6104,9 @@
                 <a:solidFill>
                   <a:srgbClr val="000000"/>
                 </a:solidFill>
+                <a:highlight>
+                  <a:srgbClr val="FFFF00"/>
+                </a:highlight>
                 <a:latin typeface="Arial" pitchFamily="34" charset="0"/>
                 <a:ea typeface="Arial" pitchFamily="34" charset="-122"/>
                 <a:cs typeface="Arial" pitchFamily="34" charset="-120"/>
@@ -5960,6 +6173,9 @@
                 <a:solidFill>
                   <a:srgbClr val="000000"/>
                 </a:solidFill>
+                <a:highlight>
+                  <a:srgbClr val="FFFF00"/>
+                </a:highlight>
                 <a:latin typeface="Arial" pitchFamily="34" charset="0"/>
                 <a:ea typeface="Arial" pitchFamily="34" charset="-122"/>
                 <a:cs typeface="Arial" pitchFamily="34" charset="-120"/>
@@ -6026,6 +6242,9 @@
                 <a:solidFill>
                   <a:srgbClr val="000000"/>
                 </a:solidFill>
+                <a:highlight>
+                  <a:srgbClr val="FFFF00"/>
+                </a:highlight>
                 <a:latin typeface="Arial" pitchFamily="34" charset="0"/>
                 <a:ea typeface="Arial" pitchFamily="34" charset="-122"/>
                 <a:cs typeface="Arial" pitchFamily="34" charset="-120"/>
@@ -6092,6 +6311,9 @@
                 <a:solidFill>
                   <a:srgbClr val="000000"/>
                 </a:solidFill>
+                <a:highlight>
+                  <a:srgbClr val="FFFF00"/>
+                </a:highlight>
                 <a:latin typeface="Arial" pitchFamily="34" charset="0"/>
                 <a:ea typeface="Arial" pitchFamily="34" charset="-122"/>
                 <a:cs typeface="Arial" pitchFamily="34" charset="-120"/>
@@ -6158,6 +6380,9 @@
                 <a:solidFill>
                   <a:srgbClr val="000000"/>
                 </a:solidFill>
+                <a:highlight>
+                  <a:srgbClr val="FFFF00"/>
+                </a:highlight>
                 <a:latin typeface="Arial" pitchFamily="34" charset="0"/>
                 <a:ea typeface="Arial" pitchFamily="34" charset="-122"/>
                 <a:cs typeface="Arial" pitchFamily="34" charset="-120"/>
@@ -6224,6 +6449,9 @@
                 <a:solidFill>
                   <a:srgbClr val="000000"/>
                 </a:solidFill>
+                <a:highlight>
+                  <a:srgbClr val="FFFF00"/>
+                </a:highlight>
                 <a:latin typeface="Arial" pitchFamily="34" charset="0"/>
                 <a:ea typeface="Arial" pitchFamily="34" charset="-122"/>
                 <a:cs typeface="Arial" pitchFamily="34" charset="-120"/>
@@ -6290,6 +6518,9 @@
                 <a:solidFill>
                   <a:srgbClr val="000000"/>
                 </a:solidFill>
+                <a:highlight>
+                  <a:srgbClr val="FFFF00"/>
+                </a:highlight>
                 <a:latin typeface="Arial" pitchFamily="34" charset="0"/>
                 <a:ea typeface="Arial" pitchFamily="34" charset="-122"/>
                 <a:cs typeface="Arial" pitchFamily="34" charset="-120"/>
@@ -6356,6 +6587,9 @@
                 <a:solidFill>
                   <a:srgbClr val="000000"/>
                 </a:solidFill>
+                <a:highlight>
+                  <a:srgbClr val="FFFF00"/>
+                </a:highlight>
                 <a:latin typeface="Arial" pitchFamily="34" charset="0"/>
                 <a:ea typeface="Arial" pitchFamily="34" charset="-122"/>
                 <a:cs typeface="Arial" pitchFamily="34" charset="-120"/>
@@ -6422,6 +6656,9 @@
                 <a:solidFill>
                   <a:srgbClr val="000000"/>
                 </a:solidFill>
+                <a:highlight>
+                  <a:srgbClr val="FFFF00"/>
+                </a:highlight>
                 <a:latin typeface="Arial" pitchFamily="34" charset="0"/>
                 <a:ea typeface="Arial" pitchFamily="34" charset="-122"/>
                 <a:cs typeface="Arial" pitchFamily="34" charset="-120"/>
@@ -6488,6 +6725,9 @@
                 <a:solidFill>
                   <a:srgbClr val="000000"/>
                 </a:solidFill>
+                <a:highlight>
+                  <a:srgbClr val="FFFF00"/>
+                </a:highlight>
                 <a:latin typeface="Arial" pitchFamily="34" charset="0"/>
                 <a:ea typeface="Arial" pitchFamily="34" charset="-122"/>
                 <a:cs typeface="Arial" pitchFamily="34" charset="-120"/>
@@ -6554,6 +6794,9 @@
                 <a:solidFill>
                   <a:srgbClr val="000000"/>
                 </a:solidFill>
+                <a:highlight>
+                  <a:srgbClr val="FFFF00"/>
+                </a:highlight>
                 <a:latin typeface="Arial" pitchFamily="34" charset="0"/>
                 <a:ea typeface="Arial" pitchFamily="34" charset="-122"/>
                 <a:cs typeface="Arial" pitchFamily="34" charset="-120"/>
@@ -6620,6 +6863,9 @@
                 <a:solidFill>
                   <a:srgbClr val="000000"/>
                 </a:solidFill>
+                <a:highlight>
+                  <a:srgbClr val="FFFF00"/>
+                </a:highlight>
                 <a:latin typeface="Arial" pitchFamily="34" charset="0"/>
                 <a:ea typeface="Arial" pitchFamily="34" charset="-122"/>
                 <a:cs typeface="Arial" pitchFamily="34" charset="-120"/>
@@ -6686,6 +6932,9 @@
                 <a:solidFill>
                   <a:srgbClr val="000000"/>
                 </a:solidFill>
+                <a:highlight>
+                  <a:srgbClr val="FFFF00"/>
+                </a:highlight>
                 <a:latin typeface="Arial" pitchFamily="34" charset="0"/>
                 <a:ea typeface="Arial" pitchFamily="34" charset="-122"/>
                 <a:cs typeface="Arial" pitchFamily="34" charset="-120"/>
@@ -6752,6 +7001,9 @@
                 <a:solidFill>
                   <a:srgbClr val="000000"/>
                 </a:solidFill>
+                <a:highlight>
+                  <a:srgbClr val="FFFF00"/>
+                </a:highlight>
                 <a:latin typeface="Arial" pitchFamily="34" charset="0"/>
                 <a:ea typeface="Arial" pitchFamily="34" charset="-122"/>
                 <a:cs typeface="Arial" pitchFamily="34" charset="-120"/>
@@ -6818,6 +7070,9 @@
                 <a:solidFill>
                   <a:srgbClr val="000000"/>
                 </a:solidFill>
+                <a:highlight>
+                  <a:srgbClr val="FFFF00"/>
+                </a:highlight>
                 <a:latin typeface="Arial" pitchFamily="34" charset="0"/>
                 <a:ea typeface="Arial" pitchFamily="34" charset="-122"/>
                 <a:cs typeface="Arial" pitchFamily="34" charset="-120"/>
@@ -6884,6 +7139,9 @@
                 <a:solidFill>
                   <a:srgbClr val="000000"/>
                 </a:solidFill>
+                <a:highlight>
+                  <a:srgbClr val="FFFF00"/>
+                </a:highlight>
                 <a:latin typeface="Arial" pitchFamily="34" charset="0"/>
                 <a:ea typeface="Arial" pitchFamily="34" charset="-122"/>
                 <a:cs typeface="Arial" pitchFamily="34" charset="-120"/>
@@ -6950,6 +7208,9 @@
                 <a:solidFill>
                   <a:srgbClr val="000000"/>
                 </a:solidFill>
+                <a:highlight>
+                  <a:srgbClr val="FFFF00"/>
+                </a:highlight>
                 <a:latin typeface="Arial" pitchFamily="34" charset="0"/>
                 <a:ea typeface="Arial" pitchFamily="34" charset="-122"/>
                 <a:cs typeface="Arial" pitchFamily="34" charset="-120"/>
@@ -7016,6 +7277,9 @@
                 <a:solidFill>
                   <a:srgbClr val="000000"/>
                 </a:solidFill>
+                <a:highlight>
+                  <a:srgbClr val="FFFF00"/>
+                </a:highlight>
                 <a:latin typeface="Arial" pitchFamily="34" charset="0"/>
                 <a:ea typeface="Arial" pitchFamily="34" charset="-122"/>
                 <a:cs typeface="Arial" pitchFamily="34" charset="-120"/>
@@ -7082,6 +7346,9 @@
                 <a:solidFill>
                   <a:srgbClr val="000000"/>
                 </a:solidFill>
+                <a:highlight>
+                  <a:srgbClr val="FFFF00"/>
+                </a:highlight>
                 <a:latin typeface="Arial" pitchFamily="34" charset="0"/>
                 <a:ea typeface="Arial" pitchFamily="34" charset="-122"/>
                 <a:cs typeface="Arial" pitchFamily="34" charset="-120"/>
@@ -7148,6 +7415,9 @@
                 <a:solidFill>
                   <a:srgbClr val="000000"/>
                 </a:solidFill>
+                <a:highlight>
+                  <a:srgbClr val="FFFF00"/>
+                </a:highlight>
                 <a:latin typeface="Arial" pitchFamily="34" charset="0"/>
                 <a:ea typeface="Arial" pitchFamily="34" charset="-122"/>
                 <a:cs typeface="Arial" pitchFamily="34" charset="-120"/>
@@ -7214,6 +7484,9 @@
                 <a:solidFill>
                   <a:srgbClr val="000000"/>
                 </a:solidFill>
+                <a:highlight>
+                  <a:srgbClr val="FFFF00"/>
+                </a:highlight>
                 <a:latin typeface="Arial" pitchFamily="34" charset="0"/>
                 <a:ea typeface="Arial" pitchFamily="34" charset="-122"/>
                 <a:cs typeface="Arial" pitchFamily="34" charset="-120"/>
@@ -7280,6 +7553,9 @@
                 <a:solidFill>
                   <a:srgbClr val="000000"/>
                 </a:solidFill>
+                <a:highlight>
+                  <a:srgbClr val="FFFF00"/>
+                </a:highlight>
                 <a:latin typeface="Arial" pitchFamily="34" charset="0"/>
                 <a:ea typeface="Arial" pitchFamily="34" charset="-122"/>
                 <a:cs typeface="Arial" pitchFamily="34" charset="-120"/>
@@ -7346,6 +7622,9 @@
                 <a:solidFill>
                   <a:srgbClr val="000000"/>
                 </a:solidFill>
+                <a:highlight>
+                  <a:srgbClr val="FFFF00"/>
+                </a:highlight>
                 <a:latin typeface="Arial" pitchFamily="34" charset="0"/>
                 <a:ea typeface="Arial" pitchFamily="34" charset="-122"/>
                 <a:cs typeface="Arial" pitchFamily="34" charset="-120"/>
@@ -7412,6 +7691,9 @@
                 <a:solidFill>
                   <a:srgbClr val="000000"/>
                 </a:solidFill>
+                <a:highlight>
+                  <a:srgbClr val="FFFF00"/>
+                </a:highlight>
                 <a:latin typeface="Arial" pitchFamily="34" charset="0"/>
                 <a:ea typeface="Arial" pitchFamily="34" charset="-122"/>
                 <a:cs typeface="Arial" pitchFamily="34" charset="-120"/>
@@ -7478,6 +7760,9 @@
                 <a:solidFill>
                   <a:srgbClr val="000000"/>
                 </a:solidFill>
+                <a:highlight>
+                  <a:srgbClr val="FFFF00"/>
+                </a:highlight>
                 <a:latin typeface="Arial" pitchFamily="34" charset="0"/>
                 <a:ea typeface="Arial" pitchFamily="34" charset="-122"/>
                 <a:cs typeface="Arial" pitchFamily="34" charset="-120"/>
@@ -7544,6 +7829,9 @@
                 <a:solidFill>
                   <a:srgbClr val="000000"/>
                 </a:solidFill>
+                <a:highlight>
+                  <a:srgbClr val="FFFF00"/>
+                </a:highlight>
                 <a:latin typeface="Arial" pitchFamily="34" charset="0"/>
                 <a:ea typeface="Arial" pitchFamily="34" charset="-122"/>
                 <a:cs typeface="Arial" pitchFamily="34" charset="-120"/>
@@ -7610,6 +7898,9 @@
                 <a:solidFill>
                   <a:srgbClr val="000000"/>
                 </a:solidFill>
+                <a:highlight>
+                  <a:srgbClr val="FFFF00"/>
+                </a:highlight>
                 <a:latin typeface="Arial" pitchFamily="34" charset="0"/>
                 <a:ea typeface="Arial" pitchFamily="34" charset="-122"/>
                 <a:cs typeface="Arial" pitchFamily="34" charset="-120"/>
@@ -7676,6 +7967,9 @@
                 <a:solidFill>
                   <a:srgbClr val="000000"/>
                 </a:solidFill>
+                <a:highlight>
+                  <a:srgbClr val="FFFF00"/>
+                </a:highlight>
                 <a:latin typeface="Arial" pitchFamily="34" charset="0"/>
                 <a:ea typeface="Arial" pitchFamily="34" charset="-122"/>
                 <a:cs typeface="Arial" pitchFamily="34" charset="-120"/>
@@ -7742,6 +8036,9 @@
                 <a:solidFill>
                   <a:srgbClr val="000000"/>
                 </a:solidFill>
+                <a:highlight>
+                  <a:srgbClr val="FFFF00"/>
+                </a:highlight>
                 <a:latin typeface="Arial" pitchFamily="34" charset="0"/>
                 <a:ea typeface="Arial" pitchFamily="34" charset="-122"/>
                 <a:cs typeface="Arial" pitchFamily="34" charset="-120"/>
@@ -7808,6 +8105,9 @@
                 <a:solidFill>
                   <a:srgbClr val="000000"/>
                 </a:solidFill>
+                <a:highlight>
+                  <a:srgbClr val="FFFF00"/>
+                </a:highlight>
                 <a:latin typeface="Arial" pitchFamily="34" charset="0"/>
                 <a:ea typeface="Arial" pitchFamily="34" charset="-122"/>
                 <a:cs typeface="Arial" pitchFamily="34" charset="-120"/>
@@ -7874,6 +8174,9 @@
                 <a:solidFill>
                   <a:srgbClr val="000000"/>
                 </a:solidFill>
+                <a:highlight>
+                  <a:srgbClr val="FFFF00"/>
+                </a:highlight>
                 <a:latin typeface="Arial" pitchFamily="34" charset="0"/>
                 <a:ea typeface="Arial" pitchFamily="34" charset="-122"/>
                 <a:cs typeface="Arial" pitchFamily="34" charset="-120"/>
@@ -7940,6 +8243,9 @@
                 <a:solidFill>
                   <a:srgbClr val="000000"/>
                 </a:solidFill>
+                <a:highlight>
+                  <a:srgbClr val="FFFF00"/>
+                </a:highlight>
                 <a:latin typeface="Arial" pitchFamily="34" charset="0"/>
                 <a:ea typeface="Arial" pitchFamily="34" charset="-122"/>
                 <a:cs typeface="Arial" pitchFamily="34" charset="-120"/>
@@ -8006,6 +8312,9 @@
                 <a:solidFill>
                   <a:srgbClr val="000000"/>
                 </a:solidFill>
+                <a:highlight>
+                  <a:srgbClr val="FFFF00"/>
+                </a:highlight>
                 <a:latin typeface="Arial" pitchFamily="34" charset="0"/>
                 <a:ea typeface="Arial" pitchFamily="34" charset="-122"/>
                 <a:cs typeface="Arial" pitchFamily="34" charset="-120"/>
@@ -8072,6 +8381,9 @@
                 <a:solidFill>
                   <a:srgbClr val="000000"/>
                 </a:solidFill>
+                <a:highlight>
+                  <a:srgbClr val="FFFF00"/>
+                </a:highlight>
                 <a:latin typeface="Arial" pitchFamily="34" charset="0"/>
                 <a:ea typeface="Arial" pitchFamily="34" charset="-122"/>
                 <a:cs typeface="Arial" pitchFamily="34" charset="-120"/>
@@ -8138,6 +8450,9 @@
                 <a:solidFill>
                   <a:srgbClr val="000000"/>
                 </a:solidFill>
+                <a:highlight>
+                  <a:srgbClr val="FFFF00"/>
+                </a:highlight>
                 <a:latin typeface="Arial" pitchFamily="34" charset="0"/>
                 <a:ea typeface="Arial" pitchFamily="34" charset="-122"/>
                 <a:cs typeface="Arial" pitchFamily="34" charset="-120"/>
@@ -8204,6 +8519,9 @@
                 <a:solidFill>
                   <a:srgbClr val="000000"/>
                 </a:solidFill>
+                <a:highlight>
+                  <a:srgbClr val="FFFF00"/>
+                </a:highlight>
                 <a:latin typeface="Arial" pitchFamily="34" charset="0"/>
                 <a:ea typeface="Arial" pitchFamily="34" charset="-122"/>
                 <a:cs typeface="Arial" pitchFamily="34" charset="-120"/>
@@ -8270,6 +8588,9 @@
                 <a:solidFill>
                   <a:srgbClr val="000000"/>
                 </a:solidFill>
+                <a:highlight>
+                  <a:srgbClr val="FFFF00"/>
+                </a:highlight>
                 <a:latin typeface="Arial" pitchFamily="34" charset="0"/>
                 <a:ea typeface="Arial" pitchFamily="34" charset="-122"/>
                 <a:cs typeface="Arial" pitchFamily="34" charset="-120"/>
@@ -8336,6 +8657,9 @@
                 <a:solidFill>
                   <a:srgbClr val="000000"/>
                 </a:solidFill>
+                <a:highlight>
+                  <a:srgbClr val="FFFF00"/>
+                </a:highlight>
                 <a:latin typeface="Arial" pitchFamily="34" charset="0"/>
                 <a:ea typeface="Arial" pitchFamily="34" charset="-122"/>
                 <a:cs typeface="Arial" pitchFamily="34" charset="-120"/>
@@ -8402,6 +8726,9 @@
                 <a:solidFill>
                   <a:srgbClr val="000000"/>
                 </a:solidFill>
+                <a:highlight>
+                  <a:srgbClr val="FFFF00"/>
+                </a:highlight>
                 <a:latin typeface="Arial" pitchFamily="34" charset="0"/>
                 <a:ea typeface="Arial" pitchFamily="34" charset="-122"/>
                 <a:cs typeface="Arial" pitchFamily="34" charset="-120"/>
@@ -8468,6 +8795,9 @@
                 <a:solidFill>
                   <a:srgbClr val="000000"/>
                 </a:solidFill>
+                <a:highlight>
+                  <a:srgbClr val="FFFF00"/>
+                </a:highlight>
                 <a:latin typeface="Arial" pitchFamily="34" charset="0"/>
                 <a:ea typeface="Arial" pitchFamily="34" charset="-122"/>
                 <a:cs typeface="Arial" pitchFamily="34" charset="-120"/>
@@ -8598,6 +8928,9 @@
                 <a:solidFill>
                   <a:srgbClr val="000000"/>
                 </a:solidFill>
+                <a:highlight>
+                  <a:srgbClr val="FFFF00"/>
+                </a:highlight>
                 <a:latin typeface="Unifont" pitchFamily="34" charset="0"/>
                 <a:ea typeface="Unifont" pitchFamily="34" charset="-122"/>
                 <a:cs typeface="Unifont" pitchFamily="34" charset="-120"/>
@@ -8664,6 +8997,9 @@
                 <a:solidFill>
                   <a:srgbClr val="000000"/>
                 </a:solidFill>
+                <a:highlight>
+                  <a:srgbClr val="FFFF00"/>
+                </a:highlight>
                 <a:latin typeface="Unifont" pitchFamily="34" charset="0"/>
                 <a:ea typeface="Unifont" pitchFamily="34" charset="-122"/>
                 <a:cs typeface="Unifont" pitchFamily="34" charset="-120"/>
@@ -8730,6 +9066,9 @@
                 <a:solidFill>
                   <a:srgbClr val="000000"/>
                 </a:solidFill>
+                <a:highlight>
+                  <a:srgbClr val="FFFF00"/>
+                </a:highlight>
                 <a:latin typeface="Unifont" pitchFamily="34" charset="0"/>
                 <a:ea typeface="Unifont" pitchFamily="34" charset="-122"/>
                 <a:cs typeface="Unifont" pitchFamily="34" charset="-120"/>
@@ -8796,6 +9135,9 @@
                 <a:solidFill>
                   <a:srgbClr val="000000"/>
                 </a:solidFill>
+                <a:highlight>
+                  <a:srgbClr val="FFFF00"/>
+                </a:highlight>
                 <a:latin typeface="Unifont" pitchFamily="34" charset="0"/>
                 <a:ea typeface="Unifont" pitchFamily="34" charset="-122"/>
                 <a:cs typeface="Unifont" pitchFamily="34" charset="-120"/>
@@ -8862,6 +9204,9 @@
                 <a:solidFill>
                   <a:srgbClr val="000000"/>
                 </a:solidFill>
+                <a:highlight>
+                  <a:srgbClr val="FFFF00"/>
+                </a:highlight>
                 <a:latin typeface="Unifont" pitchFamily="34" charset="0"/>
                 <a:ea typeface="Unifont" pitchFamily="34" charset="-122"/>
                 <a:cs typeface="Unifont" pitchFamily="34" charset="-120"/>
@@ -8928,6 +9273,9 @@
                 <a:solidFill>
                   <a:srgbClr val="000000"/>
                 </a:solidFill>
+                <a:highlight>
+                  <a:srgbClr val="FFFF00"/>
+                </a:highlight>
                 <a:latin typeface="Unifont" pitchFamily="34" charset="0"/>
                 <a:ea typeface="Unifont" pitchFamily="34" charset="-122"/>
                 <a:cs typeface="Unifont" pitchFamily="34" charset="-120"/>
@@ -8994,6 +9342,9 @@
                 <a:solidFill>
                   <a:srgbClr val="000000"/>
                 </a:solidFill>
+                <a:highlight>
+                  <a:srgbClr val="FFFF00"/>
+                </a:highlight>
                 <a:latin typeface="Unifont" pitchFamily="34" charset="0"/>
                 <a:ea typeface="Unifont" pitchFamily="34" charset="-122"/>
                 <a:cs typeface="Unifont" pitchFamily="34" charset="-120"/>
@@ -9060,6 +9411,9 @@
                 <a:solidFill>
                   <a:srgbClr val="000000"/>
                 </a:solidFill>
+                <a:highlight>
+                  <a:srgbClr val="FFFF00"/>
+                </a:highlight>
                 <a:latin typeface="Unifont" pitchFamily="34" charset="0"/>
                 <a:ea typeface="Unifont" pitchFamily="34" charset="-122"/>
                 <a:cs typeface="Unifont" pitchFamily="34" charset="-120"/>
@@ -9126,6 +9480,9 @@
                 <a:solidFill>
                   <a:srgbClr val="000000"/>
                 </a:solidFill>
+                <a:highlight>
+                  <a:srgbClr val="FFFF00"/>
+                </a:highlight>
                 <a:latin typeface="Unifont" pitchFamily="34" charset="0"/>
                 <a:ea typeface="Unifont" pitchFamily="34" charset="-122"/>
                 <a:cs typeface="Unifont" pitchFamily="34" charset="-120"/>
@@ -9192,6 +9549,9 @@
                 <a:solidFill>
                   <a:srgbClr val="000000"/>
                 </a:solidFill>
+                <a:highlight>
+                  <a:srgbClr val="FFFF00"/>
+                </a:highlight>
                 <a:latin typeface="Unifont" pitchFamily="34" charset="0"/>
                 <a:ea typeface="Unifont" pitchFamily="34" charset="-122"/>
                 <a:cs typeface="Unifont" pitchFamily="34" charset="-120"/>
@@ -9258,6 +9618,9 @@
                 <a:solidFill>
                   <a:srgbClr val="000000"/>
                 </a:solidFill>
+                <a:highlight>
+                  <a:srgbClr val="FFFF00"/>
+                </a:highlight>
                 <a:latin typeface="Unifont" pitchFamily="34" charset="0"/>
                 <a:ea typeface="Unifont" pitchFamily="34" charset="-122"/>
                 <a:cs typeface="Unifont" pitchFamily="34" charset="-120"/>
@@ -9324,6 +9687,9 @@
                 <a:solidFill>
                   <a:srgbClr val="000000"/>
                 </a:solidFill>
+                <a:highlight>
+                  <a:srgbClr val="FFFF00"/>
+                </a:highlight>
                 <a:latin typeface="Unifont" pitchFamily="34" charset="0"/>
                 <a:ea typeface="Unifont" pitchFamily="34" charset="-122"/>
                 <a:cs typeface="Unifont" pitchFamily="34" charset="-120"/>
@@ -9390,6 +9756,9 @@
                 <a:solidFill>
                   <a:srgbClr val="000000"/>
                 </a:solidFill>
+                <a:highlight>
+                  <a:srgbClr val="FFFF00"/>
+                </a:highlight>
                 <a:latin typeface="Unifont" pitchFamily="34" charset="0"/>
                 <a:ea typeface="Unifont" pitchFamily="34" charset="-122"/>
                 <a:cs typeface="Unifont" pitchFamily="34" charset="-120"/>
@@ -9456,6 +9825,9 @@
                 <a:solidFill>
                   <a:srgbClr val="000000"/>
                 </a:solidFill>
+                <a:highlight>
+                  <a:srgbClr val="FFFF00"/>
+                </a:highlight>
                 <a:latin typeface="Unifont" pitchFamily="34" charset="0"/>
                 <a:ea typeface="Unifont" pitchFamily="34" charset="-122"/>
                 <a:cs typeface="Unifont" pitchFamily="34" charset="-120"/>
@@ -9522,6 +9894,9 @@
                 <a:solidFill>
                   <a:srgbClr val="000000"/>
                 </a:solidFill>
+                <a:highlight>
+                  <a:srgbClr val="FFFF00"/>
+                </a:highlight>
                 <a:latin typeface="Unifont" pitchFamily="34" charset="0"/>
                 <a:ea typeface="Unifont" pitchFamily="34" charset="-122"/>
                 <a:cs typeface="Unifont" pitchFamily="34" charset="-120"/>
@@ -9588,6 +9963,9 @@
                 <a:solidFill>
                   <a:srgbClr val="000000"/>
                 </a:solidFill>
+                <a:highlight>
+                  <a:srgbClr val="FFFF00"/>
+                </a:highlight>
                 <a:latin typeface="Unifont" pitchFamily="34" charset="0"/>
                 <a:ea typeface="Unifont" pitchFamily="34" charset="-122"/>
                 <a:cs typeface="Unifont" pitchFamily="34" charset="-120"/>
@@ -9654,6 +10032,9 @@
                 <a:solidFill>
                   <a:srgbClr val="000000"/>
                 </a:solidFill>
+                <a:highlight>
+                  <a:srgbClr val="FFFF00"/>
+                </a:highlight>
                 <a:latin typeface="Unifont" pitchFamily="34" charset="0"/>
                 <a:ea typeface="Unifont" pitchFamily="34" charset="-122"/>
                 <a:cs typeface="Unifont" pitchFamily="34" charset="-120"/>
@@ -9720,6 +10101,9 @@
                 <a:solidFill>
                   <a:srgbClr val="000000"/>
                 </a:solidFill>
+                <a:highlight>
+                  <a:srgbClr val="FFFF00"/>
+                </a:highlight>
                 <a:latin typeface="Unifont" pitchFamily="34" charset="0"/>
                 <a:ea typeface="Unifont" pitchFamily="34" charset="-122"/>
                 <a:cs typeface="Unifont" pitchFamily="34" charset="-120"/>
@@ -9786,6 +10170,9 @@
                 <a:solidFill>
                   <a:srgbClr val="000000"/>
                 </a:solidFill>
+                <a:highlight>
+                  <a:srgbClr val="FFFF00"/>
+                </a:highlight>
                 <a:latin typeface="Unifont" pitchFamily="34" charset="0"/>
                 <a:ea typeface="Unifont" pitchFamily="34" charset="-122"/>
                 <a:cs typeface="Unifont" pitchFamily="34" charset="-120"/>
@@ -9852,6 +10239,9 @@
                 <a:solidFill>
                   <a:srgbClr val="000000"/>
                 </a:solidFill>
+                <a:highlight>
+                  <a:srgbClr val="FFFF00"/>
+                </a:highlight>
                 <a:latin typeface="Unifont" pitchFamily="34" charset="0"/>
                 <a:ea typeface="Unifont" pitchFamily="34" charset="-122"/>
                 <a:cs typeface="Unifont" pitchFamily="34" charset="-120"/>
@@ -9918,6 +10308,9 @@
                 <a:solidFill>
                   <a:srgbClr val="000000"/>
                 </a:solidFill>
+                <a:highlight>
+                  <a:srgbClr val="FFFF00"/>
+                </a:highlight>
                 <a:latin typeface="Unifont" pitchFamily="34" charset="0"/>
                 <a:ea typeface="Unifont" pitchFamily="34" charset="-122"/>
                 <a:cs typeface="Unifont" pitchFamily="34" charset="-120"/>
@@ -9984,6 +10377,9 @@
                 <a:solidFill>
                   <a:srgbClr val="000000"/>
                 </a:solidFill>
+                <a:highlight>
+                  <a:srgbClr val="FFFF00"/>
+                </a:highlight>
                 <a:latin typeface="Unifont" pitchFamily="34" charset="0"/>
                 <a:ea typeface="Unifont" pitchFamily="34" charset="-122"/>
                 <a:cs typeface="Unifont" pitchFamily="34" charset="-120"/>
@@ -10050,6 +10446,9 @@
                 <a:solidFill>
                   <a:srgbClr val="000000"/>
                 </a:solidFill>
+                <a:highlight>
+                  <a:srgbClr val="FFFF00"/>
+                </a:highlight>
                 <a:latin typeface="Unifont" pitchFamily="34" charset="0"/>
                 <a:ea typeface="Unifont" pitchFamily="34" charset="-122"/>
                 <a:cs typeface="Unifont" pitchFamily="34" charset="-120"/>
@@ -10116,6 +10515,9 @@
                 <a:solidFill>
                   <a:srgbClr val="000000"/>
                 </a:solidFill>
+                <a:highlight>
+                  <a:srgbClr val="FFFF00"/>
+                </a:highlight>
                 <a:latin typeface="Unifont" pitchFamily="34" charset="0"/>
                 <a:ea typeface="Unifont" pitchFamily="34" charset="-122"/>
                 <a:cs typeface="Unifont" pitchFamily="34" charset="-120"/>
@@ -10182,6 +10584,9 @@
                 <a:solidFill>
                   <a:srgbClr val="000000"/>
                 </a:solidFill>
+                <a:highlight>
+                  <a:srgbClr val="FFFF00"/>
+                </a:highlight>
                 <a:latin typeface="Unifont" pitchFamily="34" charset="0"/>
                 <a:ea typeface="Unifont" pitchFamily="34" charset="-122"/>
                 <a:cs typeface="Unifont" pitchFamily="34" charset="-120"/>
@@ -10248,6 +10653,9 @@
                 <a:solidFill>
                   <a:srgbClr val="000000"/>
                 </a:solidFill>
+                <a:highlight>
+                  <a:srgbClr val="FFFF00"/>
+                </a:highlight>
                 <a:latin typeface="Unifont" pitchFamily="34" charset="0"/>
                 <a:ea typeface="Unifont" pitchFamily="34" charset="-122"/>
                 <a:cs typeface="Unifont" pitchFamily="34" charset="-120"/>
@@ -10314,6 +10722,9 @@
                 <a:solidFill>
                   <a:srgbClr val="000000"/>
                 </a:solidFill>
+                <a:highlight>
+                  <a:srgbClr val="FFFF00"/>
+                </a:highlight>
                 <a:latin typeface="Unifont" pitchFamily="34" charset="0"/>
                 <a:ea typeface="Unifont" pitchFamily="34" charset="-122"/>
                 <a:cs typeface="Unifont" pitchFamily="34" charset="-120"/>
@@ -10380,6 +10791,9 @@
                 <a:solidFill>
                   <a:srgbClr val="000000"/>
                 </a:solidFill>
+                <a:highlight>
+                  <a:srgbClr val="FFFF00"/>
+                </a:highlight>
                 <a:latin typeface="Unifont" pitchFamily="34" charset="0"/>
                 <a:ea typeface="Unifont" pitchFamily="34" charset="-122"/>
                 <a:cs typeface="Unifont" pitchFamily="34" charset="-120"/>
@@ -10446,6 +10860,9 @@
                 <a:solidFill>
                   <a:srgbClr val="000000"/>
                 </a:solidFill>
+                <a:highlight>
+                  <a:srgbClr val="FFFF00"/>
+                </a:highlight>
                 <a:latin typeface="Unifont" pitchFamily="34" charset="0"/>
                 <a:ea typeface="Unifont" pitchFamily="34" charset="-122"/>
                 <a:cs typeface="Unifont" pitchFamily="34" charset="-120"/>
@@ -10512,6 +10929,9 @@
                 <a:solidFill>
                   <a:srgbClr val="000000"/>
                 </a:solidFill>
+                <a:highlight>
+                  <a:srgbClr val="FFFF00"/>
+                </a:highlight>
                 <a:latin typeface="Unifont" pitchFamily="34" charset="0"/>
                 <a:ea typeface="Unifont" pitchFamily="34" charset="-122"/>
                 <a:cs typeface="Unifont" pitchFamily="34" charset="-120"/>
@@ -10578,6 +10998,9 @@
                 <a:solidFill>
                   <a:srgbClr val="000000"/>
                 </a:solidFill>
+                <a:highlight>
+                  <a:srgbClr val="FFFF00"/>
+                </a:highlight>
                 <a:latin typeface="Unifont" pitchFamily="34" charset="0"/>
                 <a:ea typeface="Unifont" pitchFamily="34" charset="-122"/>
                 <a:cs typeface="Unifont" pitchFamily="34" charset="-120"/>
@@ -10644,6 +11067,9 @@
                 <a:solidFill>
                   <a:srgbClr val="000000"/>
                 </a:solidFill>
+                <a:highlight>
+                  <a:srgbClr val="FFFF00"/>
+                </a:highlight>
                 <a:latin typeface="Unifont" pitchFamily="34" charset="0"/>
                 <a:ea typeface="Unifont" pitchFamily="34" charset="-122"/>
                 <a:cs typeface="Unifont" pitchFamily="34" charset="-120"/>
@@ -10710,6 +11136,9 @@
                 <a:solidFill>
                   <a:srgbClr val="000000"/>
                 </a:solidFill>
+                <a:highlight>
+                  <a:srgbClr val="FFFF00"/>
+                </a:highlight>
                 <a:latin typeface="Unifont" pitchFamily="34" charset="0"/>
                 <a:ea typeface="Unifont" pitchFamily="34" charset="-122"/>
                 <a:cs typeface="Unifont" pitchFamily="34" charset="-120"/>
@@ -10776,6 +11205,9 @@
                 <a:solidFill>
                   <a:srgbClr val="000000"/>
                 </a:solidFill>
+                <a:highlight>
+                  <a:srgbClr val="FFFF00"/>
+                </a:highlight>
                 <a:latin typeface="Unifont" pitchFamily="34" charset="0"/>
                 <a:ea typeface="Unifont" pitchFamily="34" charset="-122"/>
                 <a:cs typeface="Unifont" pitchFamily="34" charset="-120"/>
@@ -10842,6 +11274,9 @@
                 <a:solidFill>
                   <a:srgbClr val="000000"/>
                 </a:solidFill>
+                <a:highlight>
+                  <a:srgbClr val="FFFF00"/>
+                </a:highlight>
                 <a:latin typeface="Unifont" pitchFamily="34" charset="0"/>
                 <a:ea typeface="Unifont" pitchFamily="34" charset="-122"/>
                 <a:cs typeface="Unifont" pitchFamily="34" charset="-120"/>
@@ -10908,6 +11343,9 @@
                 <a:solidFill>
                   <a:srgbClr val="000000"/>
                 </a:solidFill>
+                <a:highlight>
+                  <a:srgbClr val="FFFF00"/>
+                </a:highlight>
                 <a:latin typeface="Unifont" pitchFamily="34" charset="0"/>
                 <a:ea typeface="Unifont" pitchFamily="34" charset="-122"/>
                 <a:cs typeface="Unifont" pitchFamily="34" charset="-120"/>
@@ -10974,6 +11412,9 @@
                 <a:solidFill>
                   <a:srgbClr val="000000"/>
                 </a:solidFill>
+                <a:highlight>
+                  <a:srgbClr val="FFFF00"/>
+                </a:highlight>
                 <a:latin typeface="Unifont" pitchFamily="34" charset="0"/>
                 <a:ea typeface="Unifont" pitchFamily="34" charset="-122"/>
                 <a:cs typeface="Unifont" pitchFamily="34" charset="-120"/>
@@ -11040,6 +11481,9 @@
                 <a:solidFill>
                   <a:srgbClr val="000000"/>
                 </a:solidFill>
+                <a:highlight>
+                  <a:srgbClr val="FFFF00"/>
+                </a:highlight>
                 <a:latin typeface="Unifont" pitchFamily="34" charset="0"/>
                 <a:ea typeface="Unifont" pitchFamily="34" charset="-122"/>
                 <a:cs typeface="Unifont" pitchFamily="34" charset="-120"/>
@@ -11106,6 +11550,9 @@
                 <a:solidFill>
                   <a:srgbClr val="000000"/>
                 </a:solidFill>
+                <a:highlight>
+                  <a:srgbClr val="FFFF00"/>
+                </a:highlight>
                 <a:latin typeface="Unifont" pitchFamily="34" charset="0"/>
                 <a:ea typeface="Unifont" pitchFamily="34" charset="-122"/>
                 <a:cs typeface="Unifont" pitchFamily="34" charset="-120"/>
@@ -11172,6 +11619,9 @@
                 <a:solidFill>
                   <a:srgbClr val="000000"/>
                 </a:solidFill>
+                <a:highlight>
+                  <a:srgbClr val="FFFF00"/>
+                </a:highlight>
                 <a:latin typeface="Unifont" pitchFamily="34" charset="0"/>
                 <a:ea typeface="Unifont" pitchFamily="34" charset="-122"/>
                 <a:cs typeface="Unifont" pitchFamily="34" charset="-120"/>
@@ -11238,6 +11688,9 @@
                 <a:solidFill>
                   <a:srgbClr val="000000"/>
                 </a:solidFill>
+                <a:highlight>
+                  <a:srgbClr val="FFFF00"/>
+                </a:highlight>
                 <a:latin typeface="Unifont" pitchFamily="34" charset="0"/>
                 <a:ea typeface="Unifont" pitchFamily="34" charset="-122"/>
                 <a:cs typeface="Unifont" pitchFamily="34" charset="-120"/>
@@ -11304,6 +11757,9 @@
                 <a:solidFill>
                   <a:srgbClr val="000000"/>
                 </a:solidFill>
+                <a:highlight>
+                  <a:srgbClr val="FFFF00"/>
+                </a:highlight>
                 <a:latin typeface="Unifont" pitchFamily="34" charset="0"/>
                 <a:ea typeface="Unifont" pitchFamily="34" charset="-122"/>
                 <a:cs typeface="Unifont" pitchFamily="34" charset="-120"/>
@@ -11370,6 +11826,9 @@
                 <a:solidFill>
                   <a:srgbClr val="000000"/>
                 </a:solidFill>
+                <a:highlight>
+                  <a:srgbClr val="FFFF00"/>
+                </a:highlight>
                 <a:latin typeface="Unifont" pitchFamily="34" charset="0"/>
                 <a:ea typeface="Unifont" pitchFamily="34" charset="-122"/>
                 <a:cs typeface="Unifont" pitchFamily="34" charset="-120"/>
@@ -11436,6 +11895,9 @@
                 <a:solidFill>
                   <a:srgbClr val="000000"/>
                 </a:solidFill>
+                <a:highlight>
+                  <a:srgbClr val="FFFF00"/>
+                </a:highlight>
                 <a:latin typeface="Unifont" pitchFamily="34" charset="0"/>
                 <a:ea typeface="Unifont" pitchFamily="34" charset="-122"/>
                 <a:cs typeface="Unifont" pitchFamily="34" charset="-120"/>
@@ -11502,6 +11964,9 @@
                 <a:solidFill>
                   <a:srgbClr val="000000"/>
                 </a:solidFill>
+                <a:highlight>
+                  <a:srgbClr val="FFFF00"/>
+                </a:highlight>
                 <a:latin typeface="Unifont" pitchFamily="34" charset="0"/>
                 <a:ea typeface="Unifont" pitchFamily="34" charset="-122"/>
                 <a:cs typeface="Unifont" pitchFamily="34" charset="-120"/>
@@ -11568,6 +12033,9 @@
                 <a:solidFill>
                   <a:srgbClr val="000000"/>
                 </a:solidFill>
+                <a:highlight>
+                  <a:srgbClr val="FFFF00"/>
+                </a:highlight>
                 <a:latin typeface="Unifont" pitchFamily="34" charset="0"/>
                 <a:ea typeface="Unifont" pitchFamily="34" charset="-122"/>
                 <a:cs typeface="Unifont" pitchFamily="34" charset="-120"/>
@@ -11634,6 +12102,9 @@
                 <a:solidFill>
                   <a:srgbClr val="000000"/>
                 </a:solidFill>
+                <a:highlight>
+                  <a:srgbClr val="FFFF00"/>
+                </a:highlight>
                 <a:latin typeface="Unifont" pitchFamily="34" charset="0"/>
                 <a:ea typeface="Unifont" pitchFamily="34" charset="-122"/>
                 <a:cs typeface="Unifont" pitchFamily="34" charset="-120"/>
@@ -11700,6 +12171,9 @@
                 <a:solidFill>
                   <a:srgbClr val="000000"/>
                 </a:solidFill>
+                <a:highlight>
+                  <a:srgbClr val="FFFF00"/>
+                </a:highlight>
                 <a:latin typeface="Unifont" pitchFamily="34" charset="0"/>
                 <a:ea typeface="Unifont" pitchFamily="34" charset="-122"/>
                 <a:cs typeface="Unifont" pitchFamily="34" charset="-120"/>
@@ -11766,6 +12240,9 @@
                 <a:solidFill>
                   <a:srgbClr val="000000"/>
                 </a:solidFill>
+                <a:highlight>
+                  <a:srgbClr val="FFFF00"/>
+                </a:highlight>
                 <a:latin typeface="Unifont" pitchFamily="34" charset="0"/>
                 <a:ea typeface="Unifont" pitchFamily="34" charset="-122"/>
                 <a:cs typeface="Unifont" pitchFamily="34" charset="-120"/>
@@ -11832,6 +12309,9 @@
                 <a:solidFill>
                   <a:srgbClr val="000000"/>
                 </a:solidFill>
+                <a:highlight>
+                  <a:srgbClr val="FFFF00"/>
+                </a:highlight>
                 <a:latin typeface="Unifont" pitchFamily="34" charset="0"/>
                 <a:ea typeface="Unifont" pitchFamily="34" charset="-122"/>
                 <a:cs typeface="Unifont" pitchFamily="34" charset="-120"/>
@@ -11898,6 +12378,9 @@
                 <a:solidFill>
                   <a:srgbClr val="000000"/>
                 </a:solidFill>
+                <a:highlight>
+                  <a:srgbClr val="FFFF00"/>
+                </a:highlight>
                 <a:latin typeface="Unifont" pitchFamily="34" charset="0"/>
                 <a:ea typeface="Unifont" pitchFamily="34" charset="-122"/>
                 <a:cs typeface="Unifont" pitchFamily="34" charset="-120"/>
@@ -11964,6 +12447,9 @@
                 <a:solidFill>
                   <a:srgbClr val="000000"/>
                 </a:solidFill>
+                <a:highlight>
+                  <a:srgbClr val="FFFF00"/>
+                </a:highlight>
                 <a:latin typeface="Unifont" pitchFamily="34" charset="0"/>
                 <a:ea typeface="Unifont" pitchFamily="34" charset="-122"/>
                 <a:cs typeface="Unifont" pitchFamily="34" charset="-120"/>
@@ -12030,6 +12516,9 @@
                 <a:solidFill>
                   <a:srgbClr val="000000"/>
                 </a:solidFill>
+                <a:highlight>
+                  <a:srgbClr val="FFFF00"/>
+                </a:highlight>
                 <a:latin typeface="Unifont" pitchFamily="34" charset="0"/>
                 <a:ea typeface="Unifont" pitchFamily="34" charset="-122"/>
                 <a:cs typeface="Unifont" pitchFamily="34" charset="-120"/>
@@ -12096,6 +12585,9 @@
                 <a:solidFill>
                   <a:srgbClr val="000000"/>
                 </a:solidFill>
+                <a:highlight>
+                  <a:srgbClr val="FFFF00"/>
+                </a:highlight>
                 <a:latin typeface="Unifont" pitchFamily="34" charset="0"/>
                 <a:ea typeface="Unifont" pitchFamily="34" charset="-122"/>
                 <a:cs typeface="Unifont" pitchFamily="34" charset="-120"/>
@@ -12162,6 +12654,9 @@
                 <a:solidFill>
                   <a:srgbClr val="000000"/>
                 </a:solidFill>
+                <a:highlight>
+                  <a:srgbClr val="FFFF00"/>
+                </a:highlight>
                 <a:latin typeface="Unifont" pitchFamily="34" charset="0"/>
                 <a:ea typeface="Unifont" pitchFamily="34" charset="-122"/>
                 <a:cs typeface="Unifont" pitchFamily="34" charset="-120"/>
@@ -12292,6 +12787,9 @@
                 <a:solidFill>
                   <a:srgbClr val="000000"/>
                 </a:solidFill>
+                <a:highlight>
+                  <a:srgbClr val="FFFF00"/>
+                </a:highlight>
                 <a:latin typeface="Times New Roman" pitchFamily="34" charset="0"/>
                 <a:ea typeface="Times New Roman" pitchFamily="34" charset="-122"/>
                 <a:cs typeface="Times New Roman" pitchFamily="34" charset="-120"/>
@@ -12358,6 +12856,9 @@
                 <a:solidFill>
                   <a:srgbClr val="000000"/>
                 </a:solidFill>
+                <a:highlight>
+                  <a:srgbClr val="FFFF00"/>
+                </a:highlight>
                 <a:latin typeface="Times New Roman" pitchFamily="34" charset="0"/>
                 <a:ea typeface="Times New Roman" pitchFamily="34" charset="-122"/>
                 <a:cs typeface="Times New Roman" pitchFamily="34" charset="-120"/>
@@ -12424,6 +12925,9 @@
                 <a:solidFill>
                   <a:srgbClr val="000000"/>
                 </a:solidFill>
+                <a:highlight>
+                  <a:srgbClr val="FFFF00"/>
+                </a:highlight>
                 <a:latin typeface="Times New Roman" pitchFamily="34" charset="0"/>
                 <a:ea typeface="Times New Roman" pitchFamily="34" charset="-122"/>
                 <a:cs typeface="Times New Roman" pitchFamily="34" charset="-120"/>
@@ -12490,6 +12994,9 @@
                 <a:solidFill>
                   <a:srgbClr val="000000"/>
                 </a:solidFill>
+                <a:highlight>
+                  <a:srgbClr val="FFFF00"/>
+                </a:highlight>
                 <a:latin typeface="Times New Roman" pitchFamily="34" charset="0"/>
                 <a:ea typeface="Times New Roman" pitchFamily="34" charset="-122"/>
                 <a:cs typeface="Times New Roman" pitchFamily="34" charset="-120"/>
@@ -12556,6 +13063,9 @@
                 <a:solidFill>
                   <a:srgbClr val="000000"/>
                 </a:solidFill>
+                <a:highlight>
+                  <a:srgbClr val="FFFF00"/>
+                </a:highlight>
                 <a:latin typeface="Times New Roman" pitchFamily="34" charset="0"/>
                 <a:ea typeface="Times New Roman" pitchFamily="34" charset="-122"/>
                 <a:cs typeface="Times New Roman" pitchFamily="34" charset="-120"/>
@@ -12622,6 +13132,9 @@
                 <a:solidFill>
                   <a:srgbClr val="000000"/>
                 </a:solidFill>
+                <a:highlight>
+                  <a:srgbClr val="FFFF00"/>
+                </a:highlight>
                 <a:latin typeface="Times New Roman" pitchFamily="34" charset="0"/>
                 <a:ea typeface="Times New Roman" pitchFamily="34" charset="-122"/>
                 <a:cs typeface="Times New Roman" pitchFamily="34" charset="-120"/>
@@ -12688,6 +13201,9 @@
                 <a:solidFill>
                   <a:srgbClr val="000000"/>
                 </a:solidFill>
+                <a:highlight>
+                  <a:srgbClr val="FFFF00"/>
+                </a:highlight>
                 <a:latin typeface="Times New Roman" pitchFamily="34" charset="0"/>
                 <a:ea typeface="Times New Roman" pitchFamily="34" charset="-122"/>
                 <a:cs typeface="Times New Roman" pitchFamily="34" charset="-120"/>
@@ -12754,6 +13270,9 @@
                 <a:solidFill>
                   <a:srgbClr val="000000"/>
                 </a:solidFill>
+                <a:highlight>
+                  <a:srgbClr val="FFFF00"/>
+                </a:highlight>
                 <a:latin typeface="Times New Roman" pitchFamily="34" charset="0"/>
                 <a:ea typeface="Times New Roman" pitchFamily="34" charset="-122"/>
                 <a:cs typeface="Times New Roman" pitchFamily="34" charset="-120"/>
@@ -12820,6 +13339,9 @@
                 <a:solidFill>
                   <a:srgbClr val="000000"/>
                 </a:solidFill>
+                <a:highlight>
+                  <a:srgbClr val="FFFF00"/>
+                </a:highlight>
                 <a:latin typeface="Times New Roman" pitchFamily="34" charset="0"/>
                 <a:ea typeface="Times New Roman" pitchFamily="34" charset="-122"/>
                 <a:cs typeface="Times New Roman" pitchFamily="34" charset="-120"/>
@@ -12886,6 +13408,9 @@
                 <a:solidFill>
                   <a:srgbClr val="000000"/>
                 </a:solidFill>
+                <a:highlight>
+                  <a:srgbClr val="FFFF00"/>
+                </a:highlight>
                 <a:latin typeface="Times New Roman" pitchFamily="34" charset="0"/>
                 <a:ea typeface="Times New Roman" pitchFamily="34" charset="-122"/>
                 <a:cs typeface="Times New Roman" pitchFamily="34" charset="-120"/>
@@ -12952,6 +13477,9 @@
                 <a:solidFill>
                   <a:srgbClr val="000000"/>
                 </a:solidFill>
+                <a:highlight>
+                  <a:srgbClr val="FFFF00"/>
+                </a:highlight>
                 <a:latin typeface="Times New Roman" pitchFamily="34" charset="0"/>
                 <a:ea typeface="Times New Roman" pitchFamily="34" charset="-122"/>
                 <a:cs typeface="Times New Roman" pitchFamily="34" charset="-120"/>
@@ -13018,6 +13546,9 @@
                 <a:solidFill>
                   <a:srgbClr val="000000"/>
                 </a:solidFill>
+                <a:highlight>
+                  <a:srgbClr val="FFFF00"/>
+                </a:highlight>
                 <a:latin typeface="Times New Roman" pitchFamily="34" charset="0"/>
                 <a:ea typeface="Times New Roman" pitchFamily="34" charset="-122"/>
                 <a:cs typeface="Times New Roman" pitchFamily="34" charset="-120"/>
@@ -13084,6 +13615,9 @@
                 <a:solidFill>
                   <a:srgbClr val="000000"/>
                 </a:solidFill>
+                <a:highlight>
+                  <a:srgbClr val="FFFF00"/>
+                </a:highlight>
                 <a:latin typeface="Times New Roman" pitchFamily="34" charset="0"/>
                 <a:ea typeface="Times New Roman" pitchFamily="34" charset="-122"/>
                 <a:cs typeface="Times New Roman" pitchFamily="34" charset="-120"/>
@@ -13150,6 +13684,9 @@
                 <a:solidFill>
                   <a:srgbClr val="000000"/>
                 </a:solidFill>
+                <a:highlight>
+                  <a:srgbClr val="FFFF00"/>
+                </a:highlight>
                 <a:latin typeface="Times New Roman" pitchFamily="34" charset="0"/>
                 <a:ea typeface="Times New Roman" pitchFamily="34" charset="-122"/>
                 <a:cs typeface="Times New Roman" pitchFamily="34" charset="-120"/>
@@ -13216,6 +13753,9 @@
                 <a:solidFill>
                   <a:srgbClr val="000000"/>
                 </a:solidFill>
+                <a:highlight>
+                  <a:srgbClr val="FFFF00"/>
+                </a:highlight>
                 <a:latin typeface="Times New Roman" pitchFamily="34" charset="0"/>
                 <a:ea typeface="Times New Roman" pitchFamily="34" charset="-122"/>
                 <a:cs typeface="Times New Roman" pitchFamily="34" charset="-120"/>
@@ -13282,6 +13822,9 @@
                 <a:solidFill>
                   <a:srgbClr val="000000"/>
                 </a:solidFill>
+                <a:highlight>
+                  <a:srgbClr val="FFFF00"/>
+                </a:highlight>
                 <a:latin typeface="Times New Roman" pitchFamily="34" charset="0"/>
                 <a:ea typeface="Times New Roman" pitchFamily="34" charset="-122"/>
                 <a:cs typeface="Times New Roman" pitchFamily="34" charset="-120"/>
@@ -13348,6 +13891,9 @@
                 <a:solidFill>
                   <a:srgbClr val="000000"/>
                 </a:solidFill>
+                <a:highlight>
+                  <a:srgbClr val="FFFF00"/>
+                </a:highlight>
                 <a:latin typeface="Times New Roman" pitchFamily="34" charset="0"/>
                 <a:ea typeface="Times New Roman" pitchFamily="34" charset="-122"/>
                 <a:cs typeface="Times New Roman" pitchFamily="34" charset="-120"/>
@@ -13414,6 +13960,9 @@
                 <a:solidFill>
                   <a:srgbClr val="000000"/>
                 </a:solidFill>
+                <a:highlight>
+                  <a:srgbClr val="FFFF00"/>
+                </a:highlight>
                 <a:latin typeface="Times New Roman" pitchFamily="34" charset="0"/>
                 <a:ea typeface="Times New Roman" pitchFamily="34" charset="-122"/>
                 <a:cs typeface="Times New Roman" pitchFamily="34" charset="-120"/>
@@ -13480,6 +14029,9 @@
                 <a:solidFill>
                   <a:srgbClr val="000000"/>
                 </a:solidFill>
+                <a:highlight>
+                  <a:srgbClr val="FFFF00"/>
+                </a:highlight>
                 <a:latin typeface="Times New Roman" pitchFamily="34" charset="0"/>
                 <a:ea typeface="Times New Roman" pitchFamily="34" charset="-122"/>
                 <a:cs typeface="Times New Roman" pitchFamily="34" charset="-120"/>
@@ -13546,6 +14098,9 @@
                 <a:solidFill>
                   <a:srgbClr val="000000"/>
                 </a:solidFill>
+                <a:highlight>
+                  <a:srgbClr val="FFFF00"/>
+                </a:highlight>
                 <a:latin typeface="Times New Roman" pitchFamily="34" charset="0"/>
                 <a:ea typeface="Times New Roman" pitchFamily="34" charset="-122"/>
                 <a:cs typeface="Times New Roman" pitchFamily="34" charset="-120"/>
@@ -13612,6 +14167,9 @@
                 <a:solidFill>
                   <a:srgbClr val="000000"/>
                 </a:solidFill>
+                <a:highlight>
+                  <a:srgbClr val="FFFF00"/>
+                </a:highlight>
                 <a:latin typeface="Times New Roman" pitchFamily="34" charset="0"/>
                 <a:ea typeface="Times New Roman" pitchFamily="34" charset="-122"/>
                 <a:cs typeface="Times New Roman" pitchFamily="34" charset="-120"/>
@@ -13678,6 +14236,9 @@
                 <a:solidFill>
                   <a:srgbClr val="000000"/>
                 </a:solidFill>
+                <a:highlight>
+                  <a:srgbClr val="FFFF00"/>
+                </a:highlight>
                 <a:latin typeface="Times New Roman" pitchFamily="34" charset="0"/>
                 <a:ea typeface="Times New Roman" pitchFamily="34" charset="-122"/>
                 <a:cs typeface="Times New Roman" pitchFamily="34" charset="-120"/>
@@ -13744,6 +14305,9 @@
                 <a:solidFill>
                   <a:srgbClr val="000000"/>
                 </a:solidFill>
+                <a:highlight>
+                  <a:srgbClr val="FFFF00"/>
+                </a:highlight>
                 <a:latin typeface="Times New Roman" pitchFamily="34" charset="0"/>
                 <a:ea typeface="Times New Roman" pitchFamily="34" charset="-122"/>
                 <a:cs typeface="Times New Roman" pitchFamily="34" charset="-120"/>
@@ -13810,6 +14374,9 @@
                 <a:solidFill>
                   <a:srgbClr val="000000"/>
                 </a:solidFill>
+                <a:highlight>
+                  <a:srgbClr val="FFFF00"/>
+                </a:highlight>
                 <a:latin typeface="Times New Roman" pitchFamily="34" charset="0"/>
                 <a:ea typeface="Times New Roman" pitchFamily="34" charset="-122"/>
                 <a:cs typeface="Times New Roman" pitchFamily="34" charset="-120"/>
@@ -13876,6 +14443,9 @@
                 <a:solidFill>
                   <a:srgbClr val="000000"/>
                 </a:solidFill>
+                <a:highlight>
+                  <a:srgbClr val="FFFF00"/>
+                </a:highlight>
                 <a:latin typeface="Times New Roman" pitchFamily="34" charset="0"/>
                 <a:ea typeface="Times New Roman" pitchFamily="34" charset="-122"/>
                 <a:cs typeface="Times New Roman" pitchFamily="34" charset="-120"/>
@@ -13942,6 +14512,9 @@
                 <a:solidFill>
                   <a:srgbClr val="000000"/>
                 </a:solidFill>
+                <a:highlight>
+                  <a:srgbClr val="FFFF00"/>
+                </a:highlight>
                 <a:latin typeface="Times New Roman" pitchFamily="34" charset="0"/>
                 <a:ea typeface="Times New Roman" pitchFamily="34" charset="-122"/>
                 <a:cs typeface="Times New Roman" pitchFamily="34" charset="-120"/>
@@ -14008,6 +14581,9 @@
                 <a:solidFill>
                   <a:srgbClr val="000000"/>
                 </a:solidFill>
+                <a:highlight>
+                  <a:srgbClr val="FFFF00"/>
+                </a:highlight>
                 <a:latin typeface="Times New Roman" pitchFamily="34" charset="0"/>
                 <a:ea typeface="Times New Roman" pitchFamily="34" charset="-122"/>
                 <a:cs typeface="Times New Roman" pitchFamily="34" charset="-120"/>
@@ -14074,6 +14650,9 @@
                 <a:solidFill>
                   <a:srgbClr val="000000"/>
                 </a:solidFill>
+                <a:highlight>
+                  <a:srgbClr val="FFFF00"/>
+                </a:highlight>
                 <a:latin typeface="Times New Roman" pitchFamily="34" charset="0"/>
                 <a:ea typeface="Times New Roman" pitchFamily="34" charset="-122"/>
                 <a:cs typeface="Times New Roman" pitchFamily="34" charset="-120"/>
@@ -14140,6 +14719,9 @@
                 <a:solidFill>
                   <a:srgbClr val="000000"/>
                 </a:solidFill>
+                <a:highlight>
+                  <a:srgbClr val="FFFF00"/>
+                </a:highlight>
                 <a:latin typeface="Times New Roman" pitchFamily="34" charset="0"/>
                 <a:ea typeface="Times New Roman" pitchFamily="34" charset="-122"/>
                 <a:cs typeface="Times New Roman" pitchFamily="34" charset="-120"/>
@@ -14206,6 +14788,9 @@
                 <a:solidFill>
                   <a:srgbClr val="000000"/>
                 </a:solidFill>
+                <a:highlight>
+                  <a:srgbClr val="FFFF00"/>
+                </a:highlight>
                 <a:latin typeface="Times New Roman" pitchFamily="34" charset="0"/>
                 <a:ea typeface="Times New Roman" pitchFamily="34" charset="-122"/>
                 <a:cs typeface="Times New Roman" pitchFamily="34" charset="-120"/>
@@ -14272,6 +14857,9 @@
                 <a:solidFill>
                   <a:srgbClr val="000000"/>
                 </a:solidFill>
+                <a:highlight>
+                  <a:srgbClr val="FFFF00"/>
+                </a:highlight>
                 <a:latin typeface="Times New Roman" pitchFamily="34" charset="0"/>
                 <a:ea typeface="Times New Roman" pitchFamily="34" charset="-122"/>
                 <a:cs typeface="Times New Roman" pitchFamily="34" charset="-120"/>
@@ -14338,6 +14926,9 @@
                 <a:solidFill>
                   <a:srgbClr val="000000"/>
                 </a:solidFill>
+                <a:highlight>
+                  <a:srgbClr val="FFFF00"/>
+                </a:highlight>
                 <a:latin typeface="Times New Roman" pitchFamily="34" charset="0"/>
                 <a:ea typeface="Times New Roman" pitchFamily="34" charset="-122"/>
                 <a:cs typeface="Times New Roman" pitchFamily="34" charset="-120"/>
@@ -14404,6 +14995,9 @@
                 <a:solidFill>
                   <a:srgbClr val="000000"/>
                 </a:solidFill>
+                <a:highlight>
+                  <a:srgbClr val="FFFF00"/>
+                </a:highlight>
                 <a:latin typeface="Times New Roman" pitchFamily="34" charset="0"/>
                 <a:ea typeface="Times New Roman" pitchFamily="34" charset="-122"/>
                 <a:cs typeface="Times New Roman" pitchFamily="34" charset="-120"/>
@@ -14470,6 +15064,9 @@
                 <a:solidFill>
                   <a:srgbClr val="000000"/>
                 </a:solidFill>
+                <a:highlight>
+                  <a:srgbClr val="FFFF00"/>
+                </a:highlight>
                 <a:latin typeface="Times New Roman" pitchFamily="34" charset="0"/>
                 <a:ea typeface="Times New Roman" pitchFamily="34" charset="-122"/>
                 <a:cs typeface="Times New Roman" pitchFamily="34" charset="-120"/>
@@ -14536,6 +15133,9 @@
                 <a:solidFill>
                   <a:srgbClr val="000000"/>
                 </a:solidFill>
+                <a:highlight>
+                  <a:srgbClr val="FFFF00"/>
+                </a:highlight>
                 <a:latin typeface="Times New Roman" pitchFamily="34" charset="0"/>
                 <a:ea typeface="Times New Roman" pitchFamily="34" charset="-122"/>
                 <a:cs typeface="Times New Roman" pitchFamily="34" charset="-120"/>
@@ -14602,6 +15202,9 @@
                 <a:solidFill>
                   <a:srgbClr val="000000"/>
                 </a:solidFill>
+                <a:highlight>
+                  <a:srgbClr val="FFFF00"/>
+                </a:highlight>
                 <a:latin typeface="Times New Roman" pitchFamily="34" charset="0"/>
                 <a:ea typeface="Times New Roman" pitchFamily="34" charset="-122"/>
                 <a:cs typeface="Times New Roman" pitchFamily="34" charset="-120"/>
@@ -14668,6 +15271,9 @@
                 <a:solidFill>
                   <a:srgbClr val="000000"/>
                 </a:solidFill>
+                <a:highlight>
+                  <a:srgbClr val="FFFF00"/>
+                </a:highlight>
                 <a:latin typeface="Times New Roman" pitchFamily="34" charset="0"/>
                 <a:ea typeface="Times New Roman" pitchFamily="34" charset="-122"/>
                 <a:cs typeface="Times New Roman" pitchFamily="34" charset="-120"/>
@@ -14734,6 +15340,9 @@
                 <a:solidFill>
                   <a:srgbClr val="000000"/>
                 </a:solidFill>
+                <a:highlight>
+                  <a:srgbClr val="FFFF00"/>
+                </a:highlight>
                 <a:latin typeface="Times New Roman" pitchFamily="34" charset="0"/>
                 <a:ea typeface="Times New Roman" pitchFamily="34" charset="-122"/>
                 <a:cs typeface="Times New Roman" pitchFamily="34" charset="-120"/>
@@ -14800,6 +15409,9 @@
                 <a:solidFill>
                   <a:srgbClr val="000000"/>
                 </a:solidFill>
+                <a:highlight>
+                  <a:srgbClr val="FFFF00"/>
+                </a:highlight>
                 <a:latin typeface="Times New Roman" pitchFamily="34" charset="0"/>
                 <a:ea typeface="Times New Roman" pitchFamily="34" charset="-122"/>
                 <a:cs typeface="Times New Roman" pitchFamily="34" charset="-120"/>
@@ -14866,6 +15478,9 @@
                 <a:solidFill>
                   <a:srgbClr val="000000"/>
                 </a:solidFill>
+                <a:highlight>
+                  <a:srgbClr val="FFFF00"/>
+                </a:highlight>
                 <a:latin typeface="Times New Roman" pitchFamily="34" charset="0"/>
                 <a:ea typeface="Times New Roman" pitchFamily="34" charset="-122"/>
                 <a:cs typeface="Times New Roman" pitchFamily="34" charset="-120"/>
@@ -14932,6 +15547,9 @@
                 <a:solidFill>
                   <a:srgbClr val="000000"/>
                 </a:solidFill>
+                <a:highlight>
+                  <a:srgbClr val="FFFF00"/>
+                </a:highlight>
                 <a:latin typeface="Times New Roman" pitchFamily="34" charset="0"/>
                 <a:ea typeface="Times New Roman" pitchFamily="34" charset="-122"/>
                 <a:cs typeface="Times New Roman" pitchFamily="34" charset="-120"/>
@@ -14998,6 +15616,9 @@
                 <a:solidFill>
                   <a:srgbClr val="000000"/>
                 </a:solidFill>
+                <a:highlight>
+                  <a:srgbClr val="FFFF00"/>
+                </a:highlight>
                 <a:latin typeface="Times New Roman" pitchFamily="34" charset="0"/>
                 <a:ea typeface="Times New Roman" pitchFamily="34" charset="-122"/>
                 <a:cs typeface="Times New Roman" pitchFamily="34" charset="-120"/>
@@ -15064,6 +15685,9 @@
                 <a:solidFill>
                   <a:srgbClr val="000000"/>
                 </a:solidFill>
+                <a:highlight>
+                  <a:srgbClr val="FFFF00"/>
+                </a:highlight>
                 <a:latin typeface="Times New Roman" pitchFamily="34" charset="0"/>
                 <a:ea typeface="Times New Roman" pitchFamily="34" charset="-122"/>
                 <a:cs typeface="Times New Roman" pitchFamily="34" charset="-120"/>
@@ -15130,6 +15754,9 @@
                 <a:solidFill>
                   <a:srgbClr val="000000"/>
                 </a:solidFill>
+                <a:highlight>
+                  <a:srgbClr val="FFFF00"/>
+                </a:highlight>
                 <a:latin typeface="Times New Roman" pitchFamily="34" charset="0"/>
                 <a:ea typeface="Times New Roman" pitchFamily="34" charset="-122"/>
                 <a:cs typeface="Times New Roman" pitchFamily="34" charset="-120"/>
@@ -15196,6 +15823,9 @@
                 <a:solidFill>
                   <a:srgbClr val="000000"/>
                 </a:solidFill>
+                <a:highlight>
+                  <a:srgbClr val="FFFF00"/>
+                </a:highlight>
                 <a:latin typeface="Times New Roman" pitchFamily="34" charset="0"/>
                 <a:ea typeface="Times New Roman" pitchFamily="34" charset="-122"/>
                 <a:cs typeface="Times New Roman" pitchFamily="34" charset="-120"/>
@@ -15262,6 +15892,9 @@
                 <a:solidFill>
                   <a:srgbClr val="000000"/>
                 </a:solidFill>
+                <a:highlight>
+                  <a:srgbClr val="FFFF00"/>
+                </a:highlight>
                 <a:latin typeface="Times New Roman" pitchFamily="34" charset="0"/>
                 <a:ea typeface="Times New Roman" pitchFamily="34" charset="-122"/>
                 <a:cs typeface="Times New Roman" pitchFamily="34" charset="-120"/>
@@ -15328,6 +15961,9 @@
                 <a:solidFill>
                   <a:srgbClr val="000000"/>
                 </a:solidFill>
+                <a:highlight>
+                  <a:srgbClr val="FFFF00"/>
+                </a:highlight>
                 <a:latin typeface="Times New Roman" pitchFamily="34" charset="0"/>
                 <a:ea typeface="Times New Roman" pitchFamily="34" charset="-122"/>
                 <a:cs typeface="Times New Roman" pitchFamily="34" charset="-120"/>
@@ -15394,6 +16030,9 @@
                 <a:solidFill>
                   <a:srgbClr val="000000"/>
                 </a:solidFill>
+                <a:highlight>
+                  <a:srgbClr val="FFFF00"/>
+                </a:highlight>
                 <a:latin typeface="Times New Roman" pitchFamily="34" charset="0"/>
                 <a:ea typeface="Times New Roman" pitchFamily="34" charset="-122"/>
                 <a:cs typeface="Times New Roman" pitchFamily="34" charset="-120"/>
@@ -15460,6 +16099,9 @@
                 <a:solidFill>
                   <a:srgbClr val="000000"/>
                 </a:solidFill>
+                <a:highlight>
+                  <a:srgbClr val="FFFF00"/>
+                </a:highlight>
                 <a:latin typeface="Times New Roman" pitchFamily="34" charset="0"/>
                 <a:ea typeface="Times New Roman" pitchFamily="34" charset="-122"/>
                 <a:cs typeface="Times New Roman" pitchFamily="34" charset="-120"/>
@@ -15526,6 +16168,9 @@
                 <a:solidFill>
                   <a:srgbClr val="000000"/>
                 </a:solidFill>
+                <a:highlight>
+                  <a:srgbClr val="FFFF00"/>
+                </a:highlight>
                 <a:latin typeface="Times New Roman" pitchFamily="34" charset="0"/>
                 <a:ea typeface="Times New Roman" pitchFamily="34" charset="-122"/>
                 <a:cs typeface="Times New Roman" pitchFamily="34" charset="-120"/>
@@ -15592,6 +16237,9 @@
                 <a:solidFill>
                   <a:srgbClr val="000000"/>
                 </a:solidFill>
+                <a:highlight>
+                  <a:srgbClr val="FFFF00"/>
+                </a:highlight>
                 <a:latin typeface="Times New Roman" pitchFamily="34" charset="0"/>
                 <a:ea typeface="Times New Roman" pitchFamily="34" charset="-122"/>
                 <a:cs typeface="Times New Roman" pitchFamily="34" charset="-120"/>
@@ -15658,6 +16306,9 @@
                 <a:solidFill>
                   <a:srgbClr val="000000"/>
                 </a:solidFill>
+                <a:highlight>
+                  <a:srgbClr val="FFFF00"/>
+                </a:highlight>
                 <a:latin typeface="Times New Roman" pitchFamily="34" charset="0"/>
                 <a:ea typeface="Times New Roman" pitchFamily="34" charset="-122"/>
                 <a:cs typeface="Times New Roman" pitchFamily="34" charset="-120"/>
@@ -15724,6 +16375,9 @@
                 <a:solidFill>
                   <a:srgbClr val="000000"/>
                 </a:solidFill>
+                <a:highlight>
+                  <a:srgbClr val="FFFF00"/>
+                </a:highlight>
                 <a:latin typeface="Times New Roman" pitchFamily="34" charset="0"/>
                 <a:ea typeface="Times New Roman" pitchFamily="34" charset="-122"/>
                 <a:cs typeface="Times New Roman" pitchFamily="34" charset="-120"/>
@@ -15790,6 +16444,9 @@
                 <a:solidFill>
                   <a:srgbClr val="000000"/>
                 </a:solidFill>
+                <a:highlight>
+                  <a:srgbClr val="FFFF00"/>
+                </a:highlight>
                 <a:latin typeface="Times New Roman" pitchFamily="34" charset="0"/>
                 <a:ea typeface="Times New Roman" pitchFamily="34" charset="-122"/>
                 <a:cs typeface="Times New Roman" pitchFamily="34" charset="-120"/>
@@ -15856,6 +16513,9 @@
                 <a:solidFill>
                   <a:srgbClr val="000000"/>
                 </a:solidFill>
+                <a:highlight>
+                  <a:srgbClr val="FFFF00"/>
+                </a:highlight>
                 <a:latin typeface="Times New Roman" pitchFamily="34" charset="0"/>
                 <a:ea typeface="Times New Roman" pitchFamily="34" charset="-122"/>
                 <a:cs typeface="Times New Roman" pitchFamily="34" charset="-120"/>

--- a/scripts/office-metrics/font-grid-diagnostic.pptx
+++ b/scripts/office-metrics/font-grid-diagnostic.pptx
@@ -1176,14 +1176,14 @@
       </p:sp>
       <p:sp>
         <p:nvSpPr>
-          <p:cNvPr id="3" name="Roboto_6pt_sp1__c7.20_t7.02"/>
+          <p:cNvPr id="3" name="Roboto_6pt_sp1__c7.20_t7.17"/>
           <p:cNvSpPr/>
           <p:nvPr/>
         </p:nvSpPr>
         <p:spPr>
           <a:xfrm>
             <a:off x="365760" y="721360"/>
-            <a:ext cx="110490" cy="91440"/>
+            <a:ext cx="110490" cy="91059"/>
           </a:xfrm>
           <a:prstGeom prst="rect">
             <a:avLst/>
@@ -1225,34 +1225,14 @@
       </p:sp>
       <p:sp>
         <p:nvSpPr>
-          <p:cNvPr id="4" name="Roboto_6pt_sp1__c7.20_t7.02__textBoxMarker"/>
-          <p:cNvSpPr/>
-          <p:nvPr/>
-        </p:nvSpPr>
-        <p:spPr>
-          <a:xfrm>
-            <a:off x="365760" y="804164"/>
-            <a:ext cx="110490" cy="12700"/>
-          </a:xfrm>
-          <a:prstGeom prst="rect">
-            <a:avLst/>
-          </a:prstGeom>
-          <a:solidFill>
-            <a:srgbClr val="0000FF"/>
-          </a:solidFill>
-          <a:ln/>
-        </p:spPr>
-      </p:sp>
-      <p:sp>
-        <p:nvSpPr>
-          <p:cNvPr id="5" name="Roboto_6pt_sp1_25__c9.00_t8.37"/>
+          <p:cNvPr id="4" name="Roboto_6pt_sp1_25__c9.00_t8.37"/>
           <p:cNvSpPr/>
           <p:nvPr/>
         </p:nvSpPr>
         <p:spPr>
           <a:xfrm>
             <a:off x="2358263" y="721360"/>
-            <a:ext cx="110490" cy="114300"/>
+            <a:ext cx="110490" cy="106299"/>
           </a:xfrm>
           <a:prstGeom prst="rect">
             <a:avLst/>
@@ -1294,34 +1274,14 @@
       </p:sp>
       <p:sp>
         <p:nvSpPr>
-          <p:cNvPr id="6" name="Roboto_6pt_sp1_25__c9.00_t8.37__textBoxMarker"/>
-          <p:cNvSpPr/>
-          <p:nvPr/>
-        </p:nvSpPr>
-        <p:spPr>
-          <a:xfrm>
-            <a:off x="2358263" y="821309"/>
-            <a:ext cx="110490" cy="12700"/>
-          </a:xfrm>
-          <a:prstGeom prst="rect">
-            <a:avLst/>
-          </a:prstGeom>
-          <a:solidFill>
-            <a:srgbClr val="0000FF"/>
-          </a:solidFill>
-          <a:ln/>
-        </p:spPr>
-      </p:sp>
-      <p:sp>
-        <p:nvSpPr>
-          <p:cNvPr id="7" name="Roboto_6pt_sp1_5__c10.80_t9.72"/>
+          <p:cNvPr id="5" name="Roboto_6pt_sp1_5__c10.80_t9.72"/>
           <p:cNvSpPr/>
           <p:nvPr/>
         </p:nvSpPr>
         <p:spPr>
           <a:xfrm>
             <a:off x="4350766" y="721360"/>
-            <a:ext cx="110490" cy="137160"/>
+            <a:ext cx="110490" cy="123444"/>
           </a:xfrm>
           <a:prstGeom prst="rect">
             <a:avLst/>
@@ -1363,34 +1323,14 @@
       </p:sp>
       <p:sp>
         <p:nvSpPr>
-          <p:cNvPr id="8" name="Roboto_6pt_sp1_5__c10.80_t9.72__textBoxMarker"/>
-          <p:cNvSpPr/>
-          <p:nvPr/>
-        </p:nvSpPr>
-        <p:spPr>
-          <a:xfrm>
-            <a:off x="4350766" y="838454"/>
-            <a:ext cx="110490" cy="12700"/>
-          </a:xfrm>
-          <a:prstGeom prst="rect">
-            <a:avLst/>
-          </a:prstGeom>
-          <a:solidFill>
-            <a:srgbClr val="0000FF"/>
-          </a:solidFill>
-          <a:ln/>
-        </p:spPr>
-      </p:sp>
-      <p:sp>
-        <p:nvSpPr>
-          <p:cNvPr id="9" name="Roboto_6pt_sp1_75__c12.60_t11.07"/>
+          <p:cNvPr id="6" name="Roboto_6pt_sp1_75__c12.60_t11.07"/>
           <p:cNvSpPr/>
           <p:nvPr/>
         </p:nvSpPr>
         <p:spPr>
           <a:xfrm>
             <a:off x="6343269" y="721360"/>
-            <a:ext cx="110490" cy="160020"/>
+            <a:ext cx="110490" cy="140589"/>
           </a:xfrm>
           <a:prstGeom prst="rect">
             <a:avLst/>
@@ -1432,34 +1372,14 @@
       </p:sp>
       <p:sp>
         <p:nvSpPr>
-          <p:cNvPr id="10" name="Roboto_6pt_sp1_75__c12.60_t11.07__textBoxMarker"/>
-          <p:cNvSpPr/>
-          <p:nvPr/>
-        </p:nvSpPr>
-        <p:spPr>
-          <a:xfrm>
-            <a:off x="6343269" y="855599"/>
-            <a:ext cx="110490" cy="12700"/>
-          </a:xfrm>
-          <a:prstGeom prst="rect">
-            <a:avLst/>
-          </a:prstGeom>
-          <a:solidFill>
-            <a:srgbClr val="0000FF"/>
-          </a:solidFill>
-          <a:ln/>
-        </p:spPr>
-      </p:sp>
-      <p:sp>
-        <p:nvSpPr>
-          <p:cNvPr id="11" name="Roboto_6pt_sp2__c14.40_t12.42"/>
+          <p:cNvPr id="7" name="Roboto_6pt_sp2__c14.40_t12.42"/>
           <p:cNvSpPr/>
           <p:nvPr/>
         </p:nvSpPr>
         <p:spPr>
           <a:xfrm>
             <a:off x="8335772" y="721360"/>
-            <a:ext cx="110490" cy="182880"/>
+            <a:ext cx="110490" cy="157734"/>
           </a:xfrm>
           <a:prstGeom prst="rect">
             <a:avLst/>
@@ -1501,34 +1421,14 @@
       </p:sp>
       <p:sp>
         <p:nvSpPr>
-          <p:cNvPr id="12" name="Roboto_6pt_sp2__c14.40_t12.42__textBoxMarker"/>
-          <p:cNvSpPr/>
-          <p:nvPr/>
-        </p:nvSpPr>
-        <p:spPr>
-          <a:xfrm>
-            <a:off x="8335772" y="872744"/>
-            <a:ext cx="110490" cy="12700"/>
-          </a:xfrm>
-          <a:prstGeom prst="rect">
-            <a:avLst/>
-          </a:prstGeom>
-          <a:solidFill>
-            <a:srgbClr val="0000FF"/>
-          </a:solidFill>
-          <a:ln/>
-        </p:spPr>
-      </p:sp>
-      <p:sp>
-        <p:nvSpPr>
-          <p:cNvPr id="13" name="Roboto_8pt_sp1__c9.60_t9.36"/>
-          <p:cNvSpPr/>
-          <p:nvPr/>
-        </p:nvSpPr>
-        <p:spPr>
-          <a:xfrm>
-            <a:off x="365760" y="1005840"/>
-            <a:ext cx="147447" cy="121920"/>
+          <p:cNvPr id="8" name="Roboto_8pt_sp1__c9.60_t9.56"/>
+          <p:cNvSpPr/>
+          <p:nvPr/>
+        </p:nvSpPr>
+        <p:spPr>
+          <a:xfrm>
+            <a:off x="365760" y="980694"/>
+            <a:ext cx="147447" cy="121412"/>
           </a:xfrm>
           <a:prstGeom prst="rect">
             <a:avLst/>
@@ -1570,34 +1470,14 @@
       </p:sp>
       <p:sp>
         <p:nvSpPr>
-          <p:cNvPr id="14" name="Roboto_8pt_sp1__c9.60_t9.36__textBoxMarker"/>
-          <p:cNvSpPr/>
-          <p:nvPr/>
-        </p:nvSpPr>
-        <p:spPr>
-          <a:xfrm>
-            <a:off x="365760" y="1118362"/>
-            <a:ext cx="147447" cy="12700"/>
-          </a:xfrm>
-          <a:prstGeom prst="rect">
-            <a:avLst/>
-          </a:prstGeom>
-          <a:solidFill>
-            <a:srgbClr val="0000FF"/>
-          </a:solidFill>
-          <a:ln/>
-        </p:spPr>
-      </p:sp>
-      <p:sp>
-        <p:nvSpPr>
-          <p:cNvPr id="15" name="Roboto_8pt_sp1_25__c12.00_t11.16"/>
-          <p:cNvSpPr/>
-          <p:nvPr/>
-        </p:nvSpPr>
-        <p:spPr>
-          <a:xfrm>
-            <a:off x="2358263" y="1005840"/>
-            <a:ext cx="147447" cy="152400"/>
+          <p:cNvPr id="9" name="Roboto_8pt_sp1_25__c12.00_t11.16"/>
+          <p:cNvSpPr/>
+          <p:nvPr/>
+        </p:nvSpPr>
+        <p:spPr>
+          <a:xfrm>
+            <a:off x="2358263" y="980694"/>
+            <a:ext cx="147447" cy="141732"/>
           </a:xfrm>
           <a:prstGeom prst="rect">
             <a:avLst/>
@@ -1639,34 +1519,14 @@
       </p:sp>
       <p:sp>
         <p:nvSpPr>
-          <p:cNvPr id="16" name="Roboto_8pt_sp1_25__c12.00_t11.16__textBoxMarker"/>
-          <p:cNvSpPr/>
-          <p:nvPr/>
-        </p:nvSpPr>
-        <p:spPr>
-          <a:xfrm>
-            <a:off x="2358263" y="1141222"/>
-            <a:ext cx="147447" cy="12700"/>
-          </a:xfrm>
-          <a:prstGeom prst="rect">
-            <a:avLst/>
-          </a:prstGeom>
-          <a:solidFill>
-            <a:srgbClr val="0000FF"/>
-          </a:solidFill>
-          <a:ln/>
-        </p:spPr>
-      </p:sp>
-      <p:sp>
-        <p:nvSpPr>
-          <p:cNvPr id="17" name="Roboto_8pt_sp1_5__c14.40_t12.96"/>
-          <p:cNvSpPr/>
-          <p:nvPr/>
-        </p:nvSpPr>
-        <p:spPr>
-          <a:xfrm>
-            <a:off x="4350766" y="1005840"/>
-            <a:ext cx="147447" cy="182880"/>
+          <p:cNvPr id="10" name="Roboto_8pt_sp1_5__c14.40_t12.96"/>
+          <p:cNvSpPr/>
+          <p:nvPr/>
+        </p:nvSpPr>
+        <p:spPr>
+          <a:xfrm>
+            <a:off x="4350766" y="980694"/>
+            <a:ext cx="147447" cy="164592"/>
           </a:xfrm>
           <a:prstGeom prst="rect">
             <a:avLst/>
@@ -1708,34 +1568,14 @@
       </p:sp>
       <p:sp>
         <p:nvSpPr>
-          <p:cNvPr id="18" name="Roboto_8pt_sp1_5__c14.40_t12.96__textBoxMarker"/>
-          <p:cNvSpPr/>
-          <p:nvPr/>
-        </p:nvSpPr>
-        <p:spPr>
-          <a:xfrm>
-            <a:off x="4350766" y="1164082"/>
-            <a:ext cx="147447" cy="12700"/>
-          </a:xfrm>
-          <a:prstGeom prst="rect">
-            <a:avLst/>
-          </a:prstGeom>
-          <a:solidFill>
-            <a:srgbClr val="0000FF"/>
-          </a:solidFill>
-          <a:ln/>
-        </p:spPr>
-      </p:sp>
-      <p:sp>
-        <p:nvSpPr>
-          <p:cNvPr id="19" name="Roboto_8pt_sp1_75__c16.80_t14.76"/>
-          <p:cNvSpPr/>
-          <p:nvPr/>
-        </p:nvSpPr>
-        <p:spPr>
-          <a:xfrm>
-            <a:off x="6343269" y="1005840"/>
-            <a:ext cx="147447" cy="213360"/>
+          <p:cNvPr id="11" name="Roboto_8pt_sp1_75__c16.80_t14.76"/>
+          <p:cNvSpPr/>
+          <p:nvPr/>
+        </p:nvSpPr>
+        <p:spPr>
+          <a:xfrm>
+            <a:off x="6343269" y="980694"/>
+            <a:ext cx="147447" cy="187452"/>
           </a:xfrm>
           <a:prstGeom prst="rect">
             <a:avLst/>
@@ -1777,34 +1617,14 @@
       </p:sp>
       <p:sp>
         <p:nvSpPr>
-          <p:cNvPr id="20" name="Roboto_8pt_sp1_75__c16.80_t14.76__textBoxMarker"/>
-          <p:cNvSpPr/>
-          <p:nvPr/>
-        </p:nvSpPr>
-        <p:spPr>
-          <a:xfrm>
-            <a:off x="6343269" y="1186942"/>
-            <a:ext cx="147447" cy="12700"/>
-          </a:xfrm>
-          <a:prstGeom prst="rect">
-            <a:avLst/>
-          </a:prstGeom>
-          <a:solidFill>
-            <a:srgbClr val="0000FF"/>
-          </a:solidFill>
-          <a:ln/>
-        </p:spPr>
-      </p:sp>
-      <p:sp>
-        <p:nvSpPr>
-          <p:cNvPr id="21" name="Roboto_8pt_sp2__c19.20_t16.56"/>
-          <p:cNvSpPr/>
-          <p:nvPr/>
-        </p:nvSpPr>
-        <p:spPr>
-          <a:xfrm>
-            <a:off x="8335772" y="1005840"/>
-            <a:ext cx="147447" cy="243840"/>
+          <p:cNvPr id="12" name="Roboto_8pt_sp2__c19.20_t16.56"/>
+          <p:cNvSpPr/>
+          <p:nvPr/>
+        </p:nvSpPr>
+        <p:spPr>
+          <a:xfrm>
+            <a:off x="8335772" y="980694"/>
+            <a:ext cx="147447" cy="210312"/>
           </a:xfrm>
           <a:prstGeom prst="rect">
             <a:avLst/>
@@ -1846,34 +1666,14 @@
       </p:sp>
       <p:sp>
         <p:nvSpPr>
-          <p:cNvPr id="22" name="Roboto_8pt_sp2__c19.20_t16.56__textBoxMarker"/>
-          <p:cNvSpPr/>
-          <p:nvPr/>
-        </p:nvSpPr>
-        <p:spPr>
-          <a:xfrm>
-            <a:off x="8335772" y="1209802"/>
-            <a:ext cx="147447" cy="12700"/>
-          </a:xfrm>
-          <a:prstGeom prst="rect">
-            <a:avLst/>
-          </a:prstGeom>
-          <a:solidFill>
-            <a:srgbClr val="0000FF"/>
-          </a:solidFill>
-          <a:ln/>
-        </p:spPr>
-      </p:sp>
-      <p:sp>
-        <p:nvSpPr>
-          <p:cNvPr id="23" name="Roboto_10pt_sp1__c12.00_t11.70"/>
-          <p:cNvSpPr/>
-          <p:nvPr/>
-        </p:nvSpPr>
-        <p:spPr>
-          <a:xfrm>
-            <a:off x="365760" y="1351280"/>
-            <a:ext cx="255651" cy="152400"/>
+          <p:cNvPr id="13" name="Roboto_10pt_sp1__c12.00_t11.95"/>
+          <p:cNvSpPr/>
+          <p:nvPr/>
+        </p:nvSpPr>
+        <p:spPr>
+          <a:xfrm>
+            <a:off x="365760" y="1292606"/>
+            <a:ext cx="255651" cy="151765"/>
           </a:xfrm>
           <a:prstGeom prst="rect">
             <a:avLst/>
@@ -1915,34 +1715,14 @@
       </p:sp>
       <p:sp>
         <p:nvSpPr>
-          <p:cNvPr id="24" name="Roboto_10pt_sp1__c12.00_t11.70__textBoxMarker"/>
-          <p:cNvSpPr/>
-          <p:nvPr/>
-        </p:nvSpPr>
-        <p:spPr>
-          <a:xfrm>
-            <a:off x="365760" y="1493520"/>
-            <a:ext cx="255651" cy="12700"/>
-          </a:xfrm>
-          <a:prstGeom prst="rect">
-            <a:avLst/>
-          </a:prstGeom>
-          <a:solidFill>
-            <a:srgbClr val="0000FF"/>
-          </a:solidFill>
-          <a:ln/>
-        </p:spPr>
-      </p:sp>
-      <p:sp>
-        <p:nvSpPr>
-          <p:cNvPr id="25" name="Roboto_10pt_sp1_25__c15.00_t13.95"/>
-          <p:cNvSpPr/>
-          <p:nvPr/>
-        </p:nvSpPr>
-        <p:spPr>
-          <a:xfrm>
-            <a:off x="2358263" y="1351280"/>
-            <a:ext cx="255651" cy="190500"/>
+          <p:cNvPr id="14" name="Roboto_10pt_sp1_25__c15.00_t13.95"/>
+          <p:cNvSpPr/>
+          <p:nvPr/>
+        </p:nvSpPr>
+        <p:spPr>
+          <a:xfrm>
+            <a:off x="2358263" y="1292606"/>
+            <a:ext cx="255651" cy="177165"/>
           </a:xfrm>
           <a:prstGeom prst="rect">
             <a:avLst/>
@@ -1984,34 +1764,14 @@
       </p:sp>
       <p:sp>
         <p:nvSpPr>
-          <p:cNvPr id="26" name="Roboto_10pt_sp1_25__c15.00_t13.95__textBoxMarker"/>
-          <p:cNvSpPr/>
-          <p:nvPr/>
-        </p:nvSpPr>
-        <p:spPr>
-          <a:xfrm>
-            <a:off x="2358263" y="1522095"/>
-            <a:ext cx="255651" cy="12700"/>
-          </a:xfrm>
-          <a:prstGeom prst="rect">
-            <a:avLst/>
-          </a:prstGeom>
-          <a:solidFill>
-            <a:srgbClr val="0000FF"/>
-          </a:solidFill>
-          <a:ln/>
-        </p:spPr>
-      </p:sp>
-      <p:sp>
-        <p:nvSpPr>
-          <p:cNvPr id="27" name="Roboto_10pt_sp1_5__c18.00_t16.20"/>
-          <p:cNvSpPr/>
-          <p:nvPr/>
-        </p:nvSpPr>
-        <p:spPr>
-          <a:xfrm>
-            <a:off x="4350766" y="1351280"/>
-            <a:ext cx="255651" cy="228600"/>
+          <p:cNvPr id="15" name="Roboto_10pt_sp1_5__c18.00_t16.20"/>
+          <p:cNvSpPr/>
+          <p:nvPr/>
+        </p:nvSpPr>
+        <p:spPr>
+          <a:xfrm>
+            <a:off x="4350766" y="1292606"/>
+            <a:ext cx="255651" cy="205740"/>
           </a:xfrm>
           <a:prstGeom prst="rect">
             <a:avLst/>
@@ -2053,34 +1813,14 @@
       </p:sp>
       <p:sp>
         <p:nvSpPr>
-          <p:cNvPr id="28" name="Roboto_10pt_sp1_5__c18.00_t16.20__textBoxMarker"/>
-          <p:cNvSpPr/>
-          <p:nvPr/>
-        </p:nvSpPr>
-        <p:spPr>
-          <a:xfrm>
-            <a:off x="4350766" y="1550670"/>
-            <a:ext cx="255651" cy="12700"/>
-          </a:xfrm>
-          <a:prstGeom prst="rect">
-            <a:avLst/>
-          </a:prstGeom>
-          <a:solidFill>
-            <a:srgbClr val="0000FF"/>
-          </a:solidFill>
-          <a:ln/>
-        </p:spPr>
-      </p:sp>
-      <p:sp>
-        <p:nvSpPr>
-          <p:cNvPr id="29" name="Roboto_10pt_sp1_75__c21.00_t18.45"/>
-          <p:cNvSpPr/>
-          <p:nvPr/>
-        </p:nvSpPr>
-        <p:spPr>
-          <a:xfrm>
-            <a:off x="6343269" y="1351280"/>
-            <a:ext cx="255651" cy="266700"/>
+          <p:cNvPr id="16" name="Roboto_10pt_sp1_75__c21.00_t18.45"/>
+          <p:cNvSpPr/>
+          <p:nvPr/>
+        </p:nvSpPr>
+        <p:spPr>
+          <a:xfrm>
+            <a:off x="6343269" y="1292606"/>
+            <a:ext cx="255651" cy="234315"/>
           </a:xfrm>
           <a:prstGeom prst="rect">
             <a:avLst/>
@@ -2122,34 +1862,14 @@
       </p:sp>
       <p:sp>
         <p:nvSpPr>
-          <p:cNvPr id="30" name="Roboto_10pt_sp1_75__c21.00_t18.45__textBoxMarker"/>
-          <p:cNvSpPr/>
-          <p:nvPr/>
-        </p:nvSpPr>
-        <p:spPr>
-          <a:xfrm>
-            <a:off x="6343269" y="1579245"/>
-            <a:ext cx="255651" cy="12700"/>
-          </a:xfrm>
-          <a:prstGeom prst="rect">
-            <a:avLst/>
-          </a:prstGeom>
-          <a:solidFill>
-            <a:srgbClr val="0000FF"/>
-          </a:solidFill>
-          <a:ln/>
-        </p:spPr>
-      </p:sp>
-      <p:sp>
-        <p:nvSpPr>
-          <p:cNvPr id="31" name="Roboto_10pt_sp2__c24.00_t20.70"/>
-          <p:cNvSpPr/>
-          <p:nvPr/>
-        </p:nvSpPr>
-        <p:spPr>
-          <a:xfrm>
-            <a:off x="8335772" y="1351280"/>
-            <a:ext cx="255651" cy="304800"/>
+          <p:cNvPr id="17" name="Roboto_10pt_sp2__c24.00_t20.70"/>
+          <p:cNvSpPr/>
+          <p:nvPr/>
+        </p:nvSpPr>
+        <p:spPr>
+          <a:xfrm>
+            <a:off x="8335772" y="1292606"/>
+            <a:ext cx="255651" cy="262890"/>
           </a:xfrm>
           <a:prstGeom prst="rect">
             <a:avLst/>
@@ -2191,34 +1911,14 @@
       </p:sp>
       <p:sp>
         <p:nvSpPr>
-          <p:cNvPr id="32" name="Roboto_10pt_sp2__c24.00_t20.70__textBoxMarker"/>
-          <p:cNvSpPr/>
-          <p:nvPr/>
-        </p:nvSpPr>
-        <p:spPr>
-          <a:xfrm>
-            <a:off x="8335772" y="1607820"/>
-            <a:ext cx="255651" cy="12700"/>
-          </a:xfrm>
-          <a:prstGeom prst="rect">
-            <a:avLst/>
-          </a:prstGeom>
-          <a:solidFill>
-            <a:srgbClr val="0000FF"/>
-          </a:solidFill>
-          <a:ln/>
-        </p:spPr>
-      </p:sp>
-      <p:sp>
-        <p:nvSpPr>
-          <p:cNvPr id="33" name="Roboto_12pt_sp1__c14.40_t14.03"/>
-          <p:cNvSpPr/>
-          <p:nvPr/>
-        </p:nvSpPr>
-        <p:spPr>
-          <a:xfrm>
-            <a:off x="365760" y="1757680"/>
-            <a:ext cx="306705" cy="182880"/>
+          <p:cNvPr id="18" name="Roboto_12pt_sp1__c14.40_t14.33"/>
+          <p:cNvSpPr/>
+          <p:nvPr/>
+        </p:nvSpPr>
+        <p:spPr>
+          <a:xfrm>
+            <a:off x="365760" y="1657096"/>
+            <a:ext cx="306705" cy="181991"/>
           </a:xfrm>
           <a:prstGeom prst="rect">
             <a:avLst/>
@@ -2260,34 +1960,14 @@
       </p:sp>
       <p:sp>
         <p:nvSpPr>
-          <p:cNvPr id="34" name="Roboto_12pt_sp1__c14.40_t14.03__textBoxMarker"/>
-          <p:cNvSpPr/>
-          <p:nvPr/>
-        </p:nvSpPr>
-        <p:spPr>
-          <a:xfrm>
-            <a:off x="365760" y="1929511"/>
-            <a:ext cx="306705" cy="12700"/>
-          </a:xfrm>
-          <a:prstGeom prst="rect">
-            <a:avLst/>
-          </a:prstGeom>
-          <a:solidFill>
-            <a:srgbClr val="0000FF"/>
-          </a:solidFill>
-          <a:ln/>
-        </p:spPr>
-      </p:sp>
-      <p:sp>
-        <p:nvSpPr>
-          <p:cNvPr id="35" name="Roboto_12pt_sp1_25__c18.00_t16.73"/>
-          <p:cNvSpPr/>
-          <p:nvPr/>
-        </p:nvSpPr>
-        <p:spPr>
-          <a:xfrm>
-            <a:off x="2358263" y="1757680"/>
-            <a:ext cx="306705" cy="228600"/>
+          <p:cNvPr id="19" name="Roboto_12pt_sp1_25__c18.00_t16.73"/>
+          <p:cNvSpPr/>
+          <p:nvPr/>
+        </p:nvSpPr>
+        <p:spPr>
+          <a:xfrm>
+            <a:off x="2358263" y="1657096"/>
+            <a:ext cx="306705" cy="212471"/>
           </a:xfrm>
           <a:prstGeom prst="rect">
             <a:avLst/>
@@ -2329,34 +2009,14 @@
       </p:sp>
       <p:sp>
         <p:nvSpPr>
-          <p:cNvPr id="36" name="Roboto_12pt_sp1_25__c18.00_t16.73__textBoxMarker"/>
-          <p:cNvSpPr/>
-          <p:nvPr/>
-        </p:nvSpPr>
-        <p:spPr>
-          <a:xfrm>
-            <a:off x="2358263" y="1963801"/>
-            <a:ext cx="306705" cy="12700"/>
-          </a:xfrm>
-          <a:prstGeom prst="rect">
-            <a:avLst/>
-          </a:prstGeom>
-          <a:solidFill>
-            <a:srgbClr val="0000FF"/>
-          </a:solidFill>
-          <a:ln/>
-        </p:spPr>
-      </p:sp>
-      <p:sp>
-        <p:nvSpPr>
-          <p:cNvPr id="37" name="Roboto_12pt_sp1_5__c21.60_t19.43"/>
-          <p:cNvSpPr/>
-          <p:nvPr/>
-        </p:nvSpPr>
-        <p:spPr>
-          <a:xfrm>
-            <a:off x="4350766" y="1757680"/>
-            <a:ext cx="306705" cy="274320"/>
+          <p:cNvPr id="20" name="Roboto_12pt_sp1_5__c21.60_t19.43"/>
+          <p:cNvSpPr/>
+          <p:nvPr/>
+        </p:nvSpPr>
+        <p:spPr>
+          <a:xfrm>
+            <a:off x="4350766" y="1657096"/>
+            <a:ext cx="306705" cy="246761"/>
           </a:xfrm>
           <a:prstGeom prst="rect">
             <a:avLst/>
@@ -2398,34 +2058,14 @@
       </p:sp>
       <p:sp>
         <p:nvSpPr>
-          <p:cNvPr id="38" name="Roboto_12pt_sp1_5__c21.60_t19.43__textBoxMarker"/>
-          <p:cNvSpPr/>
-          <p:nvPr/>
-        </p:nvSpPr>
-        <p:spPr>
-          <a:xfrm>
-            <a:off x="4350766" y="1998091"/>
-            <a:ext cx="306705" cy="12700"/>
-          </a:xfrm>
-          <a:prstGeom prst="rect">
-            <a:avLst/>
-          </a:prstGeom>
-          <a:solidFill>
-            <a:srgbClr val="0000FF"/>
-          </a:solidFill>
-          <a:ln/>
-        </p:spPr>
-      </p:sp>
-      <p:sp>
-        <p:nvSpPr>
-          <p:cNvPr id="39" name="Roboto_12pt_sp1_75__c25.20_t22.13"/>
-          <p:cNvSpPr/>
-          <p:nvPr/>
-        </p:nvSpPr>
-        <p:spPr>
-          <a:xfrm>
-            <a:off x="6343269" y="1757680"/>
-            <a:ext cx="306705" cy="320040"/>
+          <p:cNvPr id="21" name="Roboto_12pt_sp1_75__c25.20_t22.13"/>
+          <p:cNvSpPr/>
+          <p:nvPr/>
+        </p:nvSpPr>
+        <p:spPr>
+          <a:xfrm>
+            <a:off x="6343269" y="1657096"/>
+            <a:ext cx="306705" cy="281051"/>
           </a:xfrm>
           <a:prstGeom prst="rect">
             <a:avLst/>
@@ -2467,34 +2107,14 @@
       </p:sp>
       <p:sp>
         <p:nvSpPr>
-          <p:cNvPr id="40" name="Roboto_12pt_sp1_75__c25.20_t22.13__textBoxMarker"/>
-          <p:cNvSpPr/>
-          <p:nvPr/>
-        </p:nvSpPr>
-        <p:spPr>
-          <a:xfrm>
-            <a:off x="6343269" y="2032381"/>
-            <a:ext cx="306705" cy="12700"/>
-          </a:xfrm>
-          <a:prstGeom prst="rect">
-            <a:avLst/>
-          </a:prstGeom>
-          <a:solidFill>
-            <a:srgbClr val="0000FF"/>
-          </a:solidFill>
-          <a:ln/>
-        </p:spPr>
-      </p:sp>
-      <p:sp>
-        <p:nvSpPr>
-          <p:cNvPr id="41" name="Roboto_12pt_sp2__c28.80_t24.83"/>
-          <p:cNvSpPr/>
-          <p:nvPr/>
-        </p:nvSpPr>
-        <p:spPr>
-          <a:xfrm>
-            <a:off x="8335772" y="1757680"/>
-            <a:ext cx="306705" cy="365760"/>
+          <p:cNvPr id="22" name="Roboto_12pt_sp2__c28.80_t24.83"/>
+          <p:cNvSpPr/>
+          <p:nvPr/>
+        </p:nvSpPr>
+        <p:spPr>
+          <a:xfrm>
+            <a:off x="8335772" y="1657096"/>
+            <a:ext cx="306705" cy="315341"/>
           </a:xfrm>
           <a:prstGeom prst="rect">
             <a:avLst/>
@@ -2536,34 +2156,14 @@
       </p:sp>
       <p:sp>
         <p:nvSpPr>
-          <p:cNvPr id="42" name="Roboto_12pt_sp2__c28.80_t24.83__textBoxMarker"/>
-          <p:cNvSpPr/>
-          <p:nvPr/>
-        </p:nvSpPr>
-        <p:spPr>
-          <a:xfrm>
-            <a:off x="8335772" y="2066671"/>
-            <a:ext cx="306705" cy="12700"/>
-          </a:xfrm>
-          <a:prstGeom prst="rect">
-            <a:avLst/>
-          </a:prstGeom>
-          <a:solidFill>
-            <a:srgbClr val="0000FF"/>
-          </a:solidFill>
-          <a:ln/>
-        </p:spPr>
-      </p:sp>
-      <p:sp>
-        <p:nvSpPr>
-          <p:cNvPr id="43" name="Roboto_14pt_sp1__c16.80_t16.37"/>
-          <p:cNvSpPr/>
-          <p:nvPr/>
-        </p:nvSpPr>
-        <p:spPr>
-          <a:xfrm>
-            <a:off x="365760" y="2225040"/>
-            <a:ext cx="357886" cy="213360"/>
+          <p:cNvPr id="23" name="Roboto_14pt_sp1__c16.80_t16.72"/>
+          <p:cNvSpPr/>
+          <p:nvPr/>
+        </p:nvSpPr>
+        <p:spPr>
+          <a:xfrm>
+            <a:off x="365760" y="2074037"/>
+            <a:ext cx="357886" cy="212344"/>
           </a:xfrm>
           <a:prstGeom prst="rect">
             <a:avLst/>
@@ -2605,34 +2205,14 @@
       </p:sp>
       <p:sp>
         <p:nvSpPr>
-          <p:cNvPr id="44" name="Roboto_14pt_sp1__c16.80_t16.37__textBoxMarker"/>
-          <p:cNvSpPr/>
-          <p:nvPr/>
-        </p:nvSpPr>
-        <p:spPr>
-          <a:xfrm>
-            <a:off x="365760" y="2426589"/>
-            <a:ext cx="357886" cy="12700"/>
-          </a:xfrm>
-          <a:prstGeom prst="rect">
-            <a:avLst/>
-          </a:prstGeom>
-          <a:solidFill>
-            <a:srgbClr val="0000FF"/>
-          </a:solidFill>
-          <a:ln/>
-        </p:spPr>
-      </p:sp>
-      <p:sp>
-        <p:nvSpPr>
-          <p:cNvPr id="45" name="Roboto_14pt_sp1_25__c21.00_t19.52"/>
-          <p:cNvSpPr/>
-          <p:nvPr/>
-        </p:nvSpPr>
-        <p:spPr>
-          <a:xfrm>
-            <a:off x="2358263" y="2225040"/>
-            <a:ext cx="357886" cy="266700"/>
+          <p:cNvPr id="24" name="Roboto_14pt_sp1_25__c21.00_t19.52"/>
+          <p:cNvSpPr/>
+          <p:nvPr/>
+        </p:nvSpPr>
+        <p:spPr>
+          <a:xfrm>
+            <a:off x="2358263" y="2074037"/>
+            <a:ext cx="357886" cy="247904"/>
           </a:xfrm>
           <a:prstGeom prst="rect">
             <a:avLst/>
@@ -2674,34 +2254,14 @@
       </p:sp>
       <p:sp>
         <p:nvSpPr>
-          <p:cNvPr id="46" name="Roboto_14pt_sp1_25__c21.00_t19.52__textBoxMarker"/>
-          <p:cNvSpPr/>
-          <p:nvPr/>
-        </p:nvSpPr>
-        <p:spPr>
-          <a:xfrm>
-            <a:off x="2358263" y="2466594"/>
-            <a:ext cx="357886" cy="12700"/>
-          </a:xfrm>
-          <a:prstGeom prst="rect">
-            <a:avLst/>
-          </a:prstGeom>
-          <a:solidFill>
-            <a:srgbClr val="0000FF"/>
-          </a:solidFill>
-          <a:ln/>
-        </p:spPr>
-      </p:sp>
-      <p:sp>
-        <p:nvSpPr>
-          <p:cNvPr id="47" name="Roboto_14pt_sp1_5__c25.20_t22.67"/>
-          <p:cNvSpPr/>
-          <p:nvPr/>
-        </p:nvSpPr>
-        <p:spPr>
-          <a:xfrm>
-            <a:off x="4350766" y="2225040"/>
-            <a:ext cx="357886" cy="320040"/>
+          <p:cNvPr id="25" name="Roboto_14pt_sp1_5__c25.20_t22.67"/>
+          <p:cNvSpPr/>
+          <p:nvPr/>
+        </p:nvSpPr>
+        <p:spPr>
+          <a:xfrm>
+            <a:off x="4350766" y="2074037"/>
+            <a:ext cx="357886" cy="287909"/>
           </a:xfrm>
           <a:prstGeom prst="rect">
             <a:avLst/>
@@ -2743,34 +2303,14 @@
       </p:sp>
       <p:sp>
         <p:nvSpPr>
-          <p:cNvPr id="48" name="Roboto_14pt_sp1_5__c25.20_t22.67__textBoxMarker"/>
-          <p:cNvSpPr/>
-          <p:nvPr/>
-        </p:nvSpPr>
-        <p:spPr>
-          <a:xfrm>
-            <a:off x="4350766" y="2506599"/>
-            <a:ext cx="357886" cy="12700"/>
-          </a:xfrm>
-          <a:prstGeom prst="rect">
-            <a:avLst/>
-          </a:prstGeom>
-          <a:solidFill>
-            <a:srgbClr val="0000FF"/>
-          </a:solidFill>
-          <a:ln/>
-        </p:spPr>
-      </p:sp>
-      <p:sp>
-        <p:nvSpPr>
-          <p:cNvPr id="49" name="Roboto_14pt_sp1_75__c29.40_t25.82"/>
-          <p:cNvSpPr/>
-          <p:nvPr/>
-        </p:nvSpPr>
-        <p:spPr>
-          <a:xfrm>
-            <a:off x="6343269" y="2225040"/>
-            <a:ext cx="357886" cy="373380"/>
+          <p:cNvPr id="26" name="Roboto_14pt_sp1_75__c29.40_t25.82"/>
+          <p:cNvSpPr/>
+          <p:nvPr/>
+        </p:nvSpPr>
+        <p:spPr>
+          <a:xfrm>
+            <a:off x="6343269" y="2074037"/>
+            <a:ext cx="357886" cy="327914"/>
           </a:xfrm>
           <a:prstGeom prst="rect">
             <a:avLst/>
@@ -2812,34 +2352,14 @@
       </p:sp>
       <p:sp>
         <p:nvSpPr>
-          <p:cNvPr id="50" name="Roboto_14pt_sp1_75__c29.40_t25.82__textBoxMarker"/>
-          <p:cNvSpPr/>
-          <p:nvPr/>
-        </p:nvSpPr>
-        <p:spPr>
-          <a:xfrm>
-            <a:off x="6343269" y="2546604"/>
-            <a:ext cx="357886" cy="12700"/>
-          </a:xfrm>
-          <a:prstGeom prst="rect">
-            <a:avLst/>
-          </a:prstGeom>
-          <a:solidFill>
-            <a:srgbClr val="0000FF"/>
-          </a:solidFill>
-          <a:ln/>
-        </p:spPr>
-      </p:sp>
-      <p:sp>
-        <p:nvSpPr>
-          <p:cNvPr id="51" name="Roboto_14pt_sp2__c33.60_t28.97"/>
-          <p:cNvSpPr/>
-          <p:nvPr/>
-        </p:nvSpPr>
-        <p:spPr>
-          <a:xfrm>
-            <a:off x="8335772" y="2225040"/>
-            <a:ext cx="357886" cy="426720"/>
+          <p:cNvPr id="27" name="Roboto_14pt_sp2__c33.60_t28.97"/>
+          <p:cNvSpPr/>
+          <p:nvPr/>
+        </p:nvSpPr>
+        <p:spPr>
+          <a:xfrm>
+            <a:off x="8335772" y="2074037"/>
+            <a:ext cx="357886" cy="367919"/>
           </a:xfrm>
           <a:prstGeom prst="rect">
             <a:avLst/>
@@ -2881,34 +2401,14 @@
       </p:sp>
       <p:sp>
         <p:nvSpPr>
-          <p:cNvPr id="52" name="Roboto_14pt_sp2__c33.60_t28.97__textBoxMarker"/>
-          <p:cNvSpPr/>
-          <p:nvPr/>
-        </p:nvSpPr>
-        <p:spPr>
-          <a:xfrm>
-            <a:off x="8335772" y="2586609"/>
-            <a:ext cx="357886" cy="12700"/>
-          </a:xfrm>
-          <a:prstGeom prst="rect">
-            <a:avLst/>
-          </a:prstGeom>
-          <a:solidFill>
-            <a:srgbClr val="0000FF"/>
-          </a:solidFill>
-          <a:ln/>
-        </p:spPr>
-      </p:sp>
-      <p:sp>
-        <p:nvSpPr>
-          <p:cNvPr id="53" name="Roboto_18pt_sp1__c21.60_t21.05"/>
-          <p:cNvSpPr/>
-          <p:nvPr/>
-        </p:nvSpPr>
-        <p:spPr>
-          <a:xfrm>
-            <a:off x="365760" y="2753360"/>
-            <a:ext cx="460121" cy="274320"/>
+          <p:cNvPr id="28" name="Roboto_18pt_sp1__c21.60_t21.50"/>
+          <p:cNvSpPr/>
+          <p:nvPr/>
+        </p:nvSpPr>
+        <p:spPr>
+          <a:xfrm>
+            <a:off x="365760" y="2543556"/>
+            <a:ext cx="460121" cy="273050"/>
           </a:xfrm>
           <a:prstGeom prst="rect">
             <a:avLst/>
@@ -2950,34 +2450,14 @@
       </p:sp>
       <p:sp>
         <p:nvSpPr>
-          <p:cNvPr id="54" name="Roboto_18pt_sp1__c21.60_t21.05__textBoxMarker"/>
-          <p:cNvSpPr/>
-          <p:nvPr/>
-        </p:nvSpPr>
-        <p:spPr>
-          <a:xfrm>
-            <a:off x="365760" y="3014345"/>
-            <a:ext cx="460121" cy="12700"/>
-          </a:xfrm>
-          <a:prstGeom prst="rect">
-            <a:avLst/>
-          </a:prstGeom>
-          <a:solidFill>
-            <a:srgbClr val="0000FF"/>
-          </a:solidFill>
-          <a:ln/>
-        </p:spPr>
-      </p:sp>
-      <p:sp>
-        <p:nvSpPr>
-          <p:cNvPr id="55" name="Roboto_18pt_sp1_25__c27.00_t25.10"/>
-          <p:cNvSpPr/>
-          <p:nvPr/>
-        </p:nvSpPr>
-        <p:spPr>
-          <a:xfrm>
-            <a:off x="2358263" y="2753360"/>
-            <a:ext cx="460121" cy="342900"/>
+          <p:cNvPr id="29" name="Roboto_18pt_sp1_25__c27.00_t25.10"/>
+          <p:cNvSpPr/>
+          <p:nvPr/>
+        </p:nvSpPr>
+        <p:spPr>
+          <a:xfrm>
+            <a:off x="2358263" y="2543556"/>
+            <a:ext cx="460121" cy="318770"/>
           </a:xfrm>
           <a:prstGeom prst="rect">
             <a:avLst/>
@@ -3019,34 +2499,14 @@
       </p:sp>
       <p:sp>
         <p:nvSpPr>
-          <p:cNvPr id="56" name="Roboto_18pt_sp1_25__c27.00_t25.10__textBoxMarker"/>
-          <p:cNvSpPr/>
-          <p:nvPr/>
-        </p:nvSpPr>
-        <p:spPr>
-          <a:xfrm>
-            <a:off x="2358263" y="3065780"/>
-            <a:ext cx="460121" cy="12700"/>
-          </a:xfrm>
-          <a:prstGeom prst="rect">
-            <a:avLst/>
-          </a:prstGeom>
-          <a:solidFill>
-            <a:srgbClr val="0000FF"/>
-          </a:solidFill>
-          <a:ln/>
-        </p:spPr>
-      </p:sp>
-      <p:sp>
-        <p:nvSpPr>
-          <p:cNvPr id="57" name="Roboto_18pt_sp1_5__c32.40_t29.15"/>
-          <p:cNvSpPr/>
-          <p:nvPr/>
-        </p:nvSpPr>
-        <p:spPr>
-          <a:xfrm>
-            <a:off x="4350766" y="2753360"/>
-            <a:ext cx="460121" cy="411480"/>
+          <p:cNvPr id="30" name="Roboto_18pt_sp1_5__c32.40_t29.15"/>
+          <p:cNvSpPr/>
+          <p:nvPr/>
+        </p:nvSpPr>
+        <p:spPr>
+          <a:xfrm>
+            <a:off x="4350766" y="2543556"/>
+            <a:ext cx="460121" cy="370205"/>
           </a:xfrm>
           <a:prstGeom prst="rect">
             <a:avLst/>
@@ -3088,34 +2548,14 @@
       </p:sp>
       <p:sp>
         <p:nvSpPr>
-          <p:cNvPr id="58" name="Roboto_18pt_sp1_5__c32.40_t29.15__textBoxMarker"/>
-          <p:cNvSpPr/>
-          <p:nvPr/>
-        </p:nvSpPr>
-        <p:spPr>
-          <a:xfrm>
-            <a:off x="4350766" y="3117215"/>
-            <a:ext cx="460121" cy="12700"/>
-          </a:xfrm>
-          <a:prstGeom prst="rect">
-            <a:avLst/>
-          </a:prstGeom>
-          <a:solidFill>
-            <a:srgbClr val="0000FF"/>
-          </a:solidFill>
-          <a:ln/>
-        </p:spPr>
-      </p:sp>
-      <p:sp>
-        <p:nvSpPr>
-          <p:cNvPr id="59" name="Roboto_18pt_sp1_75__c37.80_t33.20"/>
-          <p:cNvSpPr/>
-          <p:nvPr/>
-        </p:nvSpPr>
-        <p:spPr>
-          <a:xfrm>
-            <a:off x="6343269" y="2753360"/>
-            <a:ext cx="460121" cy="480060"/>
+          <p:cNvPr id="31" name="Roboto_18pt_sp1_75__c37.80_t33.20"/>
+          <p:cNvSpPr/>
+          <p:nvPr/>
+        </p:nvSpPr>
+        <p:spPr>
+          <a:xfrm>
+            <a:off x="6343269" y="2543556"/>
+            <a:ext cx="460121" cy="421640"/>
           </a:xfrm>
           <a:prstGeom prst="rect">
             <a:avLst/>
@@ -3157,34 +2597,14 @@
       </p:sp>
       <p:sp>
         <p:nvSpPr>
-          <p:cNvPr id="60" name="Roboto_18pt_sp1_75__c37.80_t33.20__textBoxMarker"/>
-          <p:cNvSpPr/>
-          <p:nvPr/>
-        </p:nvSpPr>
-        <p:spPr>
-          <a:xfrm>
-            <a:off x="6343269" y="3168650"/>
-            <a:ext cx="460121" cy="12700"/>
-          </a:xfrm>
-          <a:prstGeom prst="rect">
-            <a:avLst/>
-          </a:prstGeom>
-          <a:solidFill>
-            <a:srgbClr val="0000FF"/>
-          </a:solidFill>
-          <a:ln/>
-        </p:spPr>
-      </p:sp>
-      <p:sp>
-        <p:nvSpPr>
-          <p:cNvPr id="61" name="Roboto_18pt_sp2__c43.20_t37.25"/>
-          <p:cNvSpPr/>
-          <p:nvPr/>
-        </p:nvSpPr>
-        <p:spPr>
-          <a:xfrm>
-            <a:off x="8335772" y="2753360"/>
-            <a:ext cx="460121" cy="548640"/>
+          <p:cNvPr id="32" name="Roboto_18pt_sp2__c43.20_t37.25"/>
+          <p:cNvSpPr/>
+          <p:nvPr/>
+        </p:nvSpPr>
+        <p:spPr>
+          <a:xfrm>
+            <a:off x="8335772" y="2543556"/>
+            <a:ext cx="460121" cy="473075"/>
           </a:xfrm>
           <a:prstGeom prst="rect">
             <a:avLst/>
@@ -3226,34 +2646,14 @@
       </p:sp>
       <p:sp>
         <p:nvSpPr>
-          <p:cNvPr id="62" name="Roboto_18pt_sp2__c43.20_t37.25__textBoxMarker"/>
-          <p:cNvSpPr/>
-          <p:nvPr/>
-        </p:nvSpPr>
-        <p:spPr>
-          <a:xfrm>
-            <a:off x="8335772" y="3220085"/>
-            <a:ext cx="460121" cy="12700"/>
-          </a:xfrm>
-          <a:prstGeom prst="rect">
-            <a:avLst/>
-          </a:prstGeom>
-          <a:solidFill>
-            <a:srgbClr val="0000FF"/>
-          </a:solidFill>
-          <a:ln/>
-        </p:spPr>
-      </p:sp>
-      <p:sp>
-        <p:nvSpPr>
-          <p:cNvPr id="63" name="Roboto_24pt_sp1__c28.80_t28.07"/>
-          <p:cNvSpPr/>
-          <p:nvPr/>
-        </p:nvSpPr>
-        <p:spPr>
-          <a:xfrm>
-            <a:off x="365760" y="3403600"/>
-            <a:ext cx="613410" cy="365760"/>
+          <p:cNvPr id="33" name="Roboto_24pt_sp1__c28.80_t28.67"/>
+          <p:cNvSpPr/>
+          <p:nvPr/>
+        </p:nvSpPr>
+        <p:spPr>
+          <a:xfrm>
+            <a:off x="365760" y="3118231"/>
+            <a:ext cx="613410" cy="364109"/>
           </a:xfrm>
           <a:prstGeom prst="rect">
             <a:avLst/>
@@ -3295,34 +2695,14 @@
       </p:sp>
       <p:sp>
         <p:nvSpPr>
-          <p:cNvPr id="64" name="Roboto_24pt_sp1__c28.80_t28.07__textBoxMarker"/>
-          <p:cNvSpPr/>
-          <p:nvPr/>
-        </p:nvSpPr>
-        <p:spPr>
-          <a:xfrm>
-            <a:off x="365760" y="3753739"/>
-            <a:ext cx="613410" cy="12700"/>
-          </a:xfrm>
-          <a:prstGeom prst="rect">
-            <a:avLst/>
-          </a:prstGeom>
-          <a:solidFill>
-            <a:srgbClr val="0000FF"/>
-          </a:solidFill>
-          <a:ln/>
-        </p:spPr>
-      </p:sp>
-      <p:sp>
-        <p:nvSpPr>
-          <p:cNvPr id="65" name="Roboto_24pt_sp1_25__c36.00_t33.47"/>
-          <p:cNvSpPr/>
-          <p:nvPr/>
-        </p:nvSpPr>
-        <p:spPr>
-          <a:xfrm>
-            <a:off x="2358263" y="3403600"/>
-            <a:ext cx="613410" cy="457200"/>
+          <p:cNvPr id="34" name="Roboto_24pt_sp1_25__c36.00_t33.47"/>
+          <p:cNvSpPr/>
+          <p:nvPr/>
+        </p:nvSpPr>
+        <p:spPr>
+          <a:xfrm>
+            <a:off x="2358263" y="3118231"/>
+            <a:ext cx="613410" cy="425069"/>
           </a:xfrm>
           <a:prstGeom prst="rect">
             <a:avLst/>
@@ -3364,34 +2744,14 @@
       </p:sp>
       <p:sp>
         <p:nvSpPr>
-          <p:cNvPr id="66" name="Roboto_24pt_sp1_25__c36.00_t33.47__textBoxMarker"/>
-          <p:cNvSpPr/>
-          <p:nvPr/>
-        </p:nvSpPr>
-        <p:spPr>
-          <a:xfrm>
-            <a:off x="2358263" y="3822319"/>
-            <a:ext cx="613410" cy="12700"/>
-          </a:xfrm>
-          <a:prstGeom prst="rect">
-            <a:avLst/>
-          </a:prstGeom>
-          <a:solidFill>
-            <a:srgbClr val="0000FF"/>
-          </a:solidFill>
-          <a:ln/>
-        </p:spPr>
-      </p:sp>
-      <p:sp>
-        <p:nvSpPr>
-          <p:cNvPr id="67" name="Roboto_24pt_sp1_5__c43.20_t38.87"/>
-          <p:cNvSpPr/>
-          <p:nvPr/>
-        </p:nvSpPr>
-        <p:spPr>
-          <a:xfrm>
-            <a:off x="4350766" y="3403600"/>
-            <a:ext cx="613410" cy="548640"/>
+          <p:cNvPr id="35" name="Roboto_24pt_sp1_5__c43.20_t38.87"/>
+          <p:cNvSpPr/>
+          <p:nvPr/>
+        </p:nvSpPr>
+        <p:spPr>
+          <a:xfrm>
+            <a:off x="4350766" y="3118231"/>
+            <a:ext cx="613410" cy="493649"/>
           </a:xfrm>
           <a:prstGeom prst="rect">
             <a:avLst/>
@@ -3433,34 +2793,14 @@
       </p:sp>
       <p:sp>
         <p:nvSpPr>
-          <p:cNvPr id="68" name="Roboto_24pt_sp1_5__c43.20_t38.87__textBoxMarker"/>
-          <p:cNvSpPr/>
-          <p:nvPr/>
-        </p:nvSpPr>
-        <p:spPr>
-          <a:xfrm>
-            <a:off x="4350766" y="3890899"/>
-            <a:ext cx="613410" cy="12700"/>
-          </a:xfrm>
-          <a:prstGeom prst="rect">
-            <a:avLst/>
-          </a:prstGeom>
-          <a:solidFill>
-            <a:srgbClr val="0000FF"/>
-          </a:solidFill>
-          <a:ln/>
-        </p:spPr>
-      </p:sp>
-      <p:sp>
-        <p:nvSpPr>
-          <p:cNvPr id="69" name="Roboto_24pt_sp1_75__c50.40_t44.27"/>
-          <p:cNvSpPr/>
-          <p:nvPr/>
-        </p:nvSpPr>
-        <p:spPr>
-          <a:xfrm>
-            <a:off x="6343269" y="3403600"/>
-            <a:ext cx="613410" cy="640080"/>
+          <p:cNvPr id="36" name="Roboto_24pt_sp1_75__c50.40_t44.27"/>
+          <p:cNvSpPr/>
+          <p:nvPr/>
+        </p:nvSpPr>
+        <p:spPr>
+          <a:xfrm>
+            <a:off x="6343269" y="3118231"/>
+            <a:ext cx="613410" cy="562229"/>
           </a:xfrm>
           <a:prstGeom prst="rect">
             <a:avLst/>
@@ -3502,34 +2842,14 @@
       </p:sp>
       <p:sp>
         <p:nvSpPr>
-          <p:cNvPr id="70" name="Roboto_24pt_sp1_75__c50.40_t44.27__textBoxMarker"/>
-          <p:cNvSpPr/>
-          <p:nvPr/>
-        </p:nvSpPr>
-        <p:spPr>
-          <a:xfrm>
-            <a:off x="6343269" y="3959479"/>
-            <a:ext cx="613410" cy="12700"/>
-          </a:xfrm>
-          <a:prstGeom prst="rect">
-            <a:avLst/>
-          </a:prstGeom>
-          <a:solidFill>
-            <a:srgbClr val="0000FF"/>
-          </a:solidFill>
-          <a:ln/>
-        </p:spPr>
-      </p:sp>
-      <p:sp>
-        <p:nvSpPr>
-          <p:cNvPr id="71" name="Roboto_24pt_sp2__c57.60_t49.67"/>
-          <p:cNvSpPr/>
-          <p:nvPr/>
-        </p:nvSpPr>
-        <p:spPr>
-          <a:xfrm>
-            <a:off x="8335772" y="3403600"/>
-            <a:ext cx="613410" cy="731520"/>
+          <p:cNvPr id="37" name="Roboto_24pt_sp2__c57.60_t49.67"/>
+          <p:cNvSpPr/>
+          <p:nvPr/>
+        </p:nvSpPr>
+        <p:spPr>
+          <a:xfrm>
+            <a:off x="8335772" y="3118231"/>
+            <a:ext cx="613410" cy="630809"/>
           </a:xfrm>
           <a:prstGeom prst="rect">
             <a:avLst/>
@@ -3571,34 +2891,14 @@
       </p:sp>
       <p:sp>
         <p:nvSpPr>
-          <p:cNvPr id="72" name="Roboto_24pt_sp2__c57.60_t49.67__textBoxMarker"/>
-          <p:cNvSpPr/>
-          <p:nvPr/>
-        </p:nvSpPr>
-        <p:spPr>
-          <a:xfrm>
-            <a:off x="8335772" y="4028059"/>
-            <a:ext cx="613410" cy="12700"/>
-          </a:xfrm>
-          <a:prstGeom prst="rect">
-            <a:avLst/>
-          </a:prstGeom>
-          <a:solidFill>
-            <a:srgbClr val="0000FF"/>
-          </a:solidFill>
-          <a:ln/>
-        </p:spPr>
-      </p:sp>
-      <p:sp>
-        <p:nvSpPr>
-          <p:cNvPr id="73" name="Roboto_32pt_sp1__c38.40_t37.42"/>
-          <p:cNvSpPr/>
-          <p:nvPr/>
-        </p:nvSpPr>
-        <p:spPr>
-          <a:xfrm>
-            <a:off x="365760" y="4236720"/>
-            <a:ext cx="818007" cy="487680"/>
+          <p:cNvPr id="38" name="Roboto_32pt_sp1__c38.40_t38.22"/>
+          <p:cNvSpPr/>
+          <p:nvPr/>
+        </p:nvSpPr>
+        <p:spPr>
+          <a:xfrm>
+            <a:off x="365760" y="3850640"/>
+            <a:ext cx="818007" cy="485394"/>
           </a:xfrm>
           <a:prstGeom prst="rect">
             <a:avLst/>
@@ -3640,34 +2940,14 @@
       </p:sp>
       <p:sp>
         <p:nvSpPr>
-          <p:cNvPr id="74" name="Roboto_32pt_sp1__c38.40_t37.42__textBoxMarker"/>
-          <p:cNvSpPr/>
-          <p:nvPr/>
-        </p:nvSpPr>
-        <p:spPr>
-          <a:xfrm>
-            <a:off x="365760" y="4705604"/>
-            <a:ext cx="818007" cy="12700"/>
-          </a:xfrm>
-          <a:prstGeom prst="rect">
-            <a:avLst/>
-          </a:prstGeom>
-          <a:solidFill>
-            <a:srgbClr val="0000FF"/>
-          </a:solidFill>
-          <a:ln/>
-        </p:spPr>
-      </p:sp>
-      <p:sp>
-        <p:nvSpPr>
-          <p:cNvPr id="75" name="Roboto_32pt_sp1_25__c48.00_t44.62"/>
-          <p:cNvSpPr/>
-          <p:nvPr/>
-        </p:nvSpPr>
-        <p:spPr>
-          <a:xfrm>
-            <a:off x="2358263" y="4236720"/>
-            <a:ext cx="818007" cy="609600"/>
+          <p:cNvPr id="39" name="Roboto_32pt_sp1_25__c48.00_t44.62"/>
+          <p:cNvSpPr/>
+          <p:nvPr/>
+        </p:nvSpPr>
+        <p:spPr>
+          <a:xfrm>
+            <a:off x="2358263" y="3850640"/>
+            <a:ext cx="818007" cy="566674"/>
           </a:xfrm>
           <a:prstGeom prst="rect">
             <a:avLst/>
@@ -3709,34 +2989,14 @@
       </p:sp>
       <p:sp>
         <p:nvSpPr>
-          <p:cNvPr id="76" name="Roboto_32pt_sp1_25__c48.00_t44.62__textBoxMarker"/>
-          <p:cNvSpPr/>
-          <p:nvPr/>
-        </p:nvSpPr>
-        <p:spPr>
-          <a:xfrm>
-            <a:off x="2358263" y="4797044"/>
-            <a:ext cx="818007" cy="12700"/>
-          </a:xfrm>
-          <a:prstGeom prst="rect">
-            <a:avLst/>
-          </a:prstGeom>
-          <a:solidFill>
-            <a:srgbClr val="0000FF"/>
-          </a:solidFill>
-          <a:ln/>
-        </p:spPr>
-      </p:sp>
-      <p:sp>
-        <p:nvSpPr>
-          <p:cNvPr id="77" name="Roboto_32pt_sp1_5__c57.60_t51.82"/>
-          <p:cNvSpPr/>
-          <p:nvPr/>
-        </p:nvSpPr>
-        <p:spPr>
-          <a:xfrm>
-            <a:off x="4350766" y="4236720"/>
-            <a:ext cx="818007" cy="731520"/>
+          <p:cNvPr id="40" name="Roboto_32pt_sp1_5__c57.60_t51.82"/>
+          <p:cNvSpPr/>
+          <p:nvPr/>
+        </p:nvSpPr>
+        <p:spPr>
+          <a:xfrm>
+            <a:off x="4350766" y="3850640"/>
+            <a:ext cx="818007" cy="658114"/>
           </a:xfrm>
           <a:prstGeom prst="rect">
             <a:avLst/>
@@ -3778,34 +3038,14 @@
       </p:sp>
       <p:sp>
         <p:nvSpPr>
-          <p:cNvPr id="78" name="Roboto_32pt_sp1_5__c57.60_t51.82__textBoxMarker"/>
-          <p:cNvSpPr/>
-          <p:nvPr/>
-        </p:nvSpPr>
-        <p:spPr>
-          <a:xfrm>
-            <a:off x="4350766" y="4888484"/>
-            <a:ext cx="818007" cy="12700"/>
-          </a:xfrm>
-          <a:prstGeom prst="rect">
-            <a:avLst/>
-          </a:prstGeom>
-          <a:solidFill>
-            <a:srgbClr val="0000FF"/>
-          </a:solidFill>
-          <a:ln/>
-        </p:spPr>
-      </p:sp>
-      <p:sp>
-        <p:nvSpPr>
-          <p:cNvPr id="79" name="Roboto_32pt_sp1_75__c67.20_t59.02"/>
-          <p:cNvSpPr/>
-          <p:nvPr/>
-        </p:nvSpPr>
-        <p:spPr>
-          <a:xfrm>
-            <a:off x="6343269" y="4236720"/>
-            <a:ext cx="818007" cy="853440"/>
+          <p:cNvPr id="41" name="Roboto_32pt_sp1_75__c67.20_t59.02"/>
+          <p:cNvSpPr/>
+          <p:nvPr/>
+        </p:nvSpPr>
+        <p:spPr>
+          <a:xfrm>
+            <a:off x="6343269" y="3850640"/>
+            <a:ext cx="818007" cy="749554"/>
           </a:xfrm>
           <a:prstGeom prst="rect">
             <a:avLst/>
@@ -3847,34 +3087,14 @@
       </p:sp>
       <p:sp>
         <p:nvSpPr>
-          <p:cNvPr id="80" name="Roboto_32pt_sp1_75__c67.20_t59.02__textBoxMarker"/>
-          <p:cNvSpPr/>
-          <p:nvPr/>
-        </p:nvSpPr>
-        <p:spPr>
-          <a:xfrm>
-            <a:off x="6343269" y="4979924"/>
-            <a:ext cx="818007" cy="12700"/>
-          </a:xfrm>
-          <a:prstGeom prst="rect">
-            <a:avLst/>
-          </a:prstGeom>
-          <a:solidFill>
-            <a:srgbClr val="0000FF"/>
-          </a:solidFill>
-          <a:ln/>
-        </p:spPr>
-      </p:sp>
-      <p:sp>
-        <p:nvSpPr>
-          <p:cNvPr id="81" name="Roboto_32pt_sp2__c76.80_t66.22"/>
-          <p:cNvSpPr/>
-          <p:nvPr/>
-        </p:nvSpPr>
-        <p:spPr>
-          <a:xfrm>
-            <a:off x="8335772" y="4236720"/>
-            <a:ext cx="818007" cy="975360"/>
+          <p:cNvPr id="42" name="Roboto_32pt_sp2__c76.80_t66.22"/>
+          <p:cNvSpPr/>
+          <p:nvPr/>
+        </p:nvSpPr>
+        <p:spPr>
+          <a:xfrm>
+            <a:off x="8335772" y="3850640"/>
+            <a:ext cx="818007" cy="840994"/>
           </a:xfrm>
           <a:prstGeom prst="rect">
             <a:avLst/>
@@ -3916,34 +3136,14 @@
       </p:sp>
       <p:sp>
         <p:nvSpPr>
-          <p:cNvPr id="82" name="Roboto_32pt_sp2__c76.80_t66.22__textBoxMarker"/>
-          <p:cNvSpPr/>
-          <p:nvPr/>
-        </p:nvSpPr>
-        <p:spPr>
-          <a:xfrm>
-            <a:off x="8335772" y="5071364"/>
-            <a:ext cx="818007" cy="12700"/>
-          </a:xfrm>
-          <a:prstGeom prst="rect">
-            <a:avLst/>
-          </a:prstGeom>
-          <a:solidFill>
-            <a:srgbClr val="0000FF"/>
-          </a:solidFill>
-          <a:ln/>
-        </p:spPr>
-      </p:sp>
-      <p:sp>
-        <p:nvSpPr>
-          <p:cNvPr id="83" name="Roboto_40pt_sp1__c48.00_t46.78"/>
-          <p:cNvSpPr/>
-          <p:nvPr/>
-        </p:nvSpPr>
-        <p:spPr>
-          <a:xfrm>
-            <a:off x="365760" y="5313680"/>
-            <a:ext cx="1022477" cy="609600"/>
+          <p:cNvPr id="43" name="Roboto_40pt_sp1__c48.00_t47.78"/>
+          <p:cNvSpPr/>
+          <p:nvPr/>
+        </p:nvSpPr>
+        <p:spPr>
+          <a:xfrm>
+            <a:off x="365760" y="4793234"/>
+            <a:ext cx="1022477" cy="606806"/>
           </a:xfrm>
           <a:prstGeom prst="rect">
             <a:avLst/>
@@ -3985,34 +3185,14 @@
       </p:sp>
       <p:sp>
         <p:nvSpPr>
-          <p:cNvPr id="84" name="Roboto_40pt_sp1__c48.00_t46.78__textBoxMarker"/>
-          <p:cNvSpPr/>
-          <p:nvPr/>
-        </p:nvSpPr>
-        <p:spPr>
-          <a:xfrm>
-            <a:off x="365760" y="5901436"/>
-            <a:ext cx="1022477" cy="12700"/>
-          </a:xfrm>
-          <a:prstGeom prst="rect">
-            <a:avLst/>
-          </a:prstGeom>
-          <a:solidFill>
-            <a:srgbClr val="0000FF"/>
-          </a:solidFill>
-          <a:ln/>
-        </p:spPr>
-      </p:sp>
-      <p:sp>
-        <p:nvSpPr>
-          <p:cNvPr id="85" name="Roboto_40pt_sp1_25__c60.00_t55.78"/>
-          <p:cNvSpPr/>
-          <p:nvPr/>
-        </p:nvSpPr>
-        <p:spPr>
-          <a:xfrm>
-            <a:off x="2358263" y="5313680"/>
-            <a:ext cx="1022477" cy="762000"/>
+          <p:cNvPr id="44" name="Roboto_40pt_sp1_25__c60.00_t55.78"/>
+          <p:cNvSpPr/>
+          <p:nvPr/>
+        </p:nvSpPr>
+        <p:spPr>
+          <a:xfrm>
+            <a:off x="2358263" y="4793234"/>
+            <a:ext cx="1022477" cy="708406"/>
           </a:xfrm>
           <a:prstGeom prst="rect">
             <a:avLst/>
@@ -4054,34 +3234,14 @@
       </p:sp>
       <p:sp>
         <p:nvSpPr>
-          <p:cNvPr id="86" name="Roboto_40pt_sp1_25__c60.00_t55.78__textBoxMarker"/>
-          <p:cNvSpPr/>
-          <p:nvPr/>
-        </p:nvSpPr>
-        <p:spPr>
-          <a:xfrm>
-            <a:off x="2358263" y="6015736"/>
-            <a:ext cx="1022477" cy="12700"/>
-          </a:xfrm>
-          <a:prstGeom prst="rect">
-            <a:avLst/>
-          </a:prstGeom>
-          <a:solidFill>
-            <a:srgbClr val="0000FF"/>
-          </a:solidFill>
-          <a:ln/>
-        </p:spPr>
-      </p:sp>
-      <p:sp>
-        <p:nvSpPr>
-          <p:cNvPr id="87" name="Roboto_40pt_sp1_5__c72.00_t64.78"/>
-          <p:cNvSpPr/>
-          <p:nvPr/>
-        </p:nvSpPr>
-        <p:spPr>
-          <a:xfrm>
-            <a:off x="4350766" y="5313680"/>
-            <a:ext cx="1022477" cy="914400"/>
+          <p:cNvPr id="45" name="Roboto_40pt_sp1_5__c72.00_t64.78"/>
+          <p:cNvSpPr/>
+          <p:nvPr/>
+        </p:nvSpPr>
+        <p:spPr>
+          <a:xfrm>
+            <a:off x="4350766" y="4793234"/>
+            <a:ext cx="1022477" cy="822706"/>
           </a:xfrm>
           <a:prstGeom prst="rect">
             <a:avLst/>
@@ -4123,34 +3283,14 @@
       </p:sp>
       <p:sp>
         <p:nvSpPr>
-          <p:cNvPr id="88" name="Roboto_40pt_sp1_5__c72.00_t64.78__textBoxMarker"/>
-          <p:cNvSpPr/>
-          <p:nvPr/>
-        </p:nvSpPr>
-        <p:spPr>
-          <a:xfrm>
-            <a:off x="4350766" y="6130036"/>
-            <a:ext cx="1022477" cy="12700"/>
-          </a:xfrm>
-          <a:prstGeom prst="rect">
-            <a:avLst/>
-          </a:prstGeom>
-          <a:solidFill>
-            <a:srgbClr val="0000FF"/>
-          </a:solidFill>
-          <a:ln/>
-        </p:spPr>
-      </p:sp>
-      <p:sp>
-        <p:nvSpPr>
-          <p:cNvPr id="89" name="Roboto_40pt_sp1_75__c84.00_t73.78"/>
-          <p:cNvSpPr/>
-          <p:nvPr/>
-        </p:nvSpPr>
-        <p:spPr>
-          <a:xfrm>
-            <a:off x="6343269" y="5313680"/>
-            <a:ext cx="1022477" cy="1066800"/>
+          <p:cNvPr id="46" name="Roboto_40pt_sp1_75__c84.00_t73.78"/>
+          <p:cNvSpPr/>
+          <p:nvPr/>
+        </p:nvSpPr>
+        <p:spPr>
+          <a:xfrm>
+            <a:off x="6343269" y="4793234"/>
+            <a:ext cx="1022477" cy="937006"/>
           </a:xfrm>
           <a:prstGeom prst="rect">
             <a:avLst/>
@@ -4192,34 +3332,14 @@
       </p:sp>
       <p:sp>
         <p:nvSpPr>
-          <p:cNvPr id="90" name="Roboto_40pt_sp1_75__c84.00_t73.78__textBoxMarker"/>
-          <p:cNvSpPr/>
-          <p:nvPr/>
-        </p:nvSpPr>
-        <p:spPr>
-          <a:xfrm>
-            <a:off x="6343269" y="6244336"/>
-            <a:ext cx="1022477" cy="12700"/>
-          </a:xfrm>
-          <a:prstGeom prst="rect">
-            <a:avLst/>
-          </a:prstGeom>
-          <a:solidFill>
-            <a:srgbClr val="0000FF"/>
-          </a:solidFill>
-          <a:ln/>
-        </p:spPr>
-      </p:sp>
-      <p:sp>
-        <p:nvSpPr>
-          <p:cNvPr id="91" name="Roboto_40pt_sp2__c96.00_t82.78"/>
-          <p:cNvSpPr/>
-          <p:nvPr/>
-        </p:nvSpPr>
-        <p:spPr>
-          <a:xfrm>
-            <a:off x="8335772" y="5313680"/>
-            <a:ext cx="1022477" cy="1219200"/>
+          <p:cNvPr id="47" name="Roboto_40pt_sp2__c96.00_t82.78"/>
+          <p:cNvSpPr/>
+          <p:nvPr/>
+        </p:nvSpPr>
+        <p:spPr>
+          <a:xfrm>
+            <a:off x="8335772" y="4793234"/>
+            <a:ext cx="1022477" cy="1051306"/>
           </a:xfrm>
           <a:prstGeom prst="rect">
             <a:avLst/>
@@ -4261,34 +3381,14 @@
       </p:sp>
       <p:sp>
         <p:nvSpPr>
-          <p:cNvPr id="92" name="Roboto_40pt_sp2__c96.00_t82.78__textBoxMarker"/>
-          <p:cNvSpPr/>
-          <p:nvPr/>
-        </p:nvSpPr>
-        <p:spPr>
-          <a:xfrm>
-            <a:off x="8335772" y="6358636"/>
-            <a:ext cx="1022477" cy="12700"/>
-          </a:xfrm>
-          <a:prstGeom prst="rect">
-            <a:avLst/>
-          </a:prstGeom>
-          <a:solidFill>
-            <a:srgbClr val="0000FF"/>
-          </a:solidFill>
-          <a:ln/>
-        </p:spPr>
-      </p:sp>
-      <p:sp>
-        <p:nvSpPr>
-          <p:cNvPr id="93" name="Roboto_56pt_sp1__c67.20_t65.49"/>
-          <p:cNvSpPr/>
-          <p:nvPr/>
-        </p:nvSpPr>
-        <p:spPr>
-          <a:xfrm>
-            <a:off x="365760" y="6634480"/>
-            <a:ext cx="1431417" cy="853440"/>
+          <p:cNvPr id="48" name="Roboto_56pt_sp1__c67.20_t66.89"/>
+          <p:cNvSpPr/>
+          <p:nvPr/>
+        </p:nvSpPr>
+        <p:spPr>
+          <a:xfrm>
+            <a:off x="365760" y="5946140"/>
+            <a:ext cx="1431417" cy="849503"/>
           </a:xfrm>
           <a:prstGeom prst="rect">
             <a:avLst/>
@@ -4330,34 +3430,14 @@
       </p:sp>
       <p:sp>
         <p:nvSpPr>
-          <p:cNvPr id="94" name="Roboto_56pt_sp1__c67.20_t65.49__textBoxMarker"/>
-          <p:cNvSpPr/>
-          <p:nvPr/>
-        </p:nvSpPr>
-        <p:spPr>
-          <a:xfrm>
-            <a:off x="365760" y="7459853"/>
-            <a:ext cx="1431417" cy="12700"/>
-          </a:xfrm>
-          <a:prstGeom prst="rect">
-            <a:avLst/>
-          </a:prstGeom>
-          <a:solidFill>
-            <a:srgbClr val="0000FF"/>
-          </a:solidFill>
-          <a:ln/>
-        </p:spPr>
-      </p:sp>
-      <p:sp>
-        <p:nvSpPr>
-          <p:cNvPr id="95" name="Roboto_56pt_sp1_25__c84.00_t78.09"/>
-          <p:cNvSpPr/>
-          <p:nvPr/>
-        </p:nvSpPr>
-        <p:spPr>
-          <a:xfrm>
-            <a:off x="2358263" y="6634480"/>
-            <a:ext cx="1431417" cy="1066800"/>
+          <p:cNvPr id="49" name="Roboto_56pt_sp1_25__c84.00_t78.09"/>
+          <p:cNvSpPr/>
+          <p:nvPr/>
+        </p:nvSpPr>
+        <p:spPr>
+          <a:xfrm>
+            <a:off x="2358263" y="5946140"/>
+            <a:ext cx="1431417" cy="991743"/>
           </a:xfrm>
           <a:prstGeom prst="rect">
             <a:avLst/>
@@ -4399,34 +3479,14 @@
       </p:sp>
       <p:sp>
         <p:nvSpPr>
-          <p:cNvPr id="96" name="Roboto_56pt_sp1_25__c84.00_t78.09__textBoxMarker"/>
-          <p:cNvSpPr/>
-          <p:nvPr/>
-        </p:nvSpPr>
-        <p:spPr>
-          <a:xfrm>
-            <a:off x="2358263" y="7619873"/>
-            <a:ext cx="1431417" cy="12700"/>
-          </a:xfrm>
-          <a:prstGeom prst="rect">
-            <a:avLst/>
-          </a:prstGeom>
-          <a:solidFill>
-            <a:srgbClr val="0000FF"/>
-          </a:solidFill>
-          <a:ln/>
-        </p:spPr>
-      </p:sp>
-      <p:sp>
-        <p:nvSpPr>
-          <p:cNvPr id="97" name="Roboto_56pt_sp1_5__c100.80_t90.69"/>
-          <p:cNvSpPr/>
-          <p:nvPr/>
-        </p:nvSpPr>
-        <p:spPr>
-          <a:xfrm>
-            <a:off x="4350766" y="6634480"/>
-            <a:ext cx="1431417" cy="1280160"/>
+          <p:cNvPr id="50" name="Roboto_56pt_sp1_5__c100.80_t90.69"/>
+          <p:cNvSpPr/>
+          <p:nvPr/>
+        </p:nvSpPr>
+        <p:spPr>
+          <a:xfrm>
+            <a:off x="4350766" y="5946140"/>
+            <a:ext cx="1431417" cy="1151763"/>
           </a:xfrm>
           <a:prstGeom prst="rect">
             <a:avLst/>
@@ -4468,34 +3528,14 @@
       </p:sp>
       <p:sp>
         <p:nvSpPr>
-          <p:cNvPr id="98" name="Roboto_56pt_sp1_5__c100.80_t90.69__textBoxMarker"/>
-          <p:cNvSpPr/>
-          <p:nvPr/>
-        </p:nvSpPr>
-        <p:spPr>
-          <a:xfrm>
-            <a:off x="4350766" y="7779893"/>
-            <a:ext cx="1431417" cy="12700"/>
-          </a:xfrm>
-          <a:prstGeom prst="rect">
-            <a:avLst/>
-          </a:prstGeom>
-          <a:solidFill>
-            <a:srgbClr val="0000FF"/>
-          </a:solidFill>
-          <a:ln/>
-        </p:spPr>
-      </p:sp>
-      <p:sp>
-        <p:nvSpPr>
-          <p:cNvPr id="99" name="Roboto_56pt_sp1_75__c117.60_t103.29"/>
-          <p:cNvSpPr/>
-          <p:nvPr/>
-        </p:nvSpPr>
-        <p:spPr>
-          <a:xfrm>
-            <a:off x="6343269" y="6634480"/>
-            <a:ext cx="1431417" cy="1493520"/>
+          <p:cNvPr id="51" name="Roboto_56pt_sp1_75__c117.60_t103.29"/>
+          <p:cNvSpPr/>
+          <p:nvPr/>
+        </p:nvSpPr>
+        <p:spPr>
+          <a:xfrm>
+            <a:off x="6343269" y="5946140"/>
+            <a:ext cx="1431417" cy="1311783"/>
           </a:xfrm>
           <a:prstGeom prst="rect">
             <a:avLst/>
@@ -4537,34 +3577,14 @@
       </p:sp>
       <p:sp>
         <p:nvSpPr>
-          <p:cNvPr id="100" name="Roboto_56pt_sp1_75__c117.60_t103.29__textBoxMarker"/>
-          <p:cNvSpPr/>
-          <p:nvPr/>
-        </p:nvSpPr>
-        <p:spPr>
-          <a:xfrm>
-            <a:off x="6343269" y="7939913"/>
-            <a:ext cx="1431417" cy="12700"/>
-          </a:xfrm>
-          <a:prstGeom prst="rect">
-            <a:avLst/>
-          </a:prstGeom>
-          <a:solidFill>
-            <a:srgbClr val="0000FF"/>
-          </a:solidFill>
-          <a:ln/>
-        </p:spPr>
-      </p:sp>
-      <p:sp>
-        <p:nvSpPr>
-          <p:cNvPr id="101" name="Roboto_56pt_sp2__c134.40_t115.89"/>
-          <p:cNvSpPr/>
-          <p:nvPr/>
-        </p:nvSpPr>
-        <p:spPr>
-          <a:xfrm>
-            <a:off x="8335772" y="6634480"/>
-            <a:ext cx="1431417" cy="1706880"/>
+          <p:cNvPr id="52" name="Roboto_56pt_sp2__c134.40_t115.89"/>
+          <p:cNvSpPr/>
+          <p:nvPr/>
+        </p:nvSpPr>
+        <p:spPr>
+          <a:xfrm>
+            <a:off x="8335772" y="5946140"/>
+            <a:ext cx="1431417" cy="1471803"/>
           </a:xfrm>
           <a:prstGeom prst="rect">
             <a:avLst/>
@@ -4606,34 +3626,14 @@
       </p:sp>
       <p:sp>
         <p:nvSpPr>
-          <p:cNvPr id="102" name="Roboto_56pt_sp2__c134.40_t115.89__textBoxMarker"/>
-          <p:cNvSpPr/>
-          <p:nvPr/>
-        </p:nvSpPr>
-        <p:spPr>
-          <a:xfrm>
-            <a:off x="8335772" y="8099933"/>
-            <a:ext cx="1431417" cy="12700"/>
-          </a:xfrm>
-          <a:prstGeom prst="rect">
-            <a:avLst/>
-          </a:prstGeom>
-          <a:solidFill>
-            <a:srgbClr val="0000FF"/>
-          </a:solidFill>
-          <a:ln/>
-        </p:spPr>
-      </p:sp>
-      <p:sp>
-        <p:nvSpPr>
-          <p:cNvPr id="103" name="Roboto_70pt_sp1__c84.00_t81.87"/>
-          <p:cNvSpPr/>
-          <p:nvPr/>
-        </p:nvSpPr>
-        <p:spPr>
-          <a:xfrm>
-            <a:off x="365760" y="8442960"/>
-            <a:ext cx="1789303" cy="1066800"/>
+          <p:cNvPr id="53" name="Roboto_70pt_sp1__c84.00_t83.62"/>
+          <p:cNvSpPr/>
+          <p:nvPr/>
+        </p:nvSpPr>
+        <p:spPr>
+          <a:xfrm>
+            <a:off x="365760" y="7519543"/>
+            <a:ext cx="1789303" cy="1061974"/>
           </a:xfrm>
           <a:prstGeom prst="rect">
             <a:avLst/>
@@ -4675,34 +3675,14 @@
       </p:sp>
       <p:sp>
         <p:nvSpPr>
-          <p:cNvPr id="104" name="Roboto_70pt_sp1__c84.00_t81.87__textBoxMarker"/>
-          <p:cNvSpPr/>
-          <p:nvPr/>
-        </p:nvSpPr>
-        <p:spPr>
-          <a:xfrm>
-            <a:off x="365760" y="9476359"/>
-            <a:ext cx="1789303" cy="12700"/>
-          </a:xfrm>
-          <a:prstGeom prst="rect">
-            <a:avLst/>
-          </a:prstGeom>
-          <a:solidFill>
-            <a:srgbClr val="0000FF"/>
-          </a:solidFill>
-          <a:ln/>
-        </p:spPr>
-      </p:sp>
-      <p:sp>
-        <p:nvSpPr>
-          <p:cNvPr id="105" name="Roboto_70pt_sp1_25__c105.00_t97.62"/>
-          <p:cNvSpPr/>
-          <p:nvPr/>
-        </p:nvSpPr>
-        <p:spPr>
-          <a:xfrm>
-            <a:off x="2358263" y="8442960"/>
-            <a:ext cx="1789303" cy="1333500"/>
+          <p:cNvPr id="54" name="Roboto_70pt_sp1_25__c105.00_t97.62"/>
+          <p:cNvSpPr/>
+          <p:nvPr/>
+        </p:nvSpPr>
+        <p:spPr>
+          <a:xfrm>
+            <a:off x="2358263" y="7519543"/>
+            <a:ext cx="1789303" cy="1239774"/>
           </a:xfrm>
           <a:prstGeom prst="rect">
             <a:avLst/>
@@ -4744,34 +3724,14 @@
       </p:sp>
       <p:sp>
         <p:nvSpPr>
-          <p:cNvPr id="106" name="Roboto_70pt_sp1_25__c105.00_t97.62__textBoxMarker"/>
-          <p:cNvSpPr/>
-          <p:nvPr/>
-        </p:nvSpPr>
-        <p:spPr>
-          <a:xfrm>
-            <a:off x="2358263" y="9676384"/>
-            <a:ext cx="1789303" cy="12700"/>
-          </a:xfrm>
-          <a:prstGeom prst="rect">
-            <a:avLst/>
-          </a:prstGeom>
-          <a:solidFill>
-            <a:srgbClr val="0000FF"/>
-          </a:solidFill>
-          <a:ln/>
-        </p:spPr>
-      </p:sp>
-      <p:sp>
-        <p:nvSpPr>
-          <p:cNvPr id="107" name="Roboto_70pt_sp1_5__c126.00_t113.37"/>
-          <p:cNvSpPr/>
-          <p:nvPr/>
-        </p:nvSpPr>
-        <p:spPr>
-          <a:xfrm>
-            <a:off x="4350766" y="8442960"/>
-            <a:ext cx="1789303" cy="1600200"/>
+          <p:cNvPr id="55" name="Roboto_70pt_sp1_5__c126.00_t113.37"/>
+          <p:cNvSpPr/>
+          <p:nvPr/>
+        </p:nvSpPr>
+        <p:spPr>
+          <a:xfrm>
+            <a:off x="4350766" y="7519543"/>
+            <a:ext cx="1789303" cy="1439799"/>
           </a:xfrm>
           <a:prstGeom prst="rect">
             <a:avLst/>
@@ -4813,34 +3773,14 @@
       </p:sp>
       <p:sp>
         <p:nvSpPr>
-          <p:cNvPr id="108" name="Roboto_70pt_sp1_5__c126.00_t113.37__textBoxMarker"/>
-          <p:cNvSpPr/>
-          <p:nvPr/>
-        </p:nvSpPr>
-        <p:spPr>
-          <a:xfrm>
-            <a:off x="4350766" y="9876409"/>
-            <a:ext cx="1789303" cy="12700"/>
-          </a:xfrm>
-          <a:prstGeom prst="rect">
-            <a:avLst/>
-          </a:prstGeom>
-          <a:solidFill>
-            <a:srgbClr val="0000FF"/>
-          </a:solidFill>
-          <a:ln/>
-        </p:spPr>
-      </p:sp>
-      <p:sp>
-        <p:nvSpPr>
-          <p:cNvPr id="109" name="Roboto_70pt_sp1_75__c147.00_t129.12"/>
-          <p:cNvSpPr/>
-          <p:nvPr/>
-        </p:nvSpPr>
-        <p:spPr>
-          <a:xfrm>
-            <a:off x="6343269" y="8442960"/>
-            <a:ext cx="1789303" cy="1866900"/>
+          <p:cNvPr id="56" name="Roboto_70pt_sp1_75__c147.00_t129.12"/>
+          <p:cNvSpPr/>
+          <p:nvPr/>
+        </p:nvSpPr>
+        <p:spPr>
+          <a:xfrm>
+            <a:off x="6343269" y="7519543"/>
+            <a:ext cx="1789303" cy="1639824"/>
           </a:xfrm>
           <a:prstGeom prst="rect">
             <a:avLst/>
@@ -4882,34 +3822,14 @@
       </p:sp>
       <p:sp>
         <p:nvSpPr>
-          <p:cNvPr id="110" name="Roboto_70pt_sp1_75__c147.00_t129.12__textBoxMarker"/>
-          <p:cNvSpPr/>
-          <p:nvPr/>
-        </p:nvSpPr>
-        <p:spPr>
-          <a:xfrm>
-            <a:off x="6343269" y="10076434"/>
-            <a:ext cx="1789303" cy="12700"/>
-          </a:xfrm>
-          <a:prstGeom prst="rect">
-            <a:avLst/>
-          </a:prstGeom>
-          <a:solidFill>
-            <a:srgbClr val="0000FF"/>
-          </a:solidFill>
-          <a:ln/>
-        </p:spPr>
-      </p:sp>
-      <p:sp>
-        <p:nvSpPr>
-          <p:cNvPr id="111" name="Roboto_70pt_sp2__c168.00_t144.87"/>
-          <p:cNvSpPr/>
-          <p:nvPr/>
-        </p:nvSpPr>
-        <p:spPr>
-          <a:xfrm>
-            <a:off x="8335772" y="8442960"/>
-            <a:ext cx="1789303" cy="2133600"/>
+          <p:cNvPr id="57" name="Roboto_70pt_sp2__c168.00_t144.87"/>
+          <p:cNvSpPr/>
+          <p:nvPr/>
+        </p:nvSpPr>
+        <p:spPr>
+          <a:xfrm>
+            <a:off x="8335772" y="7519543"/>
+            <a:ext cx="1789303" cy="1839849"/>
           </a:xfrm>
           <a:prstGeom prst="rect">
             <a:avLst/>
@@ -4948,26 +3868,6 @@
             <a:endParaRPr lang="en-US" sz="7000" dirty="0"/>
           </a:p>
         </p:txBody>
-      </p:sp>
-      <p:sp>
-        <p:nvSpPr>
-          <p:cNvPr id="112" name="Roboto_70pt_sp2__c168.00_t144.87__textBoxMarker"/>
-          <p:cNvSpPr/>
-          <p:nvPr/>
-        </p:nvSpPr>
-        <p:spPr>
-          <a:xfrm>
-            <a:off x="8335772" y="10276459"/>
-            <a:ext cx="1789303" cy="12700"/>
-          </a:xfrm>
-          <a:prstGeom prst="rect">
-            <a:avLst/>
-          </a:prstGeom>
-          <a:solidFill>
-            <a:srgbClr val="0000FF"/>
-          </a:solidFill>
-          <a:ln/>
-        </p:spPr>
       </p:sp>
     </p:spTree>
   </p:cSld>
@@ -5035,14 +3935,14 @@
       </p:sp>
       <p:sp>
         <p:nvSpPr>
-          <p:cNvPr id="3" name="Arial_6pt_sp1__c7.20_t6.96"/>
+          <p:cNvPr id="3" name="Arial_6pt_sp1__c7.20_t7.08"/>
           <p:cNvSpPr/>
           <p:nvPr/>
         </p:nvSpPr>
         <p:spPr>
           <a:xfrm>
             <a:off x="365760" y="721360"/>
-            <a:ext cx="105918" cy="91440"/>
+            <a:ext cx="105918" cy="89916"/>
           </a:xfrm>
           <a:prstGeom prst="rect">
             <a:avLst/>
@@ -5084,34 +3984,14 @@
       </p:sp>
       <p:sp>
         <p:nvSpPr>
-          <p:cNvPr id="4" name="Arial_6pt_sp1__c7.20_t6.96__textBoxMarker"/>
-          <p:cNvSpPr/>
-          <p:nvPr/>
-        </p:nvSpPr>
-        <p:spPr>
-          <a:xfrm>
-            <a:off x="365760" y="803402"/>
-            <a:ext cx="105918" cy="12700"/>
-          </a:xfrm>
-          <a:prstGeom prst="rect">
-            <a:avLst/>
-          </a:prstGeom>
-          <a:solidFill>
-            <a:srgbClr val="0000FF"/>
-          </a:solidFill>
-          <a:ln/>
-        </p:spPr>
-      </p:sp>
-      <p:sp>
-        <p:nvSpPr>
-          <p:cNvPr id="5" name="Arial_6pt_sp1_25__c9.00_t8.12"/>
+          <p:cNvPr id="4" name="Arial_6pt_sp1_25__c9.00_t8.12"/>
           <p:cNvSpPr/>
           <p:nvPr/>
         </p:nvSpPr>
         <p:spPr>
           <a:xfrm>
             <a:off x="2299208" y="721360"/>
-            <a:ext cx="105918" cy="114300"/>
+            <a:ext cx="105918" cy="103124"/>
           </a:xfrm>
           <a:prstGeom prst="rect">
             <a:avLst/>
@@ -5153,34 +4033,14 @@
       </p:sp>
       <p:sp>
         <p:nvSpPr>
-          <p:cNvPr id="6" name="Arial_6pt_sp1_25__c9.00_t8.12__textBoxMarker"/>
-          <p:cNvSpPr/>
-          <p:nvPr/>
-        </p:nvSpPr>
-        <p:spPr>
-          <a:xfrm>
-            <a:off x="2299208" y="818134"/>
-            <a:ext cx="105918" cy="12700"/>
-          </a:xfrm>
-          <a:prstGeom prst="rect">
-            <a:avLst/>
-          </a:prstGeom>
-          <a:solidFill>
-            <a:srgbClr val="0000FF"/>
-          </a:solidFill>
-          <a:ln/>
-        </p:spPr>
-      </p:sp>
-      <p:sp>
-        <p:nvSpPr>
-          <p:cNvPr id="7" name="Arial_6pt_sp1_5__c10.80_t9.47"/>
+          <p:cNvPr id="5" name="Arial_6pt_sp1_5__c10.80_t9.47"/>
           <p:cNvSpPr/>
           <p:nvPr/>
         </p:nvSpPr>
         <p:spPr>
           <a:xfrm>
             <a:off x="4232656" y="721360"/>
-            <a:ext cx="105918" cy="137160"/>
+            <a:ext cx="105918" cy="120269"/>
           </a:xfrm>
           <a:prstGeom prst="rect">
             <a:avLst/>
@@ -5222,34 +4082,14 @@
       </p:sp>
       <p:sp>
         <p:nvSpPr>
-          <p:cNvPr id="8" name="Arial_6pt_sp1_5__c10.80_t9.47__textBoxMarker"/>
-          <p:cNvSpPr/>
-          <p:nvPr/>
-        </p:nvSpPr>
-        <p:spPr>
-          <a:xfrm>
-            <a:off x="4232656" y="835279"/>
-            <a:ext cx="105918" cy="12700"/>
-          </a:xfrm>
-          <a:prstGeom prst="rect">
-            <a:avLst/>
-          </a:prstGeom>
-          <a:solidFill>
-            <a:srgbClr val="0000FF"/>
-          </a:solidFill>
-          <a:ln/>
-        </p:spPr>
-      </p:sp>
-      <p:sp>
-        <p:nvSpPr>
-          <p:cNvPr id="9" name="Arial_6pt_sp1_75__c12.60_t10.82"/>
+          <p:cNvPr id="6" name="Arial_6pt_sp1_75__c12.60_t10.82"/>
           <p:cNvSpPr/>
           <p:nvPr/>
         </p:nvSpPr>
         <p:spPr>
           <a:xfrm>
             <a:off x="6166104" y="721360"/>
-            <a:ext cx="105918" cy="160020"/>
+            <a:ext cx="105918" cy="137414"/>
           </a:xfrm>
           <a:prstGeom prst="rect">
             <a:avLst/>
@@ -5291,34 +4131,14 @@
       </p:sp>
       <p:sp>
         <p:nvSpPr>
-          <p:cNvPr id="10" name="Arial_6pt_sp1_75__c12.60_t10.82__textBoxMarker"/>
-          <p:cNvSpPr/>
-          <p:nvPr/>
-        </p:nvSpPr>
-        <p:spPr>
-          <a:xfrm>
-            <a:off x="6166104" y="852424"/>
-            <a:ext cx="105918" cy="12700"/>
-          </a:xfrm>
-          <a:prstGeom prst="rect">
-            <a:avLst/>
-          </a:prstGeom>
-          <a:solidFill>
-            <a:srgbClr val="0000FF"/>
-          </a:solidFill>
-          <a:ln/>
-        </p:spPr>
-      </p:sp>
-      <p:sp>
-        <p:nvSpPr>
-          <p:cNvPr id="11" name="Arial_6pt_sp2__c14.40_t12.17"/>
+          <p:cNvPr id="7" name="Arial_6pt_sp2__c14.40_t12.17"/>
           <p:cNvSpPr/>
           <p:nvPr/>
         </p:nvSpPr>
         <p:spPr>
           <a:xfrm>
             <a:off x="8099552" y="721360"/>
-            <a:ext cx="105918" cy="182880"/>
+            <a:ext cx="105918" cy="154559"/>
           </a:xfrm>
           <a:prstGeom prst="rect">
             <a:avLst/>
@@ -5360,34 +4180,14 @@
       </p:sp>
       <p:sp>
         <p:nvSpPr>
-          <p:cNvPr id="12" name="Arial_6pt_sp2__c14.40_t12.17__textBoxMarker"/>
-          <p:cNvSpPr/>
-          <p:nvPr/>
-        </p:nvSpPr>
-        <p:spPr>
-          <a:xfrm>
-            <a:off x="8099552" y="869569"/>
-            <a:ext cx="105918" cy="12700"/>
-          </a:xfrm>
-          <a:prstGeom prst="rect">
-            <a:avLst/>
-          </a:prstGeom>
-          <a:solidFill>
-            <a:srgbClr val="0000FF"/>
-          </a:solidFill>
-          <a:ln/>
-        </p:spPr>
-      </p:sp>
-      <p:sp>
-        <p:nvSpPr>
-          <p:cNvPr id="13" name="Arial_8pt_sp1__c9.60_t9.28"/>
-          <p:cNvSpPr/>
-          <p:nvPr/>
-        </p:nvSpPr>
-        <p:spPr>
-          <a:xfrm>
-            <a:off x="365760" y="1005840"/>
-            <a:ext cx="141224" cy="121920"/>
+          <p:cNvPr id="8" name="Arial_8pt_sp1__c9.60_t9.44"/>
+          <p:cNvSpPr/>
+          <p:nvPr/>
+        </p:nvSpPr>
+        <p:spPr>
+          <a:xfrm>
+            <a:off x="365760" y="977519"/>
+            <a:ext cx="141224" cy="119888"/>
           </a:xfrm>
           <a:prstGeom prst="rect">
             <a:avLst/>
@@ -5429,34 +4229,14 @@
       </p:sp>
       <p:sp>
         <p:nvSpPr>
-          <p:cNvPr id="14" name="Arial_8pt_sp1__c9.60_t9.28__textBoxMarker"/>
-          <p:cNvSpPr/>
-          <p:nvPr/>
-        </p:nvSpPr>
-        <p:spPr>
-          <a:xfrm>
-            <a:off x="365760" y="1117346"/>
-            <a:ext cx="141224" cy="12700"/>
-          </a:xfrm>
-          <a:prstGeom prst="rect">
-            <a:avLst/>
-          </a:prstGeom>
-          <a:solidFill>
-            <a:srgbClr val="0000FF"/>
-          </a:solidFill>
-          <a:ln/>
-        </p:spPr>
-      </p:sp>
-      <p:sp>
-        <p:nvSpPr>
-          <p:cNvPr id="15" name="Arial_8pt_sp1_25__c12.00_t10.83"/>
-          <p:cNvSpPr/>
-          <p:nvPr/>
-        </p:nvSpPr>
-        <p:spPr>
-          <a:xfrm>
-            <a:off x="2299208" y="1005840"/>
-            <a:ext cx="141224" cy="152400"/>
+          <p:cNvPr id="9" name="Arial_8pt_sp1_25__c12.00_t10.83"/>
+          <p:cNvSpPr/>
+          <p:nvPr/>
+        </p:nvSpPr>
+        <p:spPr>
+          <a:xfrm>
+            <a:off x="2299208" y="977519"/>
+            <a:ext cx="141224" cy="137541"/>
           </a:xfrm>
           <a:prstGeom prst="rect">
             <a:avLst/>
@@ -5498,34 +4278,14 @@
       </p:sp>
       <p:sp>
         <p:nvSpPr>
-          <p:cNvPr id="16" name="Arial_8pt_sp1_25__c12.00_t10.83__textBoxMarker"/>
-          <p:cNvSpPr/>
-          <p:nvPr/>
-        </p:nvSpPr>
-        <p:spPr>
-          <a:xfrm>
-            <a:off x="2299208" y="1137031"/>
-            <a:ext cx="141224" cy="12700"/>
-          </a:xfrm>
-          <a:prstGeom prst="rect">
-            <a:avLst/>
-          </a:prstGeom>
-          <a:solidFill>
-            <a:srgbClr val="0000FF"/>
-          </a:solidFill>
-          <a:ln/>
-        </p:spPr>
-      </p:sp>
-      <p:sp>
-        <p:nvSpPr>
-          <p:cNvPr id="17" name="Arial_8pt_sp1_5__c14.40_t12.63"/>
-          <p:cNvSpPr/>
-          <p:nvPr/>
-        </p:nvSpPr>
-        <p:spPr>
-          <a:xfrm>
-            <a:off x="4232656" y="1005840"/>
-            <a:ext cx="141224" cy="182880"/>
+          <p:cNvPr id="10" name="Arial_8pt_sp1_5__c14.40_t12.63"/>
+          <p:cNvSpPr/>
+          <p:nvPr/>
+        </p:nvSpPr>
+        <p:spPr>
+          <a:xfrm>
+            <a:off x="4232656" y="977519"/>
+            <a:ext cx="141224" cy="160401"/>
           </a:xfrm>
           <a:prstGeom prst="rect">
             <a:avLst/>
@@ -5567,34 +4327,14 @@
       </p:sp>
       <p:sp>
         <p:nvSpPr>
-          <p:cNvPr id="18" name="Arial_8pt_sp1_5__c14.40_t12.63__textBoxMarker"/>
-          <p:cNvSpPr/>
-          <p:nvPr/>
-        </p:nvSpPr>
-        <p:spPr>
-          <a:xfrm>
-            <a:off x="4232656" y="1159891"/>
-            <a:ext cx="141224" cy="12700"/>
-          </a:xfrm>
-          <a:prstGeom prst="rect">
-            <a:avLst/>
-          </a:prstGeom>
-          <a:solidFill>
-            <a:srgbClr val="0000FF"/>
-          </a:solidFill>
-          <a:ln/>
-        </p:spPr>
-      </p:sp>
-      <p:sp>
-        <p:nvSpPr>
-          <p:cNvPr id="19" name="Arial_8pt_sp1_75__c16.80_t14.43"/>
-          <p:cNvSpPr/>
-          <p:nvPr/>
-        </p:nvSpPr>
-        <p:spPr>
-          <a:xfrm>
-            <a:off x="6166104" y="1005840"/>
-            <a:ext cx="141224" cy="213360"/>
+          <p:cNvPr id="11" name="Arial_8pt_sp1_75__c16.80_t14.43"/>
+          <p:cNvSpPr/>
+          <p:nvPr/>
+        </p:nvSpPr>
+        <p:spPr>
+          <a:xfrm>
+            <a:off x="6166104" y="977519"/>
+            <a:ext cx="141224" cy="183261"/>
           </a:xfrm>
           <a:prstGeom prst="rect">
             <a:avLst/>
@@ -5636,34 +4376,14 @@
       </p:sp>
       <p:sp>
         <p:nvSpPr>
-          <p:cNvPr id="20" name="Arial_8pt_sp1_75__c16.80_t14.43__textBoxMarker"/>
-          <p:cNvSpPr/>
-          <p:nvPr/>
-        </p:nvSpPr>
-        <p:spPr>
-          <a:xfrm>
-            <a:off x="6166104" y="1182751"/>
-            <a:ext cx="141224" cy="12700"/>
-          </a:xfrm>
-          <a:prstGeom prst="rect">
-            <a:avLst/>
-          </a:prstGeom>
-          <a:solidFill>
-            <a:srgbClr val="0000FF"/>
-          </a:solidFill>
-          <a:ln/>
-        </p:spPr>
-      </p:sp>
-      <p:sp>
-        <p:nvSpPr>
-          <p:cNvPr id="21" name="Arial_8pt_sp2__c19.20_t16.23"/>
-          <p:cNvSpPr/>
-          <p:nvPr/>
-        </p:nvSpPr>
-        <p:spPr>
-          <a:xfrm>
-            <a:off x="8099552" y="1005840"/>
-            <a:ext cx="141224" cy="243840"/>
+          <p:cNvPr id="12" name="Arial_8pt_sp2__c19.20_t16.23"/>
+          <p:cNvSpPr/>
+          <p:nvPr/>
+        </p:nvSpPr>
+        <p:spPr>
+          <a:xfrm>
+            <a:off x="8099552" y="977519"/>
+            <a:ext cx="141224" cy="206121"/>
           </a:xfrm>
           <a:prstGeom prst="rect">
             <a:avLst/>
@@ -5705,34 +4425,14 @@
       </p:sp>
       <p:sp>
         <p:nvSpPr>
-          <p:cNvPr id="22" name="Arial_8pt_sp2__c19.20_t16.23__textBoxMarker"/>
-          <p:cNvSpPr/>
-          <p:nvPr/>
-        </p:nvSpPr>
-        <p:spPr>
-          <a:xfrm>
-            <a:off x="8099552" y="1205611"/>
-            <a:ext cx="141224" cy="12700"/>
-          </a:xfrm>
-          <a:prstGeom prst="rect">
-            <a:avLst/>
-          </a:prstGeom>
-          <a:solidFill>
-            <a:srgbClr val="0000FF"/>
-          </a:solidFill>
-          <a:ln/>
-        </p:spPr>
-      </p:sp>
-      <p:sp>
-        <p:nvSpPr>
-          <p:cNvPr id="23" name="Arial_10pt_sp1__c12.00_t11.59"/>
-          <p:cNvSpPr/>
-          <p:nvPr/>
-        </p:nvSpPr>
-        <p:spPr>
-          <a:xfrm>
-            <a:off x="365760" y="1351280"/>
-            <a:ext cx="247142" cy="152400"/>
+          <p:cNvPr id="13" name="Arial_10pt_sp1__c12.00_t11.80"/>
+          <p:cNvSpPr/>
+          <p:nvPr/>
+        </p:nvSpPr>
+        <p:spPr>
+          <a:xfrm>
+            <a:off x="365760" y="1285240"/>
+            <a:ext cx="247142" cy="149860"/>
           </a:xfrm>
           <a:prstGeom prst="rect">
             <a:avLst/>
@@ -5774,34 +4474,14 @@
       </p:sp>
       <p:sp>
         <p:nvSpPr>
-          <p:cNvPr id="24" name="Arial_10pt_sp1__c12.00_t11.59__textBoxMarker"/>
-          <p:cNvSpPr/>
-          <p:nvPr/>
-        </p:nvSpPr>
-        <p:spPr>
-          <a:xfrm>
-            <a:off x="365760" y="1492123"/>
-            <a:ext cx="247142" cy="12700"/>
-          </a:xfrm>
-          <a:prstGeom prst="rect">
-            <a:avLst/>
-          </a:prstGeom>
-          <a:solidFill>
-            <a:srgbClr val="0000FF"/>
-          </a:solidFill>
-          <a:ln/>
-        </p:spPr>
-      </p:sp>
-      <p:sp>
-        <p:nvSpPr>
-          <p:cNvPr id="25" name="Arial_10pt_sp1_25__c15.00_t13.53"/>
-          <p:cNvSpPr/>
-          <p:nvPr/>
-        </p:nvSpPr>
-        <p:spPr>
-          <a:xfrm>
-            <a:off x="2299208" y="1351280"/>
-            <a:ext cx="247142" cy="190500"/>
+          <p:cNvPr id="14" name="Arial_10pt_sp1_25__c15.00_t13.53"/>
+          <p:cNvSpPr/>
+          <p:nvPr/>
+        </p:nvSpPr>
+        <p:spPr>
+          <a:xfrm>
+            <a:off x="2299208" y="1285240"/>
+            <a:ext cx="247142" cy="171831"/>
           </a:xfrm>
           <a:prstGeom prst="rect">
             <a:avLst/>
@@ -5843,34 +4523,14 @@
       </p:sp>
       <p:sp>
         <p:nvSpPr>
-          <p:cNvPr id="26" name="Arial_10pt_sp1_25__c15.00_t13.53__textBoxMarker"/>
-          <p:cNvSpPr/>
-          <p:nvPr/>
-        </p:nvSpPr>
-        <p:spPr>
-          <a:xfrm>
-            <a:off x="2299208" y="1516761"/>
-            <a:ext cx="247142" cy="12700"/>
-          </a:xfrm>
-          <a:prstGeom prst="rect">
-            <a:avLst/>
-          </a:prstGeom>
-          <a:solidFill>
-            <a:srgbClr val="0000FF"/>
-          </a:solidFill>
-          <a:ln/>
-        </p:spPr>
-      </p:sp>
-      <p:sp>
-        <p:nvSpPr>
-          <p:cNvPr id="27" name="Arial_10pt_sp1_5__c18.00_t15.78"/>
-          <p:cNvSpPr/>
-          <p:nvPr/>
-        </p:nvSpPr>
-        <p:spPr>
-          <a:xfrm>
-            <a:off x="4232656" y="1351280"/>
-            <a:ext cx="247142" cy="228600"/>
+          <p:cNvPr id="15" name="Arial_10pt_sp1_5__c18.00_t15.78"/>
+          <p:cNvSpPr/>
+          <p:nvPr/>
+        </p:nvSpPr>
+        <p:spPr>
+          <a:xfrm>
+            <a:off x="4232656" y="1285240"/>
+            <a:ext cx="247142" cy="200406"/>
           </a:xfrm>
           <a:prstGeom prst="rect">
             <a:avLst/>
@@ -5912,34 +4572,14 @@
       </p:sp>
       <p:sp>
         <p:nvSpPr>
-          <p:cNvPr id="28" name="Arial_10pt_sp1_5__c18.00_t15.78__textBoxMarker"/>
-          <p:cNvSpPr/>
-          <p:nvPr/>
-        </p:nvSpPr>
-        <p:spPr>
-          <a:xfrm>
-            <a:off x="4232656" y="1545336"/>
-            <a:ext cx="247142" cy="12700"/>
-          </a:xfrm>
-          <a:prstGeom prst="rect">
-            <a:avLst/>
-          </a:prstGeom>
-          <a:solidFill>
-            <a:srgbClr val="0000FF"/>
-          </a:solidFill>
-          <a:ln/>
-        </p:spPr>
-      </p:sp>
-      <p:sp>
-        <p:nvSpPr>
-          <p:cNvPr id="29" name="Arial_10pt_sp1_75__c21.00_t18.03"/>
-          <p:cNvSpPr/>
-          <p:nvPr/>
-        </p:nvSpPr>
-        <p:spPr>
-          <a:xfrm>
-            <a:off x="6166104" y="1351280"/>
-            <a:ext cx="247142" cy="266700"/>
+          <p:cNvPr id="16" name="Arial_10pt_sp1_75__c21.00_t18.03"/>
+          <p:cNvSpPr/>
+          <p:nvPr/>
+        </p:nvSpPr>
+        <p:spPr>
+          <a:xfrm>
+            <a:off x="6166104" y="1285240"/>
+            <a:ext cx="247142" cy="228981"/>
           </a:xfrm>
           <a:prstGeom prst="rect">
             <a:avLst/>
@@ -5981,34 +4621,14 @@
       </p:sp>
       <p:sp>
         <p:nvSpPr>
-          <p:cNvPr id="30" name="Arial_10pt_sp1_75__c21.00_t18.03__textBoxMarker"/>
-          <p:cNvSpPr/>
-          <p:nvPr/>
-        </p:nvSpPr>
-        <p:spPr>
-          <a:xfrm>
-            <a:off x="6166104" y="1573911"/>
-            <a:ext cx="247142" cy="12700"/>
-          </a:xfrm>
-          <a:prstGeom prst="rect">
-            <a:avLst/>
-          </a:prstGeom>
-          <a:solidFill>
-            <a:srgbClr val="0000FF"/>
-          </a:solidFill>
-          <a:ln/>
-        </p:spPr>
-      </p:sp>
-      <p:sp>
-        <p:nvSpPr>
-          <p:cNvPr id="31" name="Arial_10pt_sp2__c24.00_t20.28"/>
-          <p:cNvSpPr/>
-          <p:nvPr/>
-        </p:nvSpPr>
-        <p:spPr>
-          <a:xfrm>
-            <a:off x="8099552" y="1351280"/>
-            <a:ext cx="247142" cy="304800"/>
+          <p:cNvPr id="17" name="Arial_10pt_sp2__c24.00_t20.28"/>
+          <p:cNvSpPr/>
+          <p:nvPr/>
+        </p:nvSpPr>
+        <p:spPr>
+          <a:xfrm>
+            <a:off x="8099552" y="1285240"/>
+            <a:ext cx="247142" cy="257556"/>
           </a:xfrm>
           <a:prstGeom prst="rect">
             <a:avLst/>
@@ -6050,34 +4670,14 @@
       </p:sp>
       <p:sp>
         <p:nvSpPr>
-          <p:cNvPr id="32" name="Arial_10pt_sp2__c24.00_t20.28__textBoxMarker"/>
-          <p:cNvSpPr/>
-          <p:nvPr/>
-        </p:nvSpPr>
-        <p:spPr>
-          <a:xfrm>
-            <a:off x="8099552" y="1602486"/>
-            <a:ext cx="247142" cy="12700"/>
-          </a:xfrm>
-          <a:prstGeom prst="rect">
-            <a:avLst/>
-          </a:prstGeom>
-          <a:solidFill>
-            <a:srgbClr val="0000FF"/>
-          </a:solidFill>
-          <a:ln/>
-        </p:spPr>
-      </p:sp>
-      <p:sp>
-        <p:nvSpPr>
-          <p:cNvPr id="33" name="Arial_12pt_sp1__c14.40_t13.91"/>
-          <p:cNvSpPr/>
-          <p:nvPr/>
-        </p:nvSpPr>
-        <p:spPr>
-          <a:xfrm>
-            <a:off x="365760" y="1757680"/>
-            <a:ext cx="296672" cy="182880"/>
+          <p:cNvPr id="18" name="Arial_12pt_sp1__c14.40_t14.16"/>
+          <p:cNvSpPr/>
+          <p:nvPr/>
+        </p:nvSpPr>
+        <p:spPr>
+          <a:xfrm>
+            <a:off x="365760" y="1644396"/>
+            <a:ext cx="296672" cy="179832"/>
           </a:xfrm>
           <a:prstGeom prst="rect">
             <a:avLst/>
@@ -6119,34 +4719,14 @@
       </p:sp>
       <p:sp>
         <p:nvSpPr>
-          <p:cNvPr id="34" name="Arial_12pt_sp1__c14.40_t13.91__textBoxMarker"/>
-          <p:cNvSpPr/>
-          <p:nvPr/>
-        </p:nvSpPr>
-        <p:spPr>
-          <a:xfrm>
-            <a:off x="365760" y="1927987"/>
-            <a:ext cx="296672" cy="12700"/>
-          </a:xfrm>
-          <a:prstGeom prst="rect">
-            <a:avLst/>
-          </a:prstGeom>
-          <a:solidFill>
-            <a:srgbClr val="0000FF"/>
-          </a:solidFill>
-          <a:ln/>
-        </p:spPr>
-      </p:sp>
-      <p:sp>
-        <p:nvSpPr>
-          <p:cNvPr id="35" name="Arial_12pt_sp1_25__c18.00_t16.24"/>
-          <p:cNvSpPr/>
-          <p:nvPr/>
-        </p:nvSpPr>
-        <p:spPr>
-          <a:xfrm>
-            <a:off x="2299208" y="1757680"/>
-            <a:ext cx="296672" cy="228600"/>
+          <p:cNvPr id="19" name="Arial_12pt_sp1_25__c18.00_t16.24"/>
+          <p:cNvSpPr/>
+          <p:nvPr/>
+        </p:nvSpPr>
+        <p:spPr>
+          <a:xfrm>
+            <a:off x="2299208" y="1644396"/>
+            <a:ext cx="296672" cy="206248"/>
           </a:xfrm>
           <a:prstGeom prst="rect">
             <a:avLst/>
@@ -6188,34 +4768,14 @@
       </p:sp>
       <p:sp>
         <p:nvSpPr>
-          <p:cNvPr id="36" name="Arial_12pt_sp1_25__c18.00_t16.24__textBoxMarker"/>
-          <p:cNvSpPr/>
-          <p:nvPr/>
-        </p:nvSpPr>
-        <p:spPr>
-          <a:xfrm>
-            <a:off x="2299208" y="1957578"/>
-            <a:ext cx="296672" cy="12700"/>
-          </a:xfrm>
-          <a:prstGeom prst="rect">
-            <a:avLst/>
-          </a:prstGeom>
-          <a:solidFill>
-            <a:srgbClr val="0000FF"/>
-          </a:solidFill>
-          <a:ln/>
-        </p:spPr>
-      </p:sp>
-      <p:sp>
-        <p:nvSpPr>
-          <p:cNvPr id="37" name="Arial_12pt_sp1_5__c21.60_t18.94"/>
-          <p:cNvSpPr/>
-          <p:nvPr/>
-        </p:nvSpPr>
-        <p:spPr>
-          <a:xfrm>
-            <a:off x="4232656" y="1757680"/>
-            <a:ext cx="296672" cy="274320"/>
+          <p:cNvPr id="20" name="Arial_12pt_sp1_5__c21.60_t18.94"/>
+          <p:cNvSpPr/>
+          <p:nvPr/>
+        </p:nvSpPr>
+        <p:spPr>
+          <a:xfrm>
+            <a:off x="4232656" y="1644396"/>
+            <a:ext cx="296672" cy="240538"/>
           </a:xfrm>
           <a:prstGeom prst="rect">
             <a:avLst/>
@@ -6257,34 +4817,14 @@
       </p:sp>
       <p:sp>
         <p:nvSpPr>
-          <p:cNvPr id="38" name="Arial_12pt_sp1_5__c21.60_t18.94__textBoxMarker"/>
-          <p:cNvSpPr/>
-          <p:nvPr/>
-        </p:nvSpPr>
-        <p:spPr>
-          <a:xfrm>
-            <a:off x="4232656" y="1991868"/>
-            <a:ext cx="296672" cy="12700"/>
-          </a:xfrm>
-          <a:prstGeom prst="rect">
-            <a:avLst/>
-          </a:prstGeom>
-          <a:solidFill>
-            <a:srgbClr val="0000FF"/>
-          </a:solidFill>
-          <a:ln/>
-        </p:spPr>
-      </p:sp>
-      <p:sp>
-        <p:nvSpPr>
-          <p:cNvPr id="39" name="Arial_12pt_sp1_75__c25.20_t21.64"/>
-          <p:cNvSpPr/>
-          <p:nvPr/>
-        </p:nvSpPr>
-        <p:spPr>
-          <a:xfrm>
-            <a:off x="6166104" y="1757680"/>
-            <a:ext cx="296672" cy="320040"/>
+          <p:cNvPr id="21" name="Arial_12pt_sp1_75__c25.20_t21.64"/>
+          <p:cNvSpPr/>
+          <p:nvPr/>
+        </p:nvSpPr>
+        <p:spPr>
+          <a:xfrm>
+            <a:off x="6166104" y="1644396"/>
+            <a:ext cx="296672" cy="274828"/>
           </a:xfrm>
           <a:prstGeom prst="rect">
             <a:avLst/>
@@ -6326,34 +4866,14 @@
       </p:sp>
       <p:sp>
         <p:nvSpPr>
-          <p:cNvPr id="40" name="Arial_12pt_sp1_75__c25.20_t21.64__textBoxMarker"/>
-          <p:cNvSpPr/>
-          <p:nvPr/>
-        </p:nvSpPr>
-        <p:spPr>
-          <a:xfrm>
-            <a:off x="6166104" y="2026158"/>
-            <a:ext cx="296672" cy="12700"/>
-          </a:xfrm>
-          <a:prstGeom prst="rect">
-            <a:avLst/>
-          </a:prstGeom>
-          <a:solidFill>
-            <a:srgbClr val="0000FF"/>
-          </a:solidFill>
-          <a:ln/>
-        </p:spPr>
-      </p:sp>
-      <p:sp>
-        <p:nvSpPr>
-          <p:cNvPr id="41" name="Arial_12pt_sp2__c28.80_t24.34"/>
-          <p:cNvSpPr/>
-          <p:nvPr/>
-        </p:nvSpPr>
-        <p:spPr>
-          <a:xfrm>
-            <a:off x="8099552" y="1757680"/>
-            <a:ext cx="296672" cy="365760"/>
+          <p:cNvPr id="22" name="Arial_12pt_sp2__c28.80_t24.34"/>
+          <p:cNvSpPr/>
+          <p:nvPr/>
+        </p:nvSpPr>
+        <p:spPr>
+          <a:xfrm>
+            <a:off x="8099552" y="1644396"/>
+            <a:ext cx="296672" cy="309118"/>
           </a:xfrm>
           <a:prstGeom prst="rect">
             <a:avLst/>
@@ -6395,34 +4915,14 @@
       </p:sp>
       <p:sp>
         <p:nvSpPr>
-          <p:cNvPr id="42" name="Arial_12pt_sp2__c28.80_t24.34__textBoxMarker"/>
-          <p:cNvSpPr/>
-          <p:nvPr/>
-        </p:nvSpPr>
-        <p:spPr>
-          <a:xfrm>
-            <a:off x="8099552" y="2060448"/>
-            <a:ext cx="296672" cy="12700"/>
-          </a:xfrm>
-          <a:prstGeom prst="rect">
-            <a:avLst/>
-          </a:prstGeom>
-          <a:solidFill>
-            <a:srgbClr val="0000FF"/>
-          </a:solidFill>
-          <a:ln/>
-        </p:spPr>
-      </p:sp>
-      <p:sp>
-        <p:nvSpPr>
-          <p:cNvPr id="43" name="Arial_14pt_sp1__c16.80_t16.23"/>
-          <p:cNvSpPr/>
-          <p:nvPr/>
-        </p:nvSpPr>
-        <p:spPr>
-          <a:xfrm>
-            <a:off x="365760" y="2225040"/>
-            <a:ext cx="346075" cy="213360"/>
+          <p:cNvPr id="23" name="Arial_14pt_sp1__c16.80_t16.52"/>
+          <p:cNvSpPr/>
+          <p:nvPr/>
+        </p:nvSpPr>
+        <p:spPr>
+          <a:xfrm>
+            <a:off x="365760" y="2055114"/>
+            <a:ext cx="346075" cy="209804"/>
           </a:xfrm>
           <a:prstGeom prst="rect">
             <a:avLst/>
@@ -6464,34 +4964,14 @@
       </p:sp>
       <p:sp>
         <p:nvSpPr>
-          <p:cNvPr id="44" name="Arial_14pt_sp1__c16.80_t16.23__textBoxMarker"/>
-          <p:cNvSpPr/>
-          <p:nvPr/>
-        </p:nvSpPr>
-        <p:spPr>
-          <a:xfrm>
-            <a:off x="365760" y="2424811"/>
-            <a:ext cx="346075" cy="12700"/>
-          </a:xfrm>
-          <a:prstGeom prst="rect">
-            <a:avLst/>
-          </a:prstGeom>
-          <a:solidFill>
-            <a:srgbClr val="0000FF"/>
-          </a:solidFill>
-          <a:ln/>
-        </p:spPr>
-      </p:sp>
-      <p:sp>
-        <p:nvSpPr>
-          <p:cNvPr id="45" name="Arial_14pt_sp1_25__c21.00_t18.95"/>
-          <p:cNvSpPr/>
-          <p:nvPr/>
-        </p:nvSpPr>
-        <p:spPr>
-          <a:xfrm>
-            <a:off x="2299208" y="2225040"/>
-            <a:ext cx="346075" cy="266700"/>
+          <p:cNvPr id="24" name="Arial_14pt_sp1_25__c21.00_t18.95"/>
+          <p:cNvSpPr/>
+          <p:nvPr/>
+        </p:nvSpPr>
+        <p:spPr>
+          <a:xfrm>
+            <a:off x="2299208" y="2055114"/>
+            <a:ext cx="346075" cy="240665"/>
           </a:xfrm>
           <a:prstGeom prst="rect">
             <a:avLst/>
@@ -6533,34 +5013,14 @@
       </p:sp>
       <p:sp>
         <p:nvSpPr>
-          <p:cNvPr id="46" name="Arial_14pt_sp1_25__c21.00_t18.95__textBoxMarker"/>
-          <p:cNvSpPr/>
-          <p:nvPr/>
-        </p:nvSpPr>
-        <p:spPr>
-          <a:xfrm>
-            <a:off x="2299208" y="2459355"/>
-            <a:ext cx="346075" cy="12700"/>
-          </a:xfrm>
-          <a:prstGeom prst="rect">
-            <a:avLst/>
-          </a:prstGeom>
-          <a:solidFill>
-            <a:srgbClr val="0000FF"/>
-          </a:solidFill>
-          <a:ln/>
-        </p:spPr>
-      </p:sp>
-      <p:sp>
-        <p:nvSpPr>
-          <p:cNvPr id="47" name="Arial_14pt_sp1_5__c25.20_t22.10"/>
-          <p:cNvSpPr/>
-          <p:nvPr/>
-        </p:nvSpPr>
-        <p:spPr>
-          <a:xfrm>
-            <a:off x="4232656" y="2225040"/>
-            <a:ext cx="346075" cy="320040"/>
+          <p:cNvPr id="25" name="Arial_14pt_sp1_5__c25.20_t22.10"/>
+          <p:cNvSpPr/>
+          <p:nvPr/>
+        </p:nvSpPr>
+        <p:spPr>
+          <a:xfrm>
+            <a:off x="4232656" y="2055114"/>
+            <a:ext cx="346075" cy="280670"/>
           </a:xfrm>
           <a:prstGeom prst="rect">
             <a:avLst/>
@@ -6602,34 +5062,14 @@
       </p:sp>
       <p:sp>
         <p:nvSpPr>
-          <p:cNvPr id="48" name="Arial_14pt_sp1_5__c25.20_t22.10__textBoxMarker"/>
-          <p:cNvSpPr/>
-          <p:nvPr/>
-        </p:nvSpPr>
-        <p:spPr>
-          <a:xfrm>
-            <a:off x="4232656" y="2499360"/>
-            <a:ext cx="346075" cy="12700"/>
-          </a:xfrm>
-          <a:prstGeom prst="rect">
-            <a:avLst/>
-          </a:prstGeom>
-          <a:solidFill>
-            <a:srgbClr val="0000FF"/>
-          </a:solidFill>
-          <a:ln/>
-        </p:spPr>
-      </p:sp>
-      <p:sp>
-        <p:nvSpPr>
-          <p:cNvPr id="49" name="Arial_14pt_sp1_75__c29.40_t25.25"/>
-          <p:cNvSpPr/>
-          <p:nvPr/>
-        </p:nvSpPr>
-        <p:spPr>
-          <a:xfrm>
-            <a:off x="6166104" y="2225040"/>
-            <a:ext cx="346075" cy="373380"/>
+          <p:cNvPr id="26" name="Arial_14pt_sp1_75__c29.40_t25.25"/>
+          <p:cNvSpPr/>
+          <p:nvPr/>
+        </p:nvSpPr>
+        <p:spPr>
+          <a:xfrm>
+            <a:off x="6166104" y="2055114"/>
+            <a:ext cx="346075" cy="320675"/>
           </a:xfrm>
           <a:prstGeom prst="rect">
             <a:avLst/>
@@ -6671,34 +5111,14 @@
       </p:sp>
       <p:sp>
         <p:nvSpPr>
-          <p:cNvPr id="50" name="Arial_14pt_sp1_75__c29.40_t25.25__textBoxMarker"/>
-          <p:cNvSpPr/>
-          <p:nvPr/>
-        </p:nvSpPr>
-        <p:spPr>
-          <a:xfrm>
-            <a:off x="6166104" y="2539365"/>
-            <a:ext cx="346075" cy="12700"/>
-          </a:xfrm>
-          <a:prstGeom prst="rect">
-            <a:avLst/>
-          </a:prstGeom>
-          <a:solidFill>
-            <a:srgbClr val="0000FF"/>
-          </a:solidFill>
-          <a:ln/>
-        </p:spPr>
-      </p:sp>
-      <p:sp>
-        <p:nvSpPr>
-          <p:cNvPr id="51" name="Arial_14pt_sp2__c33.60_t28.40"/>
-          <p:cNvSpPr/>
-          <p:nvPr/>
-        </p:nvSpPr>
-        <p:spPr>
-          <a:xfrm>
-            <a:off x="8099552" y="2225040"/>
-            <a:ext cx="346075" cy="426720"/>
+          <p:cNvPr id="27" name="Arial_14pt_sp2__c33.60_t28.40"/>
+          <p:cNvSpPr/>
+          <p:nvPr/>
+        </p:nvSpPr>
+        <p:spPr>
+          <a:xfrm>
+            <a:off x="8099552" y="2055114"/>
+            <a:ext cx="346075" cy="360680"/>
           </a:xfrm>
           <a:prstGeom prst="rect">
             <a:avLst/>
@@ -6740,34 +5160,14 @@
       </p:sp>
       <p:sp>
         <p:nvSpPr>
-          <p:cNvPr id="52" name="Arial_14pt_sp2__c33.60_t28.40__textBoxMarker"/>
-          <p:cNvSpPr/>
-          <p:nvPr/>
-        </p:nvSpPr>
-        <p:spPr>
-          <a:xfrm>
-            <a:off x="8099552" y="2579370"/>
-            <a:ext cx="346075" cy="12700"/>
-          </a:xfrm>
-          <a:prstGeom prst="rect">
-            <a:avLst/>
-          </a:prstGeom>
-          <a:solidFill>
-            <a:srgbClr val="0000FF"/>
-          </a:solidFill>
-          <a:ln/>
-        </p:spPr>
-      </p:sp>
-      <p:sp>
-        <p:nvSpPr>
-          <p:cNvPr id="53" name="Arial_18pt_sp1__c21.60_t20.87"/>
-          <p:cNvSpPr/>
-          <p:nvPr/>
-        </p:nvSpPr>
-        <p:spPr>
-          <a:xfrm>
-            <a:off x="365760" y="2753360"/>
-            <a:ext cx="444881" cy="274320"/>
+          <p:cNvPr id="28" name="Arial_18pt_sp1__c21.60_t21.24"/>
+          <p:cNvSpPr/>
+          <p:nvPr/>
+        </p:nvSpPr>
+        <p:spPr>
+          <a:xfrm>
+            <a:off x="365760" y="2517394"/>
+            <a:ext cx="444881" cy="269748"/>
           </a:xfrm>
           <a:prstGeom prst="rect">
             <a:avLst/>
@@ -6809,34 +5209,14 @@
       </p:sp>
       <p:sp>
         <p:nvSpPr>
-          <p:cNvPr id="54" name="Arial_18pt_sp1__c21.60_t20.87__textBoxMarker"/>
-          <p:cNvSpPr/>
-          <p:nvPr/>
-        </p:nvSpPr>
-        <p:spPr>
-          <a:xfrm>
-            <a:off x="365760" y="3012059"/>
-            <a:ext cx="444881" cy="12700"/>
-          </a:xfrm>
-          <a:prstGeom prst="rect">
-            <a:avLst/>
-          </a:prstGeom>
-          <a:solidFill>
-            <a:srgbClr val="0000FF"/>
-          </a:solidFill>
-          <a:ln/>
-        </p:spPr>
-      </p:sp>
-      <p:sp>
-        <p:nvSpPr>
-          <p:cNvPr id="55" name="Arial_18pt_sp1_25__c27.00_t24.36"/>
-          <p:cNvSpPr/>
-          <p:nvPr/>
-        </p:nvSpPr>
-        <p:spPr>
-          <a:xfrm>
-            <a:off x="2299208" y="2753360"/>
-            <a:ext cx="444881" cy="342900"/>
+          <p:cNvPr id="29" name="Arial_18pt_sp1_25__c27.00_t24.36"/>
+          <p:cNvSpPr/>
+          <p:nvPr/>
+        </p:nvSpPr>
+        <p:spPr>
+          <a:xfrm>
+            <a:off x="2299208" y="2517394"/>
+            <a:ext cx="444881" cy="309372"/>
           </a:xfrm>
           <a:prstGeom prst="rect">
             <a:avLst/>
@@ -6878,34 +5258,14 @@
       </p:sp>
       <p:sp>
         <p:nvSpPr>
-          <p:cNvPr id="56" name="Arial_18pt_sp1_25__c27.00_t24.36__textBoxMarker"/>
-          <p:cNvSpPr/>
-          <p:nvPr/>
-        </p:nvSpPr>
-        <p:spPr>
-          <a:xfrm>
-            <a:off x="2299208" y="3056382"/>
-            <a:ext cx="444881" cy="12700"/>
-          </a:xfrm>
-          <a:prstGeom prst="rect">
-            <a:avLst/>
-          </a:prstGeom>
-          <a:solidFill>
-            <a:srgbClr val="0000FF"/>
-          </a:solidFill>
-          <a:ln/>
-        </p:spPr>
-      </p:sp>
-      <p:sp>
-        <p:nvSpPr>
-          <p:cNvPr id="57" name="Arial_18pt_sp1_5__c32.40_t28.41"/>
-          <p:cNvSpPr/>
-          <p:nvPr/>
-        </p:nvSpPr>
-        <p:spPr>
-          <a:xfrm>
-            <a:off x="4232656" y="2753360"/>
-            <a:ext cx="444881" cy="411480"/>
+          <p:cNvPr id="30" name="Arial_18pt_sp1_5__c32.40_t28.41"/>
+          <p:cNvSpPr/>
+          <p:nvPr/>
+        </p:nvSpPr>
+        <p:spPr>
+          <a:xfrm>
+            <a:off x="4232656" y="2517394"/>
+            <a:ext cx="444881" cy="360807"/>
           </a:xfrm>
           <a:prstGeom prst="rect">
             <a:avLst/>
@@ -6947,34 +5307,14 @@
       </p:sp>
       <p:sp>
         <p:nvSpPr>
-          <p:cNvPr id="58" name="Arial_18pt_sp1_5__c32.40_t28.41__textBoxMarker"/>
-          <p:cNvSpPr/>
-          <p:nvPr/>
-        </p:nvSpPr>
-        <p:spPr>
-          <a:xfrm>
-            <a:off x="4232656" y="3107817"/>
-            <a:ext cx="444881" cy="12700"/>
-          </a:xfrm>
-          <a:prstGeom prst="rect">
-            <a:avLst/>
-          </a:prstGeom>
-          <a:solidFill>
-            <a:srgbClr val="0000FF"/>
-          </a:solidFill>
-          <a:ln/>
-        </p:spPr>
-      </p:sp>
-      <p:sp>
-        <p:nvSpPr>
-          <p:cNvPr id="59" name="Arial_18pt_sp1_75__c37.80_t32.46"/>
-          <p:cNvSpPr/>
-          <p:nvPr/>
-        </p:nvSpPr>
-        <p:spPr>
-          <a:xfrm>
-            <a:off x="6166104" y="2753360"/>
-            <a:ext cx="444881" cy="480060"/>
+          <p:cNvPr id="31" name="Arial_18pt_sp1_75__c37.80_t32.46"/>
+          <p:cNvSpPr/>
+          <p:nvPr/>
+        </p:nvSpPr>
+        <p:spPr>
+          <a:xfrm>
+            <a:off x="6166104" y="2517394"/>
+            <a:ext cx="444881" cy="412242"/>
           </a:xfrm>
           <a:prstGeom prst="rect">
             <a:avLst/>
@@ -7016,34 +5356,14 @@
       </p:sp>
       <p:sp>
         <p:nvSpPr>
-          <p:cNvPr id="60" name="Arial_18pt_sp1_75__c37.80_t32.46__textBoxMarker"/>
-          <p:cNvSpPr/>
-          <p:nvPr/>
-        </p:nvSpPr>
-        <p:spPr>
-          <a:xfrm>
-            <a:off x="6166104" y="3159252"/>
-            <a:ext cx="444881" cy="12700"/>
-          </a:xfrm>
-          <a:prstGeom prst="rect">
-            <a:avLst/>
-          </a:prstGeom>
-          <a:solidFill>
-            <a:srgbClr val="0000FF"/>
-          </a:solidFill>
-          <a:ln/>
-        </p:spPr>
-      </p:sp>
-      <p:sp>
-        <p:nvSpPr>
-          <p:cNvPr id="61" name="Arial_18pt_sp2__c43.20_t36.51"/>
-          <p:cNvSpPr/>
-          <p:nvPr/>
-        </p:nvSpPr>
-        <p:spPr>
-          <a:xfrm>
-            <a:off x="8099552" y="2753360"/>
-            <a:ext cx="444881" cy="548640"/>
+          <p:cNvPr id="32" name="Arial_18pt_sp2__c43.20_t36.51"/>
+          <p:cNvSpPr/>
+          <p:nvPr/>
+        </p:nvSpPr>
+        <p:spPr>
+          <a:xfrm>
+            <a:off x="8099552" y="2517394"/>
+            <a:ext cx="444881" cy="463677"/>
           </a:xfrm>
           <a:prstGeom prst="rect">
             <a:avLst/>
@@ -7085,34 +5405,14 @@
       </p:sp>
       <p:sp>
         <p:nvSpPr>
-          <p:cNvPr id="62" name="Arial_18pt_sp2__c43.20_t36.51__textBoxMarker"/>
-          <p:cNvSpPr/>
-          <p:nvPr/>
-        </p:nvSpPr>
-        <p:spPr>
-          <a:xfrm>
-            <a:off x="8099552" y="3210687"/>
-            <a:ext cx="444881" cy="12700"/>
-          </a:xfrm>
-          <a:prstGeom prst="rect">
-            <a:avLst/>
-          </a:prstGeom>
-          <a:solidFill>
-            <a:srgbClr val="0000FF"/>
-          </a:solidFill>
-          <a:ln/>
-        </p:spPr>
-      </p:sp>
-      <p:sp>
-        <p:nvSpPr>
-          <p:cNvPr id="63" name="Arial_24pt_sp1__c28.80_t27.82"/>
-          <p:cNvSpPr/>
-          <p:nvPr/>
-        </p:nvSpPr>
-        <p:spPr>
-          <a:xfrm>
-            <a:off x="365760" y="3403600"/>
-            <a:ext cx="593217" cy="365760"/>
+          <p:cNvPr id="33" name="Arial_24pt_sp1__c28.80_t28.32"/>
+          <p:cNvSpPr/>
+          <p:nvPr/>
+        </p:nvSpPr>
+        <p:spPr>
+          <a:xfrm>
+            <a:off x="365760" y="3082671"/>
+            <a:ext cx="593217" cy="359664"/>
           </a:xfrm>
           <a:prstGeom prst="rect">
             <a:avLst/>
@@ -7154,34 +5454,14 @@
       </p:sp>
       <p:sp>
         <p:nvSpPr>
-          <p:cNvPr id="64" name="Arial_24pt_sp1__c28.80_t27.82__textBoxMarker"/>
-          <p:cNvSpPr/>
-          <p:nvPr/>
-        </p:nvSpPr>
-        <p:spPr>
-          <a:xfrm>
-            <a:off x="365760" y="3750564"/>
-            <a:ext cx="593217" cy="12700"/>
-          </a:xfrm>
-          <a:prstGeom prst="rect">
-            <a:avLst/>
-          </a:prstGeom>
-          <a:solidFill>
-            <a:srgbClr val="0000FF"/>
-          </a:solidFill>
-          <a:ln/>
-        </p:spPr>
-      </p:sp>
-      <p:sp>
-        <p:nvSpPr>
-          <p:cNvPr id="65" name="Arial_24pt_sp1_25__c36.00_t32.48"/>
-          <p:cNvSpPr/>
-          <p:nvPr/>
-        </p:nvSpPr>
-        <p:spPr>
-          <a:xfrm>
-            <a:off x="2299208" y="3403600"/>
-            <a:ext cx="593217" cy="457200"/>
+          <p:cNvPr id="34" name="Arial_24pt_sp1_25__c36.00_t32.48"/>
+          <p:cNvSpPr/>
+          <p:nvPr/>
+        </p:nvSpPr>
+        <p:spPr>
+          <a:xfrm>
+            <a:off x="2299208" y="3082671"/>
+            <a:ext cx="593217" cy="412496"/>
           </a:xfrm>
           <a:prstGeom prst="rect">
             <a:avLst/>
@@ -7223,34 +5503,14 @@
       </p:sp>
       <p:sp>
         <p:nvSpPr>
-          <p:cNvPr id="66" name="Arial_24pt_sp1_25__c36.00_t32.48__textBoxMarker"/>
-          <p:cNvSpPr/>
-          <p:nvPr/>
-        </p:nvSpPr>
-        <p:spPr>
-          <a:xfrm>
-            <a:off x="2299208" y="3809746"/>
-            <a:ext cx="593217" cy="12700"/>
-          </a:xfrm>
-          <a:prstGeom prst="rect">
-            <a:avLst/>
-          </a:prstGeom>
-          <a:solidFill>
-            <a:srgbClr val="0000FF"/>
-          </a:solidFill>
-          <a:ln/>
-        </p:spPr>
-      </p:sp>
-      <p:sp>
-        <p:nvSpPr>
-          <p:cNvPr id="67" name="Arial_24pt_sp1_5__c43.20_t37.88"/>
-          <p:cNvSpPr/>
-          <p:nvPr/>
-        </p:nvSpPr>
-        <p:spPr>
-          <a:xfrm>
-            <a:off x="4232656" y="3403600"/>
-            <a:ext cx="593217" cy="548640"/>
+          <p:cNvPr id="35" name="Arial_24pt_sp1_5__c43.20_t37.88"/>
+          <p:cNvSpPr/>
+          <p:nvPr/>
+        </p:nvSpPr>
+        <p:spPr>
+          <a:xfrm>
+            <a:off x="4232656" y="3082671"/>
+            <a:ext cx="593217" cy="481076"/>
           </a:xfrm>
           <a:prstGeom prst="rect">
             <a:avLst/>
@@ -7292,34 +5552,14 @@
       </p:sp>
       <p:sp>
         <p:nvSpPr>
-          <p:cNvPr id="68" name="Arial_24pt_sp1_5__c43.20_t37.88__textBoxMarker"/>
-          <p:cNvSpPr/>
-          <p:nvPr/>
-        </p:nvSpPr>
-        <p:spPr>
-          <a:xfrm>
-            <a:off x="4232656" y="3878326"/>
-            <a:ext cx="593217" cy="12700"/>
-          </a:xfrm>
-          <a:prstGeom prst="rect">
-            <a:avLst/>
-          </a:prstGeom>
-          <a:solidFill>
-            <a:srgbClr val="0000FF"/>
-          </a:solidFill>
-          <a:ln/>
-        </p:spPr>
-      </p:sp>
-      <p:sp>
-        <p:nvSpPr>
-          <p:cNvPr id="69" name="Arial_24pt_sp1_75__c50.40_t43.28"/>
-          <p:cNvSpPr/>
-          <p:nvPr/>
-        </p:nvSpPr>
-        <p:spPr>
-          <a:xfrm>
-            <a:off x="6166104" y="3403600"/>
-            <a:ext cx="593217" cy="640080"/>
+          <p:cNvPr id="36" name="Arial_24pt_sp1_75__c50.40_t43.28"/>
+          <p:cNvSpPr/>
+          <p:nvPr/>
+        </p:nvSpPr>
+        <p:spPr>
+          <a:xfrm>
+            <a:off x="6166104" y="3082671"/>
+            <a:ext cx="593217" cy="549656"/>
           </a:xfrm>
           <a:prstGeom prst="rect">
             <a:avLst/>
@@ -7361,34 +5601,14 @@
       </p:sp>
       <p:sp>
         <p:nvSpPr>
-          <p:cNvPr id="70" name="Arial_24pt_sp1_75__c50.40_t43.28__textBoxMarker"/>
-          <p:cNvSpPr/>
-          <p:nvPr/>
-        </p:nvSpPr>
-        <p:spPr>
-          <a:xfrm>
-            <a:off x="6166104" y="3946906"/>
-            <a:ext cx="593217" cy="12700"/>
-          </a:xfrm>
-          <a:prstGeom prst="rect">
-            <a:avLst/>
-          </a:prstGeom>
-          <a:solidFill>
-            <a:srgbClr val="0000FF"/>
-          </a:solidFill>
-          <a:ln/>
-        </p:spPr>
-      </p:sp>
-      <p:sp>
-        <p:nvSpPr>
-          <p:cNvPr id="71" name="Arial_24pt_sp2__c57.60_t48.68"/>
-          <p:cNvSpPr/>
-          <p:nvPr/>
-        </p:nvSpPr>
-        <p:spPr>
-          <a:xfrm>
-            <a:off x="8099552" y="3403600"/>
-            <a:ext cx="593217" cy="731520"/>
+          <p:cNvPr id="37" name="Arial_24pt_sp2__c57.60_t48.68"/>
+          <p:cNvSpPr/>
+          <p:nvPr/>
+        </p:nvSpPr>
+        <p:spPr>
+          <a:xfrm>
+            <a:off x="8099552" y="3082671"/>
+            <a:ext cx="593217" cy="618236"/>
           </a:xfrm>
           <a:prstGeom prst="rect">
             <a:avLst/>
@@ -7430,34 +5650,14 @@
       </p:sp>
       <p:sp>
         <p:nvSpPr>
-          <p:cNvPr id="72" name="Arial_24pt_sp2__c57.60_t48.68__textBoxMarker"/>
-          <p:cNvSpPr/>
-          <p:nvPr/>
-        </p:nvSpPr>
-        <p:spPr>
-          <a:xfrm>
-            <a:off x="8099552" y="4015486"/>
-            <a:ext cx="593217" cy="12700"/>
-          </a:xfrm>
-          <a:prstGeom prst="rect">
-            <a:avLst/>
-          </a:prstGeom>
-          <a:solidFill>
-            <a:srgbClr val="0000FF"/>
-          </a:solidFill>
-          <a:ln/>
-        </p:spPr>
-      </p:sp>
-      <p:sp>
-        <p:nvSpPr>
-          <p:cNvPr id="73" name="Arial_32pt_sp1__c38.40_t37.10"/>
-          <p:cNvSpPr/>
-          <p:nvPr/>
-        </p:nvSpPr>
-        <p:spPr>
-          <a:xfrm>
-            <a:off x="365760" y="4236720"/>
-            <a:ext cx="790956" cy="487680"/>
+          <p:cNvPr id="38" name="Arial_32pt_sp1__c38.40_t37.76"/>
+          <p:cNvSpPr/>
+          <p:nvPr/>
+        </p:nvSpPr>
+        <p:spPr>
+          <a:xfrm>
+            <a:off x="365760" y="3802507"/>
+            <a:ext cx="790956" cy="479552"/>
           </a:xfrm>
           <a:prstGeom prst="rect">
             <a:avLst/>
@@ -7499,34 +5699,14 @@
       </p:sp>
       <p:sp>
         <p:nvSpPr>
-          <p:cNvPr id="74" name="Arial_32pt_sp1__c38.40_t37.10__textBoxMarker"/>
-          <p:cNvSpPr/>
-          <p:nvPr/>
-        </p:nvSpPr>
-        <p:spPr>
-          <a:xfrm>
-            <a:off x="365760" y="4701540"/>
-            <a:ext cx="790956" cy="12700"/>
-          </a:xfrm>
-          <a:prstGeom prst="rect">
-            <a:avLst/>
-          </a:prstGeom>
-          <a:solidFill>
-            <a:srgbClr val="0000FF"/>
-          </a:solidFill>
-          <a:ln/>
-        </p:spPr>
-      </p:sp>
-      <p:sp>
-        <p:nvSpPr>
-          <p:cNvPr id="75" name="Arial_32pt_sp1_25__c48.00_t43.31"/>
-          <p:cNvSpPr/>
-          <p:nvPr/>
-        </p:nvSpPr>
-        <p:spPr>
-          <a:xfrm>
-            <a:off x="2299208" y="4236720"/>
-            <a:ext cx="790956" cy="609600"/>
+          <p:cNvPr id="39" name="Arial_32pt_sp1_25__c48.00_t43.31"/>
+          <p:cNvSpPr/>
+          <p:nvPr/>
+        </p:nvSpPr>
+        <p:spPr>
+          <a:xfrm>
+            <a:off x="2299208" y="3802507"/>
+            <a:ext cx="790956" cy="550037"/>
           </a:xfrm>
           <a:prstGeom prst="rect">
             <a:avLst/>
@@ -7568,34 +5748,14 @@
       </p:sp>
       <p:sp>
         <p:nvSpPr>
-          <p:cNvPr id="76" name="Arial_32pt_sp1_25__c48.00_t43.31__textBoxMarker"/>
-          <p:cNvSpPr/>
-          <p:nvPr/>
-        </p:nvSpPr>
-        <p:spPr>
-          <a:xfrm>
-            <a:off x="2299208" y="4780407"/>
-            <a:ext cx="790956" cy="12700"/>
-          </a:xfrm>
-          <a:prstGeom prst="rect">
-            <a:avLst/>
-          </a:prstGeom>
-          <a:solidFill>
-            <a:srgbClr val="0000FF"/>
-          </a:solidFill>
-          <a:ln/>
-        </p:spPr>
-      </p:sp>
-      <p:sp>
-        <p:nvSpPr>
-          <p:cNvPr id="77" name="Arial_32pt_sp1_5__c57.60_t50.51"/>
-          <p:cNvSpPr/>
-          <p:nvPr/>
-        </p:nvSpPr>
-        <p:spPr>
-          <a:xfrm>
-            <a:off x="4232656" y="4236720"/>
-            <a:ext cx="790956" cy="731520"/>
+          <p:cNvPr id="40" name="Arial_32pt_sp1_5__c57.60_t50.51"/>
+          <p:cNvSpPr/>
+          <p:nvPr/>
+        </p:nvSpPr>
+        <p:spPr>
+          <a:xfrm>
+            <a:off x="4232656" y="3802507"/>
+            <a:ext cx="790956" cy="641477"/>
           </a:xfrm>
           <a:prstGeom prst="rect">
             <a:avLst/>
@@ -7637,34 +5797,14 @@
       </p:sp>
       <p:sp>
         <p:nvSpPr>
-          <p:cNvPr id="78" name="Arial_32pt_sp1_5__c57.60_t50.51__textBoxMarker"/>
-          <p:cNvSpPr/>
-          <p:nvPr/>
-        </p:nvSpPr>
-        <p:spPr>
-          <a:xfrm>
-            <a:off x="4232656" y="4871847"/>
-            <a:ext cx="790956" cy="12700"/>
-          </a:xfrm>
-          <a:prstGeom prst="rect">
-            <a:avLst/>
-          </a:prstGeom>
-          <a:solidFill>
-            <a:srgbClr val="0000FF"/>
-          </a:solidFill>
-          <a:ln/>
-        </p:spPr>
-      </p:sp>
-      <p:sp>
-        <p:nvSpPr>
-          <p:cNvPr id="79" name="Arial_32pt_sp1_75__c67.20_t57.71"/>
-          <p:cNvSpPr/>
-          <p:nvPr/>
-        </p:nvSpPr>
-        <p:spPr>
-          <a:xfrm>
-            <a:off x="6166104" y="4236720"/>
-            <a:ext cx="790956" cy="853440"/>
+          <p:cNvPr id="41" name="Arial_32pt_sp1_75__c67.20_t57.71"/>
+          <p:cNvSpPr/>
+          <p:nvPr/>
+        </p:nvSpPr>
+        <p:spPr>
+          <a:xfrm>
+            <a:off x="6166104" y="3802507"/>
+            <a:ext cx="790956" cy="732917"/>
           </a:xfrm>
           <a:prstGeom prst="rect">
             <a:avLst/>
@@ -7706,34 +5846,14 @@
       </p:sp>
       <p:sp>
         <p:nvSpPr>
-          <p:cNvPr id="80" name="Arial_32pt_sp1_75__c67.20_t57.71__textBoxMarker"/>
-          <p:cNvSpPr/>
-          <p:nvPr/>
-        </p:nvSpPr>
-        <p:spPr>
-          <a:xfrm>
-            <a:off x="6166104" y="4963287"/>
-            <a:ext cx="790956" cy="12700"/>
-          </a:xfrm>
-          <a:prstGeom prst="rect">
-            <a:avLst/>
-          </a:prstGeom>
-          <a:solidFill>
-            <a:srgbClr val="0000FF"/>
-          </a:solidFill>
-          <a:ln/>
-        </p:spPr>
-      </p:sp>
-      <p:sp>
-        <p:nvSpPr>
-          <p:cNvPr id="81" name="Arial_32pt_sp2__c76.80_t64.91"/>
-          <p:cNvSpPr/>
-          <p:nvPr/>
-        </p:nvSpPr>
-        <p:spPr>
-          <a:xfrm>
-            <a:off x="8099552" y="4236720"/>
-            <a:ext cx="790956" cy="975360"/>
+          <p:cNvPr id="42" name="Arial_32pt_sp2__c76.80_t64.91"/>
+          <p:cNvSpPr/>
+          <p:nvPr/>
+        </p:nvSpPr>
+        <p:spPr>
+          <a:xfrm>
+            <a:off x="8099552" y="3802507"/>
+            <a:ext cx="790956" cy="824357"/>
           </a:xfrm>
           <a:prstGeom prst="rect">
             <a:avLst/>
@@ -7775,34 +5895,14 @@
       </p:sp>
       <p:sp>
         <p:nvSpPr>
-          <p:cNvPr id="82" name="Arial_32pt_sp2__c76.80_t64.91__textBoxMarker"/>
-          <p:cNvSpPr/>
-          <p:nvPr/>
-        </p:nvSpPr>
-        <p:spPr>
-          <a:xfrm>
-            <a:off x="8099552" y="5054727"/>
-            <a:ext cx="790956" cy="12700"/>
-          </a:xfrm>
-          <a:prstGeom prst="rect">
-            <a:avLst/>
-          </a:prstGeom>
-          <a:solidFill>
-            <a:srgbClr val="0000FF"/>
-          </a:solidFill>
-          <a:ln/>
-        </p:spPr>
-      </p:sp>
-      <p:sp>
-        <p:nvSpPr>
-          <p:cNvPr id="83" name="Arial_40pt_sp1__c48.00_t46.38"/>
-          <p:cNvSpPr/>
-          <p:nvPr/>
-        </p:nvSpPr>
-        <p:spPr>
-          <a:xfrm>
-            <a:off x="365760" y="5313680"/>
-            <a:ext cx="988695" cy="609600"/>
+          <p:cNvPr id="43" name="Arial_40pt_sp1__c48.00_t47.21"/>
+          <p:cNvSpPr/>
+          <p:nvPr/>
+        </p:nvSpPr>
+        <p:spPr>
+          <a:xfrm>
+            <a:off x="365760" y="4728464"/>
+            <a:ext cx="988695" cy="599567"/>
           </a:xfrm>
           <a:prstGeom prst="rect">
             <a:avLst/>
@@ -7844,34 +5944,14 @@
       </p:sp>
       <p:sp>
         <p:nvSpPr>
-          <p:cNvPr id="84" name="Arial_40pt_sp1__c48.00_t46.38__textBoxMarker"/>
-          <p:cNvSpPr/>
-          <p:nvPr/>
-        </p:nvSpPr>
-        <p:spPr>
-          <a:xfrm>
-            <a:off x="365760" y="5896356"/>
-            <a:ext cx="988695" cy="12700"/>
-          </a:xfrm>
-          <a:prstGeom prst="rect">
-            <a:avLst/>
-          </a:prstGeom>
-          <a:solidFill>
-            <a:srgbClr val="0000FF"/>
-          </a:solidFill>
-          <a:ln/>
-        </p:spPr>
-      </p:sp>
-      <p:sp>
-        <p:nvSpPr>
-          <p:cNvPr id="85" name="Arial_40pt_sp1_25__c60.00_t54.14"/>
-          <p:cNvSpPr/>
-          <p:nvPr/>
-        </p:nvSpPr>
-        <p:spPr>
-          <a:xfrm>
-            <a:off x="2299208" y="5313680"/>
-            <a:ext cx="988695" cy="762000"/>
+          <p:cNvPr id="44" name="Arial_40pt_sp1_25__c60.00_t54.14"/>
+          <p:cNvSpPr/>
+          <p:nvPr/>
+        </p:nvSpPr>
+        <p:spPr>
+          <a:xfrm>
+            <a:off x="2299208" y="4728464"/>
+            <a:ext cx="988695" cy="687578"/>
           </a:xfrm>
           <a:prstGeom prst="rect">
             <a:avLst/>
@@ -7913,34 +5993,14 @@
       </p:sp>
       <p:sp>
         <p:nvSpPr>
-          <p:cNvPr id="86" name="Arial_40pt_sp1_25__c60.00_t54.14__textBoxMarker"/>
-          <p:cNvSpPr/>
-          <p:nvPr/>
-        </p:nvSpPr>
-        <p:spPr>
-          <a:xfrm>
-            <a:off x="2299208" y="5994908"/>
-            <a:ext cx="988695" cy="12700"/>
-          </a:xfrm>
-          <a:prstGeom prst="rect">
-            <a:avLst/>
-          </a:prstGeom>
-          <a:solidFill>
-            <a:srgbClr val="0000FF"/>
-          </a:solidFill>
-          <a:ln/>
-        </p:spPr>
-      </p:sp>
-      <p:sp>
-        <p:nvSpPr>
-          <p:cNvPr id="87" name="Arial_40pt_sp1_5__c72.00_t63.14"/>
-          <p:cNvSpPr/>
-          <p:nvPr/>
-        </p:nvSpPr>
-        <p:spPr>
-          <a:xfrm>
-            <a:off x="4232656" y="5313680"/>
-            <a:ext cx="988695" cy="914400"/>
+          <p:cNvPr id="45" name="Arial_40pt_sp1_5__c72.00_t63.14"/>
+          <p:cNvSpPr/>
+          <p:nvPr/>
+        </p:nvSpPr>
+        <p:spPr>
+          <a:xfrm>
+            <a:off x="4232656" y="4728464"/>
+            <a:ext cx="988695" cy="801878"/>
           </a:xfrm>
           <a:prstGeom prst="rect">
             <a:avLst/>
@@ -7982,34 +6042,14 @@
       </p:sp>
       <p:sp>
         <p:nvSpPr>
-          <p:cNvPr id="88" name="Arial_40pt_sp1_5__c72.00_t63.14__textBoxMarker"/>
-          <p:cNvSpPr/>
-          <p:nvPr/>
-        </p:nvSpPr>
-        <p:spPr>
-          <a:xfrm>
-            <a:off x="4232656" y="6109208"/>
-            <a:ext cx="988695" cy="12700"/>
-          </a:xfrm>
-          <a:prstGeom prst="rect">
-            <a:avLst/>
-          </a:prstGeom>
-          <a:solidFill>
-            <a:srgbClr val="0000FF"/>
-          </a:solidFill>
-          <a:ln/>
-        </p:spPr>
-      </p:sp>
-      <p:sp>
-        <p:nvSpPr>
-          <p:cNvPr id="89" name="Arial_40pt_sp1_75__c84.00_t72.14"/>
-          <p:cNvSpPr/>
-          <p:nvPr/>
-        </p:nvSpPr>
-        <p:spPr>
-          <a:xfrm>
-            <a:off x="6166104" y="5313680"/>
-            <a:ext cx="988695" cy="1066800"/>
+          <p:cNvPr id="46" name="Arial_40pt_sp1_75__c84.00_t72.14"/>
+          <p:cNvSpPr/>
+          <p:nvPr/>
+        </p:nvSpPr>
+        <p:spPr>
+          <a:xfrm>
+            <a:off x="6166104" y="4728464"/>
+            <a:ext cx="988695" cy="916178"/>
           </a:xfrm>
           <a:prstGeom prst="rect">
             <a:avLst/>
@@ -8051,34 +6091,14 @@
       </p:sp>
       <p:sp>
         <p:nvSpPr>
-          <p:cNvPr id="90" name="Arial_40pt_sp1_75__c84.00_t72.14__textBoxMarker"/>
-          <p:cNvSpPr/>
-          <p:nvPr/>
-        </p:nvSpPr>
-        <p:spPr>
-          <a:xfrm>
-            <a:off x="6166104" y="6223508"/>
-            <a:ext cx="988695" cy="12700"/>
-          </a:xfrm>
-          <a:prstGeom prst="rect">
-            <a:avLst/>
-          </a:prstGeom>
-          <a:solidFill>
-            <a:srgbClr val="0000FF"/>
-          </a:solidFill>
-          <a:ln/>
-        </p:spPr>
-      </p:sp>
-      <p:sp>
-        <p:nvSpPr>
-          <p:cNvPr id="91" name="Arial_40pt_sp2__c96.00_t81.14"/>
-          <p:cNvSpPr/>
-          <p:nvPr/>
-        </p:nvSpPr>
-        <p:spPr>
-          <a:xfrm>
-            <a:off x="8099552" y="5313680"/>
-            <a:ext cx="988695" cy="1219200"/>
+          <p:cNvPr id="47" name="Arial_40pt_sp2__c96.00_t81.14"/>
+          <p:cNvSpPr/>
+          <p:nvPr/>
+        </p:nvSpPr>
+        <p:spPr>
+          <a:xfrm>
+            <a:off x="8099552" y="4728464"/>
+            <a:ext cx="988695" cy="1030478"/>
           </a:xfrm>
           <a:prstGeom prst="rect">
             <a:avLst/>
@@ -8120,34 +6140,14 @@
       </p:sp>
       <p:sp>
         <p:nvSpPr>
-          <p:cNvPr id="92" name="Arial_40pt_sp2__c96.00_t81.14__textBoxMarker"/>
-          <p:cNvSpPr/>
-          <p:nvPr/>
-        </p:nvSpPr>
-        <p:spPr>
-          <a:xfrm>
-            <a:off x="8099552" y="6337808"/>
-            <a:ext cx="988695" cy="12700"/>
-          </a:xfrm>
-          <a:prstGeom prst="rect">
-            <a:avLst/>
-          </a:prstGeom>
-          <a:solidFill>
-            <a:srgbClr val="0000FF"/>
-          </a:solidFill>
-          <a:ln/>
-        </p:spPr>
-      </p:sp>
-      <p:sp>
-        <p:nvSpPr>
-          <p:cNvPr id="93" name="Arial_56pt_sp1__c67.20_t64.92"/>
-          <p:cNvSpPr/>
-          <p:nvPr/>
-        </p:nvSpPr>
-        <p:spPr>
-          <a:xfrm>
-            <a:off x="365760" y="6634480"/>
-            <a:ext cx="1384173" cy="853440"/>
+          <p:cNvPr id="48" name="Arial_56pt_sp1__c67.20_t66.08"/>
+          <p:cNvSpPr/>
+          <p:nvPr/>
+        </p:nvSpPr>
+        <p:spPr>
+          <a:xfrm>
+            <a:off x="365760" y="5860542"/>
+            <a:ext cx="1384173" cy="839216"/>
           </a:xfrm>
           <a:prstGeom prst="rect">
             <a:avLst/>
@@ -8189,34 +6189,14 @@
       </p:sp>
       <p:sp>
         <p:nvSpPr>
-          <p:cNvPr id="94" name="Arial_56pt_sp1__c67.20_t64.92__textBoxMarker"/>
-          <p:cNvSpPr/>
-          <p:nvPr/>
-        </p:nvSpPr>
-        <p:spPr>
-          <a:xfrm>
-            <a:off x="365760" y="7452614"/>
-            <a:ext cx="1384173" cy="12700"/>
-          </a:xfrm>
-          <a:prstGeom prst="rect">
-            <a:avLst/>
-          </a:prstGeom>
-          <a:solidFill>
-            <a:srgbClr val="0000FF"/>
-          </a:solidFill>
-          <a:ln/>
-        </p:spPr>
-      </p:sp>
-      <p:sp>
-        <p:nvSpPr>
-          <p:cNvPr id="95" name="Arial_56pt_sp1_25__c84.00_t75.79"/>
-          <p:cNvSpPr/>
-          <p:nvPr/>
-        </p:nvSpPr>
-        <p:spPr>
-          <a:xfrm>
-            <a:off x="2299208" y="6634480"/>
-            <a:ext cx="1384173" cy="1066800"/>
+          <p:cNvPr id="49" name="Arial_56pt_sp1_25__c84.00_t75.79"/>
+          <p:cNvSpPr/>
+          <p:nvPr/>
+        </p:nvSpPr>
+        <p:spPr>
+          <a:xfrm>
+            <a:off x="2299208" y="5860542"/>
+            <a:ext cx="1384173" cy="962533"/>
           </a:xfrm>
           <a:prstGeom prst="rect">
             <a:avLst/>
@@ -8258,34 +6238,14 @@
       </p:sp>
       <p:sp>
         <p:nvSpPr>
-          <p:cNvPr id="96" name="Arial_56pt_sp1_25__c84.00_t75.79__textBoxMarker"/>
-          <p:cNvSpPr/>
-          <p:nvPr/>
-        </p:nvSpPr>
-        <p:spPr>
-          <a:xfrm>
-            <a:off x="2299208" y="7590663"/>
-            <a:ext cx="1384173" cy="12700"/>
-          </a:xfrm>
-          <a:prstGeom prst="rect">
-            <a:avLst/>
-          </a:prstGeom>
-          <a:solidFill>
-            <a:srgbClr val="0000FF"/>
-          </a:solidFill>
-          <a:ln/>
-        </p:spPr>
-      </p:sp>
-      <p:sp>
-        <p:nvSpPr>
-          <p:cNvPr id="97" name="Arial_56pt_sp1_5__c100.80_t88.39"/>
-          <p:cNvSpPr/>
-          <p:nvPr/>
-        </p:nvSpPr>
-        <p:spPr>
-          <a:xfrm>
-            <a:off x="4232656" y="6634480"/>
-            <a:ext cx="1384173" cy="1280160"/>
+          <p:cNvPr id="50" name="Arial_56pt_sp1_5__c100.80_t88.39"/>
+          <p:cNvSpPr/>
+          <p:nvPr/>
+        </p:nvSpPr>
+        <p:spPr>
+          <a:xfrm>
+            <a:off x="4232656" y="5860542"/>
+            <a:ext cx="1384173" cy="1122553"/>
           </a:xfrm>
           <a:prstGeom prst="rect">
             <a:avLst/>
@@ -8327,34 +6287,14 @@
       </p:sp>
       <p:sp>
         <p:nvSpPr>
-          <p:cNvPr id="98" name="Arial_56pt_sp1_5__c100.80_t88.39__textBoxMarker"/>
-          <p:cNvSpPr/>
-          <p:nvPr/>
-        </p:nvSpPr>
-        <p:spPr>
-          <a:xfrm>
-            <a:off x="4232656" y="7750683"/>
-            <a:ext cx="1384173" cy="12700"/>
-          </a:xfrm>
-          <a:prstGeom prst="rect">
-            <a:avLst/>
-          </a:prstGeom>
-          <a:solidFill>
-            <a:srgbClr val="0000FF"/>
-          </a:solidFill>
-          <a:ln/>
-        </p:spPr>
-      </p:sp>
-      <p:sp>
-        <p:nvSpPr>
-          <p:cNvPr id="99" name="Arial_56pt_sp1_75__c117.60_t100.99"/>
-          <p:cNvSpPr/>
-          <p:nvPr/>
-        </p:nvSpPr>
-        <p:spPr>
-          <a:xfrm>
-            <a:off x="6166104" y="6634480"/>
-            <a:ext cx="1384173" cy="1493520"/>
+          <p:cNvPr id="51" name="Arial_56pt_sp1_75__c117.60_t100.99"/>
+          <p:cNvSpPr/>
+          <p:nvPr/>
+        </p:nvSpPr>
+        <p:spPr>
+          <a:xfrm>
+            <a:off x="6166104" y="5860542"/>
+            <a:ext cx="1384173" cy="1282573"/>
           </a:xfrm>
           <a:prstGeom prst="rect">
             <a:avLst/>
@@ -8396,34 +6336,14 @@
       </p:sp>
       <p:sp>
         <p:nvSpPr>
-          <p:cNvPr id="100" name="Arial_56pt_sp1_75__c117.60_t100.99__textBoxMarker"/>
-          <p:cNvSpPr/>
-          <p:nvPr/>
-        </p:nvSpPr>
-        <p:spPr>
-          <a:xfrm>
-            <a:off x="6166104" y="7910703"/>
-            <a:ext cx="1384173" cy="12700"/>
-          </a:xfrm>
-          <a:prstGeom prst="rect">
-            <a:avLst/>
-          </a:prstGeom>
-          <a:solidFill>
-            <a:srgbClr val="0000FF"/>
-          </a:solidFill>
-          <a:ln/>
-        </p:spPr>
-      </p:sp>
-      <p:sp>
-        <p:nvSpPr>
-          <p:cNvPr id="101" name="Arial_56pt_sp2__c134.40_t113.59"/>
-          <p:cNvSpPr/>
-          <p:nvPr/>
-        </p:nvSpPr>
-        <p:spPr>
-          <a:xfrm>
-            <a:off x="8099552" y="6634480"/>
-            <a:ext cx="1384173" cy="1706880"/>
+          <p:cNvPr id="52" name="Arial_56pt_sp2__c134.40_t113.59"/>
+          <p:cNvSpPr/>
+          <p:nvPr/>
+        </p:nvSpPr>
+        <p:spPr>
+          <a:xfrm>
+            <a:off x="8099552" y="5860542"/>
+            <a:ext cx="1384173" cy="1442593"/>
           </a:xfrm>
           <a:prstGeom prst="rect">
             <a:avLst/>
@@ -8465,34 +6385,14 @@
       </p:sp>
       <p:sp>
         <p:nvSpPr>
-          <p:cNvPr id="102" name="Arial_56pt_sp2__c134.40_t113.59__textBoxMarker"/>
-          <p:cNvSpPr/>
-          <p:nvPr/>
-        </p:nvSpPr>
-        <p:spPr>
-          <a:xfrm>
-            <a:off x="8099552" y="8070723"/>
-            <a:ext cx="1384173" cy="12700"/>
-          </a:xfrm>
-          <a:prstGeom prst="rect">
-            <a:avLst/>
-          </a:prstGeom>
-          <a:solidFill>
-            <a:srgbClr val="0000FF"/>
-          </a:solidFill>
-          <a:ln/>
-        </p:spPr>
-      </p:sp>
-      <p:sp>
-        <p:nvSpPr>
-          <p:cNvPr id="103" name="Arial_70pt_sp1__c84.00_t81.15"/>
-          <p:cNvSpPr/>
-          <p:nvPr/>
-        </p:nvSpPr>
-        <p:spPr>
-          <a:xfrm>
-            <a:off x="365760" y="8442960"/>
-            <a:ext cx="1730248" cy="1066800"/>
+          <p:cNvPr id="53" name="Arial_70pt_sp1__c84.00_t82.60"/>
+          <p:cNvSpPr/>
+          <p:nvPr/>
+        </p:nvSpPr>
+        <p:spPr>
+          <a:xfrm>
+            <a:off x="365760" y="7404735"/>
+            <a:ext cx="1730248" cy="1049020"/>
           </a:xfrm>
           <a:prstGeom prst="rect">
             <a:avLst/>
@@ -8534,34 +6434,14 @@
       </p:sp>
       <p:sp>
         <p:nvSpPr>
-          <p:cNvPr id="104" name="Arial_70pt_sp1__c84.00_t81.15__textBoxMarker"/>
-          <p:cNvSpPr/>
-          <p:nvPr/>
-        </p:nvSpPr>
-        <p:spPr>
-          <a:xfrm>
-            <a:off x="365760" y="9467215"/>
-            <a:ext cx="1730248" cy="12700"/>
-          </a:xfrm>
-          <a:prstGeom prst="rect">
-            <a:avLst/>
-          </a:prstGeom>
-          <a:solidFill>
-            <a:srgbClr val="0000FF"/>
-          </a:solidFill>
-          <a:ln/>
-        </p:spPr>
-      </p:sp>
-      <p:sp>
-        <p:nvSpPr>
-          <p:cNvPr id="105" name="Arial_70pt_sp1_25__c105.00_t94.74"/>
-          <p:cNvSpPr/>
-          <p:nvPr/>
-        </p:nvSpPr>
-        <p:spPr>
-          <a:xfrm>
-            <a:off x="2299208" y="8442960"/>
-            <a:ext cx="1730248" cy="1333500"/>
+          <p:cNvPr id="54" name="Arial_70pt_sp1_25__c105.00_t94.74"/>
+          <p:cNvSpPr/>
+          <p:nvPr/>
+        </p:nvSpPr>
+        <p:spPr>
+          <a:xfrm>
+            <a:off x="2299208" y="7404735"/>
+            <a:ext cx="1730248" cy="1203198"/>
           </a:xfrm>
           <a:prstGeom prst="rect">
             <a:avLst/>
@@ -8603,34 +6483,14 @@
       </p:sp>
       <p:sp>
         <p:nvSpPr>
-          <p:cNvPr id="106" name="Arial_70pt_sp1_25__c105.00_t94.74__textBoxMarker"/>
-          <p:cNvSpPr/>
-          <p:nvPr/>
-        </p:nvSpPr>
-        <p:spPr>
-          <a:xfrm>
-            <a:off x="2299208" y="9639808"/>
-            <a:ext cx="1730248" cy="12700"/>
-          </a:xfrm>
-          <a:prstGeom prst="rect">
-            <a:avLst/>
-          </a:prstGeom>
-          <a:solidFill>
-            <a:srgbClr val="0000FF"/>
-          </a:solidFill>
-          <a:ln/>
-        </p:spPr>
-      </p:sp>
-      <p:sp>
-        <p:nvSpPr>
-          <p:cNvPr id="107" name="Arial_70pt_sp1_5__c126.00_t110.49"/>
-          <p:cNvSpPr/>
-          <p:nvPr/>
-        </p:nvSpPr>
-        <p:spPr>
-          <a:xfrm>
-            <a:off x="4232656" y="8442960"/>
-            <a:ext cx="1730248" cy="1600200"/>
+          <p:cNvPr id="55" name="Arial_70pt_sp1_5__c126.00_t110.49"/>
+          <p:cNvSpPr/>
+          <p:nvPr/>
+        </p:nvSpPr>
+        <p:spPr>
+          <a:xfrm>
+            <a:off x="4232656" y="7404735"/>
+            <a:ext cx="1730248" cy="1403223"/>
           </a:xfrm>
           <a:prstGeom prst="rect">
             <a:avLst/>
@@ -8672,34 +6532,14 @@
       </p:sp>
       <p:sp>
         <p:nvSpPr>
-          <p:cNvPr id="108" name="Arial_70pt_sp1_5__c126.00_t110.49__textBoxMarker"/>
-          <p:cNvSpPr/>
-          <p:nvPr/>
-        </p:nvSpPr>
-        <p:spPr>
-          <a:xfrm>
-            <a:off x="4232656" y="9839833"/>
-            <a:ext cx="1730248" cy="12700"/>
-          </a:xfrm>
-          <a:prstGeom prst="rect">
-            <a:avLst/>
-          </a:prstGeom>
-          <a:solidFill>
-            <a:srgbClr val="0000FF"/>
-          </a:solidFill>
-          <a:ln/>
-        </p:spPr>
-      </p:sp>
-      <p:sp>
-        <p:nvSpPr>
-          <p:cNvPr id="109" name="Arial_70pt_sp1_75__c147.00_t126.24"/>
-          <p:cNvSpPr/>
-          <p:nvPr/>
-        </p:nvSpPr>
-        <p:spPr>
-          <a:xfrm>
-            <a:off x="6166104" y="8442960"/>
-            <a:ext cx="1730248" cy="1866900"/>
+          <p:cNvPr id="56" name="Arial_70pt_sp1_75__c147.00_t126.24"/>
+          <p:cNvSpPr/>
+          <p:nvPr/>
+        </p:nvSpPr>
+        <p:spPr>
+          <a:xfrm>
+            <a:off x="6166104" y="7404735"/>
+            <a:ext cx="1730248" cy="1603248"/>
           </a:xfrm>
           <a:prstGeom prst="rect">
             <a:avLst/>
@@ -8741,34 +6581,14 @@
       </p:sp>
       <p:sp>
         <p:nvSpPr>
-          <p:cNvPr id="110" name="Arial_70pt_sp1_75__c147.00_t126.24__textBoxMarker"/>
-          <p:cNvSpPr/>
-          <p:nvPr/>
-        </p:nvSpPr>
-        <p:spPr>
-          <a:xfrm>
-            <a:off x="6166104" y="10039858"/>
-            <a:ext cx="1730248" cy="12700"/>
-          </a:xfrm>
-          <a:prstGeom prst="rect">
-            <a:avLst/>
-          </a:prstGeom>
-          <a:solidFill>
-            <a:srgbClr val="0000FF"/>
-          </a:solidFill>
-          <a:ln/>
-        </p:spPr>
-      </p:sp>
-      <p:sp>
-        <p:nvSpPr>
-          <p:cNvPr id="111" name="Arial_70pt_sp2__c168.00_t141.99"/>
-          <p:cNvSpPr/>
-          <p:nvPr/>
-        </p:nvSpPr>
-        <p:spPr>
-          <a:xfrm>
-            <a:off x="8099552" y="8442960"/>
-            <a:ext cx="1730248" cy="2133600"/>
+          <p:cNvPr id="57" name="Arial_70pt_sp2__c168.00_t141.99"/>
+          <p:cNvSpPr/>
+          <p:nvPr/>
+        </p:nvSpPr>
+        <p:spPr>
+          <a:xfrm>
+            <a:off x="8099552" y="7404735"/>
+            <a:ext cx="1730248" cy="1803273"/>
           </a:xfrm>
           <a:prstGeom prst="rect">
             <a:avLst/>
@@ -8807,26 +6627,6 @@
             <a:endParaRPr lang="en-US" sz="7000" dirty="0"/>
           </a:p>
         </p:txBody>
-      </p:sp>
-      <p:sp>
-        <p:nvSpPr>
-          <p:cNvPr id="112" name="Arial_70pt_sp2__c168.00_t141.99__textBoxMarker"/>
-          <p:cNvSpPr/>
-          <p:nvPr/>
-        </p:nvSpPr>
-        <p:spPr>
-          <a:xfrm>
-            <a:off x="8099552" y="10239883"/>
-            <a:ext cx="1730248" cy="12700"/>
-          </a:xfrm>
-          <a:prstGeom prst="rect">
-            <a:avLst/>
-          </a:prstGeom>
-          <a:solidFill>
-            <a:srgbClr val="0000FF"/>
-          </a:solidFill>
-          <a:ln/>
-        </p:spPr>
       </p:sp>
     </p:spTree>
   </p:cSld>
@@ -8894,14 +6694,14 @@
       </p:sp>
       <p:sp>
         <p:nvSpPr>
-          <p:cNvPr id="3" name="Unifont_6pt_sp1__c7.20_t7.11"/>
+          <p:cNvPr id="3" name="Unifont_6pt_sp1__c7.20_t6.21"/>
           <p:cNvSpPr/>
           <p:nvPr/>
         </p:nvSpPr>
         <p:spPr>
           <a:xfrm>
             <a:off x="365760" y="721360"/>
-            <a:ext cx="114300" cy="91440"/>
+            <a:ext cx="114300" cy="78867"/>
           </a:xfrm>
           <a:prstGeom prst="rect">
             <a:avLst/>
@@ -8943,34 +6743,14 @@
       </p:sp>
       <p:sp>
         <p:nvSpPr>
-          <p:cNvPr id="4" name="Unifont_6pt_sp1__c7.20_t7.11__textBoxMarker"/>
-          <p:cNvSpPr/>
-          <p:nvPr/>
-        </p:nvSpPr>
-        <p:spPr>
-          <a:xfrm>
-            <a:off x="365760" y="805307"/>
-            <a:ext cx="114300" cy="12700"/>
-          </a:xfrm>
-          <a:prstGeom prst="rect">
-            <a:avLst/>
-          </a:prstGeom>
-          <a:solidFill>
-            <a:srgbClr val="0000FF"/>
-          </a:solidFill>
-          <a:ln/>
-        </p:spPr>
-      </p:sp>
-      <p:sp>
-        <p:nvSpPr>
-          <p:cNvPr id="5" name="Unifont_6pt_sp1_25__c9.00_t7.56"/>
+          <p:cNvPr id="4" name="Unifont_6pt_sp1_25__c9.00_t7.56"/>
           <p:cNvSpPr/>
           <p:nvPr/>
         </p:nvSpPr>
         <p:spPr>
           <a:xfrm>
             <a:off x="2346960" y="721360"/>
-            <a:ext cx="114300" cy="114300"/>
+            <a:ext cx="114300" cy="96012"/>
           </a:xfrm>
           <a:prstGeom prst="rect">
             <a:avLst/>
@@ -9012,34 +6792,14 @@
       </p:sp>
       <p:sp>
         <p:nvSpPr>
-          <p:cNvPr id="6" name="Unifont_6pt_sp1_25__c9.00_t7.56__textBoxMarker"/>
-          <p:cNvSpPr/>
-          <p:nvPr/>
-        </p:nvSpPr>
-        <p:spPr>
-          <a:xfrm>
-            <a:off x="2346960" y="811022"/>
-            <a:ext cx="114300" cy="12700"/>
-          </a:xfrm>
-          <a:prstGeom prst="rect">
-            <a:avLst/>
-          </a:prstGeom>
-          <a:solidFill>
-            <a:srgbClr val="0000FF"/>
-          </a:solidFill>
-          <a:ln/>
-        </p:spPr>
-      </p:sp>
-      <p:sp>
-        <p:nvSpPr>
-          <p:cNvPr id="7" name="Unifont_6pt_sp1_5__c10.80_t8.91"/>
+          <p:cNvPr id="5" name="Unifont_6pt_sp1_5__c10.80_t8.91"/>
           <p:cNvSpPr/>
           <p:nvPr/>
         </p:nvSpPr>
         <p:spPr>
           <a:xfrm>
             <a:off x="4328160" y="721360"/>
-            <a:ext cx="114300" cy="137160"/>
+            <a:ext cx="114300" cy="113157"/>
           </a:xfrm>
           <a:prstGeom prst="rect">
             <a:avLst/>
@@ -9081,34 +6841,14 @@
       </p:sp>
       <p:sp>
         <p:nvSpPr>
-          <p:cNvPr id="8" name="Unifont_6pt_sp1_5__c10.80_t8.91__textBoxMarker"/>
-          <p:cNvSpPr/>
-          <p:nvPr/>
-        </p:nvSpPr>
-        <p:spPr>
-          <a:xfrm>
-            <a:off x="4328160" y="828167"/>
-            <a:ext cx="114300" cy="12700"/>
-          </a:xfrm>
-          <a:prstGeom prst="rect">
-            <a:avLst/>
-          </a:prstGeom>
-          <a:solidFill>
-            <a:srgbClr val="0000FF"/>
-          </a:solidFill>
-          <a:ln/>
-        </p:spPr>
-      </p:sp>
-      <p:sp>
-        <p:nvSpPr>
-          <p:cNvPr id="9" name="Unifont_6pt_sp1_75__c12.60_t10.26"/>
+          <p:cNvPr id="6" name="Unifont_6pt_sp1_75__c12.60_t10.26"/>
           <p:cNvSpPr/>
           <p:nvPr/>
         </p:nvSpPr>
         <p:spPr>
           <a:xfrm>
             <a:off x="6309360" y="721360"/>
-            <a:ext cx="114300" cy="160020"/>
+            <a:ext cx="114300" cy="130302"/>
           </a:xfrm>
           <a:prstGeom prst="rect">
             <a:avLst/>
@@ -9150,34 +6890,14 @@
       </p:sp>
       <p:sp>
         <p:nvSpPr>
-          <p:cNvPr id="10" name="Unifont_6pt_sp1_75__c12.60_t10.26__textBoxMarker"/>
-          <p:cNvSpPr/>
-          <p:nvPr/>
-        </p:nvSpPr>
-        <p:spPr>
-          <a:xfrm>
-            <a:off x="6309360" y="845312"/>
-            <a:ext cx="114300" cy="12700"/>
-          </a:xfrm>
-          <a:prstGeom prst="rect">
-            <a:avLst/>
-          </a:prstGeom>
-          <a:solidFill>
-            <a:srgbClr val="0000FF"/>
-          </a:solidFill>
-          <a:ln/>
-        </p:spPr>
-      </p:sp>
-      <p:sp>
-        <p:nvSpPr>
-          <p:cNvPr id="11" name="Unifont_6pt_sp2__c14.40_t11.61"/>
+          <p:cNvPr id="7" name="Unifont_6pt_sp2__c14.40_t11.61"/>
           <p:cNvSpPr/>
           <p:nvPr/>
         </p:nvSpPr>
         <p:spPr>
           <a:xfrm>
             <a:off x="8290560" y="721360"/>
-            <a:ext cx="114300" cy="182880"/>
+            <a:ext cx="114300" cy="147447"/>
           </a:xfrm>
           <a:prstGeom prst="rect">
             <a:avLst/>
@@ -9219,34 +6939,14 @@
       </p:sp>
       <p:sp>
         <p:nvSpPr>
-          <p:cNvPr id="12" name="Unifont_6pt_sp2__c14.40_t11.61__textBoxMarker"/>
-          <p:cNvSpPr/>
-          <p:nvPr/>
-        </p:nvSpPr>
-        <p:spPr>
-          <a:xfrm>
-            <a:off x="8290560" y="862457"/>
-            <a:ext cx="114300" cy="12700"/>
-          </a:xfrm>
-          <a:prstGeom prst="rect">
-            <a:avLst/>
-          </a:prstGeom>
-          <a:solidFill>
-            <a:srgbClr val="0000FF"/>
-          </a:solidFill>
-          <a:ln/>
-        </p:spPr>
-      </p:sp>
-      <p:sp>
-        <p:nvSpPr>
-          <p:cNvPr id="13" name="Unifont_8pt_sp1__c9.60_t9.48"/>
-          <p:cNvSpPr/>
-          <p:nvPr/>
-        </p:nvSpPr>
-        <p:spPr>
-          <a:xfrm>
-            <a:off x="365760" y="1005840"/>
-            <a:ext cx="152400" cy="121920"/>
+          <p:cNvPr id="8" name="Unifont_8pt_sp1__c9.60_t8.28"/>
+          <p:cNvSpPr/>
+          <p:nvPr/>
+        </p:nvSpPr>
+        <p:spPr>
+          <a:xfrm>
+            <a:off x="365760" y="970407"/>
+            <a:ext cx="152400" cy="105156"/>
           </a:xfrm>
           <a:prstGeom prst="rect">
             <a:avLst/>
@@ -9288,34 +6988,14 @@
       </p:sp>
       <p:sp>
         <p:nvSpPr>
-          <p:cNvPr id="14" name="Unifont_8pt_sp1__c9.60_t9.48__textBoxMarker"/>
-          <p:cNvSpPr/>
-          <p:nvPr/>
-        </p:nvSpPr>
-        <p:spPr>
-          <a:xfrm>
-            <a:off x="365760" y="1119886"/>
-            <a:ext cx="152400" cy="12700"/>
-          </a:xfrm>
-          <a:prstGeom prst="rect">
-            <a:avLst/>
-          </a:prstGeom>
-          <a:solidFill>
-            <a:srgbClr val="0000FF"/>
-          </a:solidFill>
-          <a:ln/>
-        </p:spPr>
-      </p:sp>
-      <p:sp>
-        <p:nvSpPr>
-          <p:cNvPr id="15" name="Unifont_8pt_sp1_25__c12.00_t10.08"/>
-          <p:cNvSpPr/>
-          <p:nvPr/>
-        </p:nvSpPr>
-        <p:spPr>
-          <a:xfrm>
-            <a:off x="2346960" y="1005840"/>
-            <a:ext cx="152400" cy="152400"/>
+          <p:cNvPr id="9" name="Unifont_8pt_sp1_25__c12.00_t10.08"/>
+          <p:cNvSpPr/>
+          <p:nvPr/>
+        </p:nvSpPr>
+        <p:spPr>
+          <a:xfrm>
+            <a:off x="2346960" y="970407"/>
+            <a:ext cx="152400" cy="128016"/>
           </a:xfrm>
           <a:prstGeom prst="rect">
             <a:avLst/>
@@ -9357,34 +7037,14 @@
       </p:sp>
       <p:sp>
         <p:nvSpPr>
-          <p:cNvPr id="16" name="Unifont_8pt_sp1_25__c12.00_t10.08__textBoxMarker"/>
-          <p:cNvSpPr/>
-          <p:nvPr/>
-        </p:nvSpPr>
-        <p:spPr>
-          <a:xfrm>
-            <a:off x="2346960" y="1127506"/>
-            <a:ext cx="152400" cy="12700"/>
-          </a:xfrm>
-          <a:prstGeom prst="rect">
-            <a:avLst/>
-          </a:prstGeom>
-          <a:solidFill>
-            <a:srgbClr val="0000FF"/>
-          </a:solidFill>
-          <a:ln/>
-        </p:spPr>
-      </p:sp>
-      <p:sp>
-        <p:nvSpPr>
-          <p:cNvPr id="17" name="Unifont_8pt_sp1_5__c14.40_t11.88"/>
-          <p:cNvSpPr/>
-          <p:nvPr/>
-        </p:nvSpPr>
-        <p:spPr>
-          <a:xfrm>
-            <a:off x="4328160" y="1005840"/>
-            <a:ext cx="152400" cy="182880"/>
+          <p:cNvPr id="10" name="Unifont_8pt_sp1_5__c14.40_t11.88"/>
+          <p:cNvSpPr/>
+          <p:nvPr/>
+        </p:nvSpPr>
+        <p:spPr>
+          <a:xfrm>
+            <a:off x="4328160" y="970407"/>
+            <a:ext cx="152400" cy="150876"/>
           </a:xfrm>
           <a:prstGeom prst="rect">
             <a:avLst/>
@@ -9426,34 +7086,14 @@
       </p:sp>
       <p:sp>
         <p:nvSpPr>
-          <p:cNvPr id="18" name="Unifont_8pt_sp1_5__c14.40_t11.88__textBoxMarker"/>
-          <p:cNvSpPr/>
-          <p:nvPr/>
-        </p:nvSpPr>
-        <p:spPr>
-          <a:xfrm>
-            <a:off x="4328160" y="1150366"/>
-            <a:ext cx="152400" cy="12700"/>
-          </a:xfrm>
-          <a:prstGeom prst="rect">
-            <a:avLst/>
-          </a:prstGeom>
-          <a:solidFill>
-            <a:srgbClr val="0000FF"/>
-          </a:solidFill>
-          <a:ln/>
-        </p:spPr>
-      </p:sp>
-      <p:sp>
-        <p:nvSpPr>
-          <p:cNvPr id="19" name="Unifont_8pt_sp1_75__c16.80_t13.68"/>
-          <p:cNvSpPr/>
-          <p:nvPr/>
-        </p:nvSpPr>
-        <p:spPr>
-          <a:xfrm>
-            <a:off x="6309360" y="1005840"/>
-            <a:ext cx="152400" cy="213360"/>
+          <p:cNvPr id="11" name="Unifont_8pt_sp1_75__c16.80_t13.68"/>
+          <p:cNvSpPr/>
+          <p:nvPr/>
+        </p:nvSpPr>
+        <p:spPr>
+          <a:xfrm>
+            <a:off x="6309360" y="970407"/>
+            <a:ext cx="152400" cy="173736"/>
           </a:xfrm>
           <a:prstGeom prst="rect">
             <a:avLst/>
@@ -9495,34 +7135,14 @@
       </p:sp>
       <p:sp>
         <p:nvSpPr>
-          <p:cNvPr id="20" name="Unifont_8pt_sp1_75__c16.80_t13.68__textBoxMarker"/>
-          <p:cNvSpPr/>
-          <p:nvPr/>
-        </p:nvSpPr>
-        <p:spPr>
-          <a:xfrm>
-            <a:off x="6309360" y="1173226"/>
-            <a:ext cx="152400" cy="12700"/>
-          </a:xfrm>
-          <a:prstGeom prst="rect">
-            <a:avLst/>
-          </a:prstGeom>
-          <a:solidFill>
-            <a:srgbClr val="0000FF"/>
-          </a:solidFill>
-          <a:ln/>
-        </p:spPr>
-      </p:sp>
-      <p:sp>
-        <p:nvSpPr>
-          <p:cNvPr id="21" name="Unifont_8pt_sp2__c19.20_t15.48"/>
-          <p:cNvSpPr/>
-          <p:nvPr/>
-        </p:nvSpPr>
-        <p:spPr>
-          <a:xfrm>
-            <a:off x="8290560" y="1005840"/>
-            <a:ext cx="152400" cy="243840"/>
+          <p:cNvPr id="12" name="Unifont_8pt_sp2__c19.20_t15.48"/>
+          <p:cNvSpPr/>
+          <p:nvPr/>
+        </p:nvSpPr>
+        <p:spPr>
+          <a:xfrm>
+            <a:off x="8290560" y="970407"/>
+            <a:ext cx="152400" cy="196596"/>
           </a:xfrm>
           <a:prstGeom prst="rect">
             <a:avLst/>
@@ -9564,34 +7184,14 @@
       </p:sp>
       <p:sp>
         <p:nvSpPr>
-          <p:cNvPr id="22" name="Unifont_8pt_sp2__c19.20_t15.48__textBoxMarker"/>
-          <p:cNvSpPr/>
-          <p:nvPr/>
-        </p:nvSpPr>
-        <p:spPr>
-          <a:xfrm>
-            <a:off x="8290560" y="1196086"/>
-            <a:ext cx="152400" cy="12700"/>
-          </a:xfrm>
-          <a:prstGeom prst="rect">
-            <a:avLst/>
-          </a:prstGeom>
-          <a:solidFill>
-            <a:srgbClr val="0000FF"/>
-          </a:solidFill>
-          <a:ln/>
-        </p:spPr>
-      </p:sp>
-      <p:sp>
-        <p:nvSpPr>
-          <p:cNvPr id="23" name="Unifont_10pt_sp1__c12.00_t11.85"/>
-          <p:cNvSpPr/>
-          <p:nvPr/>
-        </p:nvSpPr>
-        <p:spPr>
-          <a:xfrm>
-            <a:off x="365760" y="1351280"/>
-            <a:ext cx="254000" cy="152400"/>
+          <p:cNvPr id="13" name="Unifont_10pt_sp1__c12.00_t10.35"/>
+          <p:cNvSpPr/>
+          <p:nvPr/>
+        </p:nvSpPr>
+        <p:spPr>
+          <a:xfrm>
+            <a:off x="365760" y="1268603"/>
+            <a:ext cx="254000" cy="131445"/>
           </a:xfrm>
           <a:prstGeom prst="rect">
             <a:avLst/>
@@ -9633,34 +7233,14 @@
       </p:sp>
       <p:sp>
         <p:nvSpPr>
-          <p:cNvPr id="24" name="Unifont_10pt_sp1__c12.00_t11.85__textBoxMarker"/>
-          <p:cNvSpPr/>
-          <p:nvPr/>
-        </p:nvSpPr>
-        <p:spPr>
-          <a:xfrm>
-            <a:off x="365760" y="1495425"/>
-            <a:ext cx="254000" cy="12700"/>
-          </a:xfrm>
-          <a:prstGeom prst="rect">
-            <a:avLst/>
-          </a:prstGeom>
-          <a:solidFill>
-            <a:srgbClr val="0000FF"/>
-          </a:solidFill>
-          <a:ln/>
-        </p:spPr>
-      </p:sp>
-      <p:sp>
-        <p:nvSpPr>
-          <p:cNvPr id="25" name="Unifont_10pt_sp1_25__c15.00_t12.60"/>
-          <p:cNvSpPr/>
-          <p:nvPr/>
-        </p:nvSpPr>
-        <p:spPr>
-          <a:xfrm>
-            <a:off x="2346960" y="1351280"/>
-            <a:ext cx="254000" cy="190500"/>
+          <p:cNvPr id="14" name="Unifont_10pt_sp1_25__c15.00_t12.60"/>
+          <p:cNvSpPr/>
+          <p:nvPr/>
+        </p:nvSpPr>
+        <p:spPr>
+          <a:xfrm>
+            <a:off x="2346960" y="1268603"/>
+            <a:ext cx="254000" cy="160020"/>
           </a:xfrm>
           <a:prstGeom prst="rect">
             <a:avLst/>
@@ -9702,34 +7282,14 @@
       </p:sp>
       <p:sp>
         <p:nvSpPr>
-          <p:cNvPr id="26" name="Unifont_10pt_sp1_25__c15.00_t12.60__textBoxMarker"/>
-          <p:cNvSpPr/>
-          <p:nvPr/>
-        </p:nvSpPr>
-        <p:spPr>
-          <a:xfrm>
-            <a:off x="2346960" y="1504950"/>
-            <a:ext cx="254000" cy="12700"/>
-          </a:xfrm>
-          <a:prstGeom prst="rect">
-            <a:avLst/>
-          </a:prstGeom>
-          <a:solidFill>
-            <a:srgbClr val="0000FF"/>
-          </a:solidFill>
-          <a:ln/>
-        </p:spPr>
-      </p:sp>
-      <p:sp>
-        <p:nvSpPr>
-          <p:cNvPr id="27" name="Unifont_10pt_sp1_5__c18.00_t14.85"/>
-          <p:cNvSpPr/>
-          <p:nvPr/>
-        </p:nvSpPr>
-        <p:spPr>
-          <a:xfrm>
-            <a:off x="4328160" y="1351280"/>
-            <a:ext cx="254000" cy="228600"/>
+          <p:cNvPr id="15" name="Unifont_10pt_sp1_5__c18.00_t14.85"/>
+          <p:cNvSpPr/>
+          <p:nvPr/>
+        </p:nvSpPr>
+        <p:spPr>
+          <a:xfrm>
+            <a:off x="4328160" y="1268603"/>
+            <a:ext cx="254000" cy="188595"/>
           </a:xfrm>
           <a:prstGeom prst="rect">
             <a:avLst/>
@@ -9771,34 +7331,14 @@
       </p:sp>
       <p:sp>
         <p:nvSpPr>
-          <p:cNvPr id="28" name="Unifont_10pt_sp1_5__c18.00_t14.85__textBoxMarker"/>
-          <p:cNvSpPr/>
-          <p:nvPr/>
-        </p:nvSpPr>
-        <p:spPr>
-          <a:xfrm>
-            <a:off x="4328160" y="1533525"/>
-            <a:ext cx="254000" cy="12700"/>
-          </a:xfrm>
-          <a:prstGeom prst="rect">
-            <a:avLst/>
-          </a:prstGeom>
-          <a:solidFill>
-            <a:srgbClr val="0000FF"/>
-          </a:solidFill>
-          <a:ln/>
-        </p:spPr>
-      </p:sp>
-      <p:sp>
-        <p:nvSpPr>
-          <p:cNvPr id="29" name="Unifont_10pt_sp1_75__c21.00_t17.10"/>
-          <p:cNvSpPr/>
-          <p:nvPr/>
-        </p:nvSpPr>
-        <p:spPr>
-          <a:xfrm>
-            <a:off x="6309360" y="1351280"/>
-            <a:ext cx="254000" cy="266700"/>
+          <p:cNvPr id="16" name="Unifont_10pt_sp1_75__c21.00_t17.10"/>
+          <p:cNvSpPr/>
+          <p:nvPr/>
+        </p:nvSpPr>
+        <p:spPr>
+          <a:xfrm>
+            <a:off x="6309360" y="1268603"/>
+            <a:ext cx="254000" cy="217170"/>
           </a:xfrm>
           <a:prstGeom prst="rect">
             <a:avLst/>
@@ -9840,34 +7380,14 @@
       </p:sp>
       <p:sp>
         <p:nvSpPr>
-          <p:cNvPr id="30" name="Unifont_10pt_sp1_75__c21.00_t17.10__textBoxMarker"/>
-          <p:cNvSpPr/>
-          <p:nvPr/>
-        </p:nvSpPr>
-        <p:spPr>
-          <a:xfrm>
-            <a:off x="6309360" y="1562100"/>
-            <a:ext cx="254000" cy="12700"/>
-          </a:xfrm>
-          <a:prstGeom prst="rect">
-            <a:avLst/>
-          </a:prstGeom>
-          <a:solidFill>
-            <a:srgbClr val="0000FF"/>
-          </a:solidFill>
-          <a:ln/>
-        </p:spPr>
-      </p:sp>
-      <p:sp>
-        <p:nvSpPr>
-          <p:cNvPr id="31" name="Unifont_10pt_sp2__c24.00_t19.35"/>
-          <p:cNvSpPr/>
-          <p:nvPr/>
-        </p:nvSpPr>
-        <p:spPr>
-          <a:xfrm>
-            <a:off x="8290560" y="1351280"/>
-            <a:ext cx="254000" cy="304800"/>
+          <p:cNvPr id="17" name="Unifont_10pt_sp2__c24.00_t19.35"/>
+          <p:cNvSpPr/>
+          <p:nvPr/>
+        </p:nvSpPr>
+        <p:spPr>
+          <a:xfrm>
+            <a:off x="8290560" y="1268603"/>
+            <a:ext cx="254000" cy="245745"/>
           </a:xfrm>
           <a:prstGeom prst="rect">
             <a:avLst/>
@@ -9909,34 +7429,14 @@
       </p:sp>
       <p:sp>
         <p:nvSpPr>
-          <p:cNvPr id="32" name="Unifont_10pt_sp2__c24.00_t19.35__textBoxMarker"/>
-          <p:cNvSpPr/>
-          <p:nvPr/>
-        </p:nvSpPr>
-        <p:spPr>
-          <a:xfrm>
-            <a:off x="8290560" y="1590675"/>
-            <a:ext cx="254000" cy="12700"/>
-          </a:xfrm>
-          <a:prstGeom prst="rect">
-            <a:avLst/>
-          </a:prstGeom>
-          <a:solidFill>
-            <a:srgbClr val="0000FF"/>
-          </a:solidFill>
-          <a:ln/>
-        </p:spPr>
-      </p:sp>
-      <p:sp>
-        <p:nvSpPr>
-          <p:cNvPr id="33" name="Unifont_12pt_sp1__c14.40_t14.22"/>
-          <p:cNvSpPr/>
-          <p:nvPr/>
-        </p:nvSpPr>
-        <p:spPr>
-          <a:xfrm>
-            <a:off x="365760" y="1757680"/>
-            <a:ext cx="304800" cy="182880"/>
+          <p:cNvPr id="18" name="Unifont_12pt_sp1__c14.40_t12.42"/>
+          <p:cNvSpPr/>
+          <p:nvPr/>
+        </p:nvSpPr>
+        <p:spPr>
+          <a:xfrm>
+            <a:off x="365760" y="1615948"/>
+            <a:ext cx="304800" cy="157734"/>
           </a:xfrm>
           <a:prstGeom prst="rect">
             <a:avLst/>
@@ -9978,34 +7478,14 @@
       </p:sp>
       <p:sp>
         <p:nvSpPr>
-          <p:cNvPr id="34" name="Unifont_12pt_sp1__c14.40_t14.22__textBoxMarker"/>
-          <p:cNvSpPr/>
-          <p:nvPr/>
-        </p:nvSpPr>
-        <p:spPr>
-          <a:xfrm>
-            <a:off x="365760" y="1931924"/>
-            <a:ext cx="304800" cy="12700"/>
-          </a:xfrm>
-          <a:prstGeom prst="rect">
-            <a:avLst/>
-          </a:prstGeom>
-          <a:solidFill>
-            <a:srgbClr val="0000FF"/>
-          </a:solidFill>
-          <a:ln/>
-        </p:spPr>
-      </p:sp>
-      <p:sp>
-        <p:nvSpPr>
-          <p:cNvPr id="35" name="Unifont_12pt_sp1_25__c18.00_t15.12"/>
-          <p:cNvSpPr/>
-          <p:nvPr/>
-        </p:nvSpPr>
-        <p:spPr>
-          <a:xfrm>
-            <a:off x="2346960" y="1757680"/>
-            <a:ext cx="304800" cy="228600"/>
+          <p:cNvPr id="19" name="Unifont_12pt_sp1_25__c18.00_t15.12"/>
+          <p:cNvSpPr/>
+          <p:nvPr/>
+        </p:nvSpPr>
+        <p:spPr>
+          <a:xfrm>
+            <a:off x="2346960" y="1615948"/>
+            <a:ext cx="304800" cy="192024"/>
           </a:xfrm>
           <a:prstGeom prst="rect">
             <a:avLst/>
@@ -10047,34 +7527,14 @@
       </p:sp>
       <p:sp>
         <p:nvSpPr>
-          <p:cNvPr id="36" name="Unifont_12pt_sp1_25__c18.00_t15.12__textBoxMarker"/>
-          <p:cNvSpPr/>
-          <p:nvPr/>
-        </p:nvSpPr>
-        <p:spPr>
-          <a:xfrm>
-            <a:off x="2346960" y="1943354"/>
-            <a:ext cx="304800" cy="12700"/>
-          </a:xfrm>
-          <a:prstGeom prst="rect">
-            <a:avLst/>
-          </a:prstGeom>
-          <a:solidFill>
-            <a:srgbClr val="0000FF"/>
-          </a:solidFill>
-          <a:ln/>
-        </p:spPr>
-      </p:sp>
-      <p:sp>
-        <p:nvSpPr>
-          <p:cNvPr id="37" name="Unifont_12pt_sp1_5__c21.60_t17.82"/>
-          <p:cNvSpPr/>
-          <p:nvPr/>
-        </p:nvSpPr>
-        <p:spPr>
-          <a:xfrm>
-            <a:off x="4328160" y="1757680"/>
-            <a:ext cx="304800" cy="274320"/>
+          <p:cNvPr id="20" name="Unifont_12pt_sp1_5__c21.60_t17.82"/>
+          <p:cNvSpPr/>
+          <p:nvPr/>
+        </p:nvSpPr>
+        <p:spPr>
+          <a:xfrm>
+            <a:off x="4328160" y="1615948"/>
+            <a:ext cx="304800" cy="226314"/>
           </a:xfrm>
           <a:prstGeom prst="rect">
             <a:avLst/>
@@ -10116,34 +7576,14 @@
       </p:sp>
       <p:sp>
         <p:nvSpPr>
-          <p:cNvPr id="38" name="Unifont_12pt_sp1_5__c21.60_t17.82__textBoxMarker"/>
-          <p:cNvSpPr/>
-          <p:nvPr/>
-        </p:nvSpPr>
-        <p:spPr>
-          <a:xfrm>
-            <a:off x="4328160" y="1977644"/>
-            <a:ext cx="304800" cy="12700"/>
-          </a:xfrm>
-          <a:prstGeom prst="rect">
-            <a:avLst/>
-          </a:prstGeom>
-          <a:solidFill>
-            <a:srgbClr val="0000FF"/>
-          </a:solidFill>
-          <a:ln/>
-        </p:spPr>
-      </p:sp>
-      <p:sp>
-        <p:nvSpPr>
-          <p:cNvPr id="39" name="Unifont_12pt_sp1_75__c25.20_t20.52"/>
-          <p:cNvSpPr/>
-          <p:nvPr/>
-        </p:nvSpPr>
-        <p:spPr>
-          <a:xfrm>
-            <a:off x="6309360" y="1757680"/>
-            <a:ext cx="304800" cy="320040"/>
+          <p:cNvPr id="21" name="Unifont_12pt_sp1_75__c25.20_t20.52"/>
+          <p:cNvSpPr/>
+          <p:nvPr/>
+        </p:nvSpPr>
+        <p:spPr>
+          <a:xfrm>
+            <a:off x="6309360" y="1615948"/>
+            <a:ext cx="304800" cy="260604"/>
           </a:xfrm>
           <a:prstGeom prst="rect">
             <a:avLst/>
@@ -10185,34 +7625,14 @@
       </p:sp>
       <p:sp>
         <p:nvSpPr>
-          <p:cNvPr id="40" name="Unifont_12pt_sp1_75__c25.20_t20.52__textBoxMarker"/>
-          <p:cNvSpPr/>
-          <p:nvPr/>
-        </p:nvSpPr>
-        <p:spPr>
-          <a:xfrm>
-            <a:off x="6309360" y="2011934"/>
-            <a:ext cx="304800" cy="12700"/>
-          </a:xfrm>
-          <a:prstGeom prst="rect">
-            <a:avLst/>
-          </a:prstGeom>
-          <a:solidFill>
-            <a:srgbClr val="0000FF"/>
-          </a:solidFill>
-          <a:ln/>
-        </p:spPr>
-      </p:sp>
-      <p:sp>
-        <p:nvSpPr>
-          <p:cNvPr id="41" name="Unifont_12pt_sp2__c28.80_t23.22"/>
-          <p:cNvSpPr/>
-          <p:nvPr/>
-        </p:nvSpPr>
-        <p:spPr>
-          <a:xfrm>
-            <a:off x="8290560" y="1757680"/>
-            <a:ext cx="304800" cy="365760"/>
+          <p:cNvPr id="22" name="Unifont_12pt_sp2__c28.80_t23.22"/>
+          <p:cNvSpPr/>
+          <p:nvPr/>
+        </p:nvSpPr>
+        <p:spPr>
+          <a:xfrm>
+            <a:off x="8290560" y="1615948"/>
+            <a:ext cx="304800" cy="294894"/>
           </a:xfrm>
           <a:prstGeom prst="rect">
             <a:avLst/>
@@ -10254,34 +7674,14 @@
       </p:sp>
       <p:sp>
         <p:nvSpPr>
-          <p:cNvPr id="42" name="Unifont_12pt_sp2__c28.80_t23.22__textBoxMarker"/>
-          <p:cNvSpPr/>
-          <p:nvPr/>
-        </p:nvSpPr>
-        <p:spPr>
-          <a:xfrm>
-            <a:off x="8290560" y="2046224"/>
-            <a:ext cx="304800" cy="12700"/>
-          </a:xfrm>
-          <a:prstGeom prst="rect">
-            <a:avLst/>
-          </a:prstGeom>
-          <a:solidFill>
-            <a:srgbClr val="0000FF"/>
-          </a:solidFill>
-          <a:ln/>
-        </p:spPr>
-      </p:sp>
-      <p:sp>
-        <p:nvSpPr>
-          <p:cNvPr id="43" name="Unifont_14pt_sp1__c16.80_t16.59"/>
-          <p:cNvSpPr/>
-          <p:nvPr/>
-        </p:nvSpPr>
-        <p:spPr>
-          <a:xfrm>
-            <a:off x="365760" y="2225040"/>
-            <a:ext cx="355600" cy="213360"/>
+          <p:cNvPr id="23" name="Unifont_14pt_sp1__c16.80_t14.49"/>
+          <p:cNvSpPr/>
+          <p:nvPr/>
+        </p:nvSpPr>
+        <p:spPr>
+          <a:xfrm>
+            <a:off x="365760" y="2012442"/>
+            <a:ext cx="355600" cy="184023"/>
           </a:xfrm>
           <a:prstGeom prst="rect">
             <a:avLst/>
@@ -10323,34 +7723,14 @@
       </p:sp>
       <p:sp>
         <p:nvSpPr>
-          <p:cNvPr id="44" name="Unifont_14pt_sp1__c16.80_t16.59__textBoxMarker"/>
-          <p:cNvSpPr/>
-          <p:nvPr/>
-        </p:nvSpPr>
-        <p:spPr>
-          <a:xfrm>
-            <a:off x="365760" y="2429383"/>
-            <a:ext cx="355600" cy="12700"/>
-          </a:xfrm>
-          <a:prstGeom prst="rect">
-            <a:avLst/>
-          </a:prstGeom>
-          <a:solidFill>
-            <a:srgbClr val="0000FF"/>
-          </a:solidFill>
-          <a:ln/>
-        </p:spPr>
-      </p:sp>
-      <p:sp>
-        <p:nvSpPr>
-          <p:cNvPr id="45" name="Unifont_14pt_sp1_25__c21.00_t17.64"/>
-          <p:cNvSpPr/>
-          <p:nvPr/>
-        </p:nvSpPr>
-        <p:spPr>
-          <a:xfrm>
-            <a:off x="2346960" y="2225040"/>
-            <a:ext cx="355600" cy="266700"/>
+          <p:cNvPr id="24" name="Unifont_14pt_sp1_25__c21.00_t17.64"/>
+          <p:cNvSpPr/>
+          <p:nvPr/>
+        </p:nvSpPr>
+        <p:spPr>
+          <a:xfrm>
+            <a:off x="2346960" y="2012442"/>
+            <a:ext cx="355600" cy="224028"/>
           </a:xfrm>
           <a:prstGeom prst="rect">
             <a:avLst/>
@@ -10392,34 +7772,14 @@
       </p:sp>
       <p:sp>
         <p:nvSpPr>
-          <p:cNvPr id="46" name="Unifont_14pt_sp1_25__c21.00_t17.64__textBoxMarker"/>
-          <p:cNvSpPr/>
-          <p:nvPr/>
-        </p:nvSpPr>
-        <p:spPr>
-          <a:xfrm>
-            <a:off x="2346960" y="2442718"/>
-            <a:ext cx="355600" cy="12700"/>
-          </a:xfrm>
-          <a:prstGeom prst="rect">
-            <a:avLst/>
-          </a:prstGeom>
-          <a:solidFill>
-            <a:srgbClr val="0000FF"/>
-          </a:solidFill>
-          <a:ln/>
-        </p:spPr>
-      </p:sp>
-      <p:sp>
-        <p:nvSpPr>
-          <p:cNvPr id="47" name="Unifont_14pt_sp1_5__c25.20_t20.79"/>
-          <p:cNvSpPr/>
-          <p:nvPr/>
-        </p:nvSpPr>
-        <p:spPr>
-          <a:xfrm>
-            <a:off x="4328160" y="2225040"/>
-            <a:ext cx="355600" cy="320040"/>
+          <p:cNvPr id="25" name="Unifont_14pt_sp1_5__c25.20_t20.79"/>
+          <p:cNvSpPr/>
+          <p:nvPr/>
+        </p:nvSpPr>
+        <p:spPr>
+          <a:xfrm>
+            <a:off x="4328160" y="2012442"/>
+            <a:ext cx="355600" cy="264033"/>
           </a:xfrm>
           <a:prstGeom prst="rect">
             <a:avLst/>
@@ -10461,34 +7821,14 @@
       </p:sp>
       <p:sp>
         <p:nvSpPr>
-          <p:cNvPr id="48" name="Unifont_14pt_sp1_5__c25.20_t20.79__textBoxMarker"/>
-          <p:cNvSpPr/>
-          <p:nvPr/>
-        </p:nvSpPr>
-        <p:spPr>
-          <a:xfrm>
-            <a:off x="4328160" y="2482723"/>
-            <a:ext cx="355600" cy="12700"/>
-          </a:xfrm>
-          <a:prstGeom prst="rect">
-            <a:avLst/>
-          </a:prstGeom>
-          <a:solidFill>
-            <a:srgbClr val="0000FF"/>
-          </a:solidFill>
-          <a:ln/>
-        </p:spPr>
-      </p:sp>
-      <p:sp>
-        <p:nvSpPr>
-          <p:cNvPr id="49" name="Unifont_14pt_sp1_75__c29.40_t23.94"/>
-          <p:cNvSpPr/>
-          <p:nvPr/>
-        </p:nvSpPr>
-        <p:spPr>
-          <a:xfrm>
-            <a:off x="6309360" y="2225040"/>
-            <a:ext cx="355600" cy="373380"/>
+          <p:cNvPr id="26" name="Unifont_14pt_sp1_75__c29.40_t23.94"/>
+          <p:cNvSpPr/>
+          <p:nvPr/>
+        </p:nvSpPr>
+        <p:spPr>
+          <a:xfrm>
+            <a:off x="6309360" y="2012442"/>
+            <a:ext cx="355600" cy="304038"/>
           </a:xfrm>
           <a:prstGeom prst="rect">
             <a:avLst/>
@@ -10530,34 +7870,14 @@
       </p:sp>
       <p:sp>
         <p:nvSpPr>
-          <p:cNvPr id="50" name="Unifont_14pt_sp1_75__c29.40_t23.94__textBoxMarker"/>
-          <p:cNvSpPr/>
-          <p:nvPr/>
-        </p:nvSpPr>
-        <p:spPr>
-          <a:xfrm>
-            <a:off x="6309360" y="2522728"/>
-            <a:ext cx="355600" cy="12700"/>
-          </a:xfrm>
-          <a:prstGeom prst="rect">
-            <a:avLst/>
-          </a:prstGeom>
-          <a:solidFill>
-            <a:srgbClr val="0000FF"/>
-          </a:solidFill>
-          <a:ln/>
-        </p:spPr>
-      </p:sp>
-      <p:sp>
-        <p:nvSpPr>
-          <p:cNvPr id="51" name="Unifont_14pt_sp2__c33.60_t27.09"/>
-          <p:cNvSpPr/>
-          <p:nvPr/>
-        </p:nvSpPr>
-        <p:spPr>
-          <a:xfrm>
-            <a:off x="8290560" y="2225040"/>
-            <a:ext cx="355600" cy="426720"/>
+          <p:cNvPr id="27" name="Unifont_14pt_sp2__c33.60_t27.09"/>
+          <p:cNvSpPr/>
+          <p:nvPr/>
+        </p:nvSpPr>
+        <p:spPr>
+          <a:xfrm>
+            <a:off x="8290560" y="2012442"/>
+            <a:ext cx="355600" cy="344043"/>
           </a:xfrm>
           <a:prstGeom prst="rect">
             <a:avLst/>
@@ -10599,34 +7919,14 @@
       </p:sp>
       <p:sp>
         <p:nvSpPr>
-          <p:cNvPr id="52" name="Unifont_14pt_sp2__c33.60_t27.09__textBoxMarker"/>
-          <p:cNvSpPr/>
-          <p:nvPr/>
-        </p:nvSpPr>
-        <p:spPr>
-          <a:xfrm>
-            <a:off x="8290560" y="2562733"/>
-            <a:ext cx="355600" cy="12700"/>
-          </a:xfrm>
-          <a:prstGeom prst="rect">
-            <a:avLst/>
-          </a:prstGeom>
-          <a:solidFill>
-            <a:srgbClr val="0000FF"/>
-          </a:solidFill>
-          <a:ln/>
-        </p:spPr>
-      </p:sp>
-      <p:sp>
-        <p:nvSpPr>
-          <p:cNvPr id="53" name="Unifont_18pt_sp1__c21.60_t21.33"/>
-          <p:cNvSpPr/>
-          <p:nvPr/>
-        </p:nvSpPr>
-        <p:spPr>
-          <a:xfrm>
-            <a:off x="365760" y="2753360"/>
-            <a:ext cx="457200" cy="274320"/>
+          <p:cNvPr id="28" name="Unifont_18pt_sp1__c21.60_t18.63"/>
+          <p:cNvSpPr/>
+          <p:nvPr/>
+        </p:nvSpPr>
+        <p:spPr>
+          <a:xfrm>
+            <a:off x="365760" y="2458085"/>
+            <a:ext cx="457200" cy="236601"/>
           </a:xfrm>
           <a:prstGeom prst="rect">
             <a:avLst/>
@@ -10668,34 +7968,14 @@
       </p:sp>
       <p:sp>
         <p:nvSpPr>
-          <p:cNvPr id="54" name="Unifont_18pt_sp1__c21.60_t21.33__textBoxMarker"/>
-          <p:cNvSpPr/>
-          <p:nvPr/>
-        </p:nvSpPr>
-        <p:spPr>
-          <a:xfrm>
-            <a:off x="365760" y="3017901"/>
-            <a:ext cx="457200" cy="12700"/>
-          </a:xfrm>
-          <a:prstGeom prst="rect">
-            <a:avLst/>
-          </a:prstGeom>
-          <a:solidFill>
-            <a:srgbClr val="0000FF"/>
-          </a:solidFill>
-          <a:ln/>
-        </p:spPr>
-      </p:sp>
-      <p:sp>
-        <p:nvSpPr>
-          <p:cNvPr id="55" name="Unifont_18pt_sp1_25__c27.00_t22.68"/>
-          <p:cNvSpPr/>
-          <p:nvPr/>
-        </p:nvSpPr>
-        <p:spPr>
-          <a:xfrm>
-            <a:off x="2346960" y="2753360"/>
-            <a:ext cx="457200" cy="342900"/>
+          <p:cNvPr id="29" name="Unifont_18pt_sp1_25__c27.00_t22.68"/>
+          <p:cNvSpPr/>
+          <p:nvPr/>
+        </p:nvSpPr>
+        <p:spPr>
+          <a:xfrm>
+            <a:off x="2346960" y="2458085"/>
+            <a:ext cx="457200" cy="288036"/>
           </a:xfrm>
           <a:prstGeom prst="rect">
             <a:avLst/>
@@ -10737,34 +8017,14 @@
       </p:sp>
       <p:sp>
         <p:nvSpPr>
-          <p:cNvPr id="56" name="Unifont_18pt_sp1_25__c27.00_t22.68__textBoxMarker"/>
-          <p:cNvSpPr/>
-          <p:nvPr/>
-        </p:nvSpPr>
-        <p:spPr>
-          <a:xfrm>
-            <a:off x="2346960" y="3035046"/>
-            <a:ext cx="457200" cy="12700"/>
-          </a:xfrm>
-          <a:prstGeom prst="rect">
-            <a:avLst/>
-          </a:prstGeom>
-          <a:solidFill>
-            <a:srgbClr val="0000FF"/>
-          </a:solidFill>
-          <a:ln/>
-        </p:spPr>
-      </p:sp>
-      <p:sp>
-        <p:nvSpPr>
-          <p:cNvPr id="57" name="Unifont_18pt_sp1_5__c32.40_t26.73"/>
-          <p:cNvSpPr/>
-          <p:nvPr/>
-        </p:nvSpPr>
-        <p:spPr>
-          <a:xfrm>
-            <a:off x="4328160" y="2753360"/>
-            <a:ext cx="457200" cy="411480"/>
+          <p:cNvPr id="30" name="Unifont_18pt_sp1_5__c32.40_t26.73"/>
+          <p:cNvSpPr/>
+          <p:nvPr/>
+        </p:nvSpPr>
+        <p:spPr>
+          <a:xfrm>
+            <a:off x="4328160" y="2458085"/>
+            <a:ext cx="457200" cy="339471"/>
           </a:xfrm>
           <a:prstGeom prst="rect">
             <a:avLst/>
@@ -10806,34 +8066,14 @@
       </p:sp>
       <p:sp>
         <p:nvSpPr>
-          <p:cNvPr id="58" name="Unifont_18pt_sp1_5__c32.40_t26.73__textBoxMarker"/>
-          <p:cNvSpPr/>
-          <p:nvPr/>
-        </p:nvSpPr>
-        <p:spPr>
-          <a:xfrm>
-            <a:off x="4328160" y="3086481"/>
-            <a:ext cx="457200" cy="12700"/>
-          </a:xfrm>
-          <a:prstGeom prst="rect">
-            <a:avLst/>
-          </a:prstGeom>
-          <a:solidFill>
-            <a:srgbClr val="0000FF"/>
-          </a:solidFill>
-          <a:ln/>
-        </p:spPr>
-      </p:sp>
-      <p:sp>
-        <p:nvSpPr>
-          <p:cNvPr id="59" name="Unifont_18pt_sp1_75__c37.80_t30.78"/>
-          <p:cNvSpPr/>
-          <p:nvPr/>
-        </p:nvSpPr>
-        <p:spPr>
-          <a:xfrm>
-            <a:off x="6309360" y="2753360"/>
-            <a:ext cx="457200" cy="480060"/>
+          <p:cNvPr id="31" name="Unifont_18pt_sp1_75__c37.80_t30.78"/>
+          <p:cNvSpPr/>
+          <p:nvPr/>
+        </p:nvSpPr>
+        <p:spPr>
+          <a:xfrm>
+            <a:off x="6309360" y="2458085"/>
+            <a:ext cx="457200" cy="390906"/>
           </a:xfrm>
           <a:prstGeom prst="rect">
             <a:avLst/>
@@ -10875,34 +8115,14 @@
       </p:sp>
       <p:sp>
         <p:nvSpPr>
-          <p:cNvPr id="60" name="Unifont_18pt_sp1_75__c37.80_t30.78__textBoxMarker"/>
-          <p:cNvSpPr/>
-          <p:nvPr/>
-        </p:nvSpPr>
-        <p:spPr>
-          <a:xfrm>
-            <a:off x="6309360" y="3137916"/>
-            <a:ext cx="457200" cy="12700"/>
-          </a:xfrm>
-          <a:prstGeom prst="rect">
-            <a:avLst/>
-          </a:prstGeom>
-          <a:solidFill>
-            <a:srgbClr val="0000FF"/>
-          </a:solidFill>
-          <a:ln/>
-        </p:spPr>
-      </p:sp>
-      <p:sp>
-        <p:nvSpPr>
-          <p:cNvPr id="61" name="Unifont_18pt_sp2__c43.20_t34.83"/>
-          <p:cNvSpPr/>
-          <p:nvPr/>
-        </p:nvSpPr>
-        <p:spPr>
-          <a:xfrm>
-            <a:off x="8290560" y="2753360"/>
-            <a:ext cx="457200" cy="548640"/>
+          <p:cNvPr id="32" name="Unifont_18pt_sp2__c43.20_t34.83"/>
+          <p:cNvSpPr/>
+          <p:nvPr/>
+        </p:nvSpPr>
+        <p:spPr>
+          <a:xfrm>
+            <a:off x="8290560" y="2458085"/>
+            <a:ext cx="457200" cy="442341"/>
           </a:xfrm>
           <a:prstGeom prst="rect">
             <a:avLst/>
@@ -10944,34 +8164,14 @@
       </p:sp>
       <p:sp>
         <p:nvSpPr>
-          <p:cNvPr id="62" name="Unifont_18pt_sp2__c43.20_t34.83__textBoxMarker"/>
-          <p:cNvSpPr/>
-          <p:nvPr/>
-        </p:nvSpPr>
-        <p:spPr>
-          <a:xfrm>
-            <a:off x="8290560" y="3189351"/>
-            <a:ext cx="457200" cy="12700"/>
-          </a:xfrm>
-          <a:prstGeom prst="rect">
-            <a:avLst/>
-          </a:prstGeom>
-          <a:solidFill>
-            <a:srgbClr val="0000FF"/>
-          </a:solidFill>
-          <a:ln/>
-        </p:spPr>
-      </p:sp>
-      <p:sp>
-        <p:nvSpPr>
-          <p:cNvPr id="63" name="Unifont_24pt_sp1__c28.80_t28.43"/>
-          <p:cNvSpPr/>
-          <p:nvPr/>
-        </p:nvSpPr>
-        <p:spPr>
-          <a:xfrm>
-            <a:off x="365760" y="3403600"/>
-            <a:ext cx="609600" cy="365760"/>
+          <p:cNvPr id="33" name="Unifont_24pt_sp1__c28.80_t24.83"/>
+          <p:cNvSpPr/>
+          <p:nvPr/>
+        </p:nvSpPr>
+        <p:spPr>
+          <a:xfrm>
+            <a:off x="365760" y="3002026"/>
+            <a:ext cx="609600" cy="315341"/>
           </a:xfrm>
           <a:prstGeom prst="rect">
             <a:avLst/>
@@ -11013,34 +8213,14 @@
       </p:sp>
       <p:sp>
         <p:nvSpPr>
-          <p:cNvPr id="64" name="Unifont_24pt_sp1__c28.80_t28.43__textBoxMarker"/>
-          <p:cNvSpPr/>
-          <p:nvPr/>
-        </p:nvSpPr>
-        <p:spPr>
-          <a:xfrm>
-            <a:off x="365760" y="3758311"/>
-            <a:ext cx="609600" cy="12700"/>
-          </a:xfrm>
-          <a:prstGeom prst="rect">
-            <a:avLst/>
-          </a:prstGeom>
-          <a:solidFill>
-            <a:srgbClr val="0000FF"/>
-          </a:solidFill>
-          <a:ln/>
-        </p:spPr>
-      </p:sp>
-      <p:sp>
-        <p:nvSpPr>
-          <p:cNvPr id="65" name="Unifont_24pt_sp1_25__c36.00_t30.23"/>
-          <p:cNvSpPr/>
-          <p:nvPr/>
-        </p:nvSpPr>
-        <p:spPr>
-          <a:xfrm>
-            <a:off x="2346960" y="3403600"/>
-            <a:ext cx="609600" cy="457200"/>
+          <p:cNvPr id="34" name="Unifont_24pt_sp1_25__c36.00_t30.23"/>
+          <p:cNvSpPr/>
+          <p:nvPr/>
+        </p:nvSpPr>
+        <p:spPr>
+          <a:xfrm>
+            <a:off x="2346960" y="3002026"/>
+            <a:ext cx="609600" cy="383921"/>
           </a:xfrm>
           <a:prstGeom prst="rect">
             <a:avLst/>
@@ -11082,34 +8262,14 @@
       </p:sp>
       <p:sp>
         <p:nvSpPr>
-          <p:cNvPr id="66" name="Unifont_24pt_sp1_25__c36.00_t30.23__textBoxMarker"/>
-          <p:cNvSpPr/>
-          <p:nvPr/>
-        </p:nvSpPr>
-        <p:spPr>
-          <a:xfrm>
-            <a:off x="2346960" y="3781171"/>
-            <a:ext cx="609600" cy="12700"/>
-          </a:xfrm>
-          <a:prstGeom prst="rect">
-            <a:avLst/>
-          </a:prstGeom>
-          <a:solidFill>
-            <a:srgbClr val="0000FF"/>
-          </a:solidFill>
-          <a:ln/>
-        </p:spPr>
-      </p:sp>
-      <p:sp>
-        <p:nvSpPr>
-          <p:cNvPr id="67" name="Unifont_24pt_sp1_5__c43.20_t35.63"/>
-          <p:cNvSpPr/>
-          <p:nvPr/>
-        </p:nvSpPr>
-        <p:spPr>
-          <a:xfrm>
-            <a:off x="4328160" y="3403600"/>
-            <a:ext cx="609600" cy="548640"/>
+          <p:cNvPr id="35" name="Unifont_24pt_sp1_5__c43.20_t35.63"/>
+          <p:cNvSpPr/>
+          <p:nvPr/>
+        </p:nvSpPr>
+        <p:spPr>
+          <a:xfrm>
+            <a:off x="4328160" y="3002026"/>
+            <a:ext cx="609600" cy="452501"/>
           </a:xfrm>
           <a:prstGeom prst="rect">
             <a:avLst/>
@@ -11151,34 +8311,14 @@
       </p:sp>
       <p:sp>
         <p:nvSpPr>
-          <p:cNvPr id="68" name="Unifont_24pt_sp1_5__c43.20_t35.63__textBoxMarker"/>
-          <p:cNvSpPr/>
-          <p:nvPr/>
-        </p:nvSpPr>
-        <p:spPr>
-          <a:xfrm>
-            <a:off x="4328160" y="3849751"/>
-            <a:ext cx="609600" cy="12700"/>
-          </a:xfrm>
-          <a:prstGeom prst="rect">
-            <a:avLst/>
-          </a:prstGeom>
-          <a:solidFill>
-            <a:srgbClr val="0000FF"/>
-          </a:solidFill>
-          <a:ln/>
-        </p:spPr>
-      </p:sp>
-      <p:sp>
-        <p:nvSpPr>
-          <p:cNvPr id="69" name="Unifont_24pt_sp1_75__c50.40_t41.03"/>
-          <p:cNvSpPr/>
-          <p:nvPr/>
-        </p:nvSpPr>
-        <p:spPr>
-          <a:xfrm>
-            <a:off x="6309360" y="3403600"/>
-            <a:ext cx="609600" cy="640080"/>
+          <p:cNvPr id="36" name="Unifont_24pt_sp1_75__c50.40_t41.03"/>
+          <p:cNvSpPr/>
+          <p:nvPr/>
+        </p:nvSpPr>
+        <p:spPr>
+          <a:xfrm>
+            <a:off x="6309360" y="3002026"/>
+            <a:ext cx="609600" cy="521081"/>
           </a:xfrm>
           <a:prstGeom prst="rect">
             <a:avLst/>
@@ -11220,34 +8360,14 @@
       </p:sp>
       <p:sp>
         <p:nvSpPr>
-          <p:cNvPr id="70" name="Unifont_24pt_sp1_75__c50.40_t41.03__textBoxMarker"/>
-          <p:cNvSpPr/>
-          <p:nvPr/>
-        </p:nvSpPr>
-        <p:spPr>
-          <a:xfrm>
-            <a:off x="6309360" y="3918331"/>
-            <a:ext cx="609600" cy="12700"/>
-          </a:xfrm>
-          <a:prstGeom prst="rect">
-            <a:avLst/>
-          </a:prstGeom>
-          <a:solidFill>
-            <a:srgbClr val="0000FF"/>
-          </a:solidFill>
-          <a:ln/>
-        </p:spPr>
-      </p:sp>
-      <p:sp>
-        <p:nvSpPr>
-          <p:cNvPr id="71" name="Unifont_24pt_sp2__c57.60_t46.43"/>
-          <p:cNvSpPr/>
-          <p:nvPr/>
-        </p:nvSpPr>
-        <p:spPr>
-          <a:xfrm>
-            <a:off x="8290560" y="3403600"/>
-            <a:ext cx="609600" cy="731520"/>
+          <p:cNvPr id="37" name="Unifont_24pt_sp2__c57.60_t46.43"/>
+          <p:cNvSpPr/>
+          <p:nvPr/>
+        </p:nvSpPr>
+        <p:spPr>
+          <a:xfrm>
+            <a:off x="8290560" y="3002026"/>
+            <a:ext cx="609600" cy="589661"/>
           </a:xfrm>
           <a:prstGeom prst="rect">
             <a:avLst/>
@@ -11289,34 +8409,14 @@
       </p:sp>
       <p:sp>
         <p:nvSpPr>
-          <p:cNvPr id="72" name="Unifont_24pt_sp2__c57.60_t46.43__textBoxMarker"/>
-          <p:cNvSpPr/>
-          <p:nvPr/>
-        </p:nvSpPr>
-        <p:spPr>
-          <a:xfrm>
-            <a:off x="8290560" y="3986911"/>
-            <a:ext cx="609600" cy="12700"/>
-          </a:xfrm>
-          <a:prstGeom prst="rect">
-            <a:avLst/>
-          </a:prstGeom>
-          <a:solidFill>
-            <a:srgbClr val="0000FF"/>
-          </a:solidFill>
-          <a:ln/>
-        </p:spPr>
-      </p:sp>
-      <p:sp>
-        <p:nvSpPr>
-          <p:cNvPr id="73" name="Unifont_32pt_sp1__c38.40_t37.91"/>
-          <p:cNvSpPr/>
-          <p:nvPr/>
-        </p:nvSpPr>
-        <p:spPr>
-          <a:xfrm>
-            <a:off x="365760" y="4236720"/>
-            <a:ext cx="812800" cy="487680"/>
+          <p:cNvPr id="38" name="Unifont_32pt_sp1__c38.40_t33.11"/>
+          <p:cNvSpPr/>
+          <p:nvPr/>
+        </p:nvSpPr>
+        <p:spPr>
+          <a:xfrm>
+            <a:off x="365760" y="3693287"/>
+            <a:ext cx="812800" cy="420497"/>
           </a:xfrm>
           <a:prstGeom prst="rect">
             <a:avLst/>
@@ -11358,34 +8458,14 @@
       </p:sp>
       <p:sp>
         <p:nvSpPr>
-          <p:cNvPr id="74" name="Unifont_32pt_sp1__c38.40_t37.91__textBoxMarker"/>
-          <p:cNvSpPr/>
-          <p:nvPr/>
-        </p:nvSpPr>
-        <p:spPr>
-          <a:xfrm>
-            <a:off x="365760" y="4711827"/>
-            <a:ext cx="812800" cy="12700"/>
-          </a:xfrm>
-          <a:prstGeom prst="rect">
-            <a:avLst/>
-          </a:prstGeom>
-          <a:solidFill>
-            <a:srgbClr val="0000FF"/>
-          </a:solidFill>
-          <a:ln/>
-        </p:spPr>
-      </p:sp>
-      <p:sp>
-        <p:nvSpPr>
-          <p:cNvPr id="75" name="Unifont_32pt_sp1_25__c48.00_t40.31"/>
-          <p:cNvSpPr/>
-          <p:nvPr/>
-        </p:nvSpPr>
-        <p:spPr>
-          <a:xfrm>
-            <a:off x="2346960" y="4236720"/>
-            <a:ext cx="812800" cy="609600"/>
+          <p:cNvPr id="39" name="Unifont_32pt_sp1_25__c48.00_t40.31"/>
+          <p:cNvSpPr/>
+          <p:nvPr/>
+        </p:nvSpPr>
+        <p:spPr>
+          <a:xfrm>
+            <a:off x="2346960" y="3693287"/>
+            <a:ext cx="812800" cy="511937"/>
           </a:xfrm>
           <a:prstGeom prst="rect">
             <a:avLst/>
@@ -11427,34 +8507,14 @@
       </p:sp>
       <p:sp>
         <p:nvSpPr>
-          <p:cNvPr id="76" name="Unifont_32pt_sp1_25__c48.00_t40.31__textBoxMarker"/>
-          <p:cNvSpPr/>
-          <p:nvPr/>
-        </p:nvSpPr>
-        <p:spPr>
-          <a:xfrm>
-            <a:off x="2346960" y="4742307"/>
-            <a:ext cx="812800" cy="12700"/>
-          </a:xfrm>
-          <a:prstGeom prst="rect">
-            <a:avLst/>
-          </a:prstGeom>
-          <a:solidFill>
-            <a:srgbClr val="0000FF"/>
-          </a:solidFill>
-          <a:ln/>
-        </p:spPr>
-      </p:sp>
-      <p:sp>
-        <p:nvSpPr>
-          <p:cNvPr id="77" name="Unifont_32pt_sp1_5__c57.60_t47.51"/>
-          <p:cNvSpPr/>
-          <p:nvPr/>
-        </p:nvSpPr>
-        <p:spPr>
-          <a:xfrm>
-            <a:off x="4328160" y="4236720"/>
-            <a:ext cx="812800" cy="731520"/>
+          <p:cNvPr id="40" name="Unifont_32pt_sp1_5__c57.60_t47.51"/>
+          <p:cNvSpPr/>
+          <p:nvPr/>
+        </p:nvSpPr>
+        <p:spPr>
+          <a:xfrm>
+            <a:off x="4328160" y="3693287"/>
+            <a:ext cx="812800" cy="603377"/>
           </a:xfrm>
           <a:prstGeom prst="rect">
             <a:avLst/>
@@ -11496,34 +8556,14 @@
       </p:sp>
       <p:sp>
         <p:nvSpPr>
-          <p:cNvPr id="78" name="Unifont_32pt_sp1_5__c57.60_t47.51__textBoxMarker"/>
-          <p:cNvSpPr/>
-          <p:nvPr/>
-        </p:nvSpPr>
-        <p:spPr>
-          <a:xfrm>
-            <a:off x="4328160" y="4833747"/>
-            <a:ext cx="812800" cy="12700"/>
-          </a:xfrm>
-          <a:prstGeom prst="rect">
-            <a:avLst/>
-          </a:prstGeom>
-          <a:solidFill>
-            <a:srgbClr val="0000FF"/>
-          </a:solidFill>
-          <a:ln/>
-        </p:spPr>
-      </p:sp>
-      <p:sp>
-        <p:nvSpPr>
-          <p:cNvPr id="79" name="Unifont_32pt_sp1_75__c67.20_t54.71"/>
-          <p:cNvSpPr/>
-          <p:nvPr/>
-        </p:nvSpPr>
-        <p:spPr>
-          <a:xfrm>
-            <a:off x="6309360" y="4236720"/>
-            <a:ext cx="812800" cy="853440"/>
+          <p:cNvPr id="41" name="Unifont_32pt_sp1_75__c67.20_t54.71"/>
+          <p:cNvSpPr/>
+          <p:nvPr/>
+        </p:nvSpPr>
+        <p:spPr>
+          <a:xfrm>
+            <a:off x="6309360" y="3693287"/>
+            <a:ext cx="812800" cy="694817"/>
           </a:xfrm>
           <a:prstGeom prst="rect">
             <a:avLst/>
@@ -11565,34 +8605,14 @@
       </p:sp>
       <p:sp>
         <p:nvSpPr>
-          <p:cNvPr id="80" name="Unifont_32pt_sp1_75__c67.20_t54.71__textBoxMarker"/>
-          <p:cNvSpPr/>
-          <p:nvPr/>
-        </p:nvSpPr>
-        <p:spPr>
-          <a:xfrm>
-            <a:off x="6309360" y="4925187"/>
-            <a:ext cx="812800" cy="12700"/>
-          </a:xfrm>
-          <a:prstGeom prst="rect">
-            <a:avLst/>
-          </a:prstGeom>
-          <a:solidFill>
-            <a:srgbClr val="0000FF"/>
-          </a:solidFill>
-          <a:ln/>
-        </p:spPr>
-      </p:sp>
-      <p:sp>
-        <p:nvSpPr>
-          <p:cNvPr id="81" name="Unifont_32pt_sp2__c76.80_t61.91"/>
-          <p:cNvSpPr/>
-          <p:nvPr/>
-        </p:nvSpPr>
-        <p:spPr>
-          <a:xfrm>
-            <a:off x="8290560" y="4236720"/>
-            <a:ext cx="812800" cy="975360"/>
+          <p:cNvPr id="42" name="Unifont_32pt_sp2__c76.80_t61.91"/>
+          <p:cNvSpPr/>
+          <p:nvPr/>
+        </p:nvSpPr>
+        <p:spPr>
+          <a:xfrm>
+            <a:off x="8290560" y="3693287"/>
+            <a:ext cx="812800" cy="786257"/>
           </a:xfrm>
           <a:prstGeom prst="rect">
             <a:avLst/>
@@ -11634,34 +8654,14 @@
       </p:sp>
       <p:sp>
         <p:nvSpPr>
-          <p:cNvPr id="82" name="Unifont_32pt_sp2__c76.80_t61.91__textBoxMarker"/>
-          <p:cNvSpPr/>
-          <p:nvPr/>
-        </p:nvSpPr>
-        <p:spPr>
-          <a:xfrm>
-            <a:off x="8290560" y="5016627"/>
-            <a:ext cx="812800" cy="12700"/>
-          </a:xfrm>
-          <a:prstGeom prst="rect">
-            <a:avLst/>
-          </a:prstGeom>
-          <a:solidFill>
-            <a:srgbClr val="0000FF"/>
-          </a:solidFill>
-          <a:ln/>
-        </p:spPr>
-      </p:sp>
-      <p:sp>
-        <p:nvSpPr>
-          <p:cNvPr id="83" name="Unifont_40pt_sp1__c48.00_t47.39"/>
-          <p:cNvSpPr/>
-          <p:nvPr/>
-        </p:nvSpPr>
-        <p:spPr>
-          <a:xfrm>
-            <a:off x="365760" y="5313680"/>
-            <a:ext cx="1016000" cy="609600"/>
+          <p:cNvPr id="43" name="Unifont_40pt_sp1__c48.00_t41.39"/>
+          <p:cNvSpPr/>
+          <p:nvPr/>
+        </p:nvSpPr>
+        <p:spPr>
+          <a:xfrm>
+            <a:off x="365760" y="4581144"/>
+            <a:ext cx="1016000" cy="525653"/>
           </a:xfrm>
           <a:prstGeom prst="rect">
             <a:avLst/>
@@ -11703,34 +8703,14 @@
       </p:sp>
       <p:sp>
         <p:nvSpPr>
-          <p:cNvPr id="84" name="Unifont_40pt_sp1__c48.00_t47.39__textBoxMarker"/>
-          <p:cNvSpPr/>
-          <p:nvPr/>
-        </p:nvSpPr>
-        <p:spPr>
-          <a:xfrm>
-            <a:off x="365760" y="5909183"/>
-            <a:ext cx="1016000" cy="12700"/>
-          </a:xfrm>
-          <a:prstGeom prst="rect">
-            <a:avLst/>
-          </a:prstGeom>
-          <a:solidFill>
-            <a:srgbClr val="0000FF"/>
-          </a:solidFill>
-          <a:ln/>
-        </p:spPr>
-      </p:sp>
-      <p:sp>
-        <p:nvSpPr>
-          <p:cNvPr id="85" name="Unifont_40pt_sp1_25__c60.00_t50.39"/>
-          <p:cNvSpPr/>
-          <p:nvPr/>
-        </p:nvSpPr>
-        <p:spPr>
-          <a:xfrm>
-            <a:off x="2346960" y="5313680"/>
-            <a:ext cx="1016000" cy="762000"/>
+          <p:cNvPr id="44" name="Unifont_40pt_sp1_25__c60.00_t50.39"/>
+          <p:cNvSpPr/>
+          <p:nvPr/>
+        </p:nvSpPr>
+        <p:spPr>
+          <a:xfrm>
+            <a:off x="2346960" y="4581144"/>
+            <a:ext cx="1016000" cy="639953"/>
           </a:xfrm>
           <a:prstGeom prst="rect">
             <a:avLst/>
@@ -11772,34 +8752,14 @@
       </p:sp>
       <p:sp>
         <p:nvSpPr>
-          <p:cNvPr id="86" name="Unifont_40pt_sp1_25__c60.00_t50.39__textBoxMarker"/>
-          <p:cNvSpPr/>
-          <p:nvPr/>
-        </p:nvSpPr>
-        <p:spPr>
-          <a:xfrm>
-            <a:off x="2346960" y="5947283"/>
-            <a:ext cx="1016000" cy="12700"/>
-          </a:xfrm>
-          <a:prstGeom prst="rect">
-            <a:avLst/>
-          </a:prstGeom>
-          <a:solidFill>
-            <a:srgbClr val="0000FF"/>
-          </a:solidFill>
-          <a:ln/>
-        </p:spPr>
-      </p:sp>
-      <p:sp>
-        <p:nvSpPr>
-          <p:cNvPr id="87" name="Unifont_40pt_sp1_5__c72.00_t59.39"/>
-          <p:cNvSpPr/>
-          <p:nvPr/>
-        </p:nvSpPr>
-        <p:spPr>
-          <a:xfrm>
-            <a:off x="4328160" y="5313680"/>
-            <a:ext cx="1016000" cy="914400"/>
+          <p:cNvPr id="45" name="Unifont_40pt_sp1_5__c72.00_t59.39"/>
+          <p:cNvSpPr/>
+          <p:nvPr/>
+        </p:nvSpPr>
+        <p:spPr>
+          <a:xfrm>
+            <a:off x="4328160" y="4581144"/>
+            <a:ext cx="1016000" cy="754253"/>
           </a:xfrm>
           <a:prstGeom prst="rect">
             <a:avLst/>
@@ -11841,34 +8801,14 @@
       </p:sp>
       <p:sp>
         <p:nvSpPr>
-          <p:cNvPr id="88" name="Unifont_40pt_sp1_5__c72.00_t59.39__textBoxMarker"/>
-          <p:cNvSpPr/>
-          <p:nvPr/>
-        </p:nvSpPr>
-        <p:spPr>
-          <a:xfrm>
-            <a:off x="4328160" y="6061583"/>
-            <a:ext cx="1016000" cy="12700"/>
-          </a:xfrm>
-          <a:prstGeom prst="rect">
-            <a:avLst/>
-          </a:prstGeom>
-          <a:solidFill>
-            <a:srgbClr val="0000FF"/>
-          </a:solidFill>
-          <a:ln/>
-        </p:spPr>
-      </p:sp>
-      <p:sp>
-        <p:nvSpPr>
-          <p:cNvPr id="89" name="Unifont_40pt_sp1_75__c84.00_t68.39"/>
-          <p:cNvSpPr/>
-          <p:nvPr/>
-        </p:nvSpPr>
-        <p:spPr>
-          <a:xfrm>
-            <a:off x="6309360" y="5313680"/>
-            <a:ext cx="1016000" cy="1066800"/>
+          <p:cNvPr id="46" name="Unifont_40pt_sp1_75__c84.00_t68.39"/>
+          <p:cNvSpPr/>
+          <p:nvPr/>
+        </p:nvSpPr>
+        <p:spPr>
+          <a:xfrm>
+            <a:off x="6309360" y="4581144"/>
+            <a:ext cx="1016000" cy="868553"/>
           </a:xfrm>
           <a:prstGeom prst="rect">
             <a:avLst/>
@@ -11910,34 +8850,14 @@
       </p:sp>
       <p:sp>
         <p:nvSpPr>
-          <p:cNvPr id="90" name="Unifont_40pt_sp1_75__c84.00_t68.39__textBoxMarker"/>
-          <p:cNvSpPr/>
-          <p:nvPr/>
-        </p:nvSpPr>
-        <p:spPr>
-          <a:xfrm>
-            <a:off x="6309360" y="6175883"/>
-            <a:ext cx="1016000" cy="12700"/>
-          </a:xfrm>
-          <a:prstGeom prst="rect">
-            <a:avLst/>
-          </a:prstGeom>
-          <a:solidFill>
-            <a:srgbClr val="0000FF"/>
-          </a:solidFill>
-          <a:ln/>
-        </p:spPr>
-      </p:sp>
-      <p:sp>
-        <p:nvSpPr>
-          <p:cNvPr id="91" name="Unifont_40pt_sp2__c96.00_t77.39"/>
-          <p:cNvSpPr/>
-          <p:nvPr/>
-        </p:nvSpPr>
-        <p:spPr>
-          <a:xfrm>
-            <a:off x="8290560" y="5313680"/>
-            <a:ext cx="1016000" cy="1219200"/>
+          <p:cNvPr id="47" name="Unifont_40pt_sp2__c96.00_t77.39"/>
+          <p:cNvSpPr/>
+          <p:nvPr/>
+        </p:nvSpPr>
+        <p:spPr>
+          <a:xfrm>
+            <a:off x="8290560" y="4581144"/>
+            <a:ext cx="1016000" cy="982853"/>
           </a:xfrm>
           <a:prstGeom prst="rect">
             <a:avLst/>
@@ -11979,34 +8899,14 @@
       </p:sp>
       <p:sp>
         <p:nvSpPr>
-          <p:cNvPr id="92" name="Unifont_40pt_sp2__c96.00_t77.39__textBoxMarker"/>
-          <p:cNvSpPr/>
-          <p:nvPr/>
-        </p:nvSpPr>
-        <p:spPr>
-          <a:xfrm>
-            <a:off x="8290560" y="6290183"/>
-            <a:ext cx="1016000" cy="12700"/>
-          </a:xfrm>
-          <a:prstGeom prst="rect">
-            <a:avLst/>
-          </a:prstGeom>
-          <a:solidFill>
-            <a:srgbClr val="0000FF"/>
-          </a:solidFill>
-          <a:ln/>
-        </p:spPr>
-      </p:sp>
-      <p:sp>
-        <p:nvSpPr>
-          <p:cNvPr id="93" name="Unifont_56pt_sp1__c67.20_t66.35"/>
-          <p:cNvSpPr/>
-          <p:nvPr/>
-        </p:nvSpPr>
-        <p:spPr>
-          <a:xfrm>
-            <a:off x="365760" y="6634480"/>
-            <a:ext cx="1422400" cy="853440"/>
+          <p:cNvPr id="48" name="Unifont_56pt_sp1__c67.20_t57.95"/>
+          <p:cNvSpPr/>
+          <p:nvPr/>
+        </p:nvSpPr>
+        <p:spPr>
+          <a:xfrm>
+            <a:off x="365760" y="5665597"/>
+            <a:ext cx="1422400" cy="735965"/>
           </a:xfrm>
           <a:prstGeom prst="rect">
             <a:avLst/>
@@ -12048,34 +8948,14 @@
       </p:sp>
       <p:sp>
         <p:nvSpPr>
-          <p:cNvPr id="94" name="Unifont_56pt_sp1__c67.20_t66.35__textBoxMarker"/>
-          <p:cNvSpPr/>
-          <p:nvPr/>
-        </p:nvSpPr>
-        <p:spPr>
-          <a:xfrm>
-            <a:off x="365760" y="7470775"/>
-            <a:ext cx="1422400" cy="12700"/>
-          </a:xfrm>
-          <a:prstGeom prst="rect">
-            <a:avLst/>
-          </a:prstGeom>
-          <a:solidFill>
-            <a:srgbClr val="0000FF"/>
-          </a:solidFill>
-          <a:ln/>
-        </p:spPr>
-      </p:sp>
-      <p:sp>
-        <p:nvSpPr>
-          <p:cNvPr id="95" name="Unifont_56pt_sp1_25__c84.00_t70.55"/>
-          <p:cNvSpPr/>
-          <p:nvPr/>
-        </p:nvSpPr>
-        <p:spPr>
-          <a:xfrm>
-            <a:off x="2346960" y="6634480"/>
-            <a:ext cx="1422400" cy="1066800"/>
+          <p:cNvPr id="49" name="Unifont_56pt_sp1_25__c84.00_t70.55"/>
+          <p:cNvSpPr/>
+          <p:nvPr/>
+        </p:nvSpPr>
+        <p:spPr>
+          <a:xfrm>
+            <a:off x="2346960" y="5665597"/>
+            <a:ext cx="1422400" cy="895985"/>
           </a:xfrm>
           <a:prstGeom prst="rect">
             <a:avLst/>
@@ -12117,34 +8997,14 @@
       </p:sp>
       <p:sp>
         <p:nvSpPr>
-          <p:cNvPr id="96" name="Unifont_56pt_sp1_25__c84.00_t70.55__textBoxMarker"/>
-          <p:cNvSpPr/>
-          <p:nvPr/>
-        </p:nvSpPr>
-        <p:spPr>
-          <a:xfrm>
-            <a:off x="2346960" y="7524115"/>
-            <a:ext cx="1422400" cy="12700"/>
-          </a:xfrm>
-          <a:prstGeom prst="rect">
-            <a:avLst/>
-          </a:prstGeom>
-          <a:solidFill>
-            <a:srgbClr val="0000FF"/>
-          </a:solidFill>
-          <a:ln/>
-        </p:spPr>
-      </p:sp>
-      <p:sp>
-        <p:nvSpPr>
-          <p:cNvPr id="97" name="Unifont_56pt_sp1_5__c100.80_t83.15"/>
-          <p:cNvSpPr/>
-          <p:nvPr/>
-        </p:nvSpPr>
-        <p:spPr>
-          <a:xfrm>
-            <a:off x="4328160" y="6634480"/>
-            <a:ext cx="1422400" cy="1280160"/>
+          <p:cNvPr id="50" name="Unifont_56pt_sp1_5__c100.80_t83.15"/>
+          <p:cNvSpPr/>
+          <p:nvPr/>
+        </p:nvSpPr>
+        <p:spPr>
+          <a:xfrm>
+            <a:off x="4328160" y="5665597"/>
+            <a:ext cx="1422400" cy="1056005"/>
           </a:xfrm>
           <a:prstGeom prst="rect">
             <a:avLst/>
@@ -12186,34 +9046,14 @@
       </p:sp>
       <p:sp>
         <p:nvSpPr>
-          <p:cNvPr id="98" name="Unifont_56pt_sp1_5__c100.80_t83.15__textBoxMarker"/>
-          <p:cNvSpPr/>
-          <p:nvPr/>
-        </p:nvSpPr>
-        <p:spPr>
-          <a:xfrm>
-            <a:off x="4328160" y="7684135"/>
-            <a:ext cx="1422400" cy="12700"/>
-          </a:xfrm>
-          <a:prstGeom prst="rect">
-            <a:avLst/>
-          </a:prstGeom>
-          <a:solidFill>
-            <a:srgbClr val="0000FF"/>
-          </a:solidFill>
-          <a:ln/>
-        </p:spPr>
-      </p:sp>
-      <p:sp>
-        <p:nvSpPr>
-          <p:cNvPr id="99" name="Unifont_56pt_sp1_75__c117.60_t95.75"/>
-          <p:cNvSpPr/>
-          <p:nvPr/>
-        </p:nvSpPr>
-        <p:spPr>
-          <a:xfrm>
-            <a:off x="6309360" y="6634480"/>
-            <a:ext cx="1422400" cy="1493520"/>
+          <p:cNvPr id="51" name="Unifont_56pt_sp1_75__c117.60_t95.75"/>
+          <p:cNvSpPr/>
+          <p:nvPr/>
+        </p:nvSpPr>
+        <p:spPr>
+          <a:xfrm>
+            <a:off x="6309360" y="5665597"/>
+            <a:ext cx="1422400" cy="1216025"/>
           </a:xfrm>
           <a:prstGeom prst="rect">
             <a:avLst/>
@@ -12255,34 +9095,14 @@
       </p:sp>
       <p:sp>
         <p:nvSpPr>
-          <p:cNvPr id="100" name="Unifont_56pt_sp1_75__c117.60_t95.75__textBoxMarker"/>
-          <p:cNvSpPr/>
-          <p:nvPr/>
-        </p:nvSpPr>
-        <p:spPr>
-          <a:xfrm>
-            <a:off x="6309360" y="7844155"/>
-            <a:ext cx="1422400" cy="12700"/>
-          </a:xfrm>
-          <a:prstGeom prst="rect">
-            <a:avLst/>
-          </a:prstGeom>
-          <a:solidFill>
-            <a:srgbClr val="0000FF"/>
-          </a:solidFill>
-          <a:ln/>
-        </p:spPr>
-      </p:sp>
-      <p:sp>
-        <p:nvSpPr>
-          <p:cNvPr id="101" name="Unifont_56pt_sp2__c134.40_t108.35"/>
-          <p:cNvSpPr/>
-          <p:nvPr/>
-        </p:nvSpPr>
-        <p:spPr>
-          <a:xfrm>
-            <a:off x="8290560" y="6634480"/>
-            <a:ext cx="1422400" cy="1706880"/>
+          <p:cNvPr id="52" name="Unifont_56pt_sp2__c134.40_t108.35"/>
+          <p:cNvSpPr/>
+          <p:nvPr/>
+        </p:nvSpPr>
+        <p:spPr>
+          <a:xfrm>
+            <a:off x="8290560" y="5665597"/>
+            <a:ext cx="1422400" cy="1376045"/>
           </a:xfrm>
           <a:prstGeom prst="rect">
             <a:avLst/>
@@ -12324,34 +9144,14 @@
       </p:sp>
       <p:sp>
         <p:nvSpPr>
-          <p:cNvPr id="102" name="Unifont_56pt_sp2__c134.40_t108.35__textBoxMarker"/>
-          <p:cNvSpPr/>
-          <p:nvPr/>
-        </p:nvSpPr>
-        <p:spPr>
-          <a:xfrm>
-            <a:off x="8290560" y="8004175"/>
-            <a:ext cx="1422400" cy="12700"/>
-          </a:xfrm>
-          <a:prstGeom prst="rect">
-            <a:avLst/>
-          </a:prstGeom>
-          <a:solidFill>
-            <a:srgbClr val="0000FF"/>
-          </a:solidFill>
-          <a:ln/>
-        </p:spPr>
-      </p:sp>
-      <p:sp>
-        <p:nvSpPr>
-          <p:cNvPr id="103" name="Unifont_70pt_sp1__c84.00_t82.93"/>
-          <p:cNvSpPr/>
-          <p:nvPr/>
-        </p:nvSpPr>
-        <p:spPr>
-          <a:xfrm>
-            <a:off x="365760" y="8442960"/>
-            <a:ext cx="1778000" cy="1066800"/>
+          <p:cNvPr id="53" name="Unifont_70pt_sp1__c84.00_t72.43"/>
+          <p:cNvSpPr/>
+          <p:nvPr/>
+        </p:nvSpPr>
+        <p:spPr>
+          <a:xfrm>
+            <a:off x="365760" y="7143242"/>
+            <a:ext cx="1778000" cy="919861"/>
           </a:xfrm>
           <a:prstGeom prst="rect">
             <a:avLst/>
@@ -12393,34 +9193,14 @@
       </p:sp>
       <p:sp>
         <p:nvSpPr>
-          <p:cNvPr id="104" name="Unifont_70pt_sp1__c84.00_t82.93__textBoxMarker"/>
-          <p:cNvSpPr/>
-          <p:nvPr/>
-        </p:nvSpPr>
-        <p:spPr>
-          <a:xfrm>
-            <a:off x="365760" y="9489821"/>
-            <a:ext cx="1778000" cy="12700"/>
-          </a:xfrm>
-          <a:prstGeom prst="rect">
-            <a:avLst/>
-          </a:prstGeom>
-          <a:solidFill>
-            <a:srgbClr val="0000FF"/>
-          </a:solidFill>
-          <a:ln/>
-        </p:spPr>
-      </p:sp>
-      <p:sp>
-        <p:nvSpPr>
-          <p:cNvPr id="105" name="Unifont_70pt_sp1_25__c105.00_t88.18"/>
-          <p:cNvSpPr/>
-          <p:nvPr/>
-        </p:nvSpPr>
-        <p:spPr>
-          <a:xfrm>
-            <a:off x="2346960" y="8442960"/>
-            <a:ext cx="1778000" cy="1333500"/>
+          <p:cNvPr id="54" name="Unifont_70pt_sp1_25__c105.00_t88.18"/>
+          <p:cNvSpPr/>
+          <p:nvPr/>
+        </p:nvSpPr>
+        <p:spPr>
+          <a:xfrm>
+            <a:off x="2346960" y="7143242"/>
+            <a:ext cx="1778000" cy="1119886"/>
           </a:xfrm>
           <a:prstGeom prst="rect">
             <a:avLst/>
@@ -12462,34 +9242,14 @@
       </p:sp>
       <p:sp>
         <p:nvSpPr>
-          <p:cNvPr id="106" name="Unifont_70pt_sp1_25__c105.00_t88.18__textBoxMarker"/>
-          <p:cNvSpPr/>
-          <p:nvPr/>
-        </p:nvSpPr>
-        <p:spPr>
-          <a:xfrm>
-            <a:off x="2346960" y="9556496"/>
-            <a:ext cx="1778000" cy="12700"/>
-          </a:xfrm>
-          <a:prstGeom prst="rect">
-            <a:avLst/>
-          </a:prstGeom>
-          <a:solidFill>
-            <a:srgbClr val="0000FF"/>
-          </a:solidFill>
-          <a:ln/>
-        </p:spPr>
-      </p:sp>
-      <p:sp>
-        <p:nvSpPr>
-          <p:cNvPr id="107" name="Unifont_70pt_sp1_5__c126.00_t103.93"/>
-          <p:cNvSpPr/>
-          <p:nvPr/>
-        </p:nvSpPr>
-        <p:spPr>
-          <a:xfrm>
-            <a:off x="4328160" y="8442960"/>
-            <a:ext cx="1778000" cy="1600200"/>
+          <p:cNvPr id="55" name="Unifont_70pt_sp1_5__c126.00_t103.93"/>
+          <p:cNvSpPr/>
+          <p:nvPr/>
+        </p:nvSpPr>
+        <p:spPr>
+          <a:xfrm>
+            <a:off x="4328160" y="7143242"/>
+            <a:ext cx="1778000" cy="1319911"/>
           </a:xfrm>
           <a:prstGeom prst="rect">
             <a:avLst/>
@@ -12531,34 +9291,14 @@
       </p:sp>
       <p:sp>
         <p:nvSpPr>
-          <p:cNvPr id="108" name="Unifont_70pt_sp1_5__c126.00_t103.93__textBoxMarker"/>
-          <p:cNvSpPr/>
-          <p:nvPr/>
-        </p:nvSpPr>
-        <p:spPr>
-          <a:xfrm>
-            <a:off x="4328160" y="9756521"/>
-            <a:ext cx="1778000" cy="12700"/>
-          </a:xfrm>
-          <a:prstGeom prst="rect">
-            <a:avLst/>
-          </a:prstGeom>
-          <a:solidFill>
-            <a:srgbClr val="0000FF"/>
-          </a:solidFill>
-          <a:ln/>
-        </p:spPr>
-      </p:sp>
-      <p:sp>
-        <p:nvSpPr>
-          <p:cNvPr id="109" name="Unifont_70pt_sp1_75__c147.00_t119.68"/>
-          <p:cNvSpPr/>
-          <p:nvPr/>
-        </p:nvSpPr>
-        <p:spPr>
-          <a:xfrm>
-            <a:off x="6309360" y="8442960"/>
-            <a:ext cx="1778000" cy="1866900"/>
+          <p:cNvPr id="56" name="Unifont_70pt_sp1_75__c147.00_t119.68"/>
+          <p:cNvSpPr/>
+          <p:nvPr/>
+        </p:nvSpPr>
+        <p:spPr>
+          <a:xfrm>
+            <a:off x="6309360" y="7143242"/>
+            <a:ext cx="1778000" cy="1519936"/>
           </a:xfrm>
           <a:prstGeom prst="rect">
             <a:avLst/>
@@ -12600,34 +9340,14 @@
       </p:sp>
       <p:sp>
         <p:nvSpPr>
-          <p:cNvPr id="110" name="Unifont_70pt_sp1_75__c147.00_t119.68__textBoxMarker"/>
-          <p:cNvSpPr/>
-          <p:nvPr/>
-        </p:nvSpPr>
-        <p:spPr>
-          <a:xfrm>
-            <a:off x="6309360" y="9956546"/>
-            <a:ext cx="1778000" cy="12700"/>
-          </a:xfrm>
-          <a:prstGeom prst="rect">
-            <a:avLst/>
-          </a:prstGeom>
-          <a:solidFill>
-            <a:srgbClr val="0000FF"/>
-          </a:solidFill>
-          <a:ln/>
-        </p:spPr>
-      </p:sp>
-      <p:sp>
-        <p:nvSpPr>
-          <p:cNvPr id="111" name="Unifont_70pt_sp2__c168.00_t135.43"/>
-          <p:cNvSpPr/>
-          <p:nvPr/>
-        </p:nvSpPr>
-        <p:spPr>
-          <a:xfrm>
-            <a:off x="8290560" y="8442960"/>
-            <a:ext cx="1778000" cy="2133600"/>
+          <p:cNvPr id="57" name="Unifont_70pt_sp2__c168.00_t135.43"/>
+          <p:cNvSpPr/>
+          <p:nvPr/>
+        </p:nvSpPr>
+        <p:spPr>
+          <a:xfrm>
+            <a:off x="8290560" y="7143242"/>
+            <a:ext cx="1778000" cy="1719961"/>
           </a:xfrm>
           <a:prstGeom prst="rect">
             <a:avLst/>
@@ -12666,26 +9386,6 @@
             <a:endParaRPr lang="en-US" sz="7000" dirty="0"/>
           </a:p>
         </p:txBody>
-      </p:sp>
-      <p:sp>
-        <p:nvSpPr>
-          <p:cNvPr id="112" name="Unifont_70pt_sp2__c168.00_t135.43__textBoxMarker"/>
-          <p:cNvSpPr/>
-          <p:nvPr/>
-        </p:nvSpPr>
-        <p:spPr>
-          <a:xfrm>
-            <a:off x="8290560" y="10156571"/>
-            <a:ext cx="1778000" cy="12700"/>
-          </a:xfrm>
-          <a:prstGeom prst="rect">
-            <a:avLst/>
-          </a:prstGeom>
-          <a:solidFill>
-            <a:srgbClr val="0000FF"/>
-          </a:solidFill>
-          <a:ln/>
-        </p:spPr>
       </p:sp>
     </p:spTree>
   </p:cSld>
@@ -12753,14 +9453,14 @@
       </p:sp>
       <p:sp>
         <p:nvSpPr>
-          <p:cNvPr id="3" name="TimesNewRoman_6pt_sp1__c7.20_t6.89"/>
+          <p:cNvPr id="3" name="TimesNewRoman_6pt_sp1__c7.20_t7.04"/>
           <p:cNvSpPr/>
           <p:nvPr/>
         </p:nvSpPr>
         <p:spPr>
           <a:xfrm>
             <a:off x="365760" y="721360"/>
-            <a:ext cx="97409" cy="91440"/>
+            <a:ext cx="97409" cy="89408"/>
           </a:xfrm>
           <a:prstGeom prst="rect">
             <a:avLst/>
@@ -12802,34 +9502,14 @@
       </p:sp>
       <p:sp>
         <p:nvSpPr>
-          <p:cNvPr id="4" name="TimesNewRoman_6pt_sp1__c7.20_t6.89__textBoxMarker"/>
-          <p:cNvSpPr/>
-          <p:nvPr/>
-        </p:nvSpPr>
-        <p:spPr>
-          <a:xfrm>
-            <a:off x="365760" y="802513"/>
-            <a:ext cx="97409" cy="12700"/>
-          </a:xfrm>
-          <a:prstGeom prst="rect">
-            <a:avLst/>
-          </a:prstGeom>
-          <a:solidFill>
-            <a:srgbClr val="0000FF"/>
-          </a:solidFill>
-          <a:ln/>
-        </p:spPr>
-      </p:sp>
-      <p:sp>
-        <p:nvSpPr>
-          <p:cNvPr id="5" name="TimesNewRoman_6pt_sp1_25__c9.00_t8.15"/>
+          <p:cNvPr id="4" name="TimesNewRoman_6pt_sp1_25__c9.00_t8.15"/>
           <p:cNvSpPr/>
           <p:nvPr/>
         </p:nvSpPr>
         <p:spPr>
           <a:xfrm>
             <a:off x="2149475" y="721360"/>
-            <a:ext cx="97409" cy="114300"/>
+            <a:ext cx="97409" cy="103505"/>
           </a:xfrm>
           <a:prstGeom prst="rect">
             <a:avLst/>
@@ -12871,34 +9551,14 @@
       </p:sp>
       <p:sp>
         <p:nvSpPr>
-          <p:cNvPr id="6" name="TimesNewRoman_6pt_sp1_25__c9.00_t8.15__textBoxMarker"/>
-          <p:cNvSpPr/>
-          <p:nvPr/>
-        </p:nvSpPr>
-        <p:spPr>
-          <a:xfrm>
-            <a:off x="2149475" y="818515"/>
-            <a:ext cx="97409" cy="12700"/>
-          </a:xfrm>
-          <a:prstGeom prst="rect">
-            <a:avLst/>
-          </a:prstGeom>
-          <a:solidFill>
-            <a:srgbClr val="0000FF"/>
-          </a:solidFill>
-          <a:ln/>
-        </p:spPr>
-      </p:sp>
-      <p:sp>
-        <p:nvSpPr>
-          <p:cNvPr id="7" name="TimesNewRoman_6pt_sp1_5__c10.80_t9.50"/>
+          <p:cNvPr id="5" name="TimesNewRoman_6pt_sp1_5__c10.80_t9.50"/>
           <p:cNvSpPr/>
           <p:nvPr/>
         </p:nvSpPr>
         <p:spPr>
           <a:xfrm>
             <a:off x="3933190" y="721360"/>
-            <a:ext cx="97409" cy="137160"/>
+            <a:ext cx="97409" cy="120650"/>
           </a:xfrm>
           <a:prstGeom prst="rect">
             <a:avLst/>
@@ -12940,34 +9600,14 @@
       </p:sp>
       <p:sp>
         <p:nvSpPr>
-          <p:cNvPr id="8" name="TimesNewRoman_6pt_sp1_5__c10.80_t9.50__textBoxMarker"/>
-          <p:cNvSpPr/>
-          <p:nvPr/>
-        </p:nvSpPr>
-        <p:spPr>
-          <a:xfrm>
-            <a:off x="3933190" y="835660"/>
-            <a:ext cx="97409" cy="12700"/>
-          </a:xfrm>
-          <a:prstGeom prst="rect">
-            <a:avLst/>
-          </a:prstGeom>
-          <a:solidFill>
-            <a:srgbClr val="0000FF"/>
-          </a:solidFill>
-          <a:ln/>
-        </p:spPr>
-      </p:sp>
-      <p:sp>
-        <p:nvSpPr>
-          <p:cNvPr id="9" name="TimesNewRoman_6pt_sp1_75__c12.60_t10.85"/>
+          <p:cNvPr id="6" name="TimesNewRoman_6pt_sp1_75__c12.60_t10.85"/>
           <p:cNvSpPr/>
           <p:nvPr/>
         </p:nvSpPr>
         <p:spPr>
           <a:xfrm>
             <a:off x="5716905" y="721360"/>
-            <a:ext cx="97409" cy="160020"/>
+            <a:ext cx="97409" cy="137795"/>
           </a:xfrm>
           <a:prstGeom prst="rect">
             <a:avLst/>
@@ -13009,34 +9649,14 @@
       </p:sp>
       <p:sp>
         <p:nvSpPr>
-          <p:cNvPr id="10" name="TimesNewRoman_6pt_sp1_75__c12.60_t10.85__textBoxMarker"/>
-          <p:cNvSpPr/>
-          <p:nvPr/>
-        </p:nvSpPr>
-        <p:spPr>
-          <a:xfrm>
-            <a:off x="5716905" y="852805"/>
-            <a:ext cx="97409" cy="12700"/>
-          </a:xfrm>
-          <a:prstGeom prst="rect">
-            <a:avLst/>
-          </a:prstGeom>
-          <a:solidFill>
-            <a:srgbClr val="0000FF"/>
-          </a:solidFill>
-          <a:ln/>
-        </p:spPr>
-      </p:sp>
-      <p:sp>
-        <p:nvSpPr>
-          <p:cNvPr id="11" name="TimesNewRoman_6pt_sp2__c14.40_t12.20"/>
+          <p:cNvPr id="7" name="TimesNewRoman_6pt_sp2__c14.40_t12.20"/>
           <p:cNvSpPr/>
           <p:nvPr/>
         </p:nvSpPr>
         <p:spPr>
           <a:xfrm>
             <a:off x="7500620" y="721360"/>
-            <a:ext cx="97409" cy="182880"/>
+            <a:ext cx="97409" cy="154940"/>
           </a:xfrm>
           <a:prstGeom prst="rect">
             <a:avLst/>
@@ -13078,34 +9698,14 @@
       </p:sp>
       <p:sp>
         <p:nvSpPr>
-          <p:cNvPr id="12" name="TimesNewRoman_6pt_sp2__c14.40_t12.20__textBoxMarker"/>
-          <p:cNvSpPr/>
-          <p:nvPr/>
-        </p:nvSpPr>
-        <p:spPr>
-          <a:xfrm>
-            <a:off x="7500620" y="869950"/>
-            <a:ext cx="97409" cy="12700"/>
-          </a:xfrm>
-          <a:prstGeom prst="rect">
-            <a:avLst/>
-          </a:prstGeom>
-          <a:solidFill>
-            <a:srgbClr val="0000FF"/>
-          </a:solidFill>
-          <a:ln/>
-        </p:spPr>
-      </p:sp>
-      <p:sp>
-        <p:nvSpPr>
-          <p:cNvPr id="13" name="TimesNewRoman_8pt_sp1__c9.60_t9.19"/>
-          <p:cNvSpPr/>
-          <p:nvPr/>
-        </p:nvSpPr>
-        <p:spPr>
-          <a:xfrm>
-            <a:off x="365760" y="1005840"/>
-            <a:ext cx="129794" cy="121920"/>
+          <p:cNvPr id="8" name="TimesNewRoman_8pt_sp1__c9.60_t9.39"/>
+          <p:cNvSpPr/>
+          <p:nvPr/>
+        </p:nvSpPr>
+        <p:spPr>
+          <a:xfrm>
+            <a:off x="365760" y="977900"/>
+            <a:ext cx="129794" cy="119253"/>
           </a:xfrm>
           <a:prstGeom prst="rect">
             <a:avLst/>
@@ -13147,34 +9747,14 @@
       </p:sp>
       <p:sp>
         <p:nvSpPr>
-          <p:cNvPr id="14" name="TimesNewRoman_8pt_sp1__c9.60_t9.19__textBoxMarker"/>
-          <p:cNvSpPr/>
-          <p:nvPr/>
-        </p:nvSpPr>
-        <p:spPr>
-          <a:xfrm>
-            <a:off x="365760" y="1116203"/>
-            <a:ext cx="129794" cy="12700"/>
-          </a:xfrm>
-          <a:prstGeom prst="rect">
-            <a:avLst/>
-          </a:prstGeom>
-          <a:solidFill>
-            <a:srgbClr val="0000FF"/>
-          </a:solidFill>
-          <a:ln/>
-        </p:spPr>
-      </p:sp>
-      <p:sp>
-        <p:nvSpPr>
-          <p:cNvPr id="15" name="TimesNewRoman_8pt_sp1_25__c12.00_t10.87"/>
-          <p:cNvSpPr/>
-          <p:nvPr/>
-        </p:nvSpPr>
-        <p:spPr>
-          <a:xfrm>
-            <a:off x="2149475" y="1005840"/>
-            <a:ext cx="129794" cy="152400"/>
+          <p:cNvPr id="9" name="TimesNewRoman_8pt_sp1_25__c12.00_t10.87"/>
+          <p:cNvSpPr/>
+          <p:nvPr/>
+        </p:nvSpPr>
+        <p:spPr>
+          <a:xfrm>
+            <a:off x="2149475" y="977900"/>
+            <a:ext cx="129794" cy="138049"/>
           </a:xfrm>
           <a:prstGeom prst="rect">
             <a:avLst/>
@@ -13216,34 +9796,14 @@
       </p:sp>
       <p:sp>
         <p:nvSpPr>
-          <p:cNvPr id="16" name="TimesNewRoman_8pt_sp1_25__c12.00_t10.87__textBoxMarker"/>
-          <p:cNvSpPr/>
-          <p:nvPr/>
-        </p:nvSpPr>
-        <p:spPr>
-          <a:xfrm>
-            <a:off x="2149475" y="1137539"/>
-            <a:ext cx="129794" cy="12700"/>
-          </a:xfrm>
-          <a:prstGeom prst="rect">
-            <a:avLst/>
-          </a:prstGeom>
-          <a:solidFill>
-            <a:srgbClr val="0000FF"/>
-          </a:solidFill>
-          <a:ln/>
-        </p:spPr>
-      </p:sp>
-      <p:sp>
-        <p:nvSpPr>
-          <p:cNvPr id="17" name="TimesNewRoman_8pt_sp1_5__c14.40_t12.67"/>
-          <p:cNvSpPr/>
-          <p:nvPr/>
-        </p:nvSpPr>
-        <p:spPr>
-          <a:xfrm>
-            <a:off x="3933190" y="1005840"/>
-            <a:ext cx="129794" cy="182880"/>
+          <p:cNvPr id="10" name="TimesNewRoman_8pt_sp1_5__c14.40_t12.67"/>
+          <p:cNvSpPr/>
+          <p:nvPr/>
+        </p:nvSpPr>
+        <p:spPr>
+          <a:xfrm>
+            <a:off x="3933190" y="977900"/>
+            <a:ext cx="129794" cy="160909"/>
           </a:xfrm>
           <a:prstGeom prst="rect">
             <a:avLst/>
@@ -13285,34 +9845,14 @@
       </p:sp>
       <p:sp>
         <p:nvSpPr>
-          <p:cNvPr id="18" name="TimesNewRoman_8pt_sp1_5__c14.40_t12.67__textBoxMarker"/>
-          <p:cNvSpPr/>
-          <p:nvPr/>
-        </p:nvSpPr>
-        <p:spPr>
-          <a:xfrm>
-            <a:off x="3933190" y="1160399"/>
-            <a:ext cx="129794" cy="12700"/>
-          </a:xfrm>
-          <a:prstGeom prst="rect">
-            <a:avLst/>
-          </a:prstGeom>
-          <a:solidFill>
-            <a:srgbClr val="0000FF"/>
-          </a:solidFill>
-          <a:ln/>
-        </p:spPr>
-      </p:sp>
-      <p:sp>
-        <p:nvSpPr>
-          <p:cNvPr id="19" name="TimesNewRoman_8pt_sp1_75__c16.80_t14.47"/>
-          <p:cNvSpPr/>
-          <p:nvPr/>
-        </p:nvSpPr>
-        <p:spPr>
-          <a:xfrm>
-            <a:off x="5716905" y="1005840"/>
-            <a:ext cx="129794" cy="213360"/>
+          <p:cNvPr id="11" name="TimesNewRoman_8pt_sp1_75__c16.80_t14.47"/>
+          <p:cNvSpPr/>
+          <p:nvPr/>
+        </p:nvSpPr>
+        <p:spPr>
+          <a:xfrm>
+            <a:off x="5716905" y="977900"/>
+            <a:ext cx="129794" cy="183769"/>
           </a:xfrm>
           <a:prstGeom prst="rect">
             <a:avLst/>
@@ -13354,34 +9894,14 @@
       </p:sp>
       <p:sp>
         <p:nvSpPr>
-          <p:cNvPr id="20" name="TimesNewRoman_8pt_sp1_75__c16.80_t14.47__textBoxMarker"/>
-          <p:cNvSpPr/>
-          <p:nvPr/>
-        </p:nvSpPr>
-        <p:spPr>
-          <a:xfrm>
-            <a:off x="5716905" y="1183259"/>
-            <a:ext cx="129794" cy="12700"/>
-          </a:xfrm>
-          <a:prstGeom prst="rect">
-            <a:avLst/>
-          </a:prstGeom>
-          <a:solidFill>
-            <a:srgbClr val="0000FF"/>
-          </a:solidFill>
-          <a:ln/>
-        </p:spPr>
-      </p:sp>
-      <p:sp>
-        <p:nvSpPr>
-          <p:cNvPr id="21" name="TimesNewRoman_8pt_sp2__c19.20_t16.27"/>
-          <p:cNvSpPr/>
-          <p:nvPr/>
-        </p:nvSpPr>
-        <p:spPr>
-          <a:xfrm>
-            <a:off x="7500620" y="1005840"/>
-            <a:ext cx="129794" cy="243840"/>
+          <p:cNvPr id="12" name="TimesNewRoman_8pt_sp2__c19.20_t16.27"/>
+          <p:cNvSpPr/>
+          <p:nvPr/>
+        </p:nvSpPr>
+        <p:spPr>
+          <a:xfrm>
+            <a:off x="7500620" y="977900"/>
+            <a:ext cx="129794" cy="206629"/>
           </a:xfrm>
           <a:prstGeom prst="rect">
             <a:avLst/>
@@ -13423,34 +9943,14 @@
       </p:sp>
       <p:sp>
         <p:nvSpPr>
-          <p:cNvPr id="22" name="TimesNewRoman_8pt_sp2__c19.20_t16.27__textBoxMarker"/>
-          <p:cNvSpPr/>
-          <p:nvPr/>
-        </p:nvSpPr>
-        <p:spPr>
-          <a:xfrm>
-            <a:off x="7500620" y="1206119"/>
-            <a:ext cx="129794" cy="12700"/>
-          </a:xfrm>
-          <a:prstGeom prst="rect">
-            <a:avLst/>
-          </a:prstGeom>
-          <a:solidFill>
-            <a:srgbClr val="0000FF"/>
-          </a:solidFill>
-          <a:ln/>
-        </p:spPr>
-      </p:sp>
-      <p:sp>
-        <p:nvSpPr>
-          <p:cNvPr id="23" name="TimesNewRoman_10pt_sp1__c12.00_t11.48"/>
-          <p:cNvSpPr/>
-          <p:nvPr/>
-        </p:nvSpPr>
-        <p:spPr>
-          <a:xfrm>
-            <a:off x="365760" y="1351280"/>
-            <a:ext cx="225806" cy="152400"/>
+          <p:cNvPr id="13" name="TimesNewRoman_10pt_sp1__c12.00_t11.73"/>
+          <p:cNvSpPr/>
+          <p:nvPr/>
+        </p:nvSpPr>
+        <p:spPr>
+          <a:xfrm>
+            <a:off x="365760" y="1286129"/>
+            <a:ext cx="225806" cy="148971"/>
           </a:xfrm>
           <a:prstGeom prst="rect">
             <a:avLst/>
@@ -13492,34 +9992,14 @@
       </p:sp>
       <p:sp>
         <p:nvSpPr>
-          <p:cNvPr id="24" name="TimesNewRoman_10pt_sp1__c12.00_t11.48__textBoxMarker"/>
-          <p:cNvSpPr/>
-          <p:nvPr/>
-        </p:nvSpPr>
-        <p:spPr>
-          <a:xfrm>
-            <a:off x="365760" y="1490726"/>
-            <a:ext cx="225806" cy="12700"/>
-          </a:xfrm>
-          <a:prstGeom prst="rect">
-            <a:avLst/>
-          </a:prstGeom>
-          <a:solidFill>
-            <a:srgbClr val="0000FF"/>
-          </a:solidFill>
-          <a:ln/>
-        </p:spPr>
-      </p:sp>
-      <p:sp>
-        <p:nvSpPr>
-          <p:cNvPr id="25" name="TimesNewRoman_10pt_sp1_25__c15.00_t13.58"/>
-          <p:cNvSpPr/>
-          <p:nvPr/>
-        </p:nvSpPr>
-        <p:spPr>
-          <a:xfrm>
-            <a:off x="2149475" y="1351280"/>
-            <a:ext cx="225806" cy="190500"/>
+          <p:cNvPr id="14" name="TimesNewRoman_10pt_sp1_25__c15.00_t13.58"/>
+          <p:cNvSpPr/>
+          <p:nvPr/>
+        </p:nvSpPr>
+        <p:spPr>
+          <a:xfrm>
+            <a:off x="2149475" y="1286129"/>
+            <a:ext cx="225806" cy="172466"/>
           </a:xfrm>
           <a:prstGeom prst="rect">
             <a:avLst/>
@@ -13561,34 +10041,14 @@
       </p:sp>
       <p:sp>
         <p:nvSpPr>
-          <p:cNvPr id="26" name="TimesNewRoman_10pt_sp1_25__c15.00_t13.58__textBoxMarker"/>
-          <p:cNvSpPr/>
-          <p:nvPr/>
-        </p:nvSpPr>
-        <p:spPr>
-          <a:xfrm>
-            <a:off x="2149475" y="1517396"/>
-            <a:ext cx="225806" cy="12700"/>
-          </a:xfrm>
-          <a:prstGeom prst="rect">
-            <a:avLst/>
-          </a:prstGeom>
-          <a:solidFill>
-            <a:srgbClr val="0000FF"/>
-          </a:solidFill>
-          <a:ln/>
-        </p:spPr>
-      </p:sp>
-      <p:sp>
-        <p:nvSpPr>
-          <p:cNvPr id="27" name="TimesNewRoman_10pt_sp1_5__c18.00_t15.83"/>
-          <p:cNvSpPr/>
-          <p:nvPr/>
-        </p:nvSpPr>
-        <p:spPr>
-          <a:xfrm>
-            <a:off x="3933190" y="1351280"/>
-            <a:ext cx="225806" cy="228600"/>
+          <p:cNvPr id="15" name="TimesNewRoman_10pt_sp1_5__c18.00_t15.83"/>
+          <p:cNvSpPr/>
+          <p:nvPr/>
+        </p:nvSpPr>
+        <p:spPr>
+          <a:xfrm>
+            <a:off x="3933190" y="1286129"/>
+            <a:ext cx="225806" cy="201041"/>
           </a:xfrm>
           <a:prstGeom prst="rect">
             <a:avLst/>
@@ -13630,34 +10090,14 @@
       </p:sp>
       <p:sp>
         <p:nvSpPr>
-          <p:cNvPr id="28" name="TimesNewRoman_10pt_sp1_5__c18.00_t15.83__textBoxMarker"/>
-          <p:cNvSpPr/>
-          <p:nvPr/>
-        </p:nvSpPr>
-        <p:spPr>
-          <a:xfrm>
-            <a:off x="3933190" y="1545971"/>
-            <a:ext cx="225806" cy="12700"/>
-          </a:xfrm>
-          <a:prstGeom prst="rect">
-            <a:avLst/>
-          </a:prstGeom>
-          <a:solidFill>
-            <a:srgbClr val="0000FF"/>
-          </a:solidFill>
-          <a:ln/>
-        </p:spPr>
-      </p:sp>
-      <p:sp>
-        <p:nvSpPr>
-          <p:cNvPr id="29" name="TimesNewRoman_10pt_sp1_75__c21.00_t18.08"/>
-          <p:cNvSpPr/>
-          <p:nvPr/>
-        </p:nvSpPr>
-        <p:spPr>
-          <a:xfrm>
-            <a:off x="5716905" y="1351280"/>
-            <a:ext cx="225806" cy="266700"/>
+          <p:cNvPr id="16" name="TimesNewRoman_10pt_sp1_75__c21.00_t18.08"/>
+          <p:cNvSpPr/>
+          <p:nvPr/>
+        </p:nvSpPr>
+        <p:spPr>
+          <a:xfrm>
+            <a:off x="5716905" y="1286129"/>
+            <a:ext cx="225806" cy="229616"/>
           </a:xfrm>
           <a:prstGeom prst="rect">
             <a:avLst/>
@@ -13699,34 +10139,14 @@
       </p:sp>
       <p:sp>
         <p:nvSpPr>
-          <p:cNvPr id="30" name="TimesNewRoman_10pt_sp1_75__c21.00_t18.08__textBoxMarker"/>
-          <p:cNvSpPr/>
-          <p:nvPr/>
-        </p:nvSpPr>
-        <p:spPr>
-          <a:xfrm>
-            <a:off x="5716905" y="1574546"/>
-            <a:ext cx="225806" cy="12700"/>
-          </a:xfrm>
-          <a:prstGeom prst="rect">
-            <a:avLst/>
-          </a:prstGeom>
-          <a:solidFill>
-            <a:srgbClr val="0000FF"/>
-          </a:solidFill>
-          <a:ln/>
-        </p:spPr>
-      </p:sp>
-      <p:sp>
-        <p:nvSpPr>
-          <p:cNvPr id="31" name="TimesNewRoman_10pt_sp2__c24.00_t20.33"/>
-          <p:cNvSpPr/>
-          <p:nvPr/>
-        </p:nvSpPr>
-        <p:spPr>
-          <a:xfrm>
-            <a:off x="7500620" y="1351280"/>
-            <a:ext cx="225806" cy="304800"/>
+          <p:cNvPr id="17" name="TimesNewRoman_10pt_sp2__c24.00_t20.33"/>
+          <p:cNvSpPr/>
+          <p:nvPr/>
+        </p:nvSpPr>
+        <p:spPr>
+          <a:xfrm>
+            <a:off x="7500620" y="1286129"/>
+            <a:ext cx="225806" cy="258191"/>
           </a:xfrm>
           <a:prstGeom prst="rect">
             <a:avLst/>
@@ -13768,34 +10188,14 @@
       </p:sp>
       <p:sp>
         <p:nvSpPr>
-          <p:cNvPr id="32" name="TimesNewRoman_10pt_sp2__c24.00_t20.33__textBoxMarker"/>
-          <p:cNvSpPr/>
-          <p:nvPr/>
-        </p:nvSpPr>
-        <p:spPr>
-          <a:xfrm>
-            <a:off x="7500620" y="1603121"/>
-            <a:ext cx="225806" cy="12700"/>
-          </a:xfrm>
-          <a:prstGeom prst="rect">
-            <a:avLst/>
-          </a:prstGeom>
-          <a:solidFill>
-            <a:srgbClr val="0000FF"/>
-          </a:solidFill>
-          <a:ln/>
-        </p:spPr>
-      </p:sp>
-      <p:sp>
-        <p:nvSpPr>
-          <p:cNvPr id="33" name="TimesNewRoman_12pt_sp1__c14.40_t13.78"/>
-          <p:cNvSpPr/>
-          <p:nvPr/>
-        </p:nvSpPr>
-        <p:spPr>
-          <a:xfrm>
-            <a:off x="365760" y="1757680"/>
-            <a:ext cx="270891" cy="182880"/>
+          <p:cNvPr id="18" name="TimesNewRoman_12pt_sp1__c14.40_t14.08"/>
+          <p:cNvSpPr/>
+          <p:nvPr/>
+        </p:nvSpPr>
+        <p:spPr>
+          <a:xfrm>
+            <a:off x="365760" y="1645920"/>
+            <a:ext cx="270891" cy="178816"/>
           </a:xfrm>
           <a:prstGeom prst="rect">
             <a:avLst/>
@@ -13837,34 +10237,14 @@
       </p:sp>
       <p:sp>
         <p:nvSpPr>
-          <p:cNvPr id="34" name="TimesNewRoman_12pt_sp1__c14.40_t13.78__textBoxMarker"/>
-          <p:cNvSpPr/>
-          <p:nvPr/>
-        </p:nvSpPr>
-        <p:spPr>
-          <a:xfrm>
-            <a:off x="365760" y="1926336"/>
-            <a:ext cx="270891" cy="12700"/>
-          </a:xfrm>
-          <a:prstGeom prst="rect">
-            <a:avLst/>
-          </a:prstGeom>
-          <a:solidFill>
-            <a:srgbClr val="0000FF"/>
-          </a:solidFill>
-          <a:ln/>
-        </p:spPr>
-      </p:sp>
-      <p:sp>
-        <p:nvSpPr>
-          <p:cNvPr id="35" name="TimesNewRoman_12pt_sp1_25__c18.00_t16.30"/>
-          <p:cNvSpPr/>
-          <p:nvPr/>
-        </p:nvSpPr>
-        <p:spPr>
-          <a:xfrm>
-            <a:off x="2149475" y="1757680"/>
-            <a:ext cx="270891" cy="228600"/>
+          <p:cNvPr id="19" name="TimesNewRoman_12pt_sp1_25__c18.00_t16.30"/>
+          <p:cNvSpPr/>
+          <p:nvPr/>
+        </p:nvSpPr>
+        <p:spPr>
+          <a:xfrm>
+            <a:off x="2149475" y="1645920"/>
+            <a:ext cx="270891" cy="207010"/>
           </a:xfrm>
           <a:prstGeom prst="rect">
             <a:avLst/>
@@ -13906,34 +10286,14 @@
       </p:sp>
       <p:sp>
         <p:nvSpPr>
-          <p:cNvPr id="36" name="TimesNewRoman_12pt_sp1_25__c18.00_t16.30__textBoxMarker"/>
-          <p:cNvSpPr/>
-          <p:nvPr/>
-        </p:nvSpPr>
-        <p:spPr>
-          <a:xfrm>
-            <a:off x="2149475" y="1958340"/>
-            <a:ext cx="270891" cy="12700"/>
-          </a:xfrm>
-          <a:prstGeom prst="rect">
-            <a:avLst/>
-          </a:prstGeom>
-          <a:solidFill>
-            <a:srgbClr val="0000FF"/>
-          </a:solidFill>
-          <a:ln/>
-        </p:spPr>
-      </p:sp>
-      <p:sp>
-        <p:nvSpPr>
-          <p:cNvPr id="37" name="TimesNewRoman_12pt_sp1_5__c21.60_t19.00"/>
-          <p:cNvSpPr/>
-          <p:nvPr/>
-        </p:nvSpPr>
-        <p:spPr>
-          <a:xfrm>
-            <a:off x="3933190" y="1757680"/>
-            <a:ext cx="270891" cy="274320"/>
+          <p:cNvPr id="20" name="TimesNewRoman_12pt_sp1_5__c21.60_t19.00"/>
+          <p:cNvSpPr/>
+          <p:nvPr/>
+        </p:nvSpPr>
+        <p:spPr>
+          <a:xfrm>
+            <a:off x="3933190" y="1645920"/>
+            <a:ext cx="270891" cy="241300"/>
           </a:xfrm>
           <a:prstGeom prst="rect">
             <a:avLst/>
@@ -13975,34 +10335,14 @@
       </p:sp>
       <p:sp>
         <p:nvSpPr>
-          <p:cNvPr id="38" name="TimesNewRoman_12pt_sp1_5__c21.60_t19.00__textBoxMarker"/>
-          <p:cNvSpPr/>
-          <p:nvPr/>
-        </p:nvSpPr>
-        <p:spPr>
-          <a:xfrm>
-            <a:off x="3933190" y="1992630"/>
-            <a:ext cx="270891" cy="12700"/>
-          </a:xfrm>
-          <a:prstGeom prst="rect">
-            <a:avLst/>
-          </a:prstGeom>
-          <a:solidFill>
-            <a:srgbClr val="0000FF"/>
-          </a:solidFill>
-          <a:ln/>
-        </p:spPr>
-      </p:sp>
-      <p:sp>
-        <p:nvSpPr>
-          <p:cNvPr id="39" name="TimesNewRoman_12pt_sp1_75__c25.20_t21.70"/>
-          <p:cNvSpPr/>
-          <p:nvPr/>
-        </p:nvSpPr>
-        <p:spPr>
-          <a:xfrm>
-            <a:off x="5716905" y="1757680"/>
-            <a:ext cx="270891" cy="320040"/>
+          <p:cNvPr id="21" name="TimesNewRoman_12pt_sp1_75__c25.20_t21.70"/>
+          <p:cNvSpPr/>
+          <p:nvPr/>
+        </p:nvSpPr>
+        <p:spPr>
+          <a:xfrm>
+            <a:off x="5716905" y="1645920"/>
+            <a:ext cx="270891" cy="275590"/>
           </a:xfrm>
           <a:prstGeom prst="rect">
             <a:avLst/>
@@ -14044,34 +10384,14 @@
       </p:sp>
       <p:sp>
         <p:nvSpPr>
-          <p:cNvPr id="40" name="TimesNewRoman_12pt_sp1_75__c25.20_t21.70__textBoxMarker"/>
-          <p:cNvSpPr/>
-          <p:nvPr/>
-        </p:nvSpPr>
-        <p:spPr>
-          <a:xfrm>
-            <a:off x="5716905" y="2026920"/>
-            <a:ext cx="270891" cy="12700"/>
-          </a:xfrm>
-          <a:prstGeom prst="rect">
-            <a:avLst/>
-          </a:prstGeom>
-          <a:solidFill>
-            <a:srgbClr val="0000FF"/>
-          </a:solidFill>
-          <a:ln/>
-        </p:spPr>
-      </p:sp>
-      <p:sp>
-        <p:nvSpPr>
-          <p:cNvPr id="41" name="TimesNewRoman_12pt_sp2__c28.80_t24.40"/>
-          <p:cNvSpPr/>
-          <p:nvPr/>
-        </p:nvSpPr>
-        <p:spPr>
-          <a:xfrm>
-            <a:off x="7500620" y="1757680"/>
-            <a:ext cx="270891" cy="365760"/>
+          <p:cNvPr id="22" name="TimesNewRoman_12pt_sp2__c28.80_t24.40"/>
+          <p:cNvSpPr/>
+          <p:nvPr/>
+        </p:nvSpPr>
+        <p:spPr>
+          <a:xfrm>
+            <a:off x="7500620" y="1645920"/>
+            <a:ext cx="270891" cy="309880"/>
           </a:xfrm>
           <a:prstGeom prst="rect">
             <a:avLst/>
@@ -14113,34 +10433,14 @@
       </p:sp>
       <p:sp>
         <p:nvSpPr>
-          <p:cNvPr id="42" name="TimesNewRoman_12pt_sp2__c28.80_t24.40__textBoxMarker"/>
-          <p:cNvSpPr/>
-          <p:nvPr/>
-        </p:nvSpPr>
-        <p:spPr>
-          <a:xfrm>
-            <a:off x="7500620" y="2061210"/>
-            <a:ext cx="270891" cy="12700"/>
-          </a:xfrm>
-          <a:prstGeom prst="rect">
-            <a:avLst/>
-          </a:prstGeom>
-          <a:solidFill>
-            <a:srgbClr val="0000FF"/>
-          </a:solidFill>
-          <a:ln/>
-        </p:spPr>
-      </p:sp>
-      <p:sp>
-        <p:nvSpPr>
-          <p:cNvPr id="43" name="TimesNewRoman_14pt_sp1__c16.80_t16.07"/>
-          <p:cNvSpPr/>
-          <p:nvPr/>
-        </p:nvSpPr>
-        <p:spPr>
-          <a:xfrm>
-            <a:off x="365760" y="2225040"/>
-            <a:ext cx="316103" cy="213360"/>
+          <p:cNvPr id="23" name="TimesNewRoman_14pt_sp1__c16.80_t16.43"/>
+          <p:cNvSpPr/>
+          <p:nvPr/>
+        </p:nvSpPr>
+        <p:spPr>
+          <a:xfrm>
+            <a:off x="365760" y="2057400"/>
+            <a:ext cx="316103" cy="208661"/>
           </a:xfrm>
           <a:prstGeom prst="rect">
             <a:avLst/>
@@ -14182,34 +10482,14 @@
       </p:sp>
       <p:sp>
         <p:nvSpPr>
-          <p:cNvPr id="44" name="TimesNewRoman_14pt_sp1__c16.80_t16.07__textBoxMarker"/>
-          <p:cNvSpPr/>
-          <p:nvPr/>
-        </p:nvSpPr>
-        <p:spPr>
-          <a:xfrm>
-            <a:off x="365760" y="2422779"/>
-            <a:ext cx="316103" cy="12700"/>
-          </a:xfrm>
-          <a:prstGeom prst="rect">
-            <a:avLst/>
-          </a:prstGeom>
-          <a:solidFill>
-            <a:srgbClr val="0000FF"/>
-          </a:solidFill>
-          <a:ln/>
-        </p:spPr>
-      </p:sp>
-      <p:sp>
-        <p:nvSpPr>
-          <p:cNvPr id="45" name="TimesNewRoman_14pt_sp1_25__c21.00_t19.01"/>
-          <p:cNvSpPr/>
-          <p:nvPr/>
-        </p:nvSpPr>
-        <p:spPr>
-          <a:xfrm>
-            <a:off x="2149475" y="2225040"/>
-            <a:ext cx="316103" cy="266700"/>
+          <p:cNvPr id="24" name="TimesNewRoman_14pt_sp1_25__c21.00_t19.01"/>
+          <p:cNvSpPr/>
+          <p:nvPr/>
+        </p:nvSpPr>
+        <p:spPr>
+          <a:xfrm>
+            <a:off x="2149475" y="2057400"/>
+            <a:ext cx="316103" cy="241427"/>
           </a:xfrm>
           <a:prstGeom prst="rect">
             <a:avLst/>
@@ -14251,34 +10531,14 @@
       </p:sp>
       <p:sp>
         <p:nvSpPr>
-          <p:cNvPr id="46" name="TimesNewRoman_14pt_sp1_25__c21.00_t19.01__textBoxMarker"/>
-          <p:cNvSpPr/>
-          <p:nvPr/>
-        </p:nvSpPr>
-        <p:spPr>
-          <a:xfrm>
-            <a:off x="2149475" y="2460117"/>
-            <a:ext cx="316103" cy="12700"/>
-          </a:xfrm>
-          <a:prstGeom prst="rect">
-            <a:avLst/>
-          </a:prstGeom>
-          <a:solidFill>
-            <a:srgbClr val="0000FF"/>
-          </a:solidFill>
-          <a:ln/>
-        </p:spPr>
-      </p:sp>
-      <p:sp>
-        <p:nvSpPr>
-          <p:cNvPr id="47" name="TimesNewRoman_14pt_sp1_5__c25.20_t22.16"/>
-          <p:cNvSpPr/>
-          <p:nvPr/>
-        </p:nvSpPr>
-        <p:spPr>
-          <a:xfrm>
-            <a:off x="3933190" y="2225040"/>
-            <a:ext cx="316103" cy="320040"/>
+          <p:cNvPr id="25" name="TimesNewRoman_14pt_sp1_5__c25.20_t22.16"/>
+          <p:cNvSpPr/>
+          <p:nvPr/>
+        </p:nvSpPr>
+        <p:spPr>
+          <a:xfrm>
+            <a:off x="3933190" y="2057400"/>
+            <a:ext cx="316103" cy="281432"/>
           </a:xfrm>
           <a:prstGeom prst="rect">
             <a:avLst/>
@@ -14320,34 +10580,14 @@
       </p:sp>
       <p:sp>
         <p:nvSpPr>
-          <p:cNvPr id="48" name="TimesNewRoman_14pt_sp1_5__c25.20_t22.16__textBoxMarker"/>
-          <p:cNvSpPr/>
-          <p:nvPr/>
-        </p:nvSpPr>
-        <p:spPr>
-          <a:xfrm>
-            <a:off x="3933190" y="2500122"/>
-            <a:ext cx="316103" cy="12700"/>
-          </a:xfrm>
-          <a:prstGeom prst="rect">
-            <a:avLst/>
-          </a:prstGeom>
-          <a:solidFill>
-            <a:srgbClr val="0000FF"/>
-          </a:solidFill>
-          <a:ln/>
-        </p:spPr>
-      </p:sp>
-      <p:sp>
-        <p:nvSpPr>
-          <p:cNvPr id="49" name="TimesNewRoman_14pt_sp1_75__c29.40_t25.31"/>
-          <p:cNvSpPr/>
-          <p:nvPr/>
-        </p:nvSpPr>
-        <p:spPr>
-          <a:xfrm>
-            <a:off x="5716905" y="2225040"/>
-            <a:ext cx="316103" cy="373380"/>
+          <p:cNvPr id="26" name="TimesNewRoman_14pt_sp1_75__c29.40_t25.31"/>
+          <p:cNvSpPr/>
+          <p:nvPr/>
+        </p:nvSpPr>
+        <p:spPr>
+          <a:xfrm>
+            <a:off x="5716905" y="2057400"/>
+            <a:ext cx="316103" cy="321437"/>
           </a:xfrm>
           <a:prstGeom prst="rect">
             <a:avLst/>
@@ -14389,34 +10629,14 @@
       </p:sp>
       <p:sp>
         <p:nvSpPr>
-          <p:cNvPr id="50" name="TimesNewRoman_14pt_sp1_75__c29.40_t25.31__textBoxMarker"/>
-          <p:cNvSpPr/>
-          <p:nvPr/>
-        </p:nvSpPr>
-        <p:spPr>
-          <a:xfrm>
-            <a:off x="5716905" y="2540127"/>
-            <a:ext cx="316103" cy="12700"/>
-          </a:xfrm>
-          <a:prstGeom prst="rect">
-            <a:avLst/>
-          </a:prstGeom>
-          <a:solidFill>
-            <a:srgbClr val="0000FF"/>
-          </a:solidFill>
-          <a:ln/>
-        </p:spPr>
-      </p:sp>
-      <p:sp>
-        <p:nvSpPr>
-          <p:cNvPr id="51" name="TimesNewRoman_14pt_sp2__c33.60_t28.46"/>
-          <p:cNvSpPr/>
-          <p:nvPr/>
-        </p:nvSpPr>
-        <p:spPr>
-          <a:xfrm>
-            <a:off x="7500620" y="2225040"/>
-            <a:ext cx="316103" cy="426720"/>
+          <p:cNvPr id="27" name="TimesNewRoman_14pt_sp2__c33.60_t28.46"/>
+          <p:cNvSpPr/>
+          <p:nvPr/>
+        </p:nvSpPr>
+        <p:spPr>
+          <a:xfrm>
+            <a:off x="7500620" y="2057400"/>
+            <a:ext cx="316103" cy="361442"/>
           </a:xfrm>
           <a:prstGeom prst="rect">
             <a:avLst/>
@@ -14458,34 +10678,14 @@
       </p:sp>
       <p:sp>
         <p:nvSpPr>
-          <p:cNvPr id="52" name="TimesNewRoman_14pt_sp2__c33.60_t28.46__textBoxMarker"/>
-          <p:cNvSpPr/>
-          <p:nvPr/>
-        </p:nvSpPr>
-        <p:spPr>
-          <a:xfrm>
-            <a:off x="7500620" y="2580132"/>
-            <a:ext cx="316103" cy="12700"/>
-          </a:xfrm>
-          <a:prstGeom prst="rect">
-            <a:avLst/>
-          </a:prstGeom>
-          <a:solidFill>
-            <a:srgbClr val="0000FF"/>
-          </a:solidFill>
-          <a:ln/>
-        </p:spPr>
-      </p:sp>
-      <p:sp>
-        <p:nvSpPr>
-          <p:cNvPr id="53" name="TimesNewRoman_18pt_sp1__c21.60_t20.67"/>
-          <p:cNvSpPr/>
-          <p:nvPr/>
-        </p:nvSpPr>
-        <p:spPr>
-          <a:xfrm>
-            <a:off x="365760" y="2753360"/>
-            <a:ext cx="406400" cy="274320"/>
+          <p:cNvPr id="28" name="TimesNewRoman_18pt_sp1__c21.60_t21.13"/>
+          <p:cNvSpPr/>
+          <p:nvPr/>
+        </p:nvSpPr>
+        <p:spPr>
+          <a:xfrm>
+            <a:off x="365760" y="2520442"/>
+            <a:ext cx="406400" cy="268351"/>
           </a:xfrm>
           <a:prstGeom prst="rect">
             <a:avLst/>
@@ -14527,34 +10727,14 @@
       </p:sp>
       <p:sp>
         <p:nvSpPr>
-          <p:cNvPr id="54" name="TimesNewRoman_18pt_sp1__c21.60_t20.67__textBoxMarker"/>
-          <p:cNvSpPr/>
-          <p:nvPr/>
-        </p:nvSpPr>
-        <p:spPr>
-          <a:xfrm>
-            <a:off x="365760" y="3009519"/>
-            <a:ext cx="406400" cy="12700"/>
-          </a:xfrm>
-          <a:prstGeom prst="rect">
-            <a:avLst/>
-          </a:prstGeom>
-          <a:solidFill>
-            <a:srgbClr val="0000FF"/>
-          </a:solidFill>
-          <a:ln/>
-        </p:spPr>
-      </p:sp>
-      <p:sp>
-        <p:nvSpPr>
-          <p:cNvPr id="55" name="TimesNewRoman_18pt_sp1_25__c27.00_t24.45"/>
-          <p:cNvSpPr/>
-          <p:nvPr/>
-        </p:nvSpPr>
-        <p:spPr>
-          <a:xfrm>
-            <a:off x="2149475" y="2753360"/>
-            <a:ext cx="406400" cy="342900"/>
+          <p:cNvPr id="29" name="TimesNewRoman_18pt_sp1_25__c27.00_t24.45"/>
+          <p:cNvSpPr/>
+          <p:nvPr/>
+        </p:nvSpPr>
+        <p:spPr>
+          <a:xfrm>
+            <a:off x="2149475" y="2520442"/>
+            <a:ext cx="406400" cy="310515"/>
           </a:xfrm>
           <a:prstGeom prst="rect">
             <a:avLst/>
@@ -14596,34 +10776,14 @@
       </p:sp>
       <p:sp>
         <p:nvSpPr>
-          <p:cNvPr id="56" name="TimesNewRoman_18pt_sp1_25__c27.00_t24.45__textBoxMarker"/>
-          <p:cNvSpPr/>
-          <p:nvPr/>
-        </p:nvSpPr>
-        <p:spPr>
-          <a:xfrm>
-            <a:off x="2149475" y="3057525"/>
-            <a:ext cx="406400" cy="12700"/>
-          </a:xfrm>
-          <a:prstGeom prst="rect">
-            <a:avLst/>
-          </a:prstGeom>
-          <a:solidFill>
-            <a:srgbClr val="0000FF"/>
-          </a:solidFill>
-          <a:ln/>
-        </p:spPr>
-      </p:sp>
-      <p:sp>
-        <p:nvSpPr>
-          <p:cNvPr id="57" name="TimesNewRoman_18pt_sp1_5__c32.40_t28.50"/>
-          <p:cNvSpPr/>
-          <p:nvPr/>
-        </p:nvSpPr>
-        <p:spPr>
-          <a:xfrm>
-            <a:off x="3933190" y="2753360"/>
-            <a:ext cx="406400" cy="411480"/>
+          <p:cNvPr id="30" name="TimesNewRoman_18pt_sp1_5__c32.40_t28.50"/>
+          <p:cNvSpPr/>
+          <p:nvPr/>
+        </p:nvSpPr>
+        <p:spPr>
+          <a:xfrm>
+            <a:off x="3933190" y="2520442"/>
+            <a:ext cx="406400" cy="361950"/>
           </a:xfrm>
           <a:prstGeom prst="rect">
             <a:avLst/>
@@ -14665,34 +10825,14 @@
       </p:sp>
       <p:sp>
         <p:nvSpPr>
-          <p:cNvPr id="58" name="TimesNewRoman_18pt_sp1_5__c32.40_t28.50__textBoxMarker"/>
-          <p:cNvSpPr/>
-          <p:nvPr/>
-        </p:nvSpPr>
-        <p:spPr>
-          <a:xfrm>
-            <a:off x="3933190" y="3108960"/>
-            <a:ext cx="406400" cy="12700"/>
-          </a:xfrm>
-          <a:prstGeom prst="rect">
-            <a:avLst/>
-          </a:prstGeom>
-          <a:solidFill>
-            <a:srgbClr val="0000FF"/>
-          </a:solidFill>
-          <a:ln/>
-        </p:spPr>
-      </p:sp>
-      <p:sp>
-        <p:nvSpPr>
-          <p:cNvPr id="59" name="TimesNewRoman_18pt_sp1_75__c37.80_t32.55"/>
-          <p:cNvSpPr/>
-          <p:nvPr/>
-        </p:nvSpPr>
-        <p:spPr>
-          <a:xfrm>
-            <a:off x="5716905" y="2753360"/>
-            <a:ext cx="406400" cy="480060"/>
+          <p:cNvPr id="31" name="TimesNewRoman_18pt_sp1_75__c37.80_t32.55"/>
+          <p:cNvSpPr/>
+          <p:nvPr/>
+        </p:nvSpPr>
+        <p:spPr>
+          <a:xfrm>
+            <a:off x="5716905" y="2520442"/>
+            <a:ext cx="406400" cy="413385"/>
           </a:xfrm>
           <a:prstGeom prst="rect">
             <a:avLst/>
@@ -14734,34 +10874,14 @@
       </p:sp>
       <p:sp>
         <p:nvSpPr>
-          <p:cNvPr id="60" name="TimesNewRoman_18pt_sp1_75__c37.80_t32.55__textBoxMarker"/>
-          <p:cNvSpPr/>
-          <p:nvPr/>
-        </p:nvSpPr>
-        <p:spPr>
-          <a:xfrm>
-            <a:off x="5716905" y="3160395"/>
-            <a:ext cx="406400" cy="12700"/>
-          </a:xfrm>
-          <a:prstGeom prst="rect">
-            <a:avLst/>
-          </a:prstGeom>
-          <a:solidFill>
-            <a:srgbClr val="0000FF"/>
-          </a:solidFill>
-          <a:ln/>
-        </p:spPr>
-      </p:sp>
-      <p:sp>
-        <p:nvSpPr>
-          <p:cNvPr id="61" name="TimesNewRoman_18pt_sp2__c43.20_t36.60"/>
-          <p:cNvSpPr/>
-          <p:nvPr/>
-        </p:nvSpPr>
-        <p:spPr>
-          <a:xfrm>
-            <a:off x="7500620" y="2753360"/>
-            <a:ext cx="406400" cy="548640"/>
+          <p:cNvPr id="32" name="TimesNewRoman_18pt_sp2__c43.20_t36.60"/>
+          <p:cNvSpPr/>
+          <p:nvPr/>
+        </p:nvSpPr>
+        <p:spPr>
+          <a:xfrm>
+            <a:off x="7500620" y="2520442"/>
+            <a:ext cx="406400" cy="464820"/>
           </a:xfrm>
           <a:prstGeom prst="rect">
             <a:avLst/>
@@ -14803,34 +10923,14 @@
       </p:sp>
       <p:sp>
         <p:nvSpPr>
-          <p:cNvPr id="62" name="TimesNewRoman_18pt_sp2__c43.20_t36.60__textBoxMarker"/>
-          <p:cNvSpPr/>
-          <p:nvPr/>
-        </p:nvSpPr>
-        <p:spPr>
-          <a:xfrm>
-            <a:off x="7500620" y="3211830"/>
-            <a:ext cx="406400" cy="12700"/>
-          </a:xfrm>
-          <a:prstGeom prst="rect">
-            <a:avLst/>
-          </a:prstGeom>
-          <a:solidFill>
-            <a:srgbClr val="0000FF"/>
-          </a:solidFill>
-          <a:ln/>
-        </p:spPr>
-      </p:sp>
-      <p:sp>
-        <p:nvSpPr>
-          <p:cNvPr id="63" name="TimesNewRoman_24pt_sp1__c28.80_t27.56"/>
-          <p:cNvSpPr/>
-          <p:nvPr/>
-        </p:nvSpPr>
-        <p:spPr>
-          <a:xfrm>
-            <a:off x="365760" y="3403600"/>
-            <a:ext cx="541909" cy="365760"/>
+          <p:cNvPr id="33" name="TimesNewRoman_24pt_sp1__c28.80_t28.17"/>
+          <p:cNvSpPr/>
+          <p:nvPr/>
+        </p:nvSpPr>
+        <p:spPr>
+          <a:xfrm>
+            <a:off x="365760" y="3086862"/>
+            <a:ext cx="541909" cy="357759"/>
           </a:xfrm>
           <a:prstGeom prst="rect">
             <a:avLst/>
@@ -14872,34 +10972,14 @@
       </p:sp>
       <p:sp>
         <p:nvSpPr>
-          <p:cNvPr id="64" name="TimesNewRoman_24pt_sp1__c28.80_t27.56__textBoxMarker"/>
-          <p:cNvSpPr/>
-          <p:nvPr/>
-        </p:nvSpPr>
-        <p:spPr>
-          <a:xfrm>
-            <a:off x="365760" y="3747262"/>
-            <a:ext cx="541909" cy="12700"/>
-          </a:xfrm>
-          <a:prstGeom prst="rect">
-            <a:avLst/>
-          </a:prstGeom>
-          <a:solidFill>
-            <a:srgbClr val="0000FF"/>
-          </a:solidFill>
-          <a:ln/>
-        </p:spPr>
-      </p:sp>
-      <p:sp>
-        <p:nvSpPr>
-          <p:cNvPr id="65" name="TimesNewRoman_24pt_sp1_25__c36.00_t32.60"/>
-          <p:cNvSpPr/>
-          <p:nvPr/>
-        </p:nvSpPr>
-        <p:spPr>
-          <a:xfrm>
-            <a:off x="2149475" y="3403600"/>
-            <a:ext cx="541909" cy="457200"/>
+          <p:cNvPr id="34" name="TimesNewRoman_24pt_sp1_25__c36.00_t32.60"/>
+          <p:cNvSpPr/>
+          <p:nvPr/>
+        </p:nvSpPr>
+        <p:spPr>
+          <a:xfrm>
+            <a:off x="2149475" y="3086862"/>
+            <a:ext cx="541909" cy="414020"/>
           </a:xfrm>
           <a:prstGeom prst="rect">
             <a:avLst/>
@@ -14941,34 +11021,14 @@
       </p:sp>
       <p:sp>
         <p:nvSpPr>
-          <p:cNvPr id="66" name="TimesNewRoman_24pt_sp1_25__c36.00_t32.60__textBoxMarker"/>
-          <p:cNvSpPr/>
-          <p:nvPr/>
-        </p:nvSpPr>
-        <p:spPr>
-          <a:xfrm>
-            <a:off x="2149475" y="3811270"/>
-            <a:ext cx="541909" cy="12700"/>
-          </a:xfrm>
-          <a:prstGeom prst="rect">
-            <a:avLst/>
-          </a:prstGeom>
-          <a:solidFill>
-            <a:srgbClr val="0000FF"/>
-          </a:solidFill>
-          <a:ln/>
-        </p:spPr>
-      </p:sp>
-      <p:sp>
-        <p:nvSpPr>
-          <p:cNvPr id="67" name="TimesNewRoman_24pt_sp1_5__c43.20_t38.00"/>
-          <p:cNvSpPr/>
-          <p:nvPr/>
-        </p:nvSpPr>
-        <p:spPr>
-          <a:xfrm>
-            <a:off x="3933190" y="3403600"/>
-            <a:ext cx="541909" cy="548640"/>
+          <p:cNvPr id="35" name="TimesNewRoman_24pt_sp1_5__c43.20_t38.00"/>
+          <p:cNvSpPr/>
+          <p:nvPr/>
+        </p:nvSpPr>
+        <p:spPr>
+          <a:xfrm>
+            <a:off x="3933190" y="3086862"/>
+            <a:ext cx="541909" cy="482600"/>
           </a:xfrm>
           <a:prstGeom prst="rect">
             <a:avLst/>
@@ -15010,34 +11070,14 @@
       </p:sp>
       <p:sp>
         <p:nvSpPr>
-          <p:cNvPr id="68" name="TimesNewRoman_24pt_sp1_5__c43.20_t38.00__textBoxMarker"/>
-          <p:cNvSpPr/>
-          <p:nvPr/>
-        </p:nvSpPr>
-        <p:spPr>
-          <a:xfrm>
-            <a:off x="3933190" y="3879850"/>
-            <a:ext cx="541909" cy="12700"/>
-          </a:xfrm>
-          <a:prstGeom prst="rect">
-            <a:avLst/>
-          </a:prstGeom>
-          <a:solidFill>
-            <a:srgbClr val="0000FF"/>
-          </a:solidFill>
-          <a:ln/>
-        </p:spPr>
-      </p:sp>
-      <p:sp>
-        <p:nvSpPr>
-          <p:cNvPr id="69" name="TimesNewRoman_24pt_sp1_75__c50.40_t43.40"/>
-          <p:cNvSpPr/>
-          <p:nvPr/>
-        </p:nvSpPr>
-        <p:spPr>
-          <a:xfrm>
-            <a:off x="5716905" y="3403600"/>
-            <a:ext cx="541909" cy="640080"/>
+          <p:cNvPr id="36" name="TimesNewRoman_24pt_sp1_75__c50.40_t43.40"/>
+          <p:cNvSpPr/>
+          <p:nvPr/>
+        </p:nvSpPr>
+        <p:spPr>
+          <a:xfrm>
+            <a:off x="5716905" y="3086862"/>
+            <a:ext cx="541909" cy="551180"/>
           </a:xfrm>
           <a:prstGeom prst="rect">
             <a:avLst/>
@@ -15079,34 +11119,14 @@
       </p:sp>
       <p:sp>
         <p:nvSpPr>
-          <p:cNvPr id="70" name="TimesNewRoman_24pt_sp1_75__c50.40_t43.40__textBoxMarker"/>
-          <p:cNvSpPr/>
-          <p:nvPr/>
-        </p:nvSpPr>
-        <p:spPr>
-          <a:xfrm>
-            <a:off x="5716905" y="3948430"/>
-            <a:ext cx="541909" cy="12700"/>
-          </a:xfrm>
-          <a:prstGeom prst="rect">
-            <a:avLst/>
-          </a:prstGeom>
-          <a:solidFill>
-            <a:srgbClr val="0000FF"/>
-          </a:solidFill>
-          <a:ln/>
-        </p:spPr>
-      </p:sp>
-      <p:sp>
-        <p:nvSpPr>
-          <p:cNvPr id="71" name="TimesNewRoman_24pt_sp2__c57.60_t48.80"/>
-          <p:cNvSpPr/>
-          <p:nvPr/>
-        </p:nvSpPr>
-        <p:spPr>
-          <a:xfrm>
-            <a:off x="7500620" y="3403600"/>
-            <a:ext cx="541909" cy="731520"/>
+          <p:cNvPr id="37" name="TimesNewRoman_24pt_sp2__c57.60_t48.80"/>
+          <p:cNvSpPr/>
+          <p:nvPr/>
+        </p:nvSpPr>
+        <p:spPr>
+          <a:xfrm>
+            <a:off x="7500620" y="3086862"/>
+            <a:ext cx="541909" cy="619760"/>
           </a:xfrm>
           <a:prstGeom prst="rect">
             <a:avLst/>
@@ -15148,34 +11168,14 @@
       </p:sp>
       <p:sp>
         <p:nvSpPr>
-          <p:cNvPr id="72" name="TimesNewRoman_24pt_sp2__c57.60_t48.80__textBoxMarker"/>
-          <p:cNvSpPr/>
-          <p:nvPr/>
-        </p:nvSpPr>
-        <p:spPr>
-          <a:xfrm>
-            <a:off x="7500620" y="4017010"/>
-            <a:ext cx="541909" cy="12700"/>
-          </a:xfrm>
-          <a:prstGeom prst="rect">
-            <a:avLst/>
-          </a:prstGeom>
-          <a:solidFill>
-            <a:srgbClr val="0000FF"/>
-          </a:solidFill>
-          <a:ln/>
-        </p:spPr>
-      </p:sp>
-      <p:sp>
-        <p:nvSpPr>
-          <p:cNvPr id="73" name="TimesNewRoman_32pt_sp1__c38.40_t36.74"/>
-          <p:cNvSpPr/>
-          <p:nvPr/>
-        </p:nvSpPr>
-        <p:spPr>
-          <a:xfrm>
-            <a:off x="365760" y="4236720"/>
-            <a:ext cx="722503" cy="487680"/>
+          <p:cNvPr id="38" name="TimesNewRoman_32pt_sp1__c38.40_t37.55"/>
+          <p:cNvSpPr/>
+          <p:nvPr/>
+        </p:nvSpPr>
+        <p:spPr>
+          <a:xfrm>
+            <a:off x="365760" y="3808222"/>
+            <a:ext cx="722503" cy="476885"/>
           </a:xfrm>
           <a:prstGeom prst="rect">
             <a:avLst/>
@@ -15217,34 +11217,14 @@
       </p:sp>
       <p:sp>
         <p:nvSpPr>
-          <p:cNvPr id="74" name="TimesNewRoman_32pt_sp1__c38.40_t36.74__textBoxMarker"/>
-          <p:cNvSpPr/>
-          <p:nvPr/>
-        </p:nvSpPr>
-        <p:spPr>
-          <a:xfrm>
-            <a:off x="365760" y="4696968"/>
-            <a:ext cx="722503" cy="12700"/>
-          </a:xfrm>
-          <a:prstGeom prst="rect">
-            <a:avLst/>
-          </a:prstGeom>
-          <a:solidFill>
-            <a:srgbClr val="0000FF"/>
-          </a:solidFill>
-          <a:ln/>
-        </p:spPr>
-      </p:sp>
-      <p:sp>
-        <p:nvSpPr>
-          <p:cNvPr id="75" name="TimesNewRoman_32pt_sp1_25__c48.00_t43.46"/>
-          <p:cNvSpPr/>
-          <p:nvPr/>
-        </p:nvSpPr>
-        <p:spPr>
-          <a:xfrm>
-            <a:off x="2149475" y="4236720"/>
-            <a:ext cx="722503" cy="609600"/>
+          <p:cNvPr id="39" name="TimesNewRoman_32pt_sp1_25__c48.00_t43.46"/>
+          <p:cNvSpPr/>
+          <p:nvPr/>
+        </p:nvSpPr>
+        <p:spPr>
+          <a:xfrm>
+            <a:off x="2149475" y="3808222"/>
+            <a:ext cx="722503" cy="551942"/>
           </a:xfrm>
           <a:prstGeom prst="rect">
             <a:avLst/>
@@ -15286,34 +11266,14 @@
       </p:sp>
       <p:sp>
         <p:nvSpPr>
-          <p:cNvPr id="76" name="TimesNewRoman_32pt_sp1_25__c48.00_t43.46__textBoxMarker"/>
-          <p:cNvSpPr/>
-          <p:nvPr/>
-        </p:nvSpPr>
-        <p:spPr>
-          <a:xfrm>
-            <a:off x="2149475" y="4782312"/>
-            <a:ext cx="722503" cy="12700"/>
-          </a:xfrm>
-          <a:prstGeom prst="rect">
-            <a:avLst/>
-          </a:prstGeom>
-          <a:solidFill>
-            <a:srgbClr val="0000FF"/>
-          </a:solidFill>
-          <a:ln/>
-        </p:spPr>
-      </p:sp>
-      <p:sp>
-        <p:nvSpPr>
-          <p:cNvPr id="77" name="TimesNewRoman_32pt_sp1_5__c57.60_t50.66"/>
-          <p:cNvSpPr/>
-          <p:nvPr/>
-        </p:nvSpPr>
-        <p:spPr>
-          <a:xfrm>
-            <a:off x="3933190" y="4236720"/>
-            <a:ext cx="722503" cy="731520"/>
+          <p:cNvPr id="40" name="TimesNewRoman_32pt_sp1_5__c57.60_t50.66"/>
+          <p:cNvSpPr/>
+          <p:nvPr/>
+        </p:nvSpPr>
+        <p:spPr>
+          <a:xfrm>
+            <a:off x="3933190" y="3808222"/>
+            <a:ext cx="722503" cy="643382"/>
           </a:xfrm>
           <a:prstGeom prst="rect">
             <a:avLst/>
@@ -15355,34 +11315,14 @@
       </p:sp>
       <p:sp>
         <p:nvSpPr>
-          <p:cNvPr id="78" name="TimesNewRoman_32pt_sp1_5__c57.60_t50.66__textBoxMarker"/>
-          <p:cNvSpPr/>
-          <p:nvPr/>
-        </p:nvSpPr>
-        <p:spPr>
-          <a:xfrm>
-            <a:off x="3933190" y="4873752"/>
-            <a:ext cx="722503" cy="12700"/>
-          </a:xfrm>
-          <a:prstGeom prst="rect">
-            <a:avLst/>
-          </a:prstGeom>
-          <a:solidFill>
-            <a:srgbClr val="0000FF"/>
-          </a:solidFill>
-          <a:ln/>
-        </p:spPr>
-      </p:sp>
-      <p:sp>
-        <p:nvSpPr>
-          <p:cNvPr id="79" name="TimesNewRoman_32pt_sp1_75__c67.20_t57.86"/>
-          <p:cNvSpPr/>
-          <p:nvPr/>
-        </p:nvSpPr>
-        <p:spPr>
-          <a:xfrm>
-            <a:off x="5716905" y="4236720"/>
-            <a:ext cx="722503" cy="853440"/>
+          <p:cNvPr id="41" name="TimesNewRoman_32pt_sp1_75__c67.20_t57.86"/>
+          <p:cNvSpPr/>
+          <p:nvPr/>
+        </p:nvSpPr>
+        <p:spPr>
+          <a:xfrm>
+            <a:off x="5716905" y="3808222"/>
+            <a:ext cx="722503" cy="734822"/>
           </a:xfrm>
           <a:prstGeom prst="rect">
             <a:avLst/>
@@ -15424,34 +11364,14 @@
       </p:sp>
       <p:sp>
         <p:nvSpPr>
-          <p:cNvPr id="80" name="TimesNewRoman_32pt_sp1_75__c67.20_t57.86__textBoxMarker"/>
-          <p:cNvSpPr/>
-          <p:nvPr/>
-        </p:nvSpPr>
-        <p:spPr>
-          <a:xfrm>
-            <a:off x="5716905" y="4965192"/>
-            <a:ext cx="722503" cy="12700"/>
-          </a:xfrm>
-          <a:prstGeom prst="rect">
-            <a:avLst/>
-          </a:prstGeom>
-          <a:solidFill>
-            <a:srgbClr val="0000FF"/>
-          </a:solidFill>
-          <a:ln/>
-        </p:spPr>
-      </p:sp>
-      <p:sp>
-        <p:nvSpPr>
-          <p:cNvPr id="81" name="TimesNewRoman_32pt_sp2__c76.80_t65.06"/>
-          <p:cNvSpPr/>
-          <p:nvPr/>
-        </p:nvSpPr>
-        <p:spPr>
-          <a:xfrm>
-            <a:off x="7500620" y="4236720"/>
-            <a:ext cx="722503" cy="975360"/>
+          <p:cNvPr id="42" name="TimesNewRoman_32pt_sp2__c76.80_t65.06"/>
+          <p:cNvSpPr/>
+          <p:nvPr/>
+        </p:nvSpPr>
+        <p:spPr>
+          <a:xfrm>
+            <a:off x="7500620" y="3808222"/>
+            <a:ext cx="722503" cy="826262"/>
           </a:xfrm>
           <a:prstGeom prst="rect">
             <a:avLst/>
@@ -15493,34 +11413,14 @@
       </p:sp>
       <p:sp>
         <p:nvSpPr>
-          <p:cNvPr id="82" name="TimesNewRoman_32pt_sp2__c76.80_t65.06__textBoxMarker"/>
-          <p:cNvSpPr/>
-          <p:nvPr/>
-        </p:nvSpPr>
-        <p:spPr>
-          <a:xfrm>
-            <a:off x="7500620" y="5056632"/>
-            <a:ext cx="722503" cy="12700"/>
-          </a:xfrm>
-          <a:prstGeom prst="rect">
-            <a:avLst/>
-          </a:prstGeom>
-          <a:solidFill>
-            <a:srgbClr val="0000FF"/>
-          </a:solidFill>
-          <a:ln/>
-        </p:spPr>
-      </p:sp>
-      <p:sp>
-        <p:nvSpPr>
-          <p:cNvPr id="83" name="TimesNewRoman_40pt_sp1__c48.00_t45.94"/>
-          <p:cNvSpPr/>
-          <p:nvPr/>
-        </p:nvSpPr>
-        <p:spPr>
-          <a:xfrm>
-            <a:off x="365760" y="5313680"/>
-            <a:ext cx="903097" cy="609600"/>
+          <p:cNvPr id="43" name="TimesNewRoman_40pt_sp1__c48.00_t46.95"/>
+          <p:cNvSpPr/>
+          <p:nvPr/>
+        </p:nvSpPr>
+        <p:spPr>
+          <a:xfrm>
+            <a:off x="365760" y="4736084"/>
+            <a:ext cx="903097" cy="596265"/>
           </a:xfrm>
           <a:prstGeom prst="rect">
             <a:avLst/>
@@ -15562,34 +11462,14 @@
       </p:sp>
       <p:sp>
         <p:nvSpPr>
-          <p:cNvPr id="84" name="TimesNewRoman_40pt_sp1__c48.00_t45.94__textBoxMarker"/>
-          <p:cNvSpPr/>
-          <p:nvPr/>
-        </p:nvSpPr>
-        <p:spPr>
-          <a:xfrm>
-            <a:off x="365760" y="5890768"/>
-            <a:ext cx="903097" cy="12700"/>
-          </a:xfrm>
-          <a:prstGeom prst="rect">
-            <a:avLst/>
-          </a:prstGeom>
-          <a:solidFill>
-            <a:srgbClr val="0000FF"/>
-          </a:solidFill>
-          <a:ln/>
-        </p:spPr>
-      </p:sp>
-      <p:sp>
-        <p:nvSpPr>
-          <p:cNvPr id="85" name="TimesNewRoman_40pt_sp1_25__c60.00_t54.33"/>
-          <p:cNvSpPr/>
-          <p:nvPr/>
-        </p:nvSpPr>
-        <p:spPr>
-          <a:xfrm>
-            <a:off x="2149475" y="5313680"/>
-            <a:ext cx="903097" cy="762000"/>
+          <p:cNvPr id="44" name="TimesNewRoman_40pt_sp1_25__c60.00_t54.33"/>
+          <p:cNvSpPr/>
+          <p:nvPr/>
+        </p:nvSpPr>
+        <p:spPr>
+          <a:xfrm>
+            <a:off x="2149475" y="4736084"/>
+            <a:ext cx="903097" cy="689991"/>
           </a:xfrm>
           <a:prstGeom prst="rect">
             <a:avLst/>
@@ -15631,34 +11511,14 @@
       </p:sp>
       <p:sp>
         <p:nvSpPr>
-          <p:cNvPr id="86" name="TimesNewRoman_40pt_sp1_25__c60.00_t54.33__textBoxMarker"/>
-          <p:cNvSpPr/>
-          <p:nvPr/>
-        </p:nvSpPr>
-        <p:spPr>
-          <a:xfrm>
-            <a:off x="2149475" y="5997321"/>
-            <a:ext cx="903097" cy="12700"/>
-          </a:xfrm>
-          <a:prstGeom prst="rect">
-            <a:avLst/>
-          </a:prstGeom>
-          <a:solidFill>
-            <a:srgbClr val="0000FF"/>
-          </a:solidFill>
-          <a:ln/>
-        </p:spPr>
-      </p:sp>
-      <p:sp>
-        <p:nvSpPr>
-          <p:cNvPr id="87" name="TimesNewRoman_40pt_sp1_5__c72.00_t63.33"/>
-          <p:cNvSpPr/>
-          <p:nvPr/>
-        </p:nvSpPr>
-        <p:spPr>
-          <a:xfrm>
-            <a:off x="3933190" y="5313680"/>
-            <a:ext cx="903097" cy="914400"/>
+          <p:cNvPr id="45" name="TimesNewRoman_40pt_sp1_5__c72.00_t63.33"/>
+          <p:cNvSpPr/>
+          <p:nvPr/>
+        </p:nvSpPr>
+        <p:spPr>
+          <a:xfrm>
+            <a:off x="3933190" y="4736084"/>
+            <a:ext cx="903097" cy="804291"/>
           </a:xfrm>
           <a:prstGeom prst="rect">
             <a:avLst/>
@@ -15700,34 +11560,14 @@
       </p:sp>
       <p:sp>
         <p:nvSpPr>
-          <p:cNvPr id="88" name="TimesNewRoman_40pt_sp1_5__c72.00_t63.33__textBoxMarker"/>
-          <p:cNvSpPr/>
-          <p:nvPr/>
-        </p:nvSpPr>
-        <p:spPr>
-          <a:xfrm>
-            <a:off x="3933190" y="6111621"/>
-            <a:ext cx="903097" cy="12700"/>
-          </a:xfrm>
-          <a:prstGeom prst="rect">
-            <a:avLst/>
-          </a:prstGeom>
-          <a:solidFill>
-            <a:srgbClr val="0000FF"/>
-          </a:solidFill>
-          <a:ln/>
-        </p:spPr>
-      </p:sp>
-      <p:sp>
-        <p:nvSpPr>
-          <p:cNvPr id="89" name="TimesNewRoman_40pt_sp1_75__c84.00_t72.33"/>
-          <p:cNvSpPr/>
-          <p:nvPr/>
-        </p:nvSpPr>
-        <p:spPr>
-          <a:xfrm>
-            <a:off x="5716905" y="5313680"/>
-            <a:ext cx="903097" cy="1066800"/>
+          <p:cNvPr id="46" name="TimesNewRoman_40pt_sp1_75__c84.00_t72.33"/>
+          <p:cNvSpPr/>
+          <p:nvPr/>
+        </p:nvSpPr>
+        <p:spPr>
+          <a:xfrm>
+            <a:off x="5716905" y="4736084"/>
+            <a:ext cx="903097" cy="918591"/>
           </a:xfrm>
           <a:prstGeom prst="rect">
             <a:avLst/>
@@ -15769,34 +11609,14 @@
       </p:sp>
       <p:sp>
         <p:nvSpPr>
-          <p:cNvPr id="90" name="TimesNewRoman_40pt_sp1_75__c84.00_t72.33__textBoxMarker"/>
-          <p:cNvSpPr/>
-          <p:nvPr/>
-        </p:nvSpPr>
-        <p:spPr>
-          <a:xfrm>
-            <a:off x="5716905" y="6225921"/>
-            <a:ext cx="903097" cy="12700"/>
-          </a:xfrm>
-          <a:prstGeom prst="rect">
-            <a:avLst/>
-          </a:prstGeom>
-          <a:solidFill>
-            <a:srgbClr val="0000FF"/>
-          </a:solidFill>
-          <a:ln/>
-        </p:spPr>
-      </p:sp>
-      <p:sp>
-        <p:nvSpPr>
-          <p:cNvPr id="91" name="TimesNewRoman_40pt_sp2__c96.00_t81.33"/>
-          <p:cNvSpPr/>
-          <p:nvPr/>
-        </p:nvSpPr>
-        <p:spPr>
-          <a:xfrm>
-            <a:off x="7500620" y="5313680"/>
-            <a:ext cx="903097" cy="1219200"/>
+          <p:cNvPr id="47" name="TimesNewRoman_40pt_sp2__c96.00_t81.33"/>
+          <p:cNvSpPr/>
+          <p:nvPr/>
+        </p:nvSpPr>
+        <p:spPr>
+          <a:xfrm>
+            <a:off x="7500620" y="4736084"/>
+            <a:ext cx="903097" cy="1032891"/>
           </a:xfrm>
           <a:prstGeom prst="rect">
             <a:avLst/>
@@ -15838,34 +11658,14 @@
       </p:sp>
       <p:sp>
         <p:nvSpPr>
-          <p:cNvPr id="92" name="TimesNewRoman_40pt_sp2__c96.00_t81.33__textBoxMarker"/>
-          <p:cNvSpPr/>
-          <p:nvPr/>
-        </p:nvSpPr>
-        <p:spPr>
-          <a:xfrm>
-            <a:off x="7500620" y="6340221"/>
-            <a:ext cx="903097" cy="12700"/>
-          </a:xfrm>
-          <a:prstGeom prst="rect">
-            <a:avLst/>
-          </a:prstGeom>
-          <a:solidFill>
-            <a:srgbClr val="0000FF"/>
-          </a:solidFill>
-          <a:ln/>
-        </p:spPr>
-      </p:sp>
-      <p:sp>
-        <p:nvSpPr>
-          <p:cNvPr id="93" name="TimesNewRoman_56pt_sp1__c67.20_t64.31"/>
-          <p:cNvSpPr/>
-          <p:nvPr/>
-        </p:nvSpPr>
-        <p:spPr>
-          <a:xfrm>
-            <a:off x="365760" y="6634480"/>
-            <a:ext cx="1264412" cy="853440"/>
+          <p:cNvPr id="48" name="TimesNewRoman_56pt_sp1__c67.20_t65.72"/>
+          <p:cNvSpPr/>
+          <p:nvPr/>
+        </p:nvSpPr>
+        <p:spPr>
+          <a:xfrm>
+            <a:off x="365760" y="5870575"/>
+            <a:ext cx="1264412" cy="834644"/>
           </a:xfrm>
           <a:prstGeom prst="rect">
             <a:avLst/>
@@ -15907,34 +11707,14 @@
       </p:sp>
       <p:sp>
         <p:nvSpPr>
-          <p:cNvPr id="94" name="TimesNewRoman_56pt_sp1__c67.20_t64.31__textBoxMarker"/>
-          <p:cNvSpPr/>
-          <p:nvPr/>
-        </p:nvSpPr>
-        <p:spPr>
-          <a:xfrm>
-            <a:off x="365760" y="7444867"/>
-            <a:ext cx="1264412" cy="12700"/>
-          </a:xfrm>
-          <a:prstGeom prst="rect">
-            <a:avLst/>
-          </a:prstGeom>
-          <a:solidFill>
-            <a:srgbClr val="0000FF"/>
-          </a:solidFill>
-          <a:ln/>
-        </p:spPr>
-      </p:sp>
-      <p:sp>
-        <p:nvSpPr>
-          <p:cNvPr id="95" name="TimesNewRoman_56pt_sp1_25__c84.00_t76.06"/>
-          <p:cNvSpPr/>
-          <p:nvPr/>
-        </p:nvSpPr>
-        <p:spPr>
-          <a:xfrm>
-            <a:off x="2149475" y="6634480"/>
-            <a:ext cx="1264412" cy="1066800"/>
+          <p:cNvPr id="49" name="TimesNewRoman_56pt_sp1_25__c84.00_t76.06"/>
+          <p:cNvSpPr/>
+          <p:nvPr/>
+        </p:nvSpPr>
+        <p:spPr>
+          <a:xfrm>
+            <a:off x="2149475" y="5870575"/>
+            <a:ext cx="1264412" cy="965962"/>
           </a:xfrm>
           <a:prstGeom prst="rect">
             <a:avLst/>
@@ -15976,34 +11756,14 @@
       </p:sp>
       <p:sp>
         <p:nvSpPr>
-          <p:cNvPr id="96" name="TimesNewRoman_56pt_sp1_25__c84.00_t76.06__textBoxMarker"/>
-          <p:cNvSpPr/>
-          <p:nvPr/>
-        </p:nvSpPr>
-        <p:spPr>
-          <a:xfrm>
-            <a:off x="2149475" y="7594092"/>
-            <a:ext cx="1264412" cy="12700"/>
-          </a:xfrm>
-          <a:prstGeom prst="rect">
-            <a:avLst/>
-          </a:prstGeom>
-          <a:solidFill>
-            <a:srgbClr val="0000FF"/>
-          </a:solidFill>
-          <a:ln/>
-        </p:spPr>
-      </p:sp>
-      <p:sp>
-        <p:nvSpPr>
-          <p:cNvPr id="97" name="TimesNewRoman_56pt_sp1_5__c100.80_t88.66"/>
-          <p:cNvSpPr/>
-          <p:nvPr/>
-        </p:nvSpPr>
-        <p:spPr>
-          <a:xfrm>
-            <a:off x="3933190" y="6634480"/>
-            <a:ext cx="1264412" cy="1280160"/>
+          <p:cNvPr id="50" name="TimesNewRoman_56pt_sp1_5__c100.80_t88.66"/>
+          <p:cNvSpPr/>
+          <p:nvPr/>
+        </p:nvSpPr>
+        <p:spPr>
+          <a:xfrm>
+            <a:off x="3933190" y="5870575"/>
+            <a:ext cx="1264412" cy="1125982"/>
           </a:xfrm>
           <a:prstGeom prst="rect">
             <a:avLst/>
@@ -16045,34 +11805,14 @@
       </p:sp>
       <p:sp>
         <p:nvSpPr>
-          <p:cNvPr id="98" name="TimesNewRoman_56pt_sp1_5__c100.80_t88.66__textBoxMarker"/>
-          <p:cNvSpPr/>
-          <p:nvPr/>
-        </p:nvSpPr>
-        <p:spPr>
-          <a:xfrm>
-            <a:off x="3933190" y="7754112"/>
-            <a:ext cx="1264412" cy="12700"/>
-          </a:xfrm>
-          <a:prstGeom prst="rect">
-            <a:avLst/>
-          </a:prstGeom>
-          <a:solidFill>
-            <a:srgbClr val="0000FF"/>
-          </a:solidFill>
-          <a:ln/>
-        </p:spPr>
-      </p:sp>
-      <p:sp>
-        <p:nvSpPr>
-          <p:cNvPr id="99" name="TimesNewRoman_56pt_sp1_75__c117.60_t101.26"/>
-          <p:cNvSpPr/>
-          <p:nvPr/>
-        </p:nvSpPr>
-        <p:spPr>
-          <a:xfrm>
-            <a:off x="5716905" y="6634480"/>
-            <a:ext cx="1264412" cy="1493520"/>
+          <p:cNvPr id="51" name="TimesNewRoman_56pt_sp1_75__c117.60_t101.26"/>
+          <p:cNvSpPr/>
+          <p:nvPr/>
+        </p:nvSpPr>
+        <p:spPr>
+          <a:xfrm>
+            <a:off x="5716905" y="5870575"/>
+            <a:ext cx="1264412" cy="1286002"/>
           </a:xfrm>
           <a:prstGeom prst="rect">
             <a:avLst/>
@@ -16114,34 +11854,14 @@
       </p:sp>
       <p:sp>
         <p:nvSpPr>
-          <p:cNvPr id="100" name="TimesNewRoman_56pt_sp1_75__c117.60_t101.26__textBoxMarker"/>
-          <p:cNvSpPr/>
-          <p:nvPr/>
-        </p:nvSpPr>
-        <p:spPr>
-          <a:xfrm>
-            <a:off x="5716905" y="7914132"/>
-            <a:ext cx="1264412" cy="12700"/>
-          </a:xfrm>
-          <a:prstGeom prst="rect">
-            <a:avLst/>
-          </a:prstGeom>
-          <a:solidFill>
-            <a:srgbClr val="0000FF"/>
-          </a:solidFill>
-          <a:ln/>
-        </p:spPr>
-      </p:sp>
-      <p:sp>
-        <p:nvSpPr>
-          <p:cNvPr id="101" name="TimesNewRoman_56pt_sp2__c134.40_t113.86"/>
-          <p:cNvSpPr/>
-          <p:nvPr/>
-        </p:nvSpPr>
-        <p:spPr>
-          <a:xfrm>
-            <a:off x="7500620" y="6634480"/>
-            <a:ext cx="1264412" cy="1706880"/>
+          <p:cNvPr id="52" name="TimesNewRoman_56pt_sp2__c134.40_t113.86"/>
+          <p:cNvSpPr/>
+          <p:nvPr/>
+        </p:nvSpPr>
+        <p:spPr>
+          <a:xfrm>
+            <a:off x="7500620" y="5870575"/>
+            <a:ext cx="1264412" cy="1446022"/>
           </a:xfrm>
           <a:prstGeom prst="rect">
             <a:avLst/>
@@ -16183,34 +11903,14 @@
       </p:sp>
       <p:sp>
         <p:nvSpPr>
-          <p:cNvPr id="102" name="TimesNewRoman_56pt_sp2__c134.40_t113.86__textBoxMarker"/>
-          <p:cNvSpPr/>
-          <p:nvPr/>
-        </p:nvSpPr>
-        <p:spPr>
-          <a:xfrm>
-            <a:off x="7500620" y="8074152"/>
-            <a:ext cx="1264412" cy="12700"/>
-          </a:xfrm>
-          <a:prstGeom prst="rect">
-            <a:avLst/>
-          </a:prstGeom>
-          <a:solidFill>
-            <a:srgbClr val="0000FF"/>
-          </a:solidFill>
-          <a:ln/>
-        </p:spPr>
-      </p:sp>
-      <p:sp>
-        <p:nvSpPr>
-          <p:cNvPr id="103" name="TimesNewRoman_70pt_sp1__c84.00_t80.38"/>
-          <p:cNvSpPr/>
-          <p:nvPr/>
-        </p:nvSpPr>
-        <p:spPr>
-          <a:xfrm>
-            <a:off x="365760" y="8442960"/>
-            <a:ext cx="1580515" cy="1066800"/>
+          <p:cNvPr id="53" name="TimesNewRoman_70pt_sp1__c84.00_t82.15"/>
+          <p:cNvSpPr/>
+          <p:nvPr/>
+        </p:nvSpPr>
+        <p:spPr>
+          <a:xfrm>
+            <a:off x="365760" y="7418197"/>
+            <a:ext cx="1580515" cy="1043305"/>
           </a:xfrm>
           <a:prstGeom prst="rect">
             <a:avLst/>
@@ -16252,34 +11952,14 @@
       </p:sp>
       <p:sp>
         <p:nvSpPr>
-          <p:cNvPr id="104" name="TimesNewRoman_70pt_sp1__c84.00_t80.38__textBoxMarker"/>
-          <p:cNvSpPr/>
-          <p:nvPr/>
-        </p:nvSpPr>
-        <p:spPr>
-          <a:xfrm>
-            <a:off x="365760" y="9457436"/>
-            <a:ext cx="1580515" cy="12700"/>
-          </a:xfrm>
-          <a:prstGeom prst="rect">
-            <a:avLst/>
-          </a:prstGeom>
-          <a:solidFill>
-            <a:srgbClr val="0000FF"/>
-          </a:solidFill>
-          <a:ln/>
-        </p:spPr>
-      </p:sp>
-      <p:sp>
-        <p:nvSpPr>
-          <p:cNvPr id="105" name="TimesNewRoman_70pt_sp1_25__c105.00_t95.07"/>
-          <p:cNvSpPr/>
-          <p:nvPr/>
-        </p:nvSpPr>
-        <p:spPr>
-          <a:xfrm>
-            <a:off x="2149475" y="8442960"/>
-            <a:ext cx="1580515" cy="1333500"/>
+          <p:cNvPr id="54" name="TimesNewRoman_70pt_sp1_25__c105.00_t95.07"/>
+          <p:cNvSpPr/>
+          <p:nvPr/>
+        </p:nvSpPr>
+        <p:spPr>
+          <a:xfrm>
+            <a:off x="2149475" y="7418197"/>
+            <a:ext cx="1580515" cy="1207389"/>
           </a:xfrm>
           <a:prstGeom prst="rect">
             <a:avLst/>
@@ -16321,34 +12001,14 @@
       </p:sp>
       <p:sp>
         <p:nvSpPr>
-          <p:cNvPr id="106" name="TimesNewRoman_70pt_sp1_25__c105.00_t95.07__textBoxMarker"/>
-          <p:cNvSpPr/>
-          <p:nvPr/>
-        </p:nvSpPr>
-        <p:spPr>
-          <a:xfrm>
-            <a:off x="2149475" y="9643999"/>
-            <a:ext cx="1580515" cy="12700"/>
-          </a:xfrm>
-          <a:prstGeom prst="rect">
-            <a:avLst/>
-          </a:prstGeom>
-          <a:solidFill>
-            <a:srgbClr val="0000FF"/>
-          </a:solidFill>
-          <a:ln/>
-        </p:spPr>
-      </p:sp>
-      <p:sp>
-        <p:nvSpPr>
-          <p:cNvPr id="107" name="TimesNewRoman_70pt_sp1_5__c126.00_t110.82"/>
-          <p:cNvSpPr/>
-          <p:nvPr/>
-        </p:nvSpPr>
-        <p:spPr>
-          <a:xfrm>
-            <a:off x="3933190" y="8442960"/>
-            <a:ext cx="1580515" cy="1600200"/>
+          <p:cNvPr id="55" name="TimesNewRoman_70pt_sp1_5__c126.00_t110.82"/>
+          <p:cNvSpPr/>
+          <p:nvPr/>
+        </p:nvSpPr>
+        <p:spPr>
+          <a:xfrm>
+            <a:off x="3933190" y="7418197"/>
+            <a:ext cx="1580515" cy="1407414"/>
           </a:xfrm>
           <a:prstGeom prst="rect">
             <a:avLst/>
@@ -16390,34 +12050,14 @@
       </p:sp>
       <p:sp>
         <p:nvSpPr>
-          <p:cNvPr id="108" name="TimesNewRoman_70pt_sp1_5__c126.00_t110.82__textBoxMarker"/>
-          <p:cNvSpPr/>
-          <p:nvPr/>
-        </p:nvSpPr>
-        <p:spPr>
-          <a:xfrm>
-            <a:off x="3933190" y="9844024"/>
-            <a:ext cx="1580515" cy="12700"/>
-          </a:xfrm>
-          <a:prstGeom prst="rect">
-            <a:avLst/>
-          </a:prstGeom>
-          <a:solidFill>
-            <a:srgbClr val="0000FF"/>
-          </a:solidFill>
-          <a:ln/>
-        </p:spPr>
-      </p:sp>
-      <p:sp>
-        <p:nvSpPr>
-          <p:cNvPr id="109" name="TimesNewRoman_70pt_sp1_75__c147.00_t126.57"/>
-          <p:cNvSpPr/>
-          <p:nvPr/>
-        </p:nvSpPr>
-        <p:spPr>
-          <a:xfrm>
-            <a:off x="5716905" y="8442960"/>
-            <a:ext cx="1580515" cy="1866900"/>
+          <p:cNvPr id="56" name="TimesNewRoman_70pt_sp1_75__c147.00_t126.57"/>
+          <p:cNvSpPr/>
+          <p:nvPr/>
+        </p:nvSpPr>
+        <p:spPr>
+          <a:xfrm>
+            <a:off x="5716905" y="7418197"/>
+            <a:ext cx="1580515" cy="1607439"/>
           </a:xfrm>
           <a:prstGeom prst="rect">
             <a:avLst/>
@@ -16459,34 +12099,14 @@
       </p:sp>
       <p:sp>
         <p:nvSpPr>
-          <p:cNvPr id="110" name="TimesNewRoman_70pt_sp1_75__c147.00_t126.57__textBoxMarker"/>
-          <p:cNvSpPr/>
-          <p:nvPr/>
-        </p:nvSpPr>
-        <p:spPr>
-          <a:xfrm>
-            <a:off x="5716905" y="10044049"/>
-            <a:ext cx="1580515" cy="12700"/>
-          </a:xfrm>
-          <a:prstGeom prst="rect">
-            <a:avLst/>
-          </a:prstGeom>
-          <a:solidFill>
-            <a:srgbClr val="0000FF"/>
-          </a:solidFill>
-          <a:ln/>
-        </p:spPr>
-      </p:sp>
-      <p:sp>
-        <p:nvSpPr>
-          <p:cNvPr id="111" name="TimesNewRoman_70pt_sp2__c168.00_t142.32"/>
-          <p:cNvSpPr/>
-          <p:nvPr/>
-        </p:nvSpPr>
-        <p:spPr>
-          <a:xfrm>
-            <a:off x="7500620" y="8442960"/>
-            <a:ext cx="1580515" cy="2133600"/>
+          <p:cNvPr id="57" name="TimesNewRoman_70pt_sp2__c168.00_t142.32"/>
+          <p:cNvSpPr/>
+          <p:nvPr/>
+        </p:nvSpPr>
+        <p:spPr>
+          <a:xfrm>
+            <a:off x="7500620" y="7418197"/>
+            <a:ext cx="1580515" cy="1807464"/>
           </a:xfrm>
           <a:prstGeom prst="rect">
             <a:avLst/>
@@ -16525,26 +12145,6 @@
             <a:endParaRPr lang="en-US" sz="7000" dirty="0"/>
           </a:p>
         </p:txBody>
-      </p:sp>
-      <p:sp>
-        <p:nvSpPr>
-          <p:cNvPr id="112" name="TimesNewRoman_70pt_sp2__c168.00_t142.32__textBoxMarker"/>
-          <p:cNvSpPr/>
-          <p:nvPr/>
-        </p:nvSpPr>
-        <p:spPr>
-          <a:xfrm>
-            <a:off x="7500620" y="10244074"/>
-            <a:ext cx="1580515" cy="12700"/>
-          </a:xfrm>
-          <a:prstGeom prst="rect">
-            <a:avLst/>
-          </a:prstGeom>
-          <a:solidFill>
-            <a:srgbClr val="0000FF"/>
-          </a:solidFill>
-          <a:ln/>
-        </p:spPr>
       </p:sp>
     </p:spTree>
   </p:cSld>

--- a/scripts/office-metrics/font-grid-diagnostic.pptx
+++ b/scripts/office-metrics/font-grid-diagnostic.pptx
@@ -1183,7 +1183,7 @@
         <p:spPr>
           <a:xfrm>
             <a:off x="365760" y="721360"/>
-            <a:ext cx="110490" cy="91059"/>
+            <a:ext cx="111125" cy="91059"/>
           </a:xfrm>
           <a:prstGeom prst="rect">
             <a:avLst/>
@@ -1231,8 +1231,8 @@
         </p:nvSpPr>
         <p:spPr>
           <a:xfrm>
-            <a:off x="2358263" y="721360"/>
-            <a:ext cx="110490" cy="106299"/>
+            <a:off x="2358136" y="721360"/>
+            <a:ext cx="111125" cy="106299"/>
           </a:xfrm>
           <a:prstGeom prst="rect">
             <a:avLst/>
@@ -1280,8 +1280,8 @@
         </p:nvSpPr>
         <p:spPr>
           <a:xfrm>
-            <a:off x="4350766" y="721360"/>
-            <a:ext cx="110490" cy="123444"/>
+            <a:off x="4350512" y="721360"/>
+            <a:ext cx="111125" cy="123444"/>
           </a:xfrm>
           <a:prstGeom prst="rect">
             <a:avLst/>
@@ -1329,8 +1329,8 @@
         </p:nvSpPr>
         <p:spPr>
           <a:xfrm>
-            <a:off x="6343269" y="721360"/>
-            <a:ext cx="110490" cy="140589"/>
+            <a:off x="6342888" y="721360"/>
+            <a:ext cx="111125" cy="140589"/>
           </a:xfrm>
           <a:prstGeom prst="rect">
             <a:avLst/>
@@ -1378,8 +1378,8 @@
         </p:nvSpPr>
         <p:spPr>
           <a:xfrm>
-            <a:off x="8335772" y="721360"/>
-            <a:ext cx="110490" cy="157734"/>
+            <a:off x="8335264" y="721360"/>
+            <a:ext cx="111125" cy="157734"/>
           </a:xfrm>
           <a:prstGeom prst="rect">
             <a:avLst/>
@@ -1428,7 +1428,7 @@
         <p:spPr>
           <a:xfrm>
             <a:off x="365760" y="980694"/>
-            <a:ext cx="147447" cy="121412"/>
+            <a:ext cx="147701" cy="121412"/>
           </a:xfrm>
           <a:prstGeom prst="rect">
             <a:avLst/>
@@ -1476,8 +1476,8 @@
         </p:nvSpPr>
         <p:spPr>
           <a:xfrm>
-            <a:off x="2358263" y="980694"/>
-            <a:ext cx="147447" cy="141732"/>
+            <a:off x="2358136" y="980694"/>
+            <a:ext cx="147701" cy="141732"/>
           </a:xfrm>
           <a:prstGeom prst="rect">
             <a:avLst/>
@@ -1525,8 +1525,8 @@
         </p:nvSpPr>
         <p:spPr>
           <a:xfrm>
-            <a:off x="4350766" y="980694"/>
-            <a:ext cx="147447" cy="164592"/>
+            <a:off x="4350512" y="980694"/>
+            <a:ext cx="147701" cy="164592"/>
           </a:xfrm>
           <a:prstGeom prst="rect">
             <a:avLst/>
@@ -1574,8 +1574,8 @@
         </p:nvSpPr>
         <p:spPr>
           <a:xfrm>
-            <a:off x="6343269" y="980694"/>
-            <a:ext cx="147447" cy="187452"/>
+            <a:off x="6342888" y="980694"/>
+            <a:ext cx="147701" cy="187452"/>
           </a:xfrm>
           <a:prstGeom prst="rect">
             <a:avLst/>
@@ -1623,8 +1623,8 @@
         </p:nvSpPr>
         <p:spPr>
           <a:xfrm>
-            <a:off x="8335772" y="980694"/>
-            <a:ext cx="147447" cy="210312"/>
+            <a:off x="8335264" y="980694"/>
+            <a:ext cx="147701" cy="210312"/>
           </a:xfrm>
           <a:prstGeom prst="rect">
             <a:avLst/>
@@ -1721,7 +1721,7 @@
         </p:nvSpPr>
         <p:spPr>
           <a:xfrm>
-            <a:off x="2358263" y="1292606"/>
+            <a:off x="2358136" y="1292606"/>
             <a:ext cx="255651" cy="177165"/>
           </a:xfrm>
           <a:prstGeom prst="rect">
@@ -1770,7 +1770,7 @@
         </p:nvSpPr>
         <p:spPr>
           <a:xfrm>
-            <a:off x="4350766" y="1292606"/>
+            <a:off x="4350512" y="1292606"/>
             <a:ext cx="255651" cy="205740"/>
           </a:xfrm>
           <a:prstGeom prst="rect">
@@ -1819,7 +1819,7 @@
         </p:nvSpPr>
         <p:spPr>
           <a:xfrm>
-            <a:off x="6343269" y="1292606"/>
+            <a:off x="6342888" y="1292606"/>
             <a:ext cx="255651" cy="234315"/>
           </a:xfrm>
           <a:prstGeom prst="rect">
@@ -1868,7 +1868,7 @@
         </p:nvSpPr>
         <p:spPr>
           <a:xfrm>
-            <a:off x="8335772" y="1292606"/>
+            <a:off x="8335264" y="1292606"/>
             <a:ext cx="255651" cy="262890"/>
           </a:xfrm>
           <a:prstGeom prst="rect">
@@ -1918,7 +1918,7 @@
         <p:spPr>
           <a:xfrm>
             <a:off x="365760" y="1657096"/>
-            <a:ext cx="306705" cy="181991"/>
+            <a:ext cx="306451" cy="181991"/>
           </a:xfrm>
           <a:prstGeom prst="rect">
             <a:avLst/>
@@ -1966,8 +1966,8 @@
         </p:nvSpPr>
         <p:spPr>
           <a:xfrm>
-            <a:off x="2358263" y="1657096"/>
-            <a:ext cx="306705" cy="212471"/>
+            <a:off x="2358136" y="1657096"/>
+            <a:ext cx="306451" cy="212471"/>
           </a:xfrm>
           <a:prstGeom prst="rect">
             <a:avLst/>
@@ -2015,8 +2015,8 @@
         </p:nvSpPr>
         <p:spPr>
           <a:xfrm>
-            <a:off x="4350766" y="1657096"/>
-            <a:ext cx="306705" cy="246761"/>
+            <a:off x="4350512" y="1657096"/>
+            <a:ext cx="306451" cy="246761"/>
           </a:xfrm>
           <a:prstGeom prst="rect">
             <a:avLst/>
@@ -2064,8 +2064,8 @@
         </p:nvSpPr>
         <p:spPr>
           <a:xfrm>
-            <a:off x="6343269" y="1657096"/>
-            <a:ext cx="306705" cy="281051"/>
+            <a:off x="6342888" y="1657096"/>
+            <a:ext cx="306451" cy="281051"/>
           </a:xfrm>
           <a:prstGeom prst="rect">
             <a:avLst/>
@@ -2113,8 +2113,8 @@
         </p:nvSpPr>
         <p:spPr>
           <a:xfrm>
-            <a:off x="8335772" y="1657096"/>
-            <a:ext cx="306705" cy="315341"/>
+            <a:off x="8335264" y="1657096"/>
+            <a:ext cx="306451" cy="315341"/>
           </a:xfrm>
           <a:prstGeom prst="rect">
             <a:avLst/>
@@ -2163,7 +2163,7 @@
         <p:spPr>
           <a:xfrm>
             <a:off x="365760" y="2074037"/>
-            <a:ext cx="357886" cy="212344"/>
+            <a:ext cx="358775" cy="212344"/>
           </a:xfrm>
           <a:prstGeom prst="rect">
             <a:avLst/>
@@ -2211,8 +2211,8 @@
         </p:nvSpPr>
         <p:spPr>
           <a:xfrm>
-            <a:off x="2358263" y="2074037"/>
-            <a:ext cx="357886" cy="247904"/>
+            <a:off x="2358136" y="2074037"/>
+            <a:ext cx="358775" cy="247904"/>
           </a:xfrm>
           <a:prstGeom prst="rect">
             <a:avLst/>
@@ -2260,8 +2260,8 @@
         </p:nvSpPr>
         <p:spPr>
           <a:xfrm>
-            <a:off x="4350766" y="2074037"/>
-            <a:ext cx="357886" cy="287909"/>
+            <a:off x="4350512" y="2074037"/>
+            <a:ext cx="358775" cy="287909"/>
           </a:xfrm>
           <a:prstGeom prst="rect">
             <a:avLst/>
@@ -2309,8 +2309,8 @@
         </p:nvSpPr>
         <p:spPr>
           <a:xfrm>
-            <a:off x="6343269" y="2074037"/>
-            <a:ext cx="357886" cy="327914"/>
+            <a:off x="6342888" y="2074037"/>
+            <a:ext cx="358775" cy="327914"/>
           </a:xfrm>
           <a:prstGeom prst="rect">
             <a:avLst/>
@@ -2358,8 +2358,8 @@
         </p:nvSpPr>
         <p:spPr>
           <a:xfrm>
-            <a:off x="8335772" y="2074037"/>
-            <a:ext cx="357886" cy="367919"/>
+            <a:off x="8335264" y="2074037"/>
+            <a:ext cx="358775" cy="367919"/>
           </a:xfrm>
           <a:prstGeom prst="rect">
             <a:avLst/>
@@ -2408,7 +2408,7 @@
         <p:spPr>
           <a:xfrm>
             <a:off x="365760" y="2543556"/>
-            <a:ext cx="460121" cy="273050"/>
+            <a:ext cx="460375" cy="273050"/>
           </a:xfrm>
           <a:prstGeom prst="rect">
             <a:avLst/>
@@ -2456,8 +2456,8 @@
         </p:nvSpPr>
         <p:spPr>
           <a:xfrm>
-            <a:off x="2358263" y="2543556"/>
-            <a:ext cx="460121" cy="318770"/>
+            <a:off x="2358136" y="2543556"/>
+            <a:ext cx="460375" cy="318770"/>
           </a:xfrm>
           <a:prstGeom prst="rect">
             <a:avLst/>
@@ -2505,8 +2505,8 @@
         </p:nvSpPr>
         <p:spPr>
           <a:xfrm>
-            <a:off x="4350766" y="2543556"/>
-            <a:ext cx="460121" cy="370205"/>
+            <a:off x="4350512" y="2543556"/>
+            <a:ext cx="460375" cy="370205"/>
           </a:xfrm>
           <a:prstGeom prst="rect">
             <a:avLst/>
@@ -2554,8 +2554,8 @@
         </p:nvSpPr>
         <p:spPr>
           <a:xfrm>
-            <a:off x="6343269" y="2543556"/>
-            <a:ext cx="460121" cy="421640"/>
+            <a:off x="6342888" y="2543556"/>
+            <a:ext cx="460375" cy="421640"/>
           </a:xfrm>
           <a:prstGeom prst="rect">
             <a:avLst/>
@@ -2603,8 +2603,8 @@
         </p:nvSpPr>
         <p:spPr>
           <a:xfrm>
-            <a:off x="8335772" y="2543556"/>
-            <a:ext cx="460121" cy="473075"/>
+            <a:off x="8335264" y="2543556"/>
+            <a:ext cx="460375" cy="473075"/>
           </a:xfrm>
           <a:prstGeom prst="rect">
             <a:avLst/>
@@ -2653,7 +2653,7 @@
         <p:spPr>
           <a:xfrm>
             <a:off x="365760" y="3118231"/>
-            <a:ext cx="613410" cy="364109"/>
+            <a:ext cx="614426" cy="364109"/>
           </a:xfrm>
           <a:prstGeom prst="rect">
             <a:avLst/>
@@ -2701,8 +2701,8 @@
         </p:nvSpPr>
         <p:spPr>
           <a:xfrm>
-            <a:off x="2358263" y="3118231"/>
-            <a:ext cx="613410" cy="425069"/>
+            <a:off x="2358136" y="3118231"/>
+            <a:ext cx="614426" cy="425069"/>
           </a:xfrm>
           <a:prstGeom prst="rect">
             <a:avLst/>
@@ -2750,8 +2750,8 @@
         </p:nvSpPr>
         <p:spPr>
           <a:xfrm>
-            <a:off x="4350766" y="3118231"/>
-            <a:ext cx="613410" cy="493649"/>
+            <a:off x="4350512" y="3118231"/>
+            <a:ext cx="614426" cy="493649"/>
           </a:xfrm>
           <a:prstGeom prst="rect">
             <a:avLst/>
@@ -2799,8 +2799,8 @@
         </p:nvSpPr>
         <p:spPr>
           <a:xfrm>
-            <a:off x="6343269" y="3118231"/>
-            <a:ext cx="613410" cy="562229"/>
+            <a:off x="6342888" y="3118231"/>
+            <a:ext cx="614426" cy="562229"/>
           </a:xfrm>
           <a:prstGeom prst="rect">
             <a:avLst/>
@@ -2848,8 +2848,8 @@
         </p:nvSpPr>
         <p:spPr>
           <a:xfrm>
-            <a:off x="8335772" y="3118231"/>
-            <a:ext cx="613410" cy="630809"/>
+            <a:off x="8335264" y="3118231"/>
+            <a:ext cx="614426" cy="630809"/>
           </a:xfrm>
           <a:prstGeom prst="rect">
             <a:avLst/>
@@ -2898,7 +2898,7 @@
         <p:spPr>
           <a:xfrm>
             <a:off x="365760" y="3850640"/>
-            <a:ext cx="818007" cy="485394"/>
+            <a:ext cx="819150" cy="485394"/>
           </a:xfrm>
           <a:prstGeom prst="rect">
             <a:avLst/>
@@ -2946,8 +2946,8 @@
         </p:nvSpPr>
         <p:spPr>
           <a:xfrm>
-            <a:off x="2358263" y="3850640"/>
-            <a:ext cx="818007" cy="566674"/>
+            <a:off x="2358136" y="3850640"/>
+            <a:ext cx="819150" cy="566674"/>
           </a:xfrm>
           <a:prstGeom prst="rect">
             <a:avLst/>
@@ -2995,8 +2995,8 @@
         </p:nvSpPr>
         <p:spPr>
           <a:xfrm>
-            <a:off x="4350766" y="3850640"/>
-            <a:ext cx="818007" cy="658114"/>
+            <a:off x="4350512" y="3850640"/>
+            <a:ext cx="819150" cy="658114"/>
           </a:xfrm>
           <a:prstGeom prst="rect">
             <a:avLst/>
@@ -3044,8 +3044,8 @@
         </p:nvSpPr>
         <p:spPr>
           <a:xfrm>
-            <a:off x="6343269" y="3850640"/>
-            <a:ext cx="818007" cy="749554"/>
+            <a:off x="6342888" y="3850640"/>
+            <a:ext cx="819150" cy="749554"/>
           </a:xfrm>
           <a:prstGeom prst="rect">
             <a:avLst/>
@@ -3093,8 +3093,8 @@
         </p:nvSpPr>
         <p:spPr>
           <a:xfrm>
-            <a:off x="8335772" y="3850640"/>
-            <a:ext cx="818007" cy="840994"/>
+            <a:off x="8335264" y="3850640"/>
+            <a:ext cx="819150" cy="840994"/>
           </a:xfrm>
           <a:prstGeom prst="rect">
             <a:avLst/>
@@ -3143,7 +3143,7 @@
         <p:spPr>
           <a:xfrm>
             <a:off x="365760" y="4793234"/>
-            <a:ext cx="1022477" cy="606806"/>
+            <a:ext cx="1024001" cy="606806"/>
           </a:xfrm>
           <a:prstGeom prst="rect">
             <a:avLst/>
@@ -3191,8 +3191,8 @@
         </p:nvSpPr>
         <p:spPr>
           <a:xfrm>
-            <a:off x="2358263" y="4793234"/>
-            <a:ext cx="1022477" cy="708406"/>
+            <a:off x="2358136" y="4793234"/>
+            <a:ext cx="1024001" cy="708406"/>
           </a:xfrm>
           <a:prstGeom prst="rect">
             <a:avLst/>
@@ -3240,8 +3240,8 @@
         </p:nvSpPr>
         <p:spPr>
           <a:xfrm>
-            <a:off x="4350766" y="4793234"/>
-            <a:ext cx="1022477" cy="822706"/>
+            <a:off x="4350512" y="4793234"/>
+            <a:ext cx="1024001" cy="822706"/>
           </a:xfrm>
           <a:prstGeom prst="rect">
             <a:avLst/>
@@ -3289,8 +3289,8 @@
         </p:nvSpPr>
         <p:spPr>
           <a:xfrm>
-            <a:off x="6343269" y="4793234"/>
-            <a:ext cx="1022477" cy="937006"/>
+            <a:off x="6342888" y="4793234"/>
+            <a:ext cx="1024001" cy="937006"/>
           </a:xfrm>
           <a:prstGeom prst="rect">
             <a:avLst/>
@@ -3338,8 +3338,8 @@
         </p:nvSpPr>
         <p:spPr>
           <a:xfrm>
-            <a:off x="8335772" y="4793234"/>
-            <a:ext cx="1022477" cy="1051306"/>
+            <a:off x="8335264" y="4793234"/>
+            <a:ext cx="1024001" cy="1051306"/>
           </a:xfrm>
           <a:prstGeom prst="rect">
             <a:avLst/>
@@ -3388,7 +3388,7 @@
         <p:spPr>
           <a:xfrm>
             <a:off x="365760" y="5946140"/>
-            <a:ext cx="1431417" cy="849503"/>
+            <a:ext cx="1433576" cy="849503"/>
           </a:xfrm>
           <a:prstGeom prst="rect">
             <a:avLst/>
@@ -3436,8 +3436,8 @@
         </p:nvSpPr>
         <p:spPr>
           <a:xfrm>
-            <a:off x="2358263" y="5946140"/>
-            <a:ext cx="1431417" cy="991743"/>
+            <a:off x="2358136" y="5946140"/>
+            <a:ext cx="1433576" cy="991743"/>
           </a:xfrm>
           <a:prstGeom prst="rect">
             <a:avLst/>
@@ -3485,8 +3485,8 @@
         </p:nvSpPr>
         <p:spPr>
           <a:xfrm>
-            <a:off x="4350766" y="5946140"/>
-            <a:ext cx="1431417" cy="1151763"/>
+            <a:off x="4350512" y="5946140"/>
+            <a:ext cx="1433576" cy="1151763"/>
           </a:xfrm>
           <a:prstGeom prst="rect">
             <a:avLst/>
@@ -3534,8 +3534,8 @@
         </p:nvSpPr>
         <p:spPr>
           <a:xfrm>
-            <a:off x="6343269" y="5946140"/>
-            <a:ext cx="1431417" cy="1311783"/>
+            <a:off x="6342888" y="5946140"/>
+            <a:ext cx="1433576" cy="1311783"/>
           </a:xfrm>
           <a:prstGeom prst="rect">
             <a:avLst/>
@@ -3583,8 +3583,8 @@
         </p:nvSpPr>
         <p:spPr>
           <a:xfrm>
-            <a:off x="8335772" y="5946140"/>
-            <a:ext cx="1431417" cy="1471803"/>
+            <a:off x="8335264" y="5946140"/>
+            <a:ext cx="1433576" cy="1471803"/>
           </a:xfrm>
           <a:prstGeom prst="rect">
             <a:avLst/>
@@ -3633,7 +3633,7 @@
         <p:spPr>
           <a:xfrm>
             <a:off x="365760" y="7519543"/>
-            <a:ext cx="1789303" cy="1061974"/>
+            <a:ext cx="1789176" cy="1061974"/>
           </a:xfrm>
           <a:prstGeom prst="rect">
             <a:avLst/>
@@ -3681,8 +3681,8 @@
         </p:nvSpPr>
         <p:spPr>
           <a:xfrm>
-            <a:off x="2358263" y="7519543"/>
-            <a:ext cx="1789303" cy="1239774"/>
+            <a:off x="2358136" y="7519543"/>
+            <a:ext cx="1789176" cy="1239774"/>
           </a:xfrm>
           <a:prstGeom prst="rect">
             <a:avLst/>
@@ -3730,8 +3730,8 @@
         </p:nvSpPr>
         <p:spPr>
           <a:xfrm>
-            <a:off x="4350766" y="7519543"/>
-            <a:ext cx="1789303" cy="1439799"/>
+            <a:off x="4350512" y="7519543"/>
+            <a:ext cx="1789176" cy="1439799"/>
           </a:xfrm>
           <a:prstGeom prst="rect">
             <a:avLst/>
@@ -3779,8 +3779,8 @@
         </p:nvSpPr>
         <p:spPr>
           <a:xfrm>
-            <a:off x="6343269" y="7519543"/>
-            <a:ext cx="1789303" cy="1639824"/>
+            <a:off x="6342888" y="7519543"/>
+            <a:ext cx="1789176" cy="1639824"/>
           </a:xfrm>
           <a:prstGeom prst="rect">
             <a:avLst/>
@@ -3828,8 +3828,8 @@
         </p:nvSpPr>
         <p:spPr>
           <a:xfrm>
-            <a:off x="8335772" y="7519543"/>
-            <a:ext cx="1789303" cy="1839849"/>
+            <a:off x="8335264" y="7519543"/>
+            <a:ext cx="1789176" cy="1839849"/>
           </a:xfrm>
           <a:prstGeom prst="rect">
             <a:avLst/>
@@ -3942,7 +3942,7 @@
         <p:spPr>
           <a:xfrm>
             <a:off x="365760" y="721360"/>
-            <a:ext cx="105918" cy="89916"/>
+            <a:ext cx="106426" cy="89916"/>
           </a:xfrm>
           <a:prstGeom prst="rect">
             <a:avLst/>
@@ -3990,8 +3990,8 @@
         </p:nvSpPr>
         <p:spPr>
           <a:xfrm>
-            <a:off x="2299208" y="721360"/>
-            <a:ext cx="105918" cy="103124"/>
+            <a:off x="2297811" y="721360"/>
+            <a:ext cx="106426" cy="103124"/>
           </a:xfrm>
           <a:prstGeom prst="rect">
             <a:avLst/>
@@ -4039,8 +4039,8 @@
         </p:nvSpPr>
         <p:spPr>
           <a:xfrm>
-            <a:off x="4232656" y="721360"/>
-            <a:ext cx="105918" cy="120269"/>
+            <a:off x="4229862" y="721360"/>
+            <a:ext cx="106426" cy="120269"/>
           </a:xfrm>
           <a:prstGeom prst="rect">
             <a:avLst/>
@@ -4088,8 +4088,8 @@
         </p:nvSpPr>
         <p:spPr>
           <a:xfrm>
-            <a:off x="6166104" y="721360"/>
-            <a:ext cx="105918" cy="137414"/>
+            <a:off x="6161913" y="721360"/>
+            <a:ext cx="106426" cy="137414"/>
           </a:xfrm>
           <a:prstGeom prst="rect">
             <a:avLst/>
@@ -4137,8 +4137,8 @@
         </p:nvSpPr>
         <p:spPr>
           <a:xfrm>
-            <a:off x="8099552" y="721360"/>
-            <a:ext cx="105918" cy="154559"/>
+            <a:off x="8093964" y="721360"/>
+            <a:ext cx="106426" cy="154559"/>
           </a:xfrm>
           <a:prstGeom prst="rect">
             <a:avLst/>
@@ -4187,7 +4187,7 @@
         <p:spPr>
           <a:xfrm>
             <a:off x="365760" y="977519"/>
-            <a:ext cx="141224" cy="119888"/>
+            <a:ext cx="142875" cy="119888"/>
           </a:xfrm>
           <a:prstGeom prst="rect">
             <a:avLst/>
@@ -4235,8 +4235,8 @@
         </p:nvSpPr>
         <p:spPr>
           <a:xfrm>
-            <a:off x="2299208" y="977519"/>
-            <a:ext cx="141224" cy="137541"/>
+            <a:off x="2297811" y="977519"/>
+            <a:ext cx="142875" cy="137541"/>
           </a:xfrm>
           <a:prstGeom prst="rect">
             <a:avLst/>
@@ -4284,8 +4284,8 @@
         </p:nvSpPr>
         <p:spPr>
           <a:xfrm>
-            <a:off x="4232656" y="977519"/>
-            <a:ext cx="141224" cy="160401"/>
+            <a:off x="4229862" y="977519"/>
+            <a:ext cx="142875" cy="160401"/>
           </a:xfrm>
           <a:prstGeom prst="rect">
             <a:avLst/>
@@ -4333,8 +4333,8 @@
         </p:nvSpPr>
         <p:spPr>
           <a:xfrm>
-            <a:off x="6166104" y="977519"/>
-            <a:ext cx="141224" cy="183261"/>
+            <a:off x="6161913" y="977519"/>
+            <a:ext cx="142875" cy="183261"/>
           </a:xfrm>
           <a:prstGeom prst="rect">
             <a:avLst/>
@@ -4382,8 +4382,8 @@
         </p:nvSpPr>
         <p:spPr>
           <a:xfrm>
-            <a:off x="8099552" y="977519"/>
-            <a:ext cx="141224" cy="206121"/>
+            <a:off x="8093964" y="977519"/>
+            <a:ext cx="142875" cy="206121"/>
           </a:xfrm>
           <a:prstGeom prst="rect">
             <a:avLst/>
@@ -4432,7 +4432,7 @@
         <p:spPr>
           <a:xfrm>
             <a:off x="365760" y="1285240"/>
-            <a:ext cx="247142" cy="149860"/>
+            <a:ext cx="244475" cy="149860"/>
           </a:xfrm>
           <a:prstGeom prst="rect">
             <a:avLst/>
@@ -4480,8 +4480,8 @@
         </p:nvSpPr>
         <p:spPr>
           <a:xfrm>
-            <a:off x="2299208" y="1285240"/>
-            <a:ext cx="247142" cy="171831"/>
+            <a:off x="2297811" y="1285240"/>
+            <a:ext cx="244475" cy="171831"/>
           </a:xfrm>
           <a:prstGeom prst="rect">
             <a:avLst/>
@@ -4529,8 +4529,8 @@
         </p:nvSpPr>
         <p:spPr>
           <a:xfrm>
-            <a:off x="4232656" y="1285240"/>
-            <a:ext cx="247142" cy="200406"/>
+            <a:off x="4229862" y="1285240"/>
+            <a:ext cx="244475" cy="200406"/>
           </a:xfrm>
           <a:prstGeom prst="rect">
             <a:avLst/>
@@ -4578,8 +4578,8 @@
         </p:nvSpPr>
         <p:spPr>
           <a:xfrm>
-            <a:off x="6166104" y="1285240"/>
-            <a:ext cx="247142" cy="228981"/>
+            <a:off x="6161913" y="1285240"/>
+            <a:ext cx="244475" cy="228981"/>
           </a:xfrm>
           <a:prstGeom prst="rect">
             <a:avLst/>
@@ -4627,8 +4627,8 @@
         </p:nvSpPr>
         <p:spPr>
           <a:xfrm>
-            <a:off x="8099552" y="1285240"/>
-            <a:ext cx="247142" cy="257556"/>
+            <a:off x="8093964" y="1285240"/>
+            <a:ext cx="244475" cy="257556"/>
           </a:xfrm>
           <a:prstGeom prst="rect">
             <a:avLst/>
@@ -4677,7 +4677,7 @@
         <p:spPr>
           <a:xfrm>
             <a:off x="365760" y="1644396"/>
-            <a:ext cx="296672" cy="179832"/>
+            <a:ext cx="295275" cy="179832"/>
           </a:xfrm>
           <a:prstGeom prst="rect">
             <a:avLst/>
@@ -4725,8 +4725,8 @@
         </p:nvSpPr>
         <p:spPr>
           <a:xfrm>
-            <a:off x="2299208" y="1644396"/>
-            <a:ext cx="296672" cy="206248"/>
+            <a:off x="2297811" y="1644396"/>
+            <a:ext cx="295275" cy="206248"/>
           </a:xfrm>
           <a:prstGeom prst="rect">
             <a:avLst/>
@@ -4774,8 +4774,8 @@
         </p:nvSpPr>
         <p:spPr>
           <a:xfrm>
-            <a:off x="4232656" y="1644396"/>
-            <a:ext cx="296672" cy="240538"/>
+            <a:off x="4229862" y="1644396"/>
+            <a:ext cx="295275" cy="240538"/>
           </a:xfrm>
           <a:prstGeom prst="rect">
             <a:avLst/>
@@ -4823,8 +4823,8 @@
         </p:nvSpPr>
         <p:spPr>
           <a:xfrm>
-            <a:off x="6166104" y="1644396"/>
-            <a:ext cx="296672" cy="274828"/>
+            <a:off x="6161913" y="1644396"/>
+            <a:ext cx="295275" cy="274828"/>
           </a:xfrm>
           <a:prstGeom prst="rect">
             <a:avLst/>
@@ -4872,8 +4872,8 @@
         </p:nvSpPr>
         <p:spPr>
           <a:xfrm>
-            <a:off x="8099552" y="1644396"/>
-            <a:ext cx="296672" cy="309118"/>
+            <a:off x="8093964" y="1644396"/>
+            <a:ext cx="295275" cy="309118"/>
           </a:xfrm>
           <a:prstGeom prst="rect">
             <a:avLst/>
@@ -4922,7 +4922,7 @@
         <p:spPr>
           <a:xfrm>
             <a:off x="365760" y="2055114"/>
-            <a:ext cx="346075" cy="209804"/>
+            <a:ext cx="344551" cy="209804"/>
           </a:xfrm>
           <a:prstGeom prst="rect">
             <a:avLst/>
@@ -4970,8 +4970,8 @@
         </p:nvSpPr>
         <p:spPr>
           <a:xfrm>
-            <a:off x="2299208" y="2055114"/>
-            <a:ext cx="346075" cy="240665"/>
+            <a:off x="2297811" y="2055114"/>
+            <a:ext cx="344551" cy="240665"/>
           </a:xfrm>
           <a:prstGeom prst="rect">
             <a:avLst/>
@@ -5019,8 +5019,8 @@
         </p:nvSpPr>
         <p:spPr>
           <a:xfrm>
-            <a:off x="4232656" y="2055114"/>
-            <a:ext cx="346075" cy="280670"/>
+            <a:off x="4229862" y="2055114"/>
+            <a:ext cx="344551" cy="280670"/>
           </a:xfrm>
           <a:prstGeom prst="rect">
             <a:avLst/>
@@ -5068,8 +5068,8 @@
         </p:nvSpPr>
         <p:spPr>
           <a:xfrm>
-            <a:off x="6166104" y="2055114"/>
-            <a:ext cx="346075" cy="320675"/>
+            <a:off x="6161913" y="2055114"/>
+            <a:ext cx="344551" cy="320675"/>
           </a:xfrm>
           <a:prstGeom prst="rect">
             <a:avLst/>
@@ -5117,8 +5117,8 @@
         </p:nvSpPr>
         <p:spPr>
           <a:xfrm>
-            <a:off x="8099552" y="2055114"/>
-            <a:ext cx="346075" cy="360680"/>
+            <a:off x="8093964" y="2055114"/>
+            <a:ext cx="344551" cy="360680"/>
           </a:xfrm>
           <a:prstGeom prst="rect">
             <a:avLst/>
@@ -5167,7 +5167,7 @@
         <p:spPr>
           <a:xfrm>
             <a:off x="365760" y="2517394"/>
-            <a:ext cx="444881" cy="269748"/>
+            <a:ext cx="444500" cy="269748"/>
           </a:xfrm>
           <a:prstGeom prst="rect">
             <a:avLst/>
@@ -5215,8 +5215,8 @@
         </p:nvSpPr>
         <p:spPr>
           <a:xfrm>
-            <a:off x="2299208" y="2517394"/>
-            <a:ext cx="444881" cy="309372"/>
+            <a:off x="2297811" y="2517394"/>
+            <a:ext cx="444500" cy="309372"/>
           </a:xfrm>
           <a:prstGeom prst="rect">
             <a:avLst/>
@@ -5264,8 +5264,8 @@
         </p:nvSpPr>
         <p:spPr>
           <a:xfrm>
-            <a:off x="4232656" y="2517394"/>
-            <a:ext cx="444881" cy="360807"/>
+            <a:off x="4229862" y="2517394"/>
+            <a:ext cx="444500" cy="360807"/>
           </a:xfrm>
           <a:prstGeom prst="rect">
             <a:avLst/>
@@ -5313,8 +5313,8 @@
         </p:nvSpPr>
         <p:spPr>
           <a:xfrm>
-            <a:off x="6166104" y="2517394"/>
-            <a:ext cx="444881" cy="412242"/>
+            <a:off x="6161913" y="2517394"/>
+            <a:ext cx="444500" cy="412242"/>
           </a:xfrm>
           <a:prstGeom prst="rect">
             <a:avLst/>
@@ -5362,8 +5362,8 @@
         </p:nvSpPr>
         <p:spPr>
           <a:xfrm>
-            <a:off x="8099552" y="2517394"/>
-            <a:ext cx="444881" cy="463677"/>
+            <a:off x="8093964" y="2517394"/>
+            <a:ext cx="444500" cy="463677"/>
           </a:xfrm>
           <a:prstGeom prst="rect">
             <a:avLst/>
@@ -5412,7 +5412,7 @@
         <p:spPr>
           <a:xfrm>
             <a:off x="365760" y="3082671"/>
-            <a:ext cx="593217" cy="359664"/>
+            <a:ext cx="593725" cy="359664"/>
           </a:xfrm>
           <a:prstGeom prst="rect">
             <a:avLst/>
@@ -5460,8 +5460,8 @@
         </p:nvSpPr>
         <p:spPr>
           <a:xfrm>
-            <a:off x="2299208" y="3082671"/>
-            <a:ext cx="593217" cy="412496"/>
+            <a:off x="2297811" y="3082671"/>
+            <a:ext cx="593725" cy="412496"/>
           </a:xfrm>
           <a:prstGeom prst="rect">
             <a:avLst/>
@@ -5509,8 +5509,8 @@
         </p:nvSpPr>
         <p:spPr>
           <a:xfrm>
-            <a:off x="4232656" y="3082671"/>
-            <a:ext cx="593217" cy="481076"/>
+            <a:off x="4229862" y="3082671"/>
+            <a:ext cx="593725" cy="481076"/>
           </a:xfrm>
           <a:prstGeom prst="rect">
             <a:avLst/>
@@ -5558,8 +5558,8 @@
         </p:nvSpPr>
         <p:spPr>
           <a:xfrm>
-            <a:off x="6166104" y="3082671"/>
-            <a:ext cx="593217" cy="549656"/>
+            <a:off x="6161913" y="3082671"/>
+            <a:ext cx="593725" cy="549656"/>
           </a:xfrm>
           <a:prstGeom prst="rect">
             <a:avLst/>
@@ -5607,8 +5607,8 @@
         </p:nvSpPr>
         <p:spPr>
           <a:xfrm>
-            <a:off x="8099552" y="3082671"/>
-            <a:ext cx="593217" cy="618236"/>
+            <a:off x="8093964" y="3082671"/>
+            <a:ext cx="593725" cy="618236"/>
           </a:xfrm>
           <a:prstGeom prst="rect">
             <a:avLst/>
@@ -5657,7 +5657,7 @@
         <p:spPr>
           <a:xfrm>
             <a:off x="365760" y="3802507"/>
-            <a:ext cx="790956" cy="479552"/>
+            <a:ext cx="789051" cy="479552"/>
           </a:xfrm>
           <a:prstGeom prst="rect">
             <a:avLst/>
@@ -5705,8 +5705,8 @@
         </p:nvSpPr>
         <p:spPr>
           <a:xfrm>
-            <a:off x="2299208" y="3802507"/>
-            <a:ext cx="790956" cy="550037"/>
+            <a:off x="2297811" y="3802507"/>
+            <a:ext cx="789051" cy="550037"/>
           </a:xfrm>
           <a:prstGeom prst="rect">
             <a:avLst/>
@@ -5754,8 +5754,8 @@
         </p:nvSpPr>
         <p:spPr>
           <a:xfrm>
-            <a:off x="4232656" y="3802507"/>
-            <a:ext cx="790956" cy="641477"/>
+            <a:off x="4229862" y="3802507"/>
+            <a:ext cx="789051" cy="641477"/>
           </a:xfrm>
           <a:prstGeom prst="rect">
             <a:avLst/>
@@ -5803,8 +5803,8 @@
         </p:nvSpPr>
         <p:spPr>
           <a:xfrm>
-            <a:off x="6166104" y="3802507"/>
-            <a:ext cx="790956" cy="732917"/>
+            <a:off x="6161913" y="3802507"/>
+            <a:ext cx="789051" cy="732917"/>
           </a:xfrm>
           <a:prstGeom prst="rect">
             <a:avLst/>
@@ -5852,8 +5852,8 @@
         </p:nvSpPr>
         <p:spPr>
           <a:xfrm>
-            <a:off x="8099552" y="3802507"/>
-            <a:ext cx="790956" cy="824357"/>
+            <a:off x="8093964" y="3802507"/>
+            <a:ext cx="789051" cy="824357"/>
           </a:xfrm>
           <a:prstGeom prst="rect">
             <a:avLst/>
@@ -5902,7 +5902,7 @@
         <p:spPr>
           <a:xfrm>
             <a:off x="365760" y="4728464"/>
-            <a:ext cx="988695" cy="599567"/>
+            <a:ext cx="989076" cy="599567"/>
           </a:xfrm>
           <a:prstGeom prst="rect">
             <a:avLst/>
@@ -5950,8 +5950,8 @@
         </p:nvSpPr>
         <p:spPr>
           <a:xfrm>
-            <a:off x="2299208" y="4728464"/>
-            <a:ext cx="988695" cy="687578"/>
+            <a:off x="2297811" y="4728464"/>
+            <a:ext cx="989076" cy="687578"/>
           </a:xfrm>
           <a:prstGeom prst="rect">
             <a:avLst/>
@@ -5999,8 +5999,8 @@
         </p:nvSpPr>
         <p:spPr>
           <a:xfrm>
-            <a:off x="4232656" y="4728464"/>
-            <a:ext cx="988695" cy="801878"/>
+            <a:off x="4229862" y="4728464"/>
+            <a:ext cx="989076" cy="801878"/>
           </a:xfrm>
           <a:prstGeom prst="rect">
             <a:avLst/>
@@ -6048,8 +6048,8 @@
         </p:nvSpPr>
         <p:spPr>
           <a:xfrm>
-            <a:off x="6166104" y="4728464"/>
-            <a:ext cx="988695" cy="916178"/>
+            <a:off x="6161913" y="4728464"/>
+            <a:ext cx="989076" cy="916178"/>
           </a:xfrm>
           <a:prstGeom prst="rect">
             <a:avLst/>
@@ -6097,8 +6097,8 @@
         </p:nvSpPr>
         <p:spPr>
           <a:xfrm>
-            <a:off x="8099552" y="4728464"/>
-            <a:ext cx="988695" cy="1030478"/>
+            <a:off x="8093964" y="4728464"/>
+            <a:ext cx="989076" cy="1030478"/>
           </a:xfrm>
           <a:prstGeom prst="rect">
             <a:avLst/>
@@ -6147,7 +6147,7 @@
         <p:spPr>
           <a:xfrm>
             <a:off x="365760" y="5860542"/>
-            <a:ext cx="1384173" cy="839216"/>
+            <a:ext cx="1382776" cy="839216"/>
           </a:xfrm>
           <a:prstGeom prst="rect">
             <a:avLst/>
@@ -6195,8 +6195,8 @@
         </p:nvSpPr>
         <p:spPr>
           <a:xfrm>
-            <a:off x="2299208" y="5860542"/>
-            <a:ext cx="1384173" cy="962533"/>
+            <a:off x="2297811" y="5860542"/>
+            <a:ext cx="1382776" cy="962533"/>
           </a:xfrm>
           <a:prstGeom prst="rect">
             <a:avLst/>
@@ -6244,8 +6244,8 @@
         </p:nvSpPr>
         <p:spPr>
           <a:xfrm>
-            <a:off x="4232656" y="5860542"/>
-            <a:ext cx="1384173" cy="1122553"/>
+            <a:off x="4229862" y="5860542"/>
+            <a:ext cx="1382776" cy="1122553"/>
           </a:xfrm>
           <a:prstGeom prst="rect">
             <a:avLst/>
@@ -6293,8 +6293,8 @@
         </p:nvSpPr>
         <p:spPr>
           <a:xfrm>
-            <a:off x="6166104" y="5860542"/>
-            <a:ext cx="1384173" cy="1282573"/>
+            <a:off x="6161913" y="5860542"/>
+            <a:ext cx="1382776" cy="1282573"/>
           </a:xfrm>
           <a:prstGeom prst="rect">
             <a:avLst/>
@@ -6342,8 +6342,8 @@
         </p:nvSpPr>
         <p:spPr>
           <a:xfrm>
-            <a:off x="8099552" y="5860542"/>
-            <a:ext cx="1384173" cy="1442593"/>
+            <a:off x="8093964" y="5860542"/>
+            <a:ext cx="1382776" cy="1442593"/>
           </a:xfrm>
           <a:prstGeom prst="rect">
             <a:avLst/>
@@ -6392,7 +6392,7 @@
         <p:spPr>
           <a:xfrm>
             <a:off x="365760" y="7404735"/>
-            <a:ext cx="1730248" cy="1049020"/>
+            <a:ext cx="1728851" cy="1049020"/>
           </a:xfrm>
           <a:prstGeom prst="rect">
             <a:avLst/>
@@ -6440,8 +6440,8 @@
         </p:nvSpPr>
         <p:spPr>
           <a:xfrm>
-            <a:off x="2299208" y="7404735"/>
-            <a:ext cx="1730248" cy="1203198"/>
+            <a:off x="2297811" y="7404735"/>
+            <a:ext cx="1728851" cy="1203198"/>
           </a:xfrm>
           <a:prstGeom prst="rect">
             <a:avLst/>
@@ -6489,8 +6489,8 @@
         </p:nvSpPr>
         <p:spPr>
           <a:xfrm>
-            <a:off x="4232656" y="7404735"/>
-            <a:ext cx="1730248" cy="1403223"/>
+            <a:off x="4229862" y="7404735"/>
+            <a:ext cx="1728851" cy="1403223"/>
           </a:xfrm>
           <a:prstGeom prst="rect">
             <a:avLst/>
@@ -6538,8 +6538,8 @@
         </p:nvSpPr>
         <p:spPr>
           <a:xfrm>
-            <a:off x="6166104" y="7404735"/>
-            <a:ext cx="1730248" cy="1603248"/>
+            <a:off x="6161913" y="7404735"/>
+            <a:ext cx="1728851" cy="1603248"/>
           </a:xfrm>
           <a:prstGeom prst="rect">
             <a:avLst/>
@@ -6587,8 +6587,8 @@
         </p:nvSpPr>
         <p:spPr>
           <a:xfrm>
-            <a:off x="8099552" y="7404735"/>
-            <a:ext cx="1730248" cy="1803273"/>
+            <a:off x="8093964" y="7404735"/>
+            <a:ext cx="1728851" cy="1803273"/>
           </a:xfrm>
           <a:prstGeom prst="rect">
             <a:avLst/>
@@ -9460,7 +9460,7 @@
         <p:spPr>
           <a:xfrm>
             <a:off x="365760" y="721360"/>
-            <a:ext cx="97409" cy="89408"/>
+            <a:ext cx="96901" cy="89408"/>
           </a:xfrm>
           <a:prstGeom prst="rect">
             <a:avLst/>
@@ -9508,8 +9508,8 @@
         </p:nvSpPr>
         <p:spPr>
           <a:xfrm>
-            <a:off x="2149475" y="721360"/>
-            <a:ext cx="97409" cy="103505"/>
+            <a:off x="2150110" y="721360"/>
+            <a:ext cx="96901" cy="103505"/>
           </a:xfrm>
           <a:prstGeom prst="rect">
             <a:avLst/>
@@ -9557,8 +9557,8 @@
         </p:nvSpPr>
         <p:spPr>
           <a:xfrm>
-            <a:off x="3933190" y="721360"/>
-            <a:ext cx="97409" cy="120650"/>
+            <a:off x="3934460" y="721360"/>
+            <a:ext cx="96901" cy="120650"/>
           </a:xfrm>
           <a:prstGeom prst="rect">
             <a:avLst/>
@@ -9606,8 +9606,8 @@
         </p:nvSpPr>
         <p:spPr>
           <a:xfrm>
-            <a:off x="5716905" y="721360"/>
-            <a:ext cx="97409" cy="137795"/>
+            <a:off x="5718810" y="721360"/>
+            <a:ext cx="96901" cy="137795"/>
           </a:xfrm>
           <a:prstGeom prst="rect">
             <a:avLst/>
@@ -9655,8 +9655,8 @@
         </p:nvSpPr>
         <p:spPr>
           <a:xfrm>
-            <a:off x="7500620" y="721360"/>
-            <a:ext cx="97409" cy="154940"/>
+            <a:off x="7503160" y="721360"/>
+            <a:ext cx="96901" cy="154940"/>
           </a:xfrm>
           <a:prstGeom prst="rect">
             <a:avLst/>
@@ -9705,7 +9705,7 @@
         <p:spPr>
           <a:xfrm>
             <a:off x="365760" y="977900"/>
-            <a:ext cx="129794" cy="119253"/>
+            <a:ext cx="130175" cy="119253"/>
           </a:xfrm>
           <a:prstGeom prst="rect">
             <a:avLst/>
@@ -9753,8 +9753,8 @@
         </p:nvSpPr>
         <p:spPr>
           <a:xfrm>
-            <a:off x="2149475" y="977900"/>
-            <a:ext cx="129794" cy="138049"/>
+            <a:off x="2150110" y="977900"/>
+            <a:ext cx="130175" cy="138049"/>
           </a:xfrm>
           <a:prstGeom prst="rect">
             <a:avLst/>
@@ -9802,8 +9802,8 @@
         </p:nvSpPr>
         <p:spPr>
           <a:xfrm>
-            <a:off x="3933190" y="977900"/>
-            <a:ext cx="129794" cy="160909"/>
+            <a:off x="3934460" y="977900"/>
+            <a:ext cx="130175" cy="160909"/>
           </a:xfrm>
           <a:prstGeom prst="rect">
             <a:avLst/>
@@ -9851,8 +9851,8 @@
         </p:nvSpPr>
         <p:spPr>
           <a:xfrm>
-            <a:off x="5716905" y="977900"/>
-            <a:ext cx="129794" cy="183769"/>
+            <a:off x="5718810" y="977900"/>
+            <a:ext cx="130175" cy="183769"/>
           </a:xfrm>
           <a:prstGeom prst="rect">
             <a:avLst/>
@@ -9900,8 +9900,8 @@
         </p:nvSpPr>
         <p:spPr>
           <a:xfrm>
-            <a:off x="7500620" y="977900"/>
-            <a:ext cx="129794" cy="206629"/>
+            <a:off x="7503160" y="977900"/>
+            <a:ext cx="130175" cy="206629"/>
           </a:xfrm>
           <a:prstGeom prst="rect">
             <a:avLst/>
@@ -9950,7 +9950,7 @@
         <p:spPr>
           <a:xfrm>
             <a:off x="365760" y="1286129"/>
-            <a:ext cx="225806" cy="148971"/>
+            <a:ext cx="225425" cy="148971"/>
           </a:xfrm>
           <a:prstGeom prst="rect">
             <a:avLst/>
@@ -9998,8 +9998,8 @@
         </p:nvSpPr>
         <p:spPr>
           <a:xfrm>
-            <a:off x="2149475" y="1286129"/>
-            <a:ext cx="225806" cy="172466"/>
+            <a:off x="2150110" y="1286129"/>
+            <a:ext cx="225425" cy="172466"/>
           </a:xfrm>
           <a:prstGeom prst="rect">
             <a:avLst/>
@@ -10047,8 +10047,8 @@
         </p:nvSpPr>
         <p:spPr>
           <a:xfrm>
-            <a:off x="3933190" y="1286129"/>
-            <a:ext cx="225806" cy="201041"/>
+            <a:off x="3934460" y="1286129"/>
+            <a:ext cx="225425" cy="201041"/>
           </a:xfrm>
           <a:prstGeom prst="rect">
             <a:avLst/>
@@ -10096,8 +10096,8 @@
         </p:nvSpPr>
         <p:spPr>
           <a:xfrm>
-            <a:off x="5716905" y="1286129"/>
-            <a:ext cx="225806" cy="229616"/>
+            <a:off x="5718810" y="1286129"/>
+            <a:ext cx="225425" cy="229616"/>
           </a:xfrm>
           <a:prstGeom prst="rect">
             <a:avLst/>
@@ -10145,8 +10145,8 @@
         </p:nvSpPr>
         <p:spPr>
           <a:xfrm>
-            <a:off x="7500620" y="1286129"/>
-            <a:ext cx="225806" cy="258191"/>
+            <a:off x="7503160" y="1286129"/>
+            <a:ext cx="225425" cy="258191"/>
           </a:xfrm>
           <a:prstGeom prst="rect">
             <a:avLst/>
@@ -10195,7 +10195,7 @@
         <p:spPr>
           <a:xfrm>
             <a:off x="365760" y="1645920"/>
-            <a:ext cx="270891" cy="178816"/>
+            <a:ext cx="271526" cy="178816"/>
           </a:xfrm>
           <a:prstGeom prst="rect">
             <a:avLst/>
@@ -10243,8 +10243,8 @@
         </p:nvSpPr>
         <p:spPr>
           <a:xfrm>
-            <a:off x="2149475" y="1645920"/>
-            <a:ext cx="270891" cy="207010"/>
+            <a:off x="2150110" y="1645920"/>
+            <a:ext cx="271526" cy="207010"/>
           </a:xfrm>
           <a:prstGeom prst="rect">
             <a:avLst/>
@@ -10292,8 +10292,8 @@
         </p:nvSpPr>
         <p:spPr>
           <a:xfrm>
-            <a:off x="3933190" y="1645920"/>
-            <a:ext cx="270891" cy="241300"/>
+            <a:off x="3934460" y="1645920"/>
+            <a:ext cx="271526" cy="241300"/>
           </a:xfrm>
           <a:prstGeom prst="rect">
             <a:avLst/>
@@ -10341,8 +10341,8 @@
         </p:nvSpPr>
         <p:spPr>
           <a:xfrm>
-            <a:off x="5716905" y="1645920"/>
-            <a:ext cx="270891" cy="275590"/>
+            <a:off x="5718810" y="1645920"/>
+            <a:ext cx="271526" cy="275590"/>
           </a:xfrm>
           <a:prstGeom prst="rect">
             <a:avLst/>
@@ -10390,8 +10390,8 @@
         </p:nvSpPr>
         <p:spPr>
           <a:xfrm>
-            <a:off x="7500620" y="1645920"/>
-            <a:ext cx="270891" cy="309880"/>
+            <a:off x="7503160" y="1645920"/>
+            <a:ext cx="271526" cy="309880"/>
           </a:xfrm>
           <a:prstGeom prst="rect">
             <a:avLst/>
@@ -10440,7 +10440,7 @@
         <p:spPr>
           <a:xfrm>
             <a:off x="365760" y="2057400"/>
-            <a:ext cx="316103" cy="208661"/>
+            <a:ext cx="315976" cy="208661"/>
           </a:xfrm>
           <a:prstGeom prst="rect">
             <a:avLst/>
@@ -10488,8 +10488,8 @@
         </p:nvSpPr>
         <p:spPr>
           <a:xfrm>
-            <a:off x="2149475" y="2057400"/>
-            <a:ext cx="316103" cy="241427"/>
+            <a:off x="2150110" y="2057400"/>
+            <a:ext cx="315976" cy="241427"/>
           </a:xfrm>
           <a:prstGeom prst="rect">
             <a:avLst/>
@@ -10537,8 +10537,8 @@
         </p:nvSpPr>
         <p:spPr>
           <a:xfrm>
-            <a:off x="3933190" y="2057400"/>
-            <a:ext cx="316103" cy="281432"/>
+            <a:off x="3934460" y="2057400"/>
+            <a:ext cx="315976" cy="281432"/>
           </a:xfrm>
           <a:prstGeom prst="rect">
             <a:avLst/>
@@ -10586,8 +10586,8 @@
         </p:nvSpPr>
         <p:spPr>
           <a:xfrm>
-            <a:off x="5716905" y="2057400"/>
-            <a:ext cx="316103" cy="321437"/>
+            <a:off x="5718810" y="2057400"/>
+            <a:ext cx="315976" cy="321437"/>
           </a:xfrm>
           <a:prstGeom prst="rect">
             <a:avLst/>
@@ -10635,8 +10635,8 @@
         </p:nvSpPr>
         <p:spPr>
           <a:xfrm>
-            <a:off x="7500620" y="2057400"/>
-            <a:ext cx="316103" cy="361442"/>
+            <a:off x="7503160" y="2057400"/>
+            <a:ext cx="315976" cy="361442"/>
           </a:xfrm>
           <a:prstGeom prst="rect">
             <a:avLst/>
@@ -10733,7 +10733,7 @@
         </p:nvSpPr>
         <p:spPr>
           <a:xfrm>
-            <a:off x="2149475" y="2520442"/>
+            <a:off x="2150110" y="2520442"/>
             <a:ext cx="406400" cy="310515"/>
           </a:xfrm>
           <a:prstGeom prst="rect">
@@ -10782,7 +10782,7 @@
         </p:nvSpPr>
         <p:spPr>
           <a:xfrm>
-            <a:off x="3933190" y="2520442"/>
+            <a:off x="3934460" y="2520442"/>
             <a:ext cx="406400" cy="361950"/>
           </a:xfrm>
           <a:prstGeom prst="rect">
@@ -10831,7 +10831,7 @@
         </p:nvSpPr>
         <p:spPr>
           <a:xfrm>
-            <a:off x="5716905" y="2520442"/>
+            <a:off x="5718810" y="2520442"/>
             <a:ext cx="406400" cy="413385"/>
           </a:xfrm>
           <a:prstGeom prst="rect">
@@ -10880,7 +10880,7 @@
         </p:nvSpPr>
         <p:spPr>
           <a:xfrm>
-            <a:off x="7500620" y="2520442"/>
+            <a:off x="7503160" y="2520442"/>
             <a:ext cx="406400" cy="464820"/>
           </a:xfrm>
           <a:prstGeom prst="rect">
@@ -10930,7 +10930,7 @@
         <p:spPr>
           <a:xfrm>
             <a:off x="365760" y="3086862"/>
-            <a:ext cx="541909" cy="357759"/>
+            <a:ext cx="541401" cy="357759"/>
           </a:xfrm>
           <a:prstGeom prst="rect">
             <a:avLst/>
@@ -10978,8 +10978,8 @@
         </p:nvSpPr>
         <p:spPr>
           <a:xfrm>
-            <a:off x="2149475" y="3086862"/>
-            <a:ext cx="541909" cy="414020"/>
+            <a:off x="2150110" y="3086862"/>
+            <a:ext cx="541401" cy="414020"/>
           </a:xfrm>
           <a:prstGeom prst="rect">
             <a:avLst/>
@@ -11027,8 +11027,8 @@
         </p:nvSpPr>
         <p:spPr>
           <a:xfrm>
-            <a:off x="3933190" y="3086862"/>
-            <a:ext cx="541909" cy="482600"/>
+            <a:off x="3934460" y="3086862"/>
+            <a:ext cx="541401" cy="482600"/>
           </a:xfrm>
           <a:prstGeom prst="rect">
             <a:avLst/>
@@ -11076,8 +11076,8 @@
         </p:nvSpPr>
         <p:spPr>
           <a:xfrm>
-            <a:off x="5716905" y="3086862"/>
-            <a:ext cx="541909" cy="551180"/>
+            <a:off x="5718810" y="3086862"/>
+            <a:ext cx="541401" cy="551180"/>
           </a:xfrm>
           <a:prstGeom prst="rect">
             <a:avLst/>
@@ -11125,8 +11125,8 @@
         </p:nvSpPr>
         <p:spPr>
           <a:xfrm>
-            <a:off x="7500620" y="3086862"/>
-            <a:ext cx="541909" cy="619760"/>
+            <a:off x="7503160" y="3086862"/>
+            <a:ext cx="541401" cy="619760"/>
           </a:xfrm>
           <a:prstGeom prst="rect">
             <a:avLst/>
@@ -11175,7 +11175,7 @@
         <p:spPr>
           <a:xfrm>
             <a:off x="365760" y="3808222"/>
-            <a:ext cx="722503" cy="476885"/>
+            <a:ext cx="722376" cy="476885"/>
           </a:xfrm>
           <a:prstGeom prst="rect">
             <a:avLst/>
@@ -11223,8 +11223,8 @@
         </p:nvSpPr>
         <p:spPr>
           <a:xfrm>
-            <a:off x="2149475" y="3808222"/>
-            <a:ext cx="722503" cy="551942"/>
+            <a:off x="2150110" y="3808222"/>
+            <a:ext cx="722376" cy="551942"/>
           </a:xfrm>
           <a:prstGeom prst="rect">
             <a:avLst/>
@@ -11272,8 +11272,8 @@
         </p:nvSpPr>
         <p:spPr>
           <a:xfrm>
-            <a:off x="3933190" y="3808222"/>
-            <a:ext cx="722503" cy="643382"/>
+            <a:off x="3934460" y="3808222"/>
+            <a:ext cx="722376" cy="643382"/>
           </a:xfrm>
           <a:prstGeom prst="rect">
             <a:avLst/>
@@ -11321,8 +11321,8 @@
         </p:nvSpPr>
         <p:spPr>
           <a:xfrm>
-            <a:off x="5716905" y="3808222"/>
-            <a:ext cx="722503" cy="734822"/>
+            <a:off x="5718810" y="3808222"/>
+            <a:ext cx="722376" cy="734822"/>
           </a:xfrm>
           <a:prstGeom prst="rect">
             <a:avLst/>
@@ -11370,8 +11370,8 @@
         </p:nvSpPr>
         <p:spPr>
           <a:xfrm>
-            <a:off x="7500620" y="3808222"/>
-            <a:ext cx="722503" cy="826262"/>
+            <a:off x="7503160" y="3808222"/>
+            <a:ext cx="722376" cy="826262"/>
           </a:xfrm>
           <a:prstGeom prst="rect">
             <a:avLst/>
@@ -11420,7 +11420,7 @@
         <p:spPr>
           <a:xfrm>
             <a:off x="365760" y="4736084"/>
-            <a:ext cx="903097" cy="596265"/>
+            <a:ext cx="903351" cy="596265"/>
           </a:xfrm>
           <a:prstGeom prst="rect">
             <a:avLst/>
@@ -11468,8 +11468,8 @@
         </p:nvSpPr>
         <p:spPr>
           <a:xfrm>
-            <a:off x="2149475" y="4736084"/>
-            <a:ext cx="903097" cy="689991"/>
+            <a:off x="2150110" y="4736084"/>
+            <a:ext cx="903351" cy="689991"/>
           </a:xfrm>
           <a:prstGeom prst="rect">
             <a:avLst/>
@@ -11517,8 +11517,8 @@
         </p:nvSpPr>
         <p:spPr>
           <a:xfrm>
-            <a:off x="3933190" y="4736084"/>
-            <a:ext cx="903097" cy="804291"/>
+            <a:off x="3934460" y="4736084"/>
+            <a:ext cx="903351" cy="804291"/>
           </a:xfrm>
           <a:prstGeom prst="rect">
             <a:avLst/>
@@ -11566,8 +11566,8 @@
         </p:nvSpPr>
         <p:spPr>
           <a:xfrm>
-            <a:off x="5716905" y="4736084"/>
-            <a:ext cx="903097" cy="918591"/>
+            <a:off x="5718810" y="4736084"/>
+            <a:ext cx="903351" cy="918591"/>
           </a:xfrm>
           <a:prstGeom prst="rect">
             <a:avLst/>
@@ -11615,8 +11615,8 @@
         </p:nvSpPr>
         <p:spPr>
           <a:xfrm>
-            <a:off x="7500620" y="4736084"/>
-            <a:ext cx="903097" cy="1032891"/>
+            <a:off x="7503160" y="4736084"/>
+            <a:ext cx="903351" cy="1032891"/>
           </a:xfrm>
           <a:prstGeom prst="rect">
             <a:avLst/>
@@ -11665,7 +11665,7 @@
         <p:spPr>
           <a:xfrm>
             <a:off x="365760" y="5870575"/>
-            <a:ext cx="1264412" cy="834644"/>
+            <a:ext cx="1263650" cy="834644"/>
           </a:xfrm>
           <a:prstGeom prst="rect">
             <a:avLst/>
@@ -11713,8 +11713,8 @@
         </p:nvSpPr>
         <p:spPr>
           <a:xfrm>
-            <a:off x="2149475" y="5870575"/>
-            <a:ext cx="1264412" cy="965962"/>
+            <a:off x="2150110" y="5870575"/>
+            <a:ext cx="1263650" cy="965962"/>
           </a:xfrm>
           <a:prstGeom prst="rect">
             <a:avLst/>
@@ -11762,8 +11762,8 @@
         </p:nvSpPr>
         <p:spPr>
           <a:xfrm>
-            <a:off x="3933190" y="5870575"/>
-            <a:ext cx="1264412" cy="1125982"/>
+            <a:off x="3934460" y="5870575"/>
+            <a:ext cx="1263650" cy="1125982"/>
           </a:xfrm>
           <a:prstGeom prst="rect">
             <a:avLst/>
@@ -11811,8 +11811,8 @@
         </p:nvSpPr>
         <p:spPr>
           <a:xfrm>
-            <a:off x="5716905" y="5870575"/>
-            <a:ext cx="1264412" cy="1286002"/>
+            <a:off x="5718810" y="5870575"/>
+            <a:ext cx="1263650" cy="1286002"/>
           </a:xfrm>
           <a:prstGeom prst="rect">
             <a:avLst/>
@@ -11860,8 +11860,8 @@
         </p:nvSpPr>
         <p:spPr>
           <a:xfrm>
-            <a:off x="7500620" y="5870575"/>
-            <a:ext cx="1264412" cy="1446022"/>
+            <a:off x="7503160" y="5870575"/>
+            <a:ext cx="1263650" cy="1446022"/>
           </a:xfrm>
           <a:prstGeom prst="rect">
             <a:avLst/>
@@ -11910,7 +11910,7 @@
         <p:spPr>
           <a:xfrm>
             <a:off x="365760" y="7418197"/>
-            <a:ext cx="1580515" cy="1043305"/>
+            <a:ext cx="1581150" cy="1043305"/>
           </a:xfrm>
           <a:prstGeom prst="rect">
             <a:avLst/>
@@ -11958,8 +11958,8 @@
         </p:nvSpPr>
         <p:spPr>
           <a:xfrm>
-            <a:off x="2149475" y="7418197"/>
-            <a:ext cx="1580515" cy="1207389"/>
+            <a:off x="2150110" y="7418197"/>
+            <a:ext cx="1581150" cy="1207389"/>
           </a:xfrm>
           <a:prstGeom prst="rect">
             <a:avLst/>
@@ -12007,8 +12007,8 @@
         </p:nvSpPr>
         <p:spPr>
           <a:xfrm>
-            <a:off x="3933190" y="7418197"/>
-            <a:ext cx="1580515" cy="1407414"/>
+            <a:off x="3934460" y="7418197"/>
+            <a:ext cx="1581150" cy="1407414"/>
           </a:xfrm>
           <a:prstGeom prst="rect">
             <a:avLst/>
@@ -12056,8 +12056,8 @@
         </p:nvSpPr>
         <p:spPr>
           <a:xfrm>
-            <a:off x="5716905" y="7418197"/>
-            <a:ext cx="1580515" cy="1607439"/>
+            <a:off x="5718810" y="7418197"/>
+            <a:ext cx="1581150" cy="1607439"/>
           </a:xfrm>
           <a:prstGeom prst="rect">
             <a:avLst/>
@@ -12105,8 +12105,8 @@
         </p:nvSpPr>
         <p:spPr>
           <a:xfrm>
-            <a:off x="7500620" y="7418197"/>
-            <a:ext cx="1580515" cy="1807464"/>
+            <a:off x="7503160" y="7418197"/>
+            <a:ext cx="1581150" cy="1807464"/>
           </a:xfrm>
           <a:prstGeom prst="rect">
             <a:avLst/>
